--- a/deliverables/course/ChainGrade_课程答辩_重制版.pptx
+++ b/deliverables/course/ChainGrade_课程答辩_重制版.pptx
@@ -529,7 +529,7 @@
           <a:p>
             <a:r>
               <a:rPr lang="zh-CN" dirty="0"/>
-              <a:t>最后看工程指标。项目实现二十五个链码方法和二十五个 HTTP 路由，自动测试五十二项全部通过，其中 shared 六项、chaincode 二十项、API 二十六项。链码语句、分支、函数和行覆盖率分别为百分之八十五点九一、百分之七十五点三八、百分之九十五点五二和百分之八十五点九八。API 与 Web 从停止状态完成生产构建并进入健康状态耗时十二点五秒。我们也保留局限：分支覆盖仍低于其他指标，异常组合和完整 VC 互操作是下一阶段，而不是在本次答辩中夸大为已经完成。</a:t>
+              <a:t>最后看工程指标。项目实现二十五个链码方法和二十八个 HTTP 路由，一百二十项项目测试全部通过，另有七项基准工具测试通过。隔离性能矩阵包含七类负载、四档并发、每档三次，共八十四个正式单元，合法请求失败率为零；并发二十时公开验证吞吐中位数为每秒七百四十六点六一四次，P95 为三十八点二零二毫秒。单 orderer 稳定恢复需要二十二点四八二秒，因此这些数据证明可恢复性，但不证明写入高可用。</a:t>
             </a:r>
           </a:p>
         </p:txBody>
@@ -588,7 +588,7 @@
           <a:p>
             <a:r>
               <a:rPr lang="zh-CN" dirty="0"/>
-              <a:t>回到开头，ChainGrade 的价值不是把一个数字写进区块，而是把身份、复核、隐私、修订与申诉放进同一条可验证流程。我们已经完成真实 Fabric 双组织闭环、四角色产品，并用五十二项测试、双 Peer 一致性、真实交易和恢复彩排验证它。下一阶段的 VC 互操作和可靠性量化仍然服务同一个项目。谢谢各位老师，欢迎从为什么用链、如何保护隐私和证据是否真实三个角度提问。</a:t>
+              <a:t>回到开头，ChainGrade 的价值不是把一个数字写进区块，而是把身份、复核、隐私、修订与申诉放进同一条可验证流程。我们已经完成真实 Fabric 双组织闭环、四角色产品、标准 VC 文件互操作和可重复可靠性基准，并用一百二十项项目测试、双 Peer 一致性、真实交易、篡改失败和故障恢复时间验证它。下一步的 BBS+、三 orderer 和真实教务接入仍是明确边界。谢谢各位老师，欢迎从为什么用链、如何保护隐私和证据是否真实三个角度提问。</a:t>
             </a:r>
           </a:p>
         </p:txBody>
@@ -5586,9 +5586,9 @@
         <p:grpSpPr>
           <a:xfrm>
             <a:off x="667512" y="1695450"/>
-            <a:ext cx="2841127" cy="2175701"/>
+            <a:ext cx="4354601" cy="2175701"/>
             <a:chOff x="667512" y="1695450"/>
-            <a:chExt cx="2841127" cy="2175701"/>
+            <a:chExt cx="4354601" cy="2175701"/>
           </a:xfrm>
         </p:grpSpPr>
         <p:grpSp>
@@ -5830,7 +5830,7 @@
           <p:spPr>
             <a:xfrm>
               <a:off x="667512" y="2564130"/>
-              <a:ext cx="1741269" cy="704088"/>
+              <a:ext cx="2301019" cy="704088"/>
             </a:xfrm>
             <a:prstGeom prst="rect">
               <a:avLst/>
@@ -5856,7 +5856,7 @@
                   <a:ea typeface="+mn-ea"/>
                   <a:cs typeface="+mn-cs"/>
                 </a:rPr>
-                <a:t>52 / 52</a:t>
+                <a:t>120 / 120</a:t>
               </a:r>
             </a:p>
           </p:txBody>
@@ -5910,7 +5910,7 @@
           <p:spPr>
             <a:xfrm>
               <a:off x="678942" y="3607118"/>
-              <a:ext cx="2829697" cy="264033"/>
+              <a:ext cx="4343171" cy="264033"/>
             </a:xfrm>
             <a:prstGeom prst="rect">
               <a:avLst/>
@@ -5928,7 +5928,7 @@
             <a:p>
               <a:pPr algn="l"/>
               <a:r>
-                <a:rPr lang="en-US" sz="1350" dirty="0">
+                <a:rPr lang="zh-CN" sz="1350" dirty="0">
                   <a:solidFill>
                     <a:schemeClr val="accent5"/>
                   </a:solidFill>
@@ -5936,7 +5936,7 @@
                   <a:ea typeface="+mn-ea"/>
                   <a:cs typeface="+mn-cs"/>
                 </a:rPr>
-                <a:t>shared 6 · chaincode 20 · API 26</a:t>
+                <a:t>shared 33 · chaincode 20 · API 67 · 基准工具 7 / 7</a:t>
               </a:r>
             </a:p>
           </p:txBody>
@@ -6107,7 +6107,7 @@
                   <a:ea typeface="+mn-ea"/>
                   <a:cs typeface="+mn-cs"/>
                 </a:rPr>
-                <a:t>25</a:t>
+                <a:t>28</a:t>
               </a:r>
             </a:p>
           </p:txBody>
@@ -6776,7 +6776,7 @@
               </a:avLst>
             </a:prstGeom>
             <a:solidFill>
-              <a:srgbClr val="F9E8E8"/>
+              <a:srgbClr val="E7F1EC"/>
             </a:solidFill>
             <a:ln>
               <a:noFill/>
@@ -6792,7 +6792,7 @@
           <p:spPr>
             <a:xfrm>
               <a:off x="5955792" y="4769168"/>
-              <a:ext cx="4784312" cy="264033"/>
+              <a:ext cx="2952403" cy="264033"/>
             </a:xfrm>
             <a:prstGeom prst="rect">
               <a:avLst/>
@@ -6812,13 +6812,13 @@
               <a:r>
                 <a:rPr lang="zh-CN" sz="1350" b="1" dirty="0">
                   <a:solidFill>
-                    <a:srgbClr val="A13B3B"/>
-                  </a:solidFill>
-                  <a:latin typeface="+mn-lt"/>
-                  <a:ea typeface="+mn-ea"/>
-                  <a:cs typeface="+mn-cs"/>
-                </a:rPr>
-                <a:t>局限：分支覆盖低于其他指标，异常组合仍需继续补测。</a:t>
+                    <a:schemeClr val="accent6"/>
+                  </a:solidFill>
+                  <a:latin typeface="+mn-lt"/>
+                  <a:ea typeface="+mn-ea"/>
+                  <a:cs typeface="+mn-cs"/>
+                </a:rPr>
+                <a:t>84 个性能单元 · 合法请求失败率 0</a:t>
               </a:r>
             </a:p>
           </p:txBody>
@@ -7034,7 +7034,7 @@
           <p:spPr>
             <a:xfrm>
               <a:off x="1326642" y="5359718"/>
-              <a:ext cx="1277302" cy="264033"/>
+              <a:ext cx="4059679" cy="264033"/>
             </a:xfrm>
             <a:prstGeom prst="rect">
               <a:avLst/>
@@ -7060,7 +7060,7 @@
                   <a:ea typeface="+mn-ea"/>
                   <a:cs typeface="+mn-cs"/>
                 </a:rPr>
-                <a:t>API / Web 停止</a:t>
+                <a:t>公开验证 C20：746.614 次/秒 · P95 38.202 ms</a:t>
               </a:r>
             </a:p>
           </p:txBody>
@@ -7073,8 +7073,8 @@
           </p:nvSpPr>
           <p:spPr>
             <a:xfrm>
-              <a:off x="8417433" y="5359718"/>
-              <a:ext cx="1285875" cy="264033"/>
+              <a:off x="7972177" y="5359718"/>
+              <a:ext cx="1731131" cy="264033"/>
             </a:xfrm>
             <a:prstGeom prst="rect">
               <a:avLst/>
@@ -7100,7 +7100,7 @@
                   <a:ea typeface="+mn-ea"/>
                   <a:cs typeface="+mn-cs"/>
                 </a:rPr>
-                <a:t>生产构建后健康</a:t>
+                <a:t>单 orderer 稳定恢复</a:t>
               </a:r>
             </a:p>
           </p:txBody>
@@ -7113,8 +7113,8 @@
           </p:nvSpPr>
           <p:spPr>
             <a:xfrm>
-              <a:off x="9929576" y="5551170"/>
-              <a:ext cx="1398316" cy="469392"/>
+              <a:off x="9742993" y="5551170"/>
+              <a:ext cx="1584899" cy="469392"/>
             </a:xfrm>
             <a:prstGeom prst="rect">
               <a:avLst/>
@@ -7140,7 +7140,7 @@
                   <a:ea typeface="+mn-ea"/>
                   <a:cs typeface="+mn-cs"/>
                 </a:rPr>
-                <a:t>12.50 秒</a:t>
+                <a:t>22.482 秒</a:t>
               </a:r>
             </a:p>
           </p:txBody>
@@ -7169,7 +7169,7 @@
           <p:spPr>
             <a:xfrm>
               <a:off x="678942" y="6236018"/>
-              <a:ext cx="5147786" cy="264033"/>
+              <a:ext cx="5511260" cy="264033"/>
             </a:xfrm>
             <a:prstGeom prst="rect">
               <a:avLst/>
@@ -7195,7 +7195,7 @@
                   <a:ea typeface="+mn-ea"/>
                   <a:cs typeface="+mn-cs"/>
                 </a:rPr>
-                <a:t>数据来源：最终实验报告、coverage summary 与交付彩排记录</a:t>
+                <a:t>数据来源：最终实验报告、coverage summary 与隔离基准原始数据</a:t>
               </a:r>
             </a:p>
           </p:txBody>
@@ -7517,9 +7517,9 @@
         <p:grpSpPr>
           <a:xfrm>
             <a:off x="7194042" y="2377440"/>
-            <a:ext cx="3894264" cy="655511"/>
+            <a:ext cx="4119029" cy="655511"/>
             <a:chOff x="7194042" y="2377440"/>
-            <a:chExt cx="3894264" cy="655511"/>
+            <a:chExt cx="4119029" cy="655511"/>
           </a:xfrm>
         </p:grpSpPr>
         <p:sp>
@@ -7571,7 +7571,7 @@
           <p:spPr>
             <a:xfrm>
               <a:off x="8334756" y="2377440"/>
-              <a:ext cx="2753550" cy="352044"/>
+              <a:ext cx="2850462" cy="352044"/>
             </a:xfrm>
             <a:prstGeom prst="rect">
               <a:avLst/>
@@ -7597,7 +7597,7 @@
                   <a:ea typeface="+mn-ea"/>
                   <a:cs typeface="+mn-cs"/>
                 </a:rPr>
-                <a:t>真实 Fabric 双组织闭环</a:t>
+                <a:t>Fabric 双组织 · 标准 VC</a:t>
               </a:r>
             </a:p>
           </p:txBody>
@@ -7611,7 +7611,7 @@
           <p:spPr>
             <a:xfrm>
               <a:off x="8337042" y="2768918"/>
-              <a:ext cx="2376297" cy="264033"/>
+              <a:ext cx="2976029" cy="264033"/>
             </a:xfrm>
             <a:prstGeom prst="rect">
               <a:avLst/>
@@ -7637,7 +7637,7 @@
                   <a:ea typeface="+mn-ea"/>
                   <a:cs typeface="+mn-cs"/>
                 </a:rPr>
-                <a:t>四角色工作台与私有数据边界</a:t>
+                <a:t>四角色闭环与签名 / 状态 / 锚定验证</a:t>
               </a:r>
             </a:p>
           </p:txBody>
@@ -7652,9 +7652,9 @@
         <p:grpSpPr>
           <a:xfrm>
             <a:off x="7194042" y="3501390"/>
-            <a:ext cx="4165078" cy="655511"/>
+            <a:ext cx="4263070" cy="655511"/>
             <a:chOff x="7194042" y="3501390"/>
-            <a:chExt cx="4165078" cy="655511"/>
+            <a:chExt cx="4263070" cy="655511"/>
           </a:xfrm>
         </p:grpSpPr>
         <p:sp>
@@ -7706,7 +7706,7 @@
           <p:spPr>
             <a:xfrm>
               <a:off x="8334756" y="3501390"/>
-              <a:ext cx="3024364" cy="352044"/>
+              <a:ext cx="3122356" cy="352044"/>
             </a:xfrm>
             <a:prstGeom prst="rect">
               <a:avLst/>
@@ -7732,7 +7732,7 @@
                   <a:ea typeface="+mn-ea"/>
                   <a:cs typeface="+mn-cs"/>
                 </a:rPr>
-                <a:t>52 / 52 · 双 Peer 12 / 12</a:t>
+                <a:t>120 + 7 测试 · 84 性能单元</a:t>
               </a:r>
             </a:p>
           </p:txBody>
@@ -7746,7 +7746,7 @@
           <p:spPr>
             <a:xfrm>
               <a:off x="8337042" y="3892868"/>
-              <a:ext cx="2558034" cy="264033"/>
+              <a:ext cx="2921508" cy="264033"/>
             </a:xfrm>
             <a:prstGeom prst="rect">
               <a:avLst/>
@@ -7772,7 +7772,7 @@
                   <a:ea typeface="+mn-ea"/>
                   <a:cs typeface="+mn-cs"/>
                 </a:rPr>
-                <a:t>真实交易、原子失败与恢复彩排</a:t>
+                <a:t>真实交易、篡改失败与故障恢复时间</a:t>
               </a:r>
             </a:p>
           </p:txBody>
@@ -7787,9 +7787,9 @@
         <p:grpSpPr>
           <a:xfrm>
             <a:off x="7194042" y="4625340"/>
-            <a:ext cx="3995196" cy="655511"/>
+            <a:ext cx="4212280" cy="655511"/>
             <a:chOff x="7194042" y="4625340"/>
-            <a:chExt cx="3995196" cy="655511"/>
+            <a:chExt cx="4212280" cy="655511"/>
           </a:xfrm>
         </p:grpSpPr>
         <p:sp>
@@ -7841,7 +7841,7 @@
           <p:spPr>
             <a:xfrm>
               <a:off x="8334756" y="4625340"/>
-              <a:ext cx="2854482" cy="352044"/>
+              <a:ext cx="3071566" cy="352044"/>
             </a:xfrm>
             <a:prstGeom prst="rect">
               <a:avLst/>
@@ -7867,7 +7867,7 @@
                   <a:ea typeface="+mn-ea"/>
                   <a:cs typeface="+mn-cs"/>
                 </a:rPr>
-                <a:t>VC 互操作 · 可靠性量化</a:t>
+                <a:t>BBS+ · 三 orderer 高可用</a:t>
               </a:r>
             </a:p>
           </p:txBody>
@@ -7881,7 +7881,7 @@
           <p:spPr>
             <a:xfrm>
               <a:off x="8337042" y="5016818"/>
-              <a:ext cx="2558034" cy="264033"/>
+              <a:ext cx="2194560" cy="264033"/>
             </a:xfrm>
             <a:prstGeom prst="rect">
               <a:avLst/>
@@ -7907,7 +7907,7 @@
                   <a:ea typeface="+mn-ea"/>
                   <a:cs typeface="+mn-cs"/>
                 </a:rPr>
-                <a:t>两项工作包继续服务同一个项目</a:t>
+                <a:t>只把已有证据写成当前成果</a:t>
               </a:r>
             </a:p>
           </p:txBody>

--- a/deliverables/course/ChainGrade_课程答辩_重制版.pptx
+++ b/deliverables/course/ChainGrade_课程答辩_重制版.pptx
@@ -2830,9 +2830,36 @@
           <a:chExt cx="0" cy="0"/>
         </a:xfrm>
       </p:grpSpPr>
+      <p:pic>
+        <p:nvPicPr>
+          <p:cNvPr id="2" name="Image 2"/>
+          <p:cNvPicPr>
+            <a:picLocks noChangeAspect="1"/>
+          </p:cNvPicPr>
+          <p:nvPr/>
+        </p:nvPicPr>
+        <p:blipFill>
+          <a:blip r:embed="rId2">
+            <a:alphaModFix amt="14000"/>
+          </a:blip>
+          <a:srcRect l="0" t="27" r="0" b="27"/>
+          <a:stretch>
+            <a:fillRect/>
+          </a:stretch>
+        </p:blipFill>
+        <p:spPr>
+          <a:xfrm>
+            <a:off x="0" y="0"/>
+            <a:ext cx="12192000" cy="6858000"/>
+          </a:xfrm>
+          <a:prstGeom prst="rect">
+            <a:avLst/>
+          </a:prstGeom>
+        </p:spPr>
+      </p:pic>
       <p:grpSp>
         <p:nvGrpSpPr>
-          <p:cNvPr id="5" name="Group 5"/>
+          <p:cNvPr id="6" name="Group 6"/>
           <p:cNvGrpSpPr/>
           <p:nvPr/>
         </p:nvGrpSpPr>
@@ -2846,7 +2873,7 @@
         </p:grpSpPr>
         <p:sp>
           <p:nvSpPr>
-            <p:cNvPr id="2" name="TextBox 2"/>
+            <p:cNvPr id="3" name="TextBox 3"/>
             <p:cNvSpPr txBox="1"/>
             <p:nvPr/>
           </p:nvSpPr>
@@ -2886,7 +2913,7 @@
         </p:sp>
         <p:sp>
           <p:nvSpPr>
-            <p:cNvPr id="3" name="TextBox 3"/>
+            <p:cNvPr id="4" name="TextBox 4"/>
             <p:cNvSpPr txBox="1"/>
             <p:nvPr/>
           </p:nvSpPr>
@@ -2926,7 +2953,7 @@
         </p:sp>
         <p:sp>
           <p:nvSpPr>
-            <p:cNvPr id="4" name="Line 4"/>
+            <p:cNvPr id="5" name="Line 5"/>
             <p:cNvSpPr/>
             <p:nvPr/>
           </p:nvSpPr>
@@ -2963,7 +2990,7 @@
       </p:grpSp>
       <p:grpSp>
         <p:nvGrpSpPr>
-          <p:cNvPr id="10" name="Group 10"/>
+          <p:cNvPr id="11" name="Group 11"/>
           <p:cNvGrpSpPr/>
           <p:nvPr/>
         </p:nvGrpSpPr>
@@ -2977,7 +3004,7 @@
         </p:grpSpPr>
         <p:sp>
           <p:nvSpPr>
-            <p:cNvPr id="6" name="Rectangle 6"/>
+            <p:cNvPr id="7" name="Rectangle 7"/>
             <p:cNvSpPr/>
             <p:nvPr/>
           </p:nvSpPr>
@@ -3003,7 +3030,7 @@
         </p:sp>
         <p:sp>
           <p:nvSpPr>
-            <p:cNvPr id="7" name="Rectangle 7"/>
+            <p:cNvPr id="8" name="Rectangle 8"/>
             <p:cNvSpPr/>
             <p:nvPr/>
           </p:nvSpPr>
@@ -3027,7 +3054,7 @@
         </p:sp>
         <p:sp>
           <p:nvSpPr>
-            <p:cNvPr id="8" name="TextBox 8"/>
+            <p:cNvPr id="9" name="TextBox 9"/>
             <p:cNvSpPr txBox="1"/>
             <p:nvPr/>
           </p:nvSpPr>
@@ -3067,7 +3094,7 @@
         </p:sp>
         <p:sp>
           <p:nvSpPr>
-            <p:cNvPr id="9" name="TextBox 9"/>
+            <p:cNvPr id="10" name="TextBox 10"/>
             <p:cNvSpPr txBox="1"/>
             <p:nvPr/>
           </p:nvSpPr>
@@ -3110,7 +3137,7 @@
       </p:grpSp>
       <p:grpSp>
         <p:nvGrpSpPr>
-          <p:cNvPr id="15" name="Group 15"/>
+          <p:cNvPr id="16" name="Group 16"/>
           <p:cNvGrpSpPr/>
           <p:nvPr/>
         </p:nvGrpSpPr>
@@ -3124,7 +3151,7 @@
         </p:grpSpPr>
         <p:sp>
           <p:nvSpPr>
-            <p:cNvPr id="11" name="Rectangle 11"/>
+            <p:cNvPr id="12" name="Rectangle 12"/>
             <p:cNvSpPr/>
             <p:nvPr/>
           </p:nvSpPr>
@@ -3150,7 +3177,7 @@
         </p:sp>
         <p:sp>
           <p:nvSpPr>
-            <p:cNvPr id="12" name="Rectangle 12"/>
+            <p:cNvPr id="13" name="Rectangle 13"/>
             <p:cNvSpPr/>
             <p:nvPr/>
           </p:nvSpPr>
@@ -3174,7 +3201,7 @@
         </p:sp>
         <p:sp>
           <p:nvSpPr>
-            <p:cNvPr id="13" name="TextBox 13"/>
+            <p:cNvPr id="14" name="TextBox 14"/>
             <p:cNvSpPr txBox="1"/>
             <p:nvPr/>
           </p:nvSpPr>
@@ -3214,7 +3241,7 @@
         </p:sp>
         <p:sp>
           <p:nvSpPr>
-            <p:cNvPr id="14" name="TextBox 14"/>
+            <p:cNvPr id="15" name="TextBox 15"/>
             <p:cNvSpPr txBox="1"/>
             <p:nvPr/>
           </p:nvSpPr>
@@ -3257,7 +3284,7 @@
       </p:grpSp>
       <p:grpSp>
         <p:nvGrpSpPr>
-          <p:cNvPr id="20" name="Group 20"/>
+          <p:cNvPr id="21" name="Group 21"/>
           <p:cNvGrpSpPr/>
           <p:nvPr/>
         </p:nvGrpSpPr>
@@ -3271,7 +3298,7 @@
         </p:grpSpPr>
         <p:sp>
           <p:nvSpPr>
-            <p:cNvPr id="16" name="Rectangle 16"/>
+            <p:cNvPr id="17" name="Rectangle 17"/>
             <p:cNvSpPr/>
             <p:nvPr/>
           </p:nvSpPr>
@@ -3297,7 +3324,7 @@
         </p:sp>
         <p:sp>
           <p:nvSpPr>
-            <p:cNvPr id="17" name="Rectangle 17"/>
+            <p:cNvPr id="18" name="Rectangle 18"/>
             <p:cNvSpPr/>
             <p:nvPr/>
           </p:nvSpPr>
@@ -3321,7 +3348,7 @@
         </p:sp>
         <p:sp>
           <p:nvSpPr>
-            <p:cNvPr id="18" name="TextBox 18"/>
+            <p:cNvPr id="19" name="TextBox 19"/>
             <p:cNvSpPr txBox="1"/>
             <p:nvPr/>
           </p:nvSpPr>
@@ -3361,7 +3388,7 @@
         </p:sp>
         <p:sp>
           <p:nvSpPr>
-            <p:cNvPr id="19" name="TextBox 19"/>
+            <p:cNvPr id="20" name="TextBox 20"/>
             <p:cNvSpPr txBox="1"/>
             <p:nvPr/>
           </p:nvSpPr>
@@ -3404,7 +3431,7 @@
       </p:grpSp>
       <p:grpSp>
         <p:nvGrpSpPr>
-          <p:cNvPr id="25" name="Group 25"/>
+          <p:cNvPr id="26" name="Group 26"/>
           <p:cNvGrpSpPr/>
           <p:nvPr/>
         </p:nvGrpSpPr>
@@ -3418,7 +3445,7 @@
         </p:grpSpPr>
         <p:sp>
           <p:nvSpPr>
-            <p:cNvPr id="21" name="Rectangle 21"/>
+            <p:cNvPr id="22" name="Rectangle 22"/>
             <p:cNvSpPr/>
             <p:nvPr/>
           </p:nvSpPr>
@@ -3444,7 +3471,7 @@
         </p:sp>
         <p:sp>
           <p:nvSpPr>
-            <p:cNvPr id="22" name="Rectangle 22"/>
+            <p:cNvPr id="23" name="Rectangle 23"/>
             <p:cNvSpPr/>
             <p:nvPr/>
           </p:nvSpPr>
@@ -3468,7 +3495,7 @@
         </p:sp>
         <p:sp>
           <p:nvSpPr>
-            <p:cNvPr id="23" name="TextBox 23"/>
+            <p:cNvPr id="24" name="TextBox 24"/>
             <p:cNvSpPr txBox="1"/>
             <p:nvPr/>
           </p:nvSpPr>
@@ -3508,7 +3535,7 @@
         </p:sp>
         <p:sp>
           <p:nvSpPr>
-            <p:cNvPr id="24" name="TextBox 24"/>
+            <p:cNvPr id="25" name="TextBox 25"/>
             <p:cNvSpPr txBox="1"/>
             <p:nvPr/>
           </p:nvSpPr>
@@ -3551,7 +3578,7 @@
       </p:grpSp>
       <p:grpSp>
         <p:nvGrpSpPr>
-          <p:cNvPr id="28" name="Group 28"/>
+          <p:cNvPr id="29" name="Group 29"/>
           <p:cNvGrpSpPr/>
           <p:nvPr/>
         </p:nvGrpSpPr>
@@ -3565,7 +3592,7 @@
         </p:grpSpPr>
         <p:sp>
           <p:nvSpPr>
-            <p:cNvPr id="26" name="TextBox 26"/>
+            <p:cNvPr id="27" name="TextBox 27"/>
             <p:cNvSpPr txBox="1"/>
             <p:nvPr/>
           </p:nvSpPr>
@@ -3605,7 +3632,7 @@
         </p:sp>
         <p:sp>
           <p:nvSpPr>
-            <p:cNvPr id="27" name="TextBox 27"/>
+            <p:cNvPr id="28" name="TextBox 28"/>
             <p:cNvSpPr txBox="1"/>
             <p:nvPr/>
           </p:nvSpPr>
@@ -3680,9 +3707,36 @@
           <a:chExt cx="0" cy="0"/>
         </a:xfrm>
       </p:grpSpPr>
+      <p:pic>
+        <p:nvPicPr>
+          <p:cNvPr id="2" name="Image 2"/>
+          <p:cNvPicPr>
+            <a:picLocks noChangeAspect="1"/>
+          </p:cNvPicPr>
+          <p:nvPr/>
+        </p:nvPicPr>
+        <p:blipFill>
+          <a:blip r:embed="rId2">
+            <a:alphaModFix amt="14000"/>
+          </a:blip>
+          <a:srcRect l="0" t="27" r="0" b="27"/>
+          <a:stretch>
+            <a:fillRect/>
+          </a:stretch>
+        </p:blipFill>
+        <p:spPr>
+          <a:xfrm>
+            <a:off x="0" y="0"/>
+            <a:ext cx="12192000" cy="6858000"/>
+          </a:xfrm>
+          <a:prstGeom prst="rect">
+            <a:avLst/>
+          </a:prstGeom>
+        </p:spPr>
+      </p:pic>
       <p:grpSp>
         <p:nvGrpSpPr>
-          <p:cNvPr id="5" name="Group 5"/>
+          <p:cNvPr id="6" name="Group 6"/>
           <p:cNvGrpSpPr/>
           <p:nvPr/>
         </p:nvGrpSpPr>
@@ -3696,7 +3750,7 @@
         </p:grpSpPr>
         <p:sp>
           <p:nvSpPr>
-            <p:cNvPr id="2" name="TextBox 2"/>
+            <p:cNvPr id="3" name="TextBox 3"/>
             <p:cNvSpPr txBox="1"/>
             <p:nvPr/>
           </p:nvSpPr>
@@ -3736,7 +3790,7 @@
         </p:sp>
         <p:sp>
           <p:nvSpPr>
-            <p:cNvPr id="3" name="TextBox 3"/>
+            <p:cNvPr id="4" name="TextBox 4"/>
             <p:cNvSpPr txBox="1"/>
             <p:nvPr/>
           </p:nvSpPr>
@@ -3776,7 +3830,7 @@
         </p:sp>
         <p:sp>
           <p:nvSpPr>
-            <p:cNvPr id="4" name="Line 4"/>
+            <p:cNvPr id="5" name="Line 5"/>
             <p:cNvSpPr/>
             <p:nvPr/>
           </p:nvSpPr>
@@ -3813,7 +3867,7 @@
       </p:grpSp>
       <p:grpSp>
         <p:nvGrpSpPr>
-          <p:cNvPr id="25" name="Group 25"/>
+          <p:cNvPr id="26" name="Group 26"/>
           <p:cNvGrpSpPr/>
           <p:nvPr/>
         </p:nvGrpSpPr>
@@ -3827,7 +3881,7 @@
         </p:grpSpPr>
         <p:sp>
           <p:nvSpPr>
-            <p:cNvPr id="6" name="Rectangle 6"/>
+            <p:cNvPr id="7" name="Rectangle 7"/>
             <p:cNvSpPr/>
             <p:nvPr/>
           </p:nvSpPr>
@@ -3853,7 +3907,7 @@
         </p:sp>
         <p:sp>
           <p:nvSpPr>
-            <p:cNvPr id="7" name="Ellipse 7"/>
+            <p:cNvPr id="8" name="Ellipse 8"/>
             <p:cNvSpPr/>
             <p:nvPr/>
           </p:nvSpPr>
@@ -3875,7 +3929,7 @@
         </p:sp>
         <p:sp>
           <p:nvSpPr>
-            <p:cNvPr id="8" name="TextBox 8"/>
+            <p:cNvPr id="9" name="TextBox 9"/>
             <p:cNvSpPr txBox="1"/>
             <p:nvPr/>
           </p:nvSpPr>
@@ -3915,7 +3969,7 @@
         </p:sp>
         <p:sp>
           <p:nvSpPr>
-            <p:cNvPr id="9" name="TextBox 9"/>
+            <p:cNvPr id="10" name="TextBox 10"/>
             <p:cNvSpPr txBox="1"/>
             <p:nvPr/>
           </p:nvSpPr>
@@ -3955,7 +4009,7 @@
         </p:sp>
         <p:sp>
           <p:nvSpPr>
-            <p:cNvPr id="10" name="Freeform 10"/>
+            <p:cNvPr id="11" name="Freeform 11"/>
             <p:cNvSpPr/>
             <p:nvPr/>
           </p:nvSpPr>
@@ -3993,7 +4047,7 @@
         </p:sp>
         <p:sp>
           <p:nvSpPr>
-            <p:cNvPr id="11" name="Rectangle 11"/>
+            <p:cNvPr id="12" name="Rectangle 12"/>
             <p:cNvSpPr/>
             <p:nvPr/>
           </p:nvSpPr>
@@ -4019,7 +4073,7 @@
         </p:sp>
         <p:sp>
           <p:nvSpPr>
-            <p:cNvPr id="12" name="Ellipse 12"/>
+            <p:cNvPr id="13" name="Ellipse 13"/>
             <p:cNvSpPr/>
             <p:nvPr/>
           </p:nvSpPr>
@@ -4041,7 +4095,7 @@
         </p:sp>
         <p:sp>
           <p:nvSpPr>
-            <p:cNvPr id="13" name="TextBox 13"/>
+            <p:cNvPr id="14" name="TextBox 14"/>
             <p:cNvSpPr txBox="1"/>
             <p:nvPr/>
           </p:nvSpPr>
@@ -4081,7 +4135,7 @@
         </p:sp>
         <p:sp>
           <p:nvSpPr>
-            <p:cNvPr id="14" name="TextBox 14"/>
+            <p:cNvPr id="15" name="TextBox 15"/>
             <p:cNvSpPr txBox="1"/>
             <p:nvPr/>
           </p:nvSpPr>
@@ -4121,7 +4175,7 @@
         </p:sp>
         <p:sp>
           <p:nvSpPr>
-            <p:cNvPr id="15" name="Freeform 15"/>
+            <p:cNvPr id="16" name="Freeform 16"/>
             <p:cNvSpPr/>
             <p:nvPr/>
           </p:nvSpPr>
@@ -4159,7 +4213,7 @@
         </p:sp>
         <p:sp>
           <p:nvSpPr>
-            <p:cNvPr id="16" name="Rectangle 16"/>
+            <p:cNvPr id="17" name="Rectangle 17"/>
             <p:cNvSpPr/>
             <p:nvPr/>
           </p:nvSpPr>
@@ -4185,7 +4239,7 @@
         </p:sp>
         <p:sp>
           <p:nvSpPr>
-            <p:cNvPr id="17" name="Ellipse 17"/>
+            <p:cNvPr id="18" name="Ellipse 18"/>
             <p:cNvSpPr/>
             <p:nvPr/>
           </p:nvSpPr>
@@ -4207,7 +4261,7 @@
         </p:sp>
         <p:sp>
           <p:nvSpPr>
-            <p:cNvPr id="18" name="TextBox 18"/>
+            <p:cNvPr id="19" name="TextBox 19"/>
             <p:cNvSpPr txBox="1"/>
             <p:nvPr/>
           </p:nvSpPr>
@@ -4247,7 +4301,7 @@
         </p:sp>
         <p:sp>
           <p:nvSpPr>
-            <p:cNvPr id="19" name="TextBox 19"/>
+            <p:cNvPr id="20" name="TextBox 20"/>
             <p:cNvSpPr txBox="1"/>
             <p:nvPr/>
           </p:nvSpPr>
@@ -4287,7 +4341,7 @@
         </p:sp>
         <p:sp>
           <p:nvSpPr>
-            <p:cNvPr id="20" name="Freeform 20"/>
+            <p:cNvPr id="21" name="Freeform 21"/>
             <p:cNvSpPr/>
             <p:nvPr/>
           </p:nvSpPr>
@@ -4325,7 +4379,7 @@
         </p:sp>
         <p:sp>
           <p:nvSpPr>
-            <p:cNvPr id="21" name="Rectangle 21"/>
+            <p:cNvPr id="22" name="Rectangle 22"/>
             <p:cNvSpPr/>
             <p:nvPr/>
           </p:nvSpPr>
@@ -4351,7 +4405,7 @@
         </p:sp>
         <p:sp>
           <p:nvSpPr>
-            <p:cNvPr id="22" name="Ellipse 22"/>
+            <p:cNvPr id="23" name="Ellipse 23"/>
             <p:cNvSpPr/>
             <p:nvPr/>
           </p:nvSpPr>
@@ -4373,7 +4427,7 @@
         </p:sp>
         <p:sp>
           <p:nvSpPr>
-            <p:cNvPr id="23" name="TextBox 23"/>
+            <p:cNvPr id="24" name="TextBox 24"/>
             <p:cNvSpPr txBox="1"/>
             <p:nvPr/>
           </p:nvSpPr>
@@ -4413,7 +4467,7 @@
         </p:sp>
         <p:sp>
           <p:nvSpPr>
-            <p:cNvPr id="24" name="TextBox 24"/>
+            <p:cNvPr id="25" name="TextBox 25"/>
             <p:cNvSpPr txBox="1"/>
             <p:nvPr/>
           </p:nvSpPr>
@@ -4454,7 +4508,7 @@
       </p:grpSp>
       <p:grpSp>
         <p:nvGrpSpPr>
-          <p:cNvPr id="45" name="Group 45"/>
+          <p:cNvPr id="46" name="Group 46"/>
           <p:cNvGrpSpPr/>
           <p:nvPr/>
         </p:nvGrpSpPr>
@@ -4468,7 +4522,7 @@
         </p:grpSpPr>
         <p:sp>
           <p:nvSpPr>
-            <p:cNvPr id="26" name="Rectangle 26"/>
+            <p:cNvPr id="27" name="Rectangle 27"/>
             <p:cNvSpPr/>
             <p:nvPr/>
           </p:nvSpPr>
@@ -4494,7 +4548,7 @@
         </p:sp>
         <p:sp>
           <p:nvSpPr>
-            <p:cNvPr id="27" name="Ellipse 27"/>
+            <p:cNvPr id="28" name="Ellipse 28"/>
             <p:cNvSpPr/>
             <p:nvPr/>
           </p:nvSpPr>
@@ -4516,7 +4570,7 @@
         </p:sp>
         <p:sp>
           <p:nvSpPr>
-            <p:cNvPr id="28" name="TextBox 28"/>
+            <p:cNvPr id="29" name="TextBox 29"/>
             <p:cNvSpPr txBox="1"/>
             <p:nvPr/>
           </p:nvSpPr>
@@ -4556,7 +4610,7 @@
         </p:sp>
         <p:sp>
           <p:nvSpPr>
-            <p:cNvPr id="29" name="TextBox 29"/>
+            <p:cNvPr id="30" name="TextBox 30"/>
             <p:cNvSpPr txBox="1"/>
             <p:nvPr/>
           </p:nvSpPr>
@@ -4596,7 +4650,7 @@
         </p:sp>
         <p:sp>
           <p:nvSpPr>
-            <p:cNvPr id="30" name="Freeform 30"/>
+            <p:cNvPr id="31" name="Freeform 31"/>
             <p:cNvSpPr/>
             <p:nvPr/>
           </p:nvSpPr>
@@ -4634,7 +4688,7 @@
         </p:sp>
         <p:sp>
           <p:nvSpPr>
-            <p:cNvPr id="31" name="Rectangle 31"/>
+            <p:cNvPr id="32" name="Rectangle 32"/>
             <p:cNvSpPr/>
             <p:nvPr/>
           </p:nvSpPr>
@@ -4660,7 +4714,7 @@
         </p:sp>
         <p:sp>
           <p:nvSpPr>
-            <p:cNvPr id="32" name="Ellipse 32"/>
+            <p:cNvPr id="33" name="Ellipse 33"/>
             <p:cNvSpPr/>
             <p:nvPr/>
           </p:nvSpPr>
@@ -4682,7 +4736,7 @@
         </p:sp>
         <p:sp>
           <p:nvSpPr>
-            <p:cNvPr id="33" name="TextBox 33"/>
+            <p:cNvPr id="34" name="TextBox 34"/>
             <p:cNvSpPr txBox="1"/>
             <p:nvPr/>
           </p:nvSpPr>
@@ -4722,7 +4776,7 @@
         </p:sp>
         <p:sp>
           <p:nvSpPr>
-            <p:cNvPr id="34" name="TextBox 34"/>
+            <p:cNvPr id="35" name="TextBox 35"/>
             <p:cNvSpPr txBox="1"/>
             <p:nvPr/>
           </p:nvSpPr>
@@ -4762,7 +4816,7 @@
         </p:sp>
         <p:sp>
           <p:nvSpPr>
-            <p:cNvPr id="35" name="Freeform 35"/>
+            <p:cNvPr id="36" name="Freeform 36"/>
             <p:cNvSpPr/>
             <p:nvPr/>
           </p:nvSpPr>
@@ -4800,7 +4854,7 @@
         </p:sp>
         <p:sp>
           <p:nvSpPr>
-            <p:cNvPr id="36" name="Rectangle 36"/>
+            <p:cNvPr id="37" name="Rectangle 37"/>
             <p:cNvSpPr/>
             <p:nvPr/>
           </p:nvSpPr>
@@ -4826,7 +4880,7 @@
         </p:sp>
         <p:sp>
           <p:nvSpPr>
-            <p:cNvPr id="37" name="Ellipse 37"/>
+            <p:cNvPr id="38" name="Ellipse 38"/>
             <p:cNvSpPr/>
             <p:nvPr/>
           </p:nvSpPr>
@@ -4848,7 +4902,7 @@
         </p:sp>
         <p:sp>
           <p:nvSpPr>
-            <p:cNvPr id="38" name="TextBox 38"/>
+            <p:cNvPr id="39" name="TextBox 39"/>
             <p:cNvSpPr txBox="1"/>
             <p:nvPr/>
           </p:nvSpPr>
@@ -4888,7 +4942,7 @@
         </p:sp>
         <p:sp>
           <p:nvSpPr>
-            <p:cNvPr id="39" name="TextBox 39"/>
+            <p:cNvPr id="40" name="TextBox 40"/>
             <p:cNvSpPr txBox="1"/>
             <p:nvPr/>
           </p:nvSpPr>
@@ -4928,7 +4982,7 @@
         </p:sp>
         <p:sp>
           <p:nvSpPr>
-            <p:cNvPr id="40" name="Freeform 40"/>
+            <p:cNvPr id="41" name="Freeform 41"/>
             <p:cNvSpPr/>
             <p:nvPr/>
           </p:nvSpPr>
@@ -4966,7 +5020,7 @@
         </p:sp>
         <p:sp>
           <p:nvSpPr>
-            <p:cNvPr id="41" name="Rectangle 41"/>
+            <p:cNvPr id="42" name="Rectangle 42"/>
             <p:cNvSpPr/>
             <p:nvPr/>
           </p:nvSpPr>
@@ -4992,7 +5046,7 @@
         </p:sp>
         <p:sp>
           <p:nvSpPr>
-            <p:cNvPr id="42" name="Ellipse 42"/>
+            <p:cNvPr id="43" name="Ellipse 43"/>
             <p:cNvSpPr/>
             <p:nvPr/>
           </p:nvSpPr>
@@ -5014,7 +5068,7 @@
         </p:sp>
         <p:sp>
           <p:nvSpPr>
-            <p:cNvPr id="43" name="TextBox 43"/>
+            <p:cNvPr id="44" name="TextBox 44"/>
             <p:cNvSpPr txBox="1"/>
             <p:nvPr/>
           </p:nvSpPr>
@@ -5054,7 +5108,7 @@
         </p:sp>
         <p:sp>
           <p:nvSpPr>
-            <p:cNvPr id="44" name="TextBox 44"/>
+            <p:cNvPr id="45" name="TextBox 45"/>
             <p:cNvSpPr txBox="1"/>
             <p:nvPr/>
           </p:nvSpPr>
@@ -5095,7 +5149,7 @@
       </p:grpSp>
       <p:grpSp>
         <p:nvGrpSpPr>
-          <p:cNvPr id="51" name="Group 51"/>
+          <p:cNvPr id="52" name="Group 52"/>
           <p:cNvGrpSpPr/>
           <p:nvPr/>
         </p:nvGrpSpPr>
@@ -5109,7 +5163,7 @@
         </p:grpSpPr>
         <p:sp>
           <p:nvSpPr>
-            <p:cNvPr id="46" name="Rectangle 46"/>
+            <p:cNvPr id="47" name="Rectangle 47"/>
             <p:cNvSpPr/>
             <p:nvPr/>
           </p:nvSpPr>
@@ -5133,7 +5187,7 @@
         </p:sp>
         <p:sp>
           <p:nvSpPr>
-            <p:cNvPr id="47" name="Ellipse 47"/>
+            <p:cNvPr id="48" name="Ellipse 48"/>
             <p:cNvSpPr/>
             <p:nvPr/>
           </p:nvSpPr>
@@ -5155,7 +5209,7 @@
         </p:sp>
         <p:sp>
           <p:nvSpPr>
-            <p:cNvPr id="48" name="Ellipse 48"/>
+            <p:cNvPr id="49" name="Ellipse 49"/>
             <p:cNvSpPr/>
             <p:nvPr/>
           </p:nvSpPr>
@@ -5177,7 +5231,7 @@
         </p:sp>
         <p:sp>
           <p:nvSpPr>
-            <p:cNvPr id="49" name="Ellipse 49"/>
+            <p:cNvPr id="50" name="Ellipse 50"/>
             <p:cNvSpPr/>
             <p:nvPr/>
           </p:nvSpPr>
@@ -5199,7 +5253,7 @@
         </p:sp>
         <p:sp>
           <p:nvSpPr>
-            <p:cNvPr id="50" name="TextBox 50"/>
+            <p:cNvPr id="51" name="TextBox 51"/>
             <p:cNvSpPr txBox="1"/>
             <p:nvPr/>
           </p:nvSpPr>
@@ -5242,7 +5296,7 @@
       </p:grpSp>
       <p:grpSp>
         <p:nvGrpSpPr>
-          <p:cNvPr id="54" name="Group 54"/>
+          <p:cNvPr id="55" name="Group 55"/>
           <p:cNvGrpSpPr/>
           <p:nvPr/>
         </p:nvGrpSpPr>
@@ -5256,7 +5310,7 @@
         </p:grpSpPr>
         <p:sp>
           <p:nvSpPr>
-            <p:cNvPr id="52" name="Rectangle 52"/>
+            <p:cNvPr id="53" name="Rectangle 53"/>
             <p:cNvSpPr/>
             <p:nvPr/>
           </p:nvSpPr>
@@ -5280,7 +5334,7 @@
         </p:sp>
         <p:sp>
           <p:nvSpPr>
-            <p:cNvPr id="53" name="TextBox 53"/>
+            <p:cNvPr id="54" name="TextBox 54"/>
             <p:cNvSpPr txBox="1"/>
             <p:nvPr/>
           </p:nvSpPr>
@@ -5323,7 +5377,7 @@
       </p:grpSp>
       <p:grpSp>
         <p:nvGrpSpPr>
-          <p:cNvPr id="57" name="Group 57"/>
+          <p:cNvPr id="58" name="Group 58"/>
           <p:cNvGrpSpPr/>
           <p:nvPr/>
         </p:nvGrpSpPr>
@@ -5337,7 +5391,7 @@
         </p:grpSpPr>
         <p:sp>
           <p:nvSpPr>
-            <p:cNvPr id="55" name="TextBox 55"/>
+            <p:cNvPr id="56" name="TextBox 56"/>
             <p:cNvSpPr txBox="1"/>
             <p:nvPr/>
           </p:nvSpPr>
@@ -5377,7 +5431,7 @@
         </p:sp>
         <p:sp>
           <p:nvSpPr>
-            <p:cNvPr id="56" name="TextBox 56"/>
+            <p:cNvPr id="57" name="TextBox 57"/>
             <p:cNvSpPr txBox="1"/>
             <p:nvPr/>
           </p:nvSpPr>
@@ -5452,9 +5506,36 @@
           <a:chExt cx="0" cy="0"/>
         </a:xfrm>
       </p:grpSpPr>
+      <p:pic>
+        <p:nvPicPr>
+          <p:cNvPr id="2" name="Image 2"/>
+          <p:cNvPicPr>
+            <a:picLocks noChangeAspect="1"/>
+          </p:cNvPicPr>
+          <p:nvPr/>
+        </p:nvPicPr>
+        <p:blipFill>
+          <a:blip r:embed="rId2">
+            <a:alphaModFix amt="14000"/>
+          </a:blip>
+          <a:srcRect l="0" t="27" r="0" b="27"/>
+          <a:stretch>
+            <a:fillRect/>
+          </a:stretch>
+        </p:blipFill>
+        <p:spPr>
+          <a:xfrm>
+            <a:off x="0" y="0"/>
+            <a:ext cx="12192000" cy="6858000"/>
+          </a:xfrm>
+          <a:prstGeom prst="rect">
+            <a:avLst/>
+          </a:prstGeom>
+        </p:spPr>
+      </p:pic>
       <p:grpSp>
         <p:nvGrpSpPr>
-          <p:cNvPr id="5" name="Group 5"/>
+          <p:cNvPr id="6" name="Group 6"/>
           <p:cNvGrpSpPr/>
           <p:nvPr/>
         </p:nvGrpSpPr>
@@ -5468,7 +5549,7 @@
         </p:grpSpPr>
         <p:sp>
           <p:nvSpPr>
-            <p:cNvPr id="2" name="TextBox 2"/>
+            <p:cNvPr id="3" name="TextBox 3"/>
             <p:cNvSpPr txBox="1"/>
             <p:nvPr/>
           </p:nvSpPr>
@@ -5508,7 +5589,7 @@
         </p:sp>
         <p:sp>
           <p:nvSpPr>
-            <p:cNvPr id="3" name="TextBox 3"/>
+            <p:cNvPr id="4" name="TextBox 4"/>
             <p:cNvSpPr txBox="1"/>
             <p:nvPr/>
           </p:nvSpPr>
@@ -5548,7 +5629,7 @@
         </p:sp>
         <p:sp>
           <p:nvSpPr>
-            <p:cNvPr id="4" name="Line 4"/>
+            <p:cNvPr id="5" name="Line 5"/>
             <p:cNvSpPr/>
             <p:nvPr/>
           </p:nvSpPr>
@@ -5585,7 +5666,7 @@
       </p:grpSp>
       <p:grpSp>
         <p:nvGrpSpPr>
-          <p:cNvPr id="10" name="Group 10"/>
+          <p:cNvPr id="11" name="Group 11"/>
           <p:cNvGrpSpPr/>
           <p:nvPr/>
         </p:nvGrpSpPr>
@@ -5599,7 +5680,7 @@
         </p:grpSpPr>
         <p:sp>
           <p:nvSpPr>
-            <p:cNvPr id="6" name="Rectangle 6"/>
+            <p:cNvPr id="7" name="Rectangle 7"/>
             <p:cNvSpPr/>
             <p:nvPr/>
           </p:nvSpPr>
@@ -5625,7 +5706,7 @@
         </p:sp>
         <p:sp>
           <p:nvSpPr>
-            <p:cNvPr id="7" name="Rectangle 7"/>
+            <p:cNvPr id="8" name="Rectangle 8"/>
             <p:cNvSpPr/>
             <p:nvPr/>
           </p:nvSpPr>
@@ -5649,7 +5730,7 @@
         </p:sp>
         <p:sp>
           <p:nvSpPr>
-            <p:cNvPr id="8" name="TextBox 8"/>
+            <p:cNvPr id="9" name="TextBox 9"/>
             <p:cNvSpPr txBox="1"/>
             <p:nvPr/>
           </p:nvSpPr>
@@ -5689,7 +5770,7 @@
         </p:sp>
         <p:sp>
           <p:nvSpPr>
-            <p:cNvPr id="9" name="TextBox 9"/>
+            <p:cNvPr id="10" name="TextBox 10"/>
             <p:cNvSpPr txBox="1"/>
             <p:nvPr/>
           </p:nvSpPr>
@@ -5732,7 +5813,7 @@
       </p:grpSp>
       <p:grpSp>
         <p:nvGrpSpPr>
-          <p:cNvPr id="15" name="Group 15"/>
+          <p:cNvPr id="16" name="Group 16"/>
           <p:cNvGrpSpPr/>
           <p:nvPr/>
         </p:nvGrpSpPr>
@@ -5746,7 +5827,7 @@
         </p:grpSpPr>
         <p:sp>
           <p:nvSpPr>
-            <p:cNvPr id="11" name="Rectangle 11"/>
+            <p:cNvPr id="12" name="Rectangle 12"/>
             <p:cNvSpPr/>
             <p:nvPr/>
           </p:nvSpPr>
@@ -5772,7 +5853,7 @@
         </p:sp>
         <p:sp>
           <p:nvSpPr>
-            <p:cNvPr id="12" name="Rectangle 12"/>
+            <p:cNvPr id="13" name="Rectangle 13"/>
             <p:cNvSpPr/>
             <p:nvPr/>
           </p:nvSpPr>
@@ -5796,7 +5877,7 @@
         </p:sp>
         <p:sp>
           <p:nvSpPr>
-            <p:cNvPr id="13" name="TextBox 13"/>
+            <p:cNvPr id="14" name="TextBox 14"/>
             <p:cNvSpPr txBox="1"/>
             <p:nvPr/>
           </p:nvSpPr>
@@ -5836,7 +5917,7 @@
         </p:sp>
         <p:sp>
           <p:nvSpPr>
-            <p:cNvPr id="14" name="TextBox 14"/>
+            <p:cNvPr id="15" name="TextBox 15"/>
             <p:cNvSpPr txBox="1"/>
             <p:nvPr/>
           </p:nvSpPr>
@@ -5879,7 +5960,7 @@
       </p:grpSp>
       <p:grpSp>
         <p:nvGrpSpPr>
-          <p:cNvPr id="20" name="Group 20"/>
+          <p:cNvPr id="21" name="Group 21"/>
           <p:cNvGrpSpPr/>
           <p:nvPr/>
         </p:nvGrpSpPr>
@@ -5893,7 +5974,7 @@
         </p:grpSpPr>
         <p:sp>
           <p:nvSpPr>
-            <p:cNvPr id="16" name="Rectangle 16"/>
+            <p:cNvPr id="17" name="Rectangle 17"/>
             <p:cNvSpPr/>
             <p:nvPr/>
           </p:nvSpPr>
@@ -5919,7 +6000,7 @@
         </p:sp>
         <p:sp>
           <p:nvSpPr>
-            <p:cNvPr id="17" name="Rectangle 17"/>
+            <p:cNvPr id="18" name="Rectangle 18"/>
             <p:cNvSpPr/>
             <p:nvPr/>
           </p:nvSpPr>
@@ -5943,7 +6024,7 @@
         </p:sp>
         <p:sp>
           <p:nvSpPr>
-            <p:cNvPr id="18" name="TextBox 18"/>
+            <p:cNvPr id="19" name="TextBox 19"/>
             <p:cNvSpPr txBox="1"/>
             <p:nvPr/>
           </p:nvSpPr>
@@ -5983,7 +6064,7 @@
         </p:sp>
         <p:sp>
           <p:nvSpPr>
-            <p:cNvPr id="19" name="TextBox 19"/>
+            <p:cNvPr id="20" name="TextBox 20"/>
             <p:cNvSpPr txBox="1"/>
             <p:nvPr/>
           </p:nvSpPr>
@@ -6026,7 +6107,7 @@
       </p:grpSp>
       <p:grpSp>
         <p:nvGrpSpPr>
-          <p:cNvPr id="25" name="Group 25"/>
+          <p:cNvPr id="26" name="Group 26"/>
           <p:cNvGrpSpPr/>
           <p:nvPr/>
         </p:nvGrpSpPr>
@@ -6040,7 +6121,7 @@
         </p:grpSpPr>
         <p:sp>
           <p:nvSpPr>
-            <p:cNvPr id="21" name="Rectangle 21"/>
+            <p:cNvPr id="22" name="Rectangle 22"/>
             <p:cNvSpPr/>
             <p:nvPr/>
           </p:nvSpPr>
@@ -6066,7 +6147,7 @@
         </p:sp>
         <p:sp>
           <p:nvSpPr>
-            <p:cNvPr id="22" name="Rectangle 22"/>
+            <p:cNvPr id="23" name="Rectangle 23"/>
             <p:cNvSpPr/>
             <p:nvPr/>
           </p:nvSpPr>
@@ -6090,7 +6171,7 @@
         </p:sp>
         <p:sp>
           <p:nvSpPr>
-            <p:cNvPr id="23" name="TextBox 23"/>
+            <p:cNvPr id="24" name="TextBox 24"/>
             <p:cNvSpPr txBox="1"/>
             <p:nvPr/>
           </p:nvSpPr>
@@ -6130,7 +6211,7 @@
         </p:sp>
         <p:sp>
           <p:nvSpPr>
-            <p:cNvPr id="24" name="TextBox 24"/>
+            <p:cNvPr id="25" name="TextBox 25"/>
             <p:cNvSpPr txBox="1"/>
             <p:nvPr/>
           </p:nvSpPr>
@@ -6173,7 +6254,7 @@
       </p:grpSp>
       <p:grpSp>
         <p:nvGrpSpPr>
-          <p:cNvPr id="28" name="Group 28"/>
+          <p:cNvPr id="29" name="Group 29"/>
           <p:cNvGrpSpPr/>
           <p:nvPr/>
         </p:nvGrpSpPr>
@@ -6187,7 +6268,7 @@
         </p:grpSpPr>
         <p:sp>
           <p:nvSpPr>
-            <p:cNvPr id="26" name="TextBox 26"/>
+            <p:cNvPr id="27" name="TextBox 27"/>
             <p:cNvSpPr txBox="1"/>
             <p:nvPr/>
           </p:nvSpPr>
@@ -6227,7 +6308,7 @@
         </p:sp>
         <p:sp>
           <p:nvSpPr>
-            <p:cNvPr id="27" name="TextBox 27"/>
+            <p:cNvPr id="28" name="TextBox 28"/>
             <p:cNvSpPr txBox="1"/>
             <p:nvPr/>
           </p:nvSpPr>
@@ -6302,9 +6383,36 @@
           <a:chExt cx="0" cy="0"/>
         </a:xfrm>
       </p:grpSpPr>
+      <p:pic>
+        <p:nvPicPr>
+          <p:cNvPr id="2" name="Image 2"/>
+          <p:cNvPicPr>
+            <a:picLocks noChangeAspect="1"/>
+          </p:cNvPicPr>
+          <p:nvPr/>
+        </p:nvPicPr>
+        <p:blipFill>
+          <a:blip r:embed="rId2">
+            <a:alphaModFix amt="14000"/>
+          </a:blip>
+          <a:srcRect l="0" t="27" r="0" b="27"/>
+          <a:stretch>
+            <a:fillRect/>
+          </a:stretch>
+        </p:blipFill>
+        <p:spPr>
+          <a:xfrm>
+            <a:off x="0" y="0"/>
+            <a:ext cx="12192000" cy="6858000"/>
+          </a:xfrm>
+          <a:prstGeom prst="rect">
+            <a:avLst/>
+          </a:prstGeom>
+        </p:spPr>
+      </p:pic>
       <p:grpSp>
         <p:nvGrpSpPr>
-          <p:cNvPr id="5" name="Group 5"/>
+          <p:cNvPr id="6" name="Group 6"/>
           <p:cNvGrpSpPr/>
           <p:nvPr/>
         </p:nvGrpSpPr>
@@ -6318,7 +6426,7 @@
         </p:grpSpPr>
         <p:sp>
           <p:nvSpPr>
-            <p:cNvPr id="2" name="TextBox 2"/>
+            <p:cNvPr id="3" name="TextBox 3"/>
             <p:cNvSpPr txBox="1"/>
             <p:nvPr/>
           </p:nvSpPr>
@@ -6358,7 +6466,7 @@
         </p:sp>
         <p:sp>
           <p:nvSpPr>
-            <p:cNvPr id="3" name="TextBox 3"/>
+            <p:cNvPr id="4" name="TextBox 4"/>
             <p:cNvSpPr txBox="1"/>
             <p:nvPr/>
           </p:nvSpPr>
@@ -6398,7 +6506,7 @@
         </p:sp>
         <p:sp>
           <p:nvSpPr>
-            <p:cNvPr id="4" name="Line 4"/>
+            <p:cNvPr id="5" name="Line 5"/>
             <p:cNvSpPr/>
             <p:nvPr/>
           </p:nvSpPr>
@@ -6435,7 +6543,7 @@
       </p:grpSp>
       <p:grpSp>
         <p:nvGrpSpPr>
-          <p:cNvPr id="11" name="Group 11"/>
+          <p:cNvPr id="12" name="Group 12"/>
           <p:cNvGrpSpPr/>
           <p:nvPr/>
         </p:nvGrpSpPr>
@@ -6449,7 +6557,7 @@
         </p:grpSpPr>
         <p:sp>
           <p:nvSpPr>
-            <p:cNvPr id="6" name="Rectangle 6"/>
+            <p:cNvPr id="7" name="Rectangle 7"/>
             <p:cNvSpPr/>
             <p:nvPr/>
           </p:nvSpPr>
@@ -6473,7 +6581,7 @@
         </p:sp>
         <p:sp>
           <p:nvSpPr>
-            <p:cNvPr id="7" name="Ellipse 7"/>
+            <p:cNvPr id="8" name="Ellipse 8"/>
             <p:cNvSpPr/>
             <p:nvPr/>
           </p:nvSpPr>
@@ -6495,7 +6603,7 @@
         </p:sp>
         <p:sp>
           <p:nvSpPr>
-            <p:cNvPr id="8" name="Ellipse 8"/>
+            <p:cNvPr id="9" name="Ellipse 9"/>
             <p:cNvSpPr/>
             <p:nvPr/>
           </p:nvSpPr>
@@ -6517,7 +6625,7 @@
         </p:sp>
         <p:sp>
           <p:nvSpPr>
-            <p:cNvPr id="9" name="Ellipse 9"/>
+            <p:cNvPr id="10" name="Ellipse 10"/>
             <p:cNvSpPr/>
             <p:nvPr/>
           </p:nvSpPr>
@@ -6539,7 +6647,7 @@
         </p:sp>
         <p:sp>
           <p:nvSpPr>
-            <p:cNvPr id="10" name="TextBox 10"/>
+            <p:cNvPr id="11" name="TextBox 11"/>
             <p:cNvSpPr txBox="1"/>
             <p:nvPr/>
           </p:nvSpPr>
@@ -6615,7 +6723,7 @@
       </p:grpSp>
       <p:grpSp>
         <p:nvGrpSpPr>
-          <p:cNvPr id="16" name="Group 16"/>
+          <p:cNvPr id="17" name="Group 17"/>
           <p:cNvGrpSpPr/>
           <p:nvPr/>
         </p:nvGrpSpPr>
@@ -6629,7 +6737,7 @@
         </p:grpSpPr>
         <p:sp>
           <p:nvSpPr>
-            <p:cNvPr id="12" name="Rectangle 12"/>
+            <p:cNvPr id="13" name="Rectangle 13"/>
             <p:cNvSpPr/>
             <p:nvPr/>
           </p:nvSpPr>
@@ -6655,7 +6763,7 @@
         </p:sp>
         <p:sp>
           <p:nvSpPr>
-            <p:cNvPr id="13" name="Rectangle 13"/>
+            <p:cNvPr id="14" name="Rectangle 14"/>
             <p:cNvSpPr/>
             <p:nvPr/>
           </p:nvSpPr>
@@ -6679,7 +6787,7 @@
         </p:sp>
         <p:sp>
           <p:nvSpPr>
-            <p:cNvPr id="14" name="TextBox 14"/>
+            <p:cNvPr id="15" name="TextBox 15"/>
             <p:cNvSpPr txBox="1"/>
             <p:nvPr/>
           </p:nvSpPr>
@@ -6719,7 +6827,7 @@
         </p:sp>
         <p:sp>
           <p:nvSpPr>
-            <p:cNvPr id="15" name="TextBox 15"/>
+            <p:cNvPr id="16" name="TextBox 16"/>
             <p:cNvSpPr txBox="1"/>
             <p:nvPr/>
           </p:nvSpPr>
@@ -6762,7 +6870,7 @@
       </p:grpSp>
       <p:grpSp>
         <p:nvGrpSpPr>
-          <p:cNvPr id="21" name="Group 21"/>
+          <p:cNvPr id="22" name="Group 22"/>
           <p:cNvGrpSpPr/>
           <p:nvPr/>
         </p:nvGrpSpPr>
@@ -6776,7 +6884,7 @@
         </p:grpSpPr>
         <p:sp>
           <p:nvSpPr>
-            <p:cNvPr id="17" name="Rectangle 17"/>
+            <p:cNvPr id="18" name="Rectangle 18"/>
             <p:cNvSpPr/>
             <p:nvPr/>
           </p:nvSpPr>
@@ -6802,7 +6910,7 @@
         </p:sp>
         <p:sp>
           <p:nvSpPr>
-            <p:cNvPr id="18" name="Rectangle 18"/>
+            <p:cNvPr id="19" name="Rectangle 19"/>
             <p:cNvSpPr/>
             <p:nvPr/>
           </p:nvSpPr>
@@ -6826,7 +6934,7 @@
         </p:sp>
         <p:sp>
           <p:nvSpPr>
-            <p:cNvPr id="19" name="TextBox 19"/>
+            <p:cNvPr id="20" name="TextBox 20"/>
             <p:cNvSpPr txBox="1"/>
             <p:nvPr/>
           </p:nvSpPr>
@@ -6866,7 +6974,7 @@
         </p:sp>
         <p:sp>
           <p:nvSpPr>
-            <p:cNvPr id="20" name="TextBox 20"/>
+            <p:cNvPr id="21" name="TextBox 21"/>
             <p:cNvSpPr txBox="1"/>
             <p:nvPr/>
           </p:nvSpPr>
@@ -6909,7 +7017,7 @@
       </p:grpSp>
       <p:grpSp>
         <p:nvGrpSpPr>
-          <p:cNvPr id="24" name="Group 24"/>
+          <p:cNvPr id="25" name="Group 25"/>
           <p:cNvGrpSpPr/>
           <p:nvPr/>
         </p:nvGrpSpPr>
@@ -6923,7 +7031,7 @@
         </p:grpSpPr>
         <p:sp>
           <p:nvSpPr>
-            <p:cNvPr id="22" name="Rectangle 22"/>
+            <p:cNvPr id="23" name="Rectangle 23"/>
             <p:cNvSpPr/>
             <p:nvPr/>
           </p:nvSpPr>
@@ -6947,7 +7055,7 @@
         </p:sp>
         <p:sp>
           <p:nvSpPr>
-            <p:cNvPr id="23" name="TextBox 23"/>
+            <p:cNvPr id="24" name="TextBox 24"/>
             <p:cNvSpPr txBox="1"/>
             <p:nvPr/>
           </p:nvSpPr>
@@ -6988,7 +7096,7 @@
       </p:grpSp>
       <p:grpSp>
         <p:nvGrpSpPr>
-          <p:cNvPr id="27" name="Group 27"/>
+          <p:cNvPr id="28" name="Group 28"/>
           <p:cNvGrpSpPr/>
           <p:nvPr/>
         </p:nvGrpSpPr>
@@ -7002,7 +7110,7 @@
         </p:grpSpPr>
         <p:sp>
           <p:nvSpPr>
-            <p:cNvPr id="25" name="TextBox 25"/>
+            <p:cNvPr id="26" name="TextBox 26"/>
             <p:cNvSpPr txBox="1"/>
             <p:nvPr/>
           </p:nvSpPr>
@@ -7042,7 +7150,7 @@
         </p:sp>
         <p:sp>
           <p:nvSpPr>
-            <p:cNvPr id="26" name="TextBox 26"/>
+            <p:cNvPr id="27" name="TextBox 27"/>
             <p:cNvSpPr txBox="1"/>
             <p:nvPr/>
           </p:nvSpPr>
@@ -7117,9 +7225,36 @@
           <a:chExt cx="0" cy="0"/>
         </a:xfrm>
       </p:grpSpPr>
+      <p:pic>
+        <p:nvPicPr>
+          <p:cNvPr id="2" name="Image 2"/>
+          <p:cNvPicPr>
+            <a:picLocks noChangeAspect="1"/>
+          </p:cNvPicPr>
+          <p:nvPr/>
+        </p:nvPicPr>
+        <p:blipFill>
+          <a:blip r:embed="rId2">
+            <a:alphaModFix amt="14000"/>
+          </a:blip>
+          <a:srcRect l="0" t="27" r="0" b="27"/>
+          <a:stretch>
+            <a:fillRect/>
+          </a:stretch>
+        </p:blipFill>
+        <p:spPr>
+          <a:xfrm>
+            <a:off x="0" y="0"/>
+            <a:ext cx="12192000" cy="6858000"/>
+          </a:xfrm>
+          <a:prstGeom prst="rect">
+            <a:avLst/>
+          </a:prstGeom>
+        </p:spPr>
+      </p:pic>
       <p:grpSp>
         <p:nvGrpSpPr>
-          <p:cNvPr id="5" name="Group 5"/>
+          <p:cNvPr id="6" name="Group 6"/>
           <p:cNvGrpSpPr/>
           <p:nvPr/>
         </p:nvGrpSpPr>
@@ -7133,7 +7268,7 @@
         </p:grpSpPr>
         <p:sp>
           <p:nvSpPr>
-            <p:cNvPr id="2" name="TextBox 2"/>
+            <p:cNvPr id="3" name="TextBox 3"/>
             <p:cNvSpPr txBox="1"/>
             <p:nvPr/>
           </p:nvSpPr>
@@ -7173,7 +7308,7 @@
         </p:sp>
         <p:sp>
           <p:nvSpPr>
-            <p:cNvPr id="3" name="TextBox 3"/>
+            <p:cNvPr id="4" name="TextBox 4"/>
             <p:cNvSpPr txBox="1"/>
             <p:nvPr/>
           </p:nvSpPr>
@@ -7213,7 +7348,7 @@
         </p:sp>
         <p:sp>
           <p:nvSpPr>
-            <p:cNvPr id="4" name="Line 4"/>
+            <p:cNvPr id="5" name="Line 5"/>
             <p:cNvSpPr/>
             <p:nvPr/>
           </p:nvSpPr>
@@ -7250,7 +7385,7 @@
       </p:grpSp>
       <p:grpSp>
         <p:nvGrpSpPr>
-          <p:cNvPr id="10" name="Group 10"/>
+          <p:cNvPr id="11" name="Group 11"/>
           <p:cNvGrpSpPr/>
           <p:nvPr/>
         </p:nvGrpSpPr>
@@ -7264,7 +7399,7 @@
         </p:grpSpPr>
         <p:sp>
           <p:nvSpPr>
-            <p:cNvPr id="6" name="Rectangle 6"/>
+            <p:cNvPr id="7" name="Rectangle 7"/>
             <p:cNvSpPr/>
             <p:nvPr/>
           </p:nvSpPr>
@@ -7290,7 +7425,7 @@
         </p:sp>
         <p:sp>
           <p:nvSpPr>
-            <p:cNvPr id="7" name="Rectangle 7"/>
+            <p:cNvPr id="8" name="Rectangle 8"/>
             <p:cNvSpPr/>
             <p:nvPr/>
           </p:nvSpPr>
@@ -7314,7 +7449,7 @@
         </p:sp>
         <p:sp>
           <p:nvSpPr>
-            <p:cNvPr id="8" name="TextBox 8"/>
+            <p:cNvPr id="9" name="TextBox 9"/>
             <p:cNvSpPr txBox="1"/>
             <p:nvPr/>
           </p:nvSpPr>
@@ -7354,7 +7489,7 @@
         </p:sp>
         <p:sp>
           <p:nvSpPr>
-            <p:cNvPr id="9" name="TextBox 9"/>
+            <p:cNvPr id="10" name="TextBox 10"/>
             <p:cNvSpPr txBox="1"/>
             <p:nvPr/>
           </p:nvSpPr>
@@ -7397,7 +7532,7 @@
       </p:grpSp>
       <p:grpSp>
         <p:nvGrpSpPr>
-          <p:cNvPr id="15" name="Group 15"/>
+          <p:cNvPr id="16" name="Group 16"/>
           <p:cNvGrpSpPr/>
           <p:nvPr/>
         </p:nvGrpSpPr>
@@ -7411,7 +7546,7 @@
         </p:grpSpPr>
         <p:sp>
           <p:nvSpPr>
-            <p:cNvPr id="11" name="Rectangle 11"/>
+            <p:cNvPr id="12" name="Rectangle 12"/>
             <p:cNvSpPr/>
             <p:nvPr/>
           </p:nvSpPr>
@@ -7437,7 +7572,7 @@
         </p:sp>
         <p:sp>
           <p:nvSpPr>
-            <p:cNvPr id="12" name="Rectangle 12"/>
+            <p:cNvPr id="13" name="Rectangle 13"/>
             <p:cNvSpPr/>
             <p:nvPr/>
           </p:nvSpPr>
@@ -7461,7 +7596,7 @@
         </p:sp>
         <p:sp>
           <p:nvSpPr>
-            <p:cNvPr id="13" name="TextBox 13"/>
+            <p:cNvPr id="14" name="TextBox 14"/>
             <p:cNvSpPr txBox="1"/>
             <p:nvPr/>
           </p:nvSpPr>
@@ -7501,7 +7636,7 @@
         </p:sp>
         <p:sp>
           <p:nvSpPr>
-            <p:cNvPr id="14" name="TextBox 14"/>
+            <p:cNvPr id="15" name="TextBox 15"/>
             <p:cNvSpPr txBox="1"/>
             <p:nvPr/>
           </p:nvSpPr>
@@ -7544,7 +7679,7 @@
       </p:grpSp>
       <p:grpSp>
         <p:nvGrpSpPr>
-          <p:cNvPr id="20" name="Group 20"/>
+          <p:cNvPr id="21" name="Group 21"/>
           <p:cNvGrpSpPr/>
           <p:nvPr/>
         </p:nvGrpSpPr>
@@ -7558,7 +7693,7 @@
         </p:grpSpPr>
         <p:sp>
           <p:nvSpPr>
-            <p:cNvPr id="16" name="Rectangle 16"/>
+            <p:cNvPr id="17" name="Rectangle 17"/>
             <p:cNvSpPr/>
             <p:nvPr/>
           </p:nvSpPr>
@@ -7584,7 +7719,7 @@
         </p:sp>
         <p:sp>
           <p:nvSpPr>
-            <p:cNvPr id="17" name="Rectangle 17"/>
+            <p:cNvPr id="18" name="Rectangle 18"/>
             <p:cNvSpPr/>
             <p:nvPr/>
           </p:nvSpPr>
@@ -7608,7 +7743,7 @@
         </p:sp>
         <p:sp>
           <p:nvSpPr>
-            <p:cNvPr id="18" name="TextBox 18"/>
+            <p:cNvPr id="19" name="TextBox 19"/>
             <p:cNvSpPr txBox="1"/>
             <p:nvPr/>
           </p:nvSpPr>
@@ -7648,7 +7783,7 @@
         </p:sp>
         <p:sp>
           <p:nvSpPr>
-            <p:cNvPr id="19" name="TextBox 19"/>
+            <p:cNvPr id="20" name="TextBox 20"/>
             <p:cNvSpPr txBox="1"/>
             <p:nvPr/>
           </p:nvSpPr>
@@ -7691,7 +7826,7 @@
       </p:grpSp>
       <p:grpSp>
         <p:nvGrpSpPr>
-          <p:cNvPr id="25" name="Group 25"/>
+          <p:cNvPr id="26" name="Group 26"/>
           <p:cNvGrpSpPr/>
           <p:nvPr/>
         </p:nvGrpSpPr>
@@ -7705,7 +7840,7 @@
         </p:grpSpPr>
         <p:sp>
           <p:nvSpPr>
-            <p:cNvPr id="21" name="Rectangle 21"/>
+            <p:cNvPr id="22" name="Rectangle 22"/>
             <p:cNvSpPr/>
             <p:nvPr/>
           </p:nvSpPr>
@@ -7731,7 +7866,7 @@
         </p:sp>
         <p:sp>
           <p:nvSpPr>
-            <p:cNvPr id="22" name="Rectangle 22"/>
+            <p:cNvPr id="23" name="Rectangle 23"/>
             <p:cNvSpPr/>
             <p:nvPr/>
           </p:nvSpPr>
@@ -7755,7 +7890,7 @@
         </p:sp>
         <p:sp>
           <p:nvSpPr>
-            <p:cNvPr id="23" name="TextBox 23"/>
+            <p:cNvPr id="24" name="TextBox 24"/>
             <p:cNvSpPr txBox="1"/>
             <p:nvPr/>
           </p:nvSpPr>
@@ -7795,7 +7930,7 @@
         </p:sp>
         <p:sp>
           <p:nvSpPr>
-            <p:cNvPr id="24" name="TextBox 24"/>
+            <p:cNvPr id="25" name="TextBox 25"/>
             <p:cNvSpPr txBox="1"/>
             <p:nvPr/>
           </p:nvSpPr>
@@ -7838,7 +7973,7 @@
       </p:grpSp>
       <p:grpSp>
         <p:nvGrpSpPr>
-          <p:cNvPr id="28" name="Group 28"/>
+          <p:cNvPr id="29" name="Group 29"/>
           <p:cNvGrpSpPr/>
           <p:nvPr/>
         </p:nvGrpSpPr>
@@ -7852,7 +7987,7 @@
         </p:grpSpPr>
         <p:sp>
           <p:nvSpPr>
-            <p:cNvPr id="26" name="TextBox 26"/>
+            <p:cNvPr id="27" name="TextBox 27"/>
             <p:cNvSpPr txBox="1"/>
             <p:nvPr/>
           </p:nvSpPr>
@@ -7892,7 +8027,7 @@
         </p:sp>
         <p:sp>
           <p:nvSpPr>
-            <p:cNvPr id="27" name="TextBox 27"/>
+            <p:cNvPr id="28" name="TextBox 28"/>
             <p:cNvSpPr txBox="1"/>
             <p:nvPr/>
           </p:nvSpPr>
@@ -7967,9 +8102,36 @@
           <a:chExt cx="0" cy="0"/>
         </a:xfrm>
       </p:grpSpPr>
+      <p:pic>
+        <p:nvPicPr>
+          <p:cNvPr id="2" name="Image 2"/>
+          <p:cNvPicPr>
+            <a:picLocks noChangeAspect="1"/>
+          </p:cNvPicPr>
+          <p:nvPr/>
+        </p:nvPicPr>
+        <p:blipFill>
+          <a:blip r:embed="rId2">
+            <a:alphaModFix amt="14000"/>
+          </a:blip>
+          <a:srcRect l="0" t="27" r="0" b="27"/>
+          <a:stretch>
+            <a:fillRect/>
+          </a:stretch>
+        </p:blipFill>
+        <p:spPr>
+          <a:xfrm>
+            <a:off x="0" y="0"/>
+            <a:ext cx="12192000" cy="6858000"/>
+          </a:xfrm>
+          <a:prstGeom prst="rect">
+            <a:avLst/>
+          </a:prstGeom>
+        </p:spPr>
+      </p:pic>
       <p:grpSp>
         <p:nvGrpSpPr>
-          <p:cNvPr id="5" name="Group 5"/>
+          <p:cNvPr id="6" name="Group 6"/>
           <p:cNvGrpSpPr/>
           <p:nvPr/>
         </p:nvGrpSpPr>
@@ -7983,7 +8145,7 @@
         </p:grpSpPr>
         <p:sp>
           <p:nvSpPr>
-            <p:cNvPr id="2" name="TextBox 2"/>
+            <p:cNvPr id="3" name="TextBox 3"/>
             <p:cNvSpPr txBox="1"/>
             <p:nvPr/>
           </p:nvSpPr>
@@ -8023,7 +8185,7 @@
         </p:sp>
         <p:sp>
           <p:nvSpPr>
-            <p:cNvPr id="3" name="TextBox 3"/>
+            <p:cNvPr id="4" name="TextBox 4"/>
             <p:cNvSpPr txBox="1"/>
             <p:nvPr/>
           </p:nvSpPr>
@@ -8063,7 +8225,7 @@
         </p:sp>
         <p:sp>
           <p:nvSpPr>
-            <p:cNvPr id="4" name="Line 4"/>
+            <p:cNvPr id="5" name="Line 5"/>
             <p:cNvSpPr/>
             <p:nvPr/>
           </p:nvSpPr>
@@ -8100,7 +8262,7 @@
       </p:grpSp>
       <p:grpSp>
         <p:nvGrpSpPr>
-          <p:cNvPr id="11" name="Group 11"/>
+          <p:cNvPr id="12" name="Group 12"/>
           <p:cNvGrpSpPr/>
           <p:nvPr/>
         </p:nvGrpSpPr>
@@ -8114,7 +8276,7 @@
         </p:grpSpPr>
         <p:sp>
           <p:nvSpPr>
-            <p:cNvPr id="6" name="Rectangle 6"/>
+            <p:cNvPr id="7" name="Rectangle 7"/>
             <p:cNvSpPr/>
             <p:nvPr/>
           </p:nvSpPr>
@@ -8138,7 +8300,7 @@
         </p:sp>
         <p:sp>
           <p:nvSpPr>
-            <p:cNvPr id="7" name="Ellipse 7"/>
+            <p:cNvPr id="8" name="Ellipse 8"/>
             <p:cNvSpPr/>
             <p:nvPr/>
           </p:nvSpPr>
@@ -8160,7 +8322,7 @@
         </p:sp>
         <p:sp>
           <p:nvSpPr>
-            <p:cNvPr id="8" name="Ellipse 8"/>
+            <p:cNvPr id="9" name="Ellipse 9"/>
             <p:cNvSpPr/>
             <p:nvPr/>
           </p:nvSpPr>
@@ -8182,7 +8344,7 @@
         </p:sp>
         <p:sp>
           <p:nvSpPr>
-            <p:cNvPr id="9" name="Ellipse 9"/>
+            <p:cNvPr id="10" name="Ellipse 10"/>
             <p:cNvSpPr/>
             <p:nvPr/>
           </p:nvSpPr>
@@ -8204,7 +8366,7 @@
         </p:sp>
         <p:sp>
           <p:nvSpPr>
-            <p:cNvPr id="10" name="TextBox 10"/>
+            <p:cNvPr id="11" name="TextBox 11"/>
             <p:cNvSpPr txBox="1"/>
             <p:nvPr/>
           </p:nvSpPr>
@@ -8302,7 +8464,7 @@
       </p:grpSp>
       <p:grpSp>
         <p:nvGrpSpPr>
-          <p:cNvPr id="16" name="Group 16"/>
+          <p:cNvPr id="17" name="Group 17"/>
           <p:cNvGrpSpPr/>
           <p:nvPr/>
         </p:nvGrpSpPr>
@@ -8316,7 +8478,7 @@
         </p:grpSpPr>
         <p:sp>
           <p:nvSpPr>
-            <p:cNvPr id="12" name="Rectangle 12"/>
+            <p:cNvPr id="13" name="Rectangle 13"/>
             <p:cNvSpPr/>
             <p:nvPr/>
           </p:nvSpPr>
@@ -8342,7 +8504,7 @@
         </p:sp>
         <p:sp>
           <p:nvSpPr>
-            <p:cNvPr id="13" name="Rectangle 13"/>
+            <p:cNvPr id="14" name="Rectangle 14"/>
             <p:cNvSpPr/>
             <p:nvPr/>
           </p:nvSpPr>
@@ -8366,7 +8528,7 @@
         </p:sp>
         <p:sp>
           <p:nvSpPr>
-            <p:cNvPr id="14" name="TextBox 14"/>
+            <p:cNvPr id="15" name="TextBox 15"/>
             <p:cNvSpPr txBox="1"/>
             <p:nvPr/>
           </p:nvSpPr>
@@ -8406,7 +8568,7 @@
         </p:sp>
         <p:sp>
           <p:nvSpPr>
-            <p:cNvPr id="15" name="TextBox 15"/>
+            <p:cNvPr id="16" name="TextBox 16"/>
             <p:cNvSpPr txBox="1"/>
             <p:nvPr/>
           </p:nvSpPr>
@@ -8449,7 +8611,7 @@
       </p:grpSp>
       <p:grpSp>
         <p:nvGrpSpPr>
-          <p:cNvPr id="21" name="Group 21"/>
+          <p:cNvPr id="22" name="Group 22"/>
           <p:cNvGrpSpPr/>
           <p:nvPr/>
         </p:nvGrpSpPr>
@@ -8463,7 +8625,7 @@
         </p:grpSpPr>
         <p:sp>
           <p:nvSpPr>
-            <p:cNvPr id="17" name="Rectangle 17"/>
+            <p:cNvPr id="18" name="Rectangle 18"/>
             <p:cNvSpPr/>
             <p:nvPr/>
           </p:nvSpPr>
@@ -8489,7 +8651,7 @@
         </p:sp>
         <p:sp>
           <p:nvSpPr>
-            <p:cNvPr id="18" name="Rectangle 18"/>
+            <p:cNvPr id="19" name="Rectangle 19"/>
             <p:cNvSpPr/>
             <p:nvPr/>
           </p:nvSpPr>
@@ -8513,7 +8675,7 @@
         </p:sp>
         <p:sp>
           <p:nvSpPr>
-            <p:cNvPr id="19" name="TextBox 19"/>
+            <p:cNvPr id="20" name="TextBox 20"/>
             <p:cNvSpPr txBox="1"/>
             <p:nvPr/>
           </p:nvSpPr>
@@ -8553,7 +8715,7 @@
         </p:sp>
         <p:sp>
           <p:nvSpPr>
-            <p:cNvPr id="20" name="TextBox 20"/>
+            <p:cNvPr id="21" name="TextBox 21"/>
             <p:cNvSpPr txBox="1"/>
             <p:nvPr/>
           </p:nvSpPr>
@@ -8596,7 +8758,7 @@
       </p:grpSp>
       <p:grpSp>
         <p:nvGrpSpPr>
-          <p:cNvPr id="24" name="Group 24"/>
+          <p:cNvPr id="25" name="Group 25"/>
           <p:cNvGrpSpPr/>
           <p:nvPr/>
         </p:nvGrpSpPr>
@@ -8610,7 +8772,7 @@
         </p:grpSpPr>
         <p:sp>
           <p:nvSpPr>
-            <p:cNvPr id="22" name="TextBox 22"/>
+            <p:cNvPr id="23" name="TextBox 23"/>
             <p:cNvSpPr txBox="1"/>
             <p:nvPr/>
           </p:nvSpPr>
@@ -8650,7 +8812,7 @@
         </p:sp>
         <p:sp>
           <p:nvSpPr>
-            <p:cNvPr id="23" name="TextBox 23"/>
+            <p:cNvPr id="24" name="TextBox 24"/>
             <p:cNvSpPr txBox="1"/>
             <p:nvPr/>
           </p:nvSpPr>
@@ -8725,9 +8887,36 @@
           <a:chExt cx="0" cy="0"/>
         </a:xfrm>
       </p:grpSpPr>
+      <p:pic>
+        <p:nvPicPr>
+          <p:cNvPr id="2" name="Image 2"/>
+          <p:cNvPicPr>
+            <a:picLocks noChangeAspect="1"/>
+          </p:cNvPicPr>
+          <p:nvPr/>
+        </p:nvPicPr>
+        <p:blipFill>
+          <a:blip r:embed="rId2">
+            <a:alphaModFix amt="14000"/>
+          </a:blip>
+          <a:srcRect l="0" t="27" r="0" b="27"/>
+          <a:stretch>
+            <a:fillRect/>
+          </a:stretch>
+        </p:blipFill>
+        <p:spPr>
+          <a:xfrm>
+            <a:off x="0" y="0"/>
+            <a:ext cx="12192000" cy="6858000"/>
+          </a:xfrm>
+          <a:prstGeom prst="rect">
+            <a:avLst/>
+          </a:prstGeom>
+        </p:spPr>
+      </p:pic>
       <p:grpSp>
         <p:nvGrpSpPr>
-          <p:cNvPr id="5" name="Group 5"/>
+          <p:cNvPr id="6" name="Group 6"/>
           <p:cNvGrpSpPr/>
           <p:nvPr/>
         </p:nvGrpSpPr>
@@ -8741,7 +8930,7 @@
         </p:grpSpPr>
         <p:sp>
           <p:nvSpPr>
-            <p:cNvPr id="2" name="TextBox 2"/>
+            <p:cNvPr id="3" name="TextBox 3"/>
             <p:cNvSpPr txBox="1"/>
             <p:nvPr/>
           </p:nvSpPr>
@@ -8781,7 +8970,7 @@
         </p:sp>
         <p:sp>
           <p:nvSpPr>
-            <p:cNvPr id="3" name="TextBox 3"/>
+            <p:cNvPr id="4" name="TextBox 4"/>
             <p:cNvSpPr txBox="1"/>
             <p:nvPr/>
           </p:nvSpPr>
@@ -8821,7 +9010,7 @@
         </p:sp>
         <p:sp>
           <p:nvSpPr>
-            <p:cNvPr id="4" name="Line 4"/>
+            <p:cNvPr id="5" name="Line 5"/>
             <p:cNvSpPr/>
             <p:nvPr/>
           </p:nvSpPr>
@@ -8858,7 +9047,7 @@
       </p:grpSp>
       <p:grpSp>
         <p:nvGrpSpPr>
-          <p:cNvPr id="8" name="Group 8"/>
+          <p:cNvPr id="9" name="Group 9"/>
           <p:cNvGrpSpPr/>
           <p:nvPr/>
         </p:nvGrpSpPr>
@@ -8872,7 +9061,7 @@
         </p:grpSpPr>
         <p:sp>
           <p:nvSpPr>
-            <p:cNvPr id="6" name="Rectangle 6"/>
+            <p:cNvPr id="7" name="Rectangle 7"/>
             <p:cNvSpPr/>
             <p:nvPr/>
           </p:nvSpPr>
@@ -8898,14 +9087,14 @@
         </p:sp>
         <p:pic>
           <p:nvPicPr>
-            <p:cNvPr id="7" name="Image 7"/>
+            <p:cNvPr id="8" name="Image 8"/>
             <p:cNvPicPr>
               <a:picLocks noChangeAspect="1"/>
             </p:cNvPicPr>
             <p:nvPr/>
           </p:nvPicPr>
           <p:blipFill>
-            <a:blip r:embed="rId2"/>
+            <a:blip r:embed="rId3"/>
             <a:srcRect l="9150" t="0" r="9150" b="0"/>
             <a:stretch>
               <a:fillRect/>
@@ -8924,7 +9113,7 @@
       </p:grpSp>
       <p:grpSp>
         <p:nvGrpSpPr>
-          <p:cNvPr id="11" name="Group 11"/>
+          <p:cNvPr id="12" name="Group 12"/>
           <p:cNvGrpSpPr/>
           <p:nvPr/>
         </p:nvGrpSpPr>
@@ -8938,7 +9127,7 @@
         </p:grpSpPr>
         <p:sp>
           <p:nvSpPr>
-            <p:cNvPr id="9" name="Rectangle 9"/>
+            <p:cNvPr id="10" name="Rectangle 10"/>
             <p:cNvSpPr/>
             <p:nvPr/>
           </p:nvSpPr>
@@ -8964,14 +9153,14 @@
         </p:sp>
         <p:pic>
           <p:nvPicPr>
-            <p:cNvPr id="10" name="Image 10"/>
+            <p:cNvPr id="11" name="Image 11"/>
             <p:cNvPicPr>
               <a:picLocks noChangeAspect="1"/>
             </p:cNvPicPr>
             <p:nvPr/>
           </p:nvPicPr>
           <p:blipFill>
-            <a:blip r:embed="rId3"/>
+            <a:blip r:embed="rId4"/>
             <a:srcRect l="0" t="20002" r="0" b="20002"/>
             <a:stretch>
               <a:fillRect/>
@@ -8990,7 +9179,7 @@
       </p:grpSp>
       <p:grpSp>
         <p:nvGrpSpPr>
-          <p:cNvPr id="14" name="Group 14"/>
+          <p:cNvPr id="15" name="Group 15"/>
           <p:cNvGrpSpPr/>
           <p:nvPr/>
         </p:nvGrpSpPr>
@@ -9004,7 +9193,7 @@
         </p:grpSpPr>
         <p:sp>
           <p:nvSpPr>
-            <p:cNvPr id="12" name="Rectangle 12"/>
+            <p:cNvPr id="13" name="Rectangle 13"/>
             <p:cNvSpPr/>
             <p:nvPr/>
           </p:nvSpPr>
@@ -9030,14 +9219,14 @@
         </p:sp>
         <p:pic>
           <p:nvPicPr>
-            <p:cNvPr id="13" name="Image 13"/>
+            <p:cNvPr id="14" name="Image 14"/>
             <p:cNvPicPr>
               <a:picLocks noChangeAspect="1"/>
             </p:cNvPicPr>
             <p:nvPr/>
           </p:nvPicPr>
           <p:blipFill>
-            <a:blip r:embed="rId4"/>
+            <a:blip r:embed="rId5"/>
             <a:srcRect l="0" t="18997" r="0" b="18997"/>
             <a:stretch>
               <a:fillRect/>
@@ -9056,7 +9245,7 @@
       </p:grpSp>
       <p:grpSp>
         <p:nvGrpSpPr>
-          <p:cNvPr id="16" name="Group 16"/>
+          <p:cNvPr id="17" name="Group 17"/>
           <p:cNvGrpSpPr/>
           <p:nvPr/>
         </p:nvGrpSpPr>
@@ -9070,7 +9259,7 @@
         </p:grpSpPr>
         <p:sp>
           <p:nvSpPr>
-            <p:cNvPr id="15" name="TextBox 15"/>
+            <p:cNvPr id="16" name="TextBox 16"/>
             <p:cNvSpPr txBox="1"/>
             <p:nvPr/>
           </p:nvSpPr>
@@ -9111,7 +9300,7 @@
       </p:grpSp>
       <p:grpSp>
         <p:nvGrpSpPr>
-          <p:cNvPr id="19" name="Group 19"/>
+          <p:cNvPr id="20" name="Group 20"/>
           <p:cNvGrpSpPr/>
           <p:nvPr/>
         </p:nvGrpSpPr>
@@ -9125,7 +9314,7 @@
         </p:grpSpPr>
         <p:sp>
           <p:nvSpPr>
-            <p:cNvPr id="17" name="TextBox 17"/>
+            <p:cNvPr id="18" name="TextBox 18"/>
             <p:cNvSpPr txBox="1"/>
             <p:nvPr/>
           </p:nvSpPr>
@@ -9165,7 +9354,7 @@
         </p:sp>
         <p:sp>
           <p:nvSpPr>
-            <p:cNvPr id="18" name="TextBox 18"/>
+            <p:cNvPr id="19" name="TextBox 19"/>
             <p:cNvSpPr txBox="1"/>
             <p:nvPr/>
           </p:nvSpPr>
@@ -9240,9 +9429,36 @@
           <a:chExt cx="0" cy="0"/>
         </a:xfrm>
       </p:grpSpPr>
+      <p:pic>
+        <p:nvPicPr>
+          <p:cNvPr id="2" name="Image 2"/>
+          <p:cNvPicPr>
+            <a:picLocks noChangeAspect="1"/>
+          </p:cNvPicPr>
+          <p:nvPr/>
+        </p:nvPicPr>
+        <p:blipFill>
+          <a:blip r:embed="rId2">
+            <a:alphaModFix amt="14000"/>
+          </a:blip>
+          <a:srcRect l="0" t="27" r="0" b="27"/>
+          <a:stretch>
+            <a:fillRect/>
+          </a:stretch>
+        </p:blipFill>
+        <p:spPr>
+          <a:xfrm>
+            <a:off x="0" y="0"/>
+            <a:ext cx="12192000" cy="6858000"/>
+          </a:xfrm>
+          <a:prstGeom prst="rect">
+            <a:avLst/>
+          </a:prstGeom>
+        </p:spPr>
+      </p:pic>
       <p:grpSp>
         <p:nvGrpSpPr>
-          <p:cNvPr id="5" name="Group 5"/>
+          <p:cNvPr id="6" name="Group 6"/>
           <p:cNvGrpSpPr/>
           <p:nvPr/>
         </p:nvGrpSpPr>
@@ -9256,7 +9472,7 @@
         </p:grpSpPr>
         <p:sp>
           <p:nvSpPr>
-            <p:cNvPr id="2" name="TextBox 2"/>
+            <p:cNvPr id="3" name="TextBox 3"/>
             <p:cNvSpPr txBox="1"/>
             <p:nvPr/>
           </p:nvSpPr>
@@ -9296,7 +9512,7 @@
         </p:sp>
         <p:sp>
           <p:nvSpPr>
-            <p:cNvPr id="3" name="TextBox 3"/>
+            <p:cNvPr id="4" name="TextBox 4"/>
             <p:cNvSpPr txBox="1"/>
             <p:nvPr/>
           </p:nvSpPr>
@@ -9336,7 +9552,7 @@
         </p:sp>
         <p:sp>
           <p:nvSpPr>
-            <p:cNvPr id="4" name="Line 4"/>
+            <p:cNvPr id="5" name="Line 5"/>
             <p:cNvSpPr/>
             <p:nvPr/>
           </p:nvSpPr>
@@ -9373,7 +9589,7 @@
       </p:grpSp>
       <p:grpSp>
         <p:nvGrpSpPr>
-          <p:cNvPr id="8" name="Group 8"/>
+          <p:cNvPr id="9" name="Group 9"/>
           <p:cNvGrpSpPr/>
           <p:nvPr/>
         </p:nvGrpSpPr>
@@ -9387,7 +9603,7 @@
         </p:grpSpPr>
         <p:sp>
           <p:nvSpPr>
-            <p:cNvPr id="6" name="Rectangle 6"/>
+            <p:cNvPr id="7" name="Rectangle 7"/>
             <p:cNvSpPr/>
             <p:nvPr/>
           </p:nvSpPr>
@@ -9413,14 +9629,14 @@
         </p:sp>
         <p:pic>
           <p:nvPicPr>
-            <p:cNvPr id="7" name="Image 7"/>
+            <p:cNvPr id="8" name="Image 8"/>
             <p:cNvPicPr>
               <a:picLocks noChangeAspect="1"/>
             </p:cNvPicPr>
             <p:nvPr/>
           </p:nvPicPr>
           <p:blipFill>
-            <a:blip r:embed="rId2"/>
+            <a:blip r:embed="rId3"/>
             <a:srcRect l="0" t="26557" r="0" b="26557"/>
             <a:stretch>
               <a:fillRect/>
@@ -9439,7 +9655,7 @@
       </p:grpSp>
       <p:grpSp>
         <p:nvGrpSpPr>
-          <p:cNvPr id="13" name="Group 13"/>
+          <p:cNvPr id="14" name="Group 14"/>
           <p:cNvGrpSpPr/>
           <p:nvPr/>
         </p:nvGrpSpPr>
@@ -9453,7 +9669,7 @@
         </p:grpSpPr>
         <p:sp>
           <p:nvSpPr>
-            <p:cNvPr id="9" name="Rectangle 9"/>
+            <p:cNvPr id="10" name="Rectangle 10"/>
             <p:cNvSpPr/>
             <p:nvPr/>
           </p:nvSpPr>
@@ -9479,7 +9695,7 @@
         </p:sp>
         <p:sp>
           <p:nvSpPr>
-            <p:cNvPr id="10" name="Rectangle 10"/>
+            <p:cNvPr id="11" name="Rectangle 11"/>
             <p:cNvSpPr/>
             <p:nvPr/>
           </p:nvSpPr>
@@ -9503,7 +9719,7 @@
         </p:sp>
         <p:sp>
           <p:nvSpPr>
-            <p:cNvPr id="11" name="TextBox 11"/>
+            <p:cNvPr id="12" name="TextBox 12"/>
             <p:cNvSpPr txBox="1"/>
             <p:nvPr/>
           </p:nvSpPr>
@@ -9543,7 +9759,7 @@
         </p:sp>
         <p:sp>
           <p:nvSpPr>
-            <p:cNvPr id="12" name="TextBox 12"/>
+            <p:cNvPr id="13" name="TextBox 13"/>
             <p:cNvSpPr txBox="1"/>
             <p:nvPr/>
           </p:nvSpPr>
@@ -9586,7 +9802,7 @@
       </p:grpSp>
       <p:grpSp>
         <p:nvGrpSpPr>
-          <p:cNvPr id="18" name="Group 18"/>
+          <p:cNvPr id="19" name="Group 19"/>
           <p:cNvGrpSpPr/>
           <p:nvPr/>
         </p:nvGrpSpPr>
@@ -9600,7 +9816,7 @@
         </p:grpSpPr>
         <p:sp>
           <p:nvSpPr>
-            <p:cNvPr id="14" name="Rectangle 14"/>
+            <p:cNvPr id="15" name="Rectangle 15"/>
             <p:cNvSpPr/>
             <p:nvPr/>
           </p:nvSpPr>
@@ -9626,7 +9842,7 @@
         </p:sp>
         <p:sp>
           <p:nvSpPr>
-            <p:cNvPr id="15" name="Rectangle 15"/>
+            <p:cNvPr id="16" name="Rectangle 16"/>
             <p:cNvSpPr/>
             <p:nvPr/>
           </p:nvSpPr>
@@ -9650,7 +9866,7 @@
         </p:sp>
         <p:sp>
           <p:nvSpPr>
-            <p:cNvPr id="16" name="TextBox 16"/>
+            <p:cNvPr id="17" name="TextBox 17"/>
             <p:cNvSpPr txBox="1"/>
             <p:nvPr/>
           </p:nvSpPr>
@@ -9690,7 +9906,7 @@
         </p:sp>
         <p:sp>
           <p:nvSpPr>
-            <p:cNvPr id="17" name="TextBox 17"/>
+            <p:cNvPr id="18" name="TextBox 18"/>
             <p:cNvSpPr txBox="1"/>
             <p:nvPr/>
           </p:nvSpPr>
@@ -9733,7 +9949,7 @@
       </p:grpSp>
       <p:grpSp>
         <p:nvGrpSpPr>
-          <p:cNvPr id="21" name="Group 21"/>
+          <p:cNvPr id="22" name="Group 22"/>
           <p:cNvGrpSpPr/>
           <p:nvPr/>
         </p:nvGrpSpPr>
@@ -9747,7 +9963,7 @@
         </p:grpSpPr>
         <p:sp>
           <p:nvSpPr>
-            <p:cNvPr id="19" name="Rectangle 19"/>
+            <p:cNvPr id="20" name="Rectangle 20"/>
             <p:cNvSpPr/>
             <p:nvPr/>
           </p:nvSpPr>
@@ -9771,7 +9987,7 @@
         </p:sp>
         <p:sp>
           <p:nvSpPr>
-            <p:cNvPr id="20" name="TextBox 20"/>
+            <p:cNvPr id="21" name="TextBox 21"/>
             <p:cNvSpPr txBox="1"/>
             <p:nvPr/>
           </p:nvSpPr>
@@ -9812,7 +10028,7 @@
       </p:grpSp>
       <p:grpSp>
         <p:nvGrpSpPr>
-          <p:cNvPr id="24" name="Group 24"/>
+          <p:cNvPr id="25" name="Group 25"/>
           <p:cNvGrpSpPr/>
           <p:nvPr/>
         </p:nvGrpSpPr>
@@ -9826,7 +10042,7 @@
         </p:grpSpPr>
         <p:sp>
           <p:nvSpPr>
-            <p:cNvPr id="22" name="TextBox 22"/>
+            <p:cNvPr id="23" name="TextBox 23"/>
             <p:cNvSpPr txBox="1"/>
             <p:nvPr/>
           </p:nvSpPr>
@@ -9866,7 +10082,7 @@
         </p:sp>
         <p:sp>
           <p:nvSpPr>
-            <p:cNvPr id="23" name="TextBox 23"/>
+            <p:cNvPr id="24" name="TextBox 24"/>
             <p:cNvSpPr txBox="1"/>
             <p:nvPr/>
           </p:nvSpPr>
@@ -9941,9 +10157,36 @@
           <a:chExt cx="0" cy="0"/>
         </a:xfrm>
       </p:grpSpPr>
+      <p:pic>
+        <p:nvPicPr>
+          <p:cNvPr id="2" name="Image 2"/>
+          <p:cNvPicPr>
+            <a:picLocks noChangeAspect="1"/>
+          </p:cNvPicPr>
+          <p:nvPr/>
+        </p:nvPicPr>
+        <p:blipFill>
+          <a:blip r:embed="rId2">
+            <a:alphaModFix amt="14000"/>
+          </a:blip>
+          <a:srcRect l="0" t="27" r="0" b="27"/>
+          <a:stretch>
+            <a:fillRect/>
+          </a:stretch>
+        </p:blipFill>
+        <p:spPr>
+          <a:xfrm>
+            <a:off x="0" y="0"/>
+            <a:ext cx="12192000" cy="6858000"/>
+          </a:xfrm>
+          <a:prstGeom prst="rect">
+            <a:avLst/>
+          </a:prstGeom>
+        </p:spPr>
+      </p:pic>
       <p:grpSp>
         <p:nvGrpSpPr>
-          <p:cNvPr id="5" name="Group 5"/>
+          <p:cNvPr id="6" name="Group 6"/>
           <p:cNvGrpSpPr/>
           <p:nvPr/>
         </p:nvGrpSpPr>
@@ -9957,7 +10200,7 @@
         </p:grpSpPr>
         <p:sp>
           <p:nvSpPr>
-            <p:cNvPr id="2" name="TextBox 2"/>
+            <p:cNvPr id="3" name="TextBox 3"/>
             <p:cNvSpPr txBox="1"/>
             <p:nvPr/>
           </p:nvSpPr>
@@ -9997,7 +10240,7 @@
         </p:sp>
         <p:sp>
           <p:nvSpPr>
-            <p:cNvPr id="3" name="TextBox 3"/>
+            <p:cNvPr id="4" name="TextBox 4"/>
             <p:cNvSpPr txBox="1"/>
             <p:nvPr/>
           </p:nvSpPr>
@@ -10037,7 +10280,7 @@
         </p:sp>
         <p:sp>
           <p:nvSpPr>
-            <p:cNvPr id="4" name="Line 4"/>
+            <p:cNvPr id="5" name="Line 5"/>
             <p:cNvSpPr/>
             <p:nvPr/>
           </p:nvSpPr>
@@ -10074,7 +10317,7 @@
       </p:grpSp>
       <p:grpSp>
         <p:nvGrpSpPr>
-          <p:cNvPr id="10" name="Group 10"/>
+          <p:cNvPr id="11" name="Group 11"/>
           <p:cNvGrpSpPr/>
           <p:nvPr/>
         </p:nvGrpSpPr>
@@ -10088,7 +10331,7 @@
         </p:grpSpPr>
         <p:sp>
           <p:nvSpPr>
-            <p:cNvPr id="6" name="Rectangle 6"/>
+            <p:cNvPr id="7" name="Rectangle 7"/>
             <p:cNvSpPr/>
             <p:nvPr/>
           </p:nvSpPr>
@@ -10114,7 +10357,7 @@
         </p:sp>
         <p:sp>
           <p:nvSpPr>
-            <p:cNvPr id="7" name="Rectangle 7"/>
+            <p:cNvPr id="8" name="Rectangle 8"/>
             <p:cNvSpPr/>
             <p:nvPr/>
           </p:nvSpPr>
@@ -10138,7 +10381,7 @@
         </p:sp>
         <p:sp>
           <p:nvSpPr>
-            <p:cNvPr id="8" name="TextBox 8"/>
+            <p:cNvPr id="9" name="TextBox 9"/>
             <p:cNvSpPr txBox="1"/>
             <p:nvPr/>
           </p:nvSpPr>
@@ -10178,7 +10421,7 @@
         </p:sp>
         <p:sp>
           <p:nvSpPr>
-            <p:cNvPr id="9" name="TextBox 9"/>
+            <p:cNvPr id="10" name="TextBox 10"/>
             <p:cNvSpPr txBox="1"/>
             <p:nvPr/>
           </p:nvSpPr>
@@ -10221,7 +10464,7 @@
       </p:grpSp>
       <p:grpSp>
         <p:nvGrpSpPr>
-          <p:cNvPr id="15" name="Group 15"/>
+          <p:cNvPr id="16" name="Group 16"/>
           <p:cNvGrpSpPr/>
           <p:nvPr/>
         </p:nvGrpSpPr>
@@ -10235,7 +10478,7 @@
         </p:grpSpPr>
         <p:sp>
           <p:nvSpPr>
-            <p:cNvPr id="11" name="Rectangle 11"/>
+            <p:cNvPr id="12" name="Rectangle 12"/>
             <p:cNvSpPr/>
             <p:nvPr/>
           </p:nvSpPr>
@@ -10261,7 +10504,7 @@
         </p:sp>
         <p:sp>
           <p:nvSpPr>
-            <p:cNvPr id="12" name="Rectangle 12"/>
+            <p:cNvPr id="13" name="Rectangle 13"/>
             <p:cNvSpPr/>
             <p:nvPr/>
           </p:nvSpPr>
@@ -10285,7 +10528,7 @@
         </p:sp>
         <p:sp>
           <p:nvSpPr>
-            <p:cNvPr id="13" name="TextBox 13"/>
+            <p:cNvPr id="14" name="TextBox 14"/>
             <p:cNvSpPr txBox="1"/>
             <p:nvPr/>
           </p:nvSpPr>
@@ -10325,7 +10568,7 @@
         </p:sp>
         <p:sp>
           <p:nvSpPr>
-            <p:cNvPr id="14" name="TextBox 14"/>
+            <p:cNvPr id="15" name="TextBox 15"/>
             <p:cNvSpPr txBox="1"/>
             <p:nvPr/>
           </p:nvSpPr>
@@ -10368,7 +10611,7 @@
       </p:grpSp>
       <p:grpSp>
         <p:nvGrpSpPr>
-          <p:cNvPr id="33" name="Group 33"/>
+          <p:cNvPr id="34" name="Group 34"/>
           <p:cNvGrpSpPr/>
           <p:nvPr/>
         </p:nvGrpSpPr>
@@ -10382,7 +10625,7 @@
         </p:grpSpPr>
         <p:sp>
           <p:nvSpPr>
-            <p:cNvPr id="16" name="Rectangle 16"/>
+            <p:cNvPr id="17" name="Rectangle 17"/>
             <p:cNvSpPr/>
             <p:nvPr/>
           </p:nvSpPr>
@@ -10408,7 +10651,7 @@
         </p:sp>
         <p:sp>
           <p:nvSpPr>
-            <p:cNvPr id="17" name="TextBox 17"/>
+            <p:cNvPr id="18" name="TextBox 18"/>
             <p:cNvSpPr txBox="1"/>
             <p:nvPr/>
           </p:nvSpPr>
@@ -10448,7 +10691,7 @@
         </p:sp>
         <p:sp>
           <p:nvSpPr>
-            <p:cNvPr id="18" name="Ellipse 18"/>
+            <p:cNvPr id="19" name="Ellipse 19"/>
             <p:cNvSpPr/>
             <p:nvPr/>
           </p:nvSpPr>
@@ -10470,7 +10713,7 @@
         </p:sp>
         <p:sp>
           <p:nvSpPr>
-            <p:cNvPr id="19" name="TextBox 19"/>
+            <p:cNvPr id="20" name="TextBox 20"/>
             <p:cNvSpPr txBox="1"/>
             <p:nvPr/>
           </p:nvSpPr>
@@ -10510,7 +10753,7 @@
         </p:sp>
         <p:sp>
           <p:nvSpPr>
-            <p:cNvPr id="20" name="TextBox 20"/>
+            <p:cNvPr id="21" name="TextBox 21"/>
             <p:cNvSpPr txBox="1"/>
             <p:nvPr/>
           </p:nvSpPr>
@@ -10550,7 +10793,7 @@
         </p:sp>
         <p:sp>
           <p:nvSpPr>
-            <p:cNvPr id="21" name="Ellipse 21"/>
+            <p:cNvPr id="22" name="Ellipse 22"/>
             <p:cNvSpPr/>
             <p:nvPr/>
           </p:nvSpPr>
@@ -10572,7 +10815,7 @@
         </p:sp>
         <p:sp>
           <p:nvSpPr>
-            <p:cNvPr id="22" name="TextBox 22"/>
+            <p:cNvPr id="23" name="TextBox 23"/>
             <p:cNvSpPr txBox="1"/>
             <p:nvPr/>
           </p:nvSpPr>
@@ -10612,7 +10855,7 @@
         </p:sp>
         <p:sp>
           <p:nvSpPr>
-            <p:cNvPr id="23" name="TextBox 23"/>
+            <p:cNvPr id="24" name="TextBox 24"/>
             <p:cNvSpPr txBox="1"/>
             <p:nvPr/>
           </p:nvSpPr>
@@ -10652,7 +10895,7 @@
         </p:sp>
         <p:sp>
           <p:nvSpPr>
-            <p:cNvPr id="24" name="Ellipse 24"/>
+            <p:cNvPr id="25" name="Ellipse 25"/>
             <p:cNvSpPr/>
             <p:nvPr/>
           </p:nvSpPr>
@@ -10674,7 +10917,7 @@
         </p:sp>
         <p:sp>
           <p:nvSpPr>
-            <p:cNvPr id="25" name="TextBox 25"/>
+            <p:cNvPr id="26" name="TextBox 26"/>
             <p:cNvSpPr txBox="1"/>
             <p:nvPr/>
           </p:nvSpPr>
@@ -10714,7 +10957,7 @@
         </p:sp>
         <p:sp>
           <p:nvSpPr>
-            <p:cNvPr id="26" name="TextBox 26"/>
+            <p:cNvPr id="27" name="TextBox 27"/>
             <p:cNvSpPr txBox="1"/>
             <p:nvPr/>
           </p:nvSpPr>
@@ -10754,7 +10997,7 @@
         </p:sp>
         <p:sp>
           <p:nvSpPr>
-            <p:cNvPr id="27" name="Ellipse 27"/>
+            <p:cNvPr id="28" name="Ellipse 28"/>
             <p:cNvSpPr/>
             <p:nvPr/>
           </p:nvSpPr>
@@ -10776,7 +11019,7 @@
         </p:sp>
         <p:sp>
           <p:nvSpPr>
-            <p:cNvPr id="28" name="TextBox 28"/>
+            <p:cNvPr id="29" name="TextBox 29"/>
             <p:cNvSpPr txBox="1"/>
             <p:nvPr/>
           </p:nvSpPr>
@@ -10816,7 +11059,7 @@
         </p:sp>
         <p:sp>
           <p:nvSpPr>
-            <p:cNvPr id="29" name="TextBox 29"/>
+            <p:cNvPr id="30" name="TextBox 30"/>
             <p:cNvSpPr txBox="1"/>
             <p:nvPr/>
           </p:nvSpPr>
@@ -10856,7 +11099,7 @@
         </p:sp>
         <p:sp>
           <p:nvSpPr>
-            <p:cNvPr id="30" name="Ellipse 30"/>
+            <p:cNvPr id="31" name="Ellipse 31"/>
             <p:cNvSpPr/>
             <p:nvPr/>
           </p:nvSpPr>
@@ -10878,7 +11121,7 @@
         </p:sp>
         <p:sp>
           <p:nvSpPr>
-            <p:cNvPr id="31" name="TextBox 31"/>
+            <p:cNvPr id="32" name="TextBox 32"/>
             <p:cNvSpPr txBox="1"/>
             <p:nvPr/>
           </p:nvSpPr>
@@ -10918,7 +11161,7 @@
         </p:sp>
         <p:sp>
           <p:nvSpPr>
-            <p:cNvPr id="32" name="TextBox 32"/>
+            <p:cNvPr id="33" name="TextBox 33"/>
             <p:cNvSpPr txBox="1"/>
             <p:nvPr/>
           </p:nvSpPr>
@@ -10959,7 +11202,7 @@
       </p:grpSp>
       <p:grpSp>
         <p:nvGrpSpPr>
-          <p:cNvPr id="36" name="Group 36"/>
+          <p:cNvPr id="37" name="Group 37"/>
           <p:cNvGrpSpPr/>
           <p:nvPr/>
         </p:nvGrpSpPr>
@@ -10973,7 +11216,7 @@
         </p:grpSpPr>
         <p:sp>
           <p:nvSpPr>
-            <p:cNvPr id="34" name="TextBox 34"/>
+            <p:cNvPr id="35" name="TextBox 35"/>
             <p:cNvSpPr txBox="1"/>
             <p:nvPr/>
           </p:nvSpPr>
@@ -11013,7 +11256,7 @@
         </p:sp>
         <p:sp>
           <p:nvSpPr>
-            <p:cNvPr id="35" name="TextBox 35"/>
+            <p:cNvPr id="36" name="TextBox 36"/>
             <p:cNvSpPr txBox="1"/>
             <p:nvPr/>
           </p:nvSpPr>
@@ -11088,9 +11331,36 @@
           <a:chExt cx="0" cy="0"/>
         </a:xfrm>
       </p:grpSpPr>
+      <p:pic>
+        <p:nvPicPr>
+          <p:cNvPr id="2" name="Image 2"/>
+          <p:cNvPicPr>
+            <a:picLocks noChangeAspect="1"/>
+          </p:cNvPicPr>
+          <p:nvPr/>
+        </p:nvPicPr>
+        <p:blipFill>
+          <a:blip r:embed="rId2">
+            <a:alphaModFix amt="14000"/>
+          </a:blip>
+          <a:srcRect l="0" t="27" r="0" b="27"/>
+          <a:stretch>
+            <a:fillRect/>
+          </a:stretch>
+        </p:blipFill>
+        <p:spPr>
+          <a:xfrm>
+            <a:off x="0" y="0"/>
+            <a:ext cx="12192000" cy="6858000"/>
+          </a:xfrm>
+          <a:prstGeom prst="rect">
+            <a:avLst/>
+          </a:prstGeom>
+        </p:spPr>
+      </p:pic>
       <p:grpSp>
         <p:nvGrpSpPr>
-          <p:cNvPr id="5" name="Group 5"/>
+          <p:cNvPr id="6" name="Group 6"/>
           <p:cNvGrpSpPr/>
           <p:nvPr/>
         </p:nvGrpSpPr>
@@ -11104,7 +11374,7 @@
         </p:grpSpPr>
         <p:sp>
           <p:nvSpPr>
-            <p:cNvPr id="2" name="TextBox 2"/>
+            <p:cNvPr id="3" name="TextBox 3"/>
             <p:cNvSpPr txBox="1"/>
             <p:nvPr/>
           </p:nvSpPr>
@@ -11144,7 +11414,7 @@
         </p:sp>
         <p:sp>
           <p:nvSpPr>
-            <p:cNvPr id="3" name="TextBox 3"/>
+            <p:cNvPr id="4" name="TextBox 4"/>
             <p:cNvSpPr txBox="1"/>
             <p:nvPr/>
           </p:nvSpPr>
@@ -11184,7 +11454,7 @@
         </p:sp>
         <p:sp>
           <p:nvSpPr>
-            <p:cNvPr id="4" name="Line 4"/>
+            <p:cNvPr id="5" name="Line 5"/>
             <p:cNvSpPr/>
             <p:nvPr/>
           </p:nvSpPr>
@@ -11221,7 +11491,7 @@
       </p:grpSp>
       <p:grpSp>
         <p:nvGrpSpPr>
-          <p:cNvPr id="10" name="Group 10"/>
+          <p:cNvPr id="11" name="Group 11"/>
           <p:cNvGrpSpPr/>
           <p:nvPr/>
         </p:nvGrpSpPr>
@@ -11235,7 +11505,7 @@
         </p:grpSpPr>
         <p:sp>
           <p:nvSpPr>
-            <p:cNvPr id="6" name="Rectangle 6"/>
+            <p:cNvPr id="7" name="Rectangle 7"/>
             <p:cNvSpPr/>
             <p:nvPr/>
           </p:nvSpPr>
@@ -11261,7 +11531,7 @@
         </p:sp>
         <p:sp>
           <p:nvSpPr>
-            <p:cNvPr id="7" name="Rectangle 7"/>
+            <p:cNvPr id="8" name="Rectangle 8"/>
             <p:cNvSpPr/>
             <p:nvPr/>
           </p:nvSpPr>
@@ -11285,7 +11555,7 @@
         </p:sp>
         <p:sp>
           <p:nvSpPr>
-            <p:cNvPr id="8" name="TextBox 8"/>
+            <p:cNvPr id="9" name="TextBox 9"/>
             <p:cNvSpPr txBox="1"/>
             <p:nvPr/>
           </p:nvSpPr>
@@ -11325,7 +11595,7 @@
         </p:sp>
         <p:sp>
           <p:nvSpPr>
-            <p:cNvPr id="9" name="TextBox 9"/>
+            <p:cNvPr id="10" name="TextBox 10"/>
             <p:cNvSpPr txBox="1"/>
             <p:nvPr/>
           </p:nvSpPr>
@@ -11368,7 +11638,7 @@
       </p:grpSp>
       <p:grpSp>
         <p:nvGrpSpPr>
-          <p:cNvPr id="15" name="Group 15"/>
+          <p:cNvPr id="16" name="Group 16"/>
           <p:cNvGrpSpPr/>
           <p:nvPr/>
         </p:nvGrpSpPr>
@@ -11382,7 +11652,7 @@
         </p:grpSpPr>
         <p:sp>
           <p:nvSpPr>
-            <p:cNvPr id="11" name="Rectangle 11"/>
+            <p:cNvPr id="12" name="Rectangle 12"/>
             <p:cNvSpPr/>
             <p:nvPr/>
           </p:nvSpPr>
@@ -11408,7 +11678,7 @@
         </p:sp>
         <p:sp>
           <p:nvSpPr>
-            <p:cNvPr id="12" name="Rectangle 12"/>
+            <p:cNvPr id="13" name="Rectangle 13"/>
             <p:cNvSpPr/>
             <p:nvPr/>
           </p:nvSpPr>
@@ -11432,7 +11702,7 @@
         </p:sp>
         <p:sp>
           <p:nvSpPr>
-            <p:cNvPr id="13" name="TextBox 13"/>
+            <p:cNvPr id="14" name="TextBox 14"/>
             <p:cNvSpPr txBox="1"/>
             <p:nvPr/>
           </p:nvSpPr>
@@ -11472,7 +11742,7 @@
         </p:sp>
         <p:sp>
           <p:nvSpPr>
-            <p:cNvPr id="14" name="TextBox 14"/>
+            <p:cNvPr id="15" name="TextBox 15"/>
             <p:cNvSpPr txBox="1"/>
             <p:nvPr/>
           </p:nvSpPr>
@@ -11515,7 +11785,7 @@
       </p:grpSp>
       <p:grpSp>
         <p:nvGrpSpPr>
-          <p:cNvPr id="20" name="Group 20"/>
+          <p:cNvPr id="21" name="Group 21"/>
           <p:cNvGrpSpPr/>
           <p:nvPr/>
         </p:nvGrpSpPr>
@@ -11529,7 +11799,7 @@
         </p:grpSpPr>
         <p:sp>
           <p:nvSpPr>
-            <p:cNvPr id="16" name="Rectangle 16"/>
+            <p:cNvPr id="17" name="Rectangle 17"/>
             <p:cNvSpPr/>
             <p:nvPr/>
           </p:nvSpPr>
@@ -11555,7 +11825,7 @@
         </p:sp>
         <p:sp>
           <p:nvSpPr>
-            <p:cNvPr id="17" name="Rectangle 17"/>
+            <p:cNvPr id="18" name="Rectangle 18"/>
             <p:cNvSpPr/>
             <p:nvPr/>
           </p:nvSpPr>
@@ -11579,7 +11849,7 @@
         </p:sp>
         <p:sp>
           <p:nvSpPr>
-            <p:cNvPr id="18" name="TextBox 18"/>
+            <p:cNvPr id="19" name="TextBox 19"/>
             <p:cNvSpPr txBox="1"/>
             <p:nvPr/>
           </p:nvSpPr>
@@ -11619,7 +11889,7 @@
         </p:sp>
         <p:sp>
           <p:nvSpPr>
-            <p:cNvPr id="19" name="TextBox 19"/>
+            <p:cNvPr id="20" name="TextBox 20"/>
             <p:cNvSpPr txBox="1"/>
             <p:nvPr/>
           </p:nvSpPr>
@@ -11662,7 +11932,7 @@
       </p:grpSp>
       <p:grpSp>
         <p:nvGrpSpPr>
-          <p:cNvPr id="25" name="Group 25"/>
+          <p:cNvPr id="26" name="Group 26"/>
           <p:cNvGrpSpPr/>
           <p:nvPr/>
         </p:nvGrpSpPr>
@@ -11676,7 +11946,7 @@
         </p:grpSpPr>
         <p:sp>
           <p:nvSpPr>
-            <p:cNvPr id="21" name="Rectangle 21"/>
+            <p:cNvPr id="22" name="Rectangle 22"/>
             <p:cNvSpPr/>
             <p:nvPr/>
           </p:nvSpPr>
@@ -11702,7 +11972,7 @@
         </p:sp>
         <p:sp>
           <p:nvSpPr>
-            <p:cNvPr id="22" name="Rectangle 22"/>
+            <p:cNvPr id="23" name="Rectangle 23"/>
             <p:cNvSpPr/>
             <p:nvPr/>
           </p:nvSpPr>
@@ -11726,7 +11996,7 @@
         </p:sp>
         <p:sp>
           <p:nvSpPr>
-            <p:cNvPr id="23" name="TextBox 23"/>
+            <p:cNvPr id="24" name="TextBox 24"/>
             <p:cNvSpPr txBox="1"/>
             <p:nvPr/>
           </p:nvSpPr>
@@ -11766,7 +12036,7 @@
         </p:sp>
         <p:sp>
           <p:nvSpPr>
-            <p:cNvPr id="24" name="TextBox 24"/>
+            <p:cNvPr id="25" name="TextBox 25"/>
             <p:cNvSpPr txBox="1"/>
             <p:nvPr/>
           </p:nvSpPr>
@@ -11809,7 +12079,7 @@
       </p:grpSp>
       <p:grpSp>
         <p:nvGrpSpPr>
-          <p:cNvPr id="28" name="Group 28"/>
+          <p:cNvPr id="29" name="Group 29"/>
           <p:cNvGrpSpPr/>
           <p:nvPr/>
         </p:nvGrpSpPr>
@@ -11823,7 +12093,7 @@
         </p:grpSpPr>
         <p:sp>
           <p:nvSpPr>
-            <p:cNvPr id="26" name="TextBox 26"/>
+            <p:cNvPr id="27" name="TextBox 27"/>
             <p:cNvSpPr txBox="1"/>
             <p:nvPr/>
           </p:nvSpPr>
@@ -11863,7 +12133,7 @@
         </p:sp>
         <p:sp>
           <p:nvSpPr>
-            <p:cNvPr id="27" name="TextBox 27"/>
+            <p:cNvPr id="28" name="TextBox 28"/>
             <p:cNvSpPr txBox="1"/>
             <p:nvPr/>
           </p:nvSpPr>
@@ -11938,9 +12208,36 @@
           <a:chExt cx="0" cy="0"/>
         </a:xfrm>
       </p:grpSpPr>
+      <p:pic>
+        <p:nvPicPr>
+          <p:cNvPr id="2" name="Image 2"/>
+          <p:cNvPicPr>
+            <a:picLocks noChangeAspect="1"/>
+          </p:cNvPicPr>
+          <p:nvPr/>
+        </p:nvPicPr>
+        <p:blipFill>
+          <a:blip r:embed="rId2">
+            <a:alphaModFix amt="14000"/>
+          </a:blip>
+          <a:srcRect l="0" t="27" r="0" b="27"/>
+          <a:stretch>
+            <a:fillRect/>
+          </a:stretch>
+        </p:blipFill>
+        <p:spPr>
+          <a:xfrm>
+            <a:off x="0" y="0"/>
+            <a:ext cx="12192000" cy="6858000"/>
+          </a:xfrm>
+          <a:prstGeom prst="rect">
+            <a:avLst/>
+          </a:prstGeom>
+        </p:spPr>
+      </p:pic>
       <p:grpSp>
         <p:nvGrpSpPr>
-          <p:cNvPr id="5" name="Group 5"/>
+          <p:cNvPr id="6" name="Group 6"/>
           <p:cNvGrpSpPr/>
           <p:nvPr/>
         </p:nvGrpSpPr>
@@ -11954,7 +12251,7 @@
         </p:grpSpPr>
         <p:sp>
           <p:nvSpPr>
-            <p:cNvPr id="2" name="TextBox 2"/>
+            <p:cNvPr id="3" name="TextBox 3"/>
             <p:cNvSpPr txBox="1"/>
             <p:nvPr/>
           </p:nvSpPr>
@@ -11994,7 +12291,7 @@
         </p:sp>
         <p:sp>
           <p:nvSpPr>
-            <p:cNvPr id="3" name="TextBox 3"/>
+            <p:cNvPr id="4" name="TextBox 4"/>
             <p:cNvSpPr txBox="1"/>
             <p:nvPr/>
           </p:nvSpPr>
@@ -12034,7 +12331,7 @@
         </p:sp>
         <p:sp>
           <p:nvSpPr>
-            <p:cNvPr id="4" name="Line 4"/>
+            <p:cNvPr id="5" name="Line 5"/>
             <p:cNvSpPr/>
             <p:nvPr/>
           </p:nvSpPr>
@@ -12071,7 +12368,7 @@
       </p:grpSp>
       <p:grpSp>
         <p:nvGrpSpPr>
-          <p:cNvPr id="23" name="Group 23"/>
+          <p:cNvPr id="24" name="Group 24"/>
           <p:cNvGrpSpPr/>
           <p:nvPr/>
         </p:nvGrpSpPr>
@@ -12085,7 +12382,7 @@
         </p:grpSpPr>
         <p:sp>
           <p:nvSpPr>
-            <p:cNvPr id="6" name="Freeform 6"/>
+            <p:cNvPr id="7" name="Freeform 7"/>
             <p:cNvSpPr/>
             <p:nvPr/>
           </p:nvSpPr>
@@ -12123,7 +12420,7 @@
         </p:sp>
         <p:sp>
           <p:nvSpPr>
-            <p:cNvPr id="7" name="Ellipse 7"/>
+            <p:cNvPr id="8" name="Ellipse 8"/>
             <p:cNvSpPr/>
             <p:nvPr/>
           </p:nvSpPr>
@@ -12145,7 +12442,7 @@
         </p:sp>
         <p:sp>
           <p:nvSpPr>
-            <p:cNvPr id="8" name="TextBox 8"/>
+            <p:cNvPr id="9" name="TextBox 9"/>
             <p:cNvSpPr txBox="1"/>
             <p:nvPr/>
           </p:nvSpPr>
@@ -12185,7 +12482,7 @@
         </p:sp>
         <p:sp>
           <p:nvSpPr>
-            <p:cNvPr id="9" name="TextBox 9"/>
+            <p:cNvPr id="10" name="TextBox 10"/>
             <p:cNvSpPr txBox="1"/>
             <p:nvPr/>
           </p:nvSpPr>
@@ -12225,7 +12522,7 @@
         </p:sp>
         <p:sp>
           <p:nvSpPr>
-            <p:cNvPr id="10" name="TextBox 10"/>
+            <p:cNvPr id="11" name="TextBox 11"/>
             <p:cNvSpPr txBox="1"/>
             <p:nvPr/>
           </p:nvSpPr>
@@ -12265,7 +12562,7 @@
         </p:sp>
         <p:sp>
           <p:nvSpPr>
-            <p:cNvPr id="11" name="Ellipse 11"/>
+            <p:cNvPr id="12" name="Ellipse 12"/>
             <p:cNvSpPr/>
             <p:nvPr/>
           </p:nvSpPr>
@@ -12287,7 +12584,7 @@
         </p:sp>
         <p:sp>
           <p:nvSpPr>
-            <p:cNvPr id="12" name="TextBox 12"/>
+            <p:cNvPr id="13" name="TextBox 13"/>
             <p:cNvSpPr txBox="1"/>
             <p:nvPr/>
           </p:nvSpPr>
@@ -12327,7 +12624,7 @@
         </p:sp>
         <p:sp>
           <p:nvSpPr>
-            <p:cNvPr id="13" name="TextBox 13"/>
+            <p:cNvPr id="14" name="TextBox 14"/>
             <p:cNvSpPr txBox="1"/>
             <p:nvPr/>
           </p:nvSpPr>
@@ -12367,7 +12664,7 @@
         </p:sp>
         <p:sp>
           <p:nvSpPr>
-            <p:cNvPr id="14" name="TextBox 14"/>
+            <p:cNvPr id="15" name="TextBox 15"/>
             <p:cNvSpPr txBox="1"/>
             <p:nvPr/>
           </p:nvSpPr>
@@ -12407,7 +12704,7 @@
         </p:sp>
         <p:sp>
           <p:nvSpPr>
-            <p:cNvPr id="15" name="Ellipse 15"/>
+            <p:cNvPr id="16" name="Ellipse 16"/>
             <p:cNvSpPr/>
             <p:nvPr/>
           </p:nvSpPr>
@@ -12429,7 +12726,7 @@
         </p:sp>
         <p:sp>
           <p:nvSpPr>
-            <p:cNvPr id="16" name="TextBox 16"/>
+            <p:cNvPr id="17" name="TextBox 17"/>
             <p:cNvSpPr txBox="1"/>
             <p:nvPr/>
           </p:nvSpPr>
@@ -12469,7 +12766,7 @@
         </p:sp>
         <p:sp>
           <p:nvSpPr>
-            <p:cNvPr id="17" name="TextBox 17"/>
+            <p:cNvPr id="18" name="TextBox 18"/>
             <p:cNvSpPr txBox="1"/>
             <p:nvPr/>
           </p:nvSpPr>
@@ -12509,7 +12806,7 @@
         </p:sp>
         <p:sp>
           <p:nvSpPr>
-            <p:cNvPr id="18" name="TextBox 18"/>
+            <p:cNvPr id="19" name="TextBox 19"/>
             <p:cNvSpPr txBox="1"/>
             <p:nvPr/>
           </p:nvSpPr>
@@ -12549,7 +12846,7 @@
         </p:sp>
         <p:sp>
           <p:nvSpPr>
-            <p:cNvPr id="19" name="Ellipse 19"/>
+            <p:cNvPr id="20" name="Ellipse 20"/>
             <p:cNvSpPr/>
             <p:nvPr/>
           </p:nvSpPr>
@@ -12571,7 +12868,7 @@
         </p:sp>
         <p:sp>
           <p:nvSpPr>
-            <p:cNvPr id="20" name="TextBox 20"/>
+            <p:cNvPr id="21" name="TextBox 21"/>
             <p:cNvSpPr txBox="1"/>
             <p:nvPr/>
           </p:nvSpPr>
@@ -12611,7 +12908,7 @@
         </p:sp>
         <p:sp>
           <p:nvSpPr>
-            <p:cNvPr id="21" name="TextBox 21"/>
+            <p:cNvPr id="22" name="TextBox 22"/>
             <p:cNvSpPr txBox="1"/>
             <p:nvPr/>
           </p:nvSpPr>
@@ -12651,7 +12948,7 @@
         </p:sp>
         <p:sp>
           <p:nvSpPr>
-            <p:cNvPr id="22" name="TextBox 22"/>
+            <p:cNvPr id="23" name="TextBox 23"/>
             <p:cNvSpPr txBox="1"/>
             <p:nvPr/>
           </p:nvSpPr>
@@ -12692,7 +12989,7 @@
       </p:grpSp>
       <p:grpSp>
         <p:nvGrpSpPr>
-          <p:cNvPr id="26" name="Group 26"/>
+          <p:cNvPr id="27" name="Group 27"/>
           <p:cNvGrpSpPr/>
           <p:nvPr/>
         </p:nvGrpSpPr>
@@ -12706,7 +13003,7 @@
         </p:grpSpPr>
         <p:sp>
           <p:nvSpPr>
-            <p:cNvPr id="24" name="TextBox 24"/>
+            <p:cNvPr id="25" name="TextBox 25"/>
             <p:cNvSpPr txBox="1"/>
             <p:nvPr/>
           </p:nvSpPr>
@@ -12746,7 +13043,7 @@
         </p:sp>
         <p:sp>
           <p:nvSpPr>
-            <p:cNvPr id="25" name="TextBox 25"/>
+            <p:cNvPr id="26" name="TextBox 26"/>
             <p:cNvSpPr txBox="1"/>
             <p:nvPr/>
           </p:nvSpPr>
@@ -12821,9 +13118,36 @@
           <a:chExt cx="0" cy="0"/>
         </a:xfrm>
       </p:grpSpPr>
+      <p:pic>
+        <p:nvPicPr>
+          <p:cNvPr id="2" name="Image 2"/>
+          <p:cNvPicPr>
+            <a:picLocks noChangeAspect="1"/>
+          </p:cNvPicPr>
+          <p:nvPr/>
+        </p:nvPicPr>
+        <p:blipFill>
+          <a:blip r:embed="rId2">
+            <a:alphaModFix amt="14000"/>
+          </a:blip>
+          <a:srcRect l="0" t="27" r="0" b="27"/>
+          <a:stretch>
+            <a:fillRect/>
+          </a:stretch>
+        </p:blipFill>
+        <p:spPr>
+          <a:xfrm>
+            <a:off x="0" y="0"/>
+            <a:ext cx="12192000" cy="6858000"/>
+          </a:xfrm>
+          <a:prstGeom prst="rect">
+            <a:avLst/>
+          </a:prstGeom>
+        </p:spPr>
+      </p:pic>
       <p:grpSp>
         <p:nvGrpSpPr>
-          <p:cNvPr id="5" name="Group 5"/>
+          <p:cNvPr id="6" name="Group 6"/>
           <p:cNvGrpSpPr/>
           <p:nvPr/>
         </p:nvGrpSpPr>
@@ -12837,7 +13161,7 @@
         </p:grpSpPr>
         <p:sp>
           <p:nvSpPr>
-            <p:cNvPr id="2" name="TextBox 2"/>
+            <p:cNvPr id="3" name="TextBox 3"/>
             <p:cNvSpPr txBox="1"/>
             <p:nvPr/>
           </p:nvSpPr>
@@ -12877,7 +13201,7 @@
         </p:sp>
         <p:sp>
           <p:nvSpPr>
-            <p:cNvPr id="3" name="TextBox 3"/>
+            <p:cNvPr id="4" name="TextBox 4"/>
             <p:cNvSpPr txBox="1"/>
             <p:nvPr/>
           </p:nvSpPr>
@@ -12917,7 +13241,7 @@
         </p:sp>
         <p:sp>
           <p:nvSpPr>
-            <p:cNvPr id="4" name="Line 4"/>
+            <p:cNvPr id="5" name="Line 5"/>
             <p:cNvSpPr/>
             <p:nvPr/>
           </p:nvSpPr>
@@ -12954,7 +13278,7 @@
       </p:grpSp>
       <p:grpSp>
         <p:nvGrpSpPr>
-          <p:cNvPr id="8" name="Group 8"/>
+          <p:cNvPr id="9" name="Group 9"/>
           <p:cNvGrpSpPr/>
           <p:nvPr/>
         </p:nvGrpSpPr>
@@ -12968,7 +13292,7 @@
         </p:grpSpPr>
         <p:sp>
           <p:nvSpPr>
-            <p:cNvPr id="6" name="Rectangle 6"/>
+            <p:cNvPr id="7" name="Rectangle 7"/>
             <p:cNvSpPr/>
             <p:nvPr/>
           </p:nvSpPr>
@@ -12994,14 +13318,14 @@
         </p:sp>
         <p:pic>
           <p:nvPicPr>
-            <p:cNvPr id="7" name="Image 7"/>
+            <p:cNvPr id="8" name="Image 8"/>
             <p:cNvPicPr>
               <a:picLocks noChangeAspect="1"/>
             </p:cNvPicPr>
             <p:nvPr/>
           </p:nvPicPr>
           <p:blipFill>
-            <a:blip r:embed="rId2"/>
+            <a:blip r:embed="rId3"/>
             <a:srcRect l="1457" t="0" r="1457" b="0"/>
             <a:stretch>
               <a:fillRect/>
@@ -13020,7 +13344,7 @@
       </p:grpSp>
       <p:grpSp>
         <p:nvGrpSpPr>
-          <p:cNvPr id="14" name="Group 14"/>
+          <p:cNvPr id="15" name="Group 15"/>
           <p:cNvGrpSpPr/>
           <p:nvPr/>
         </p:nvGrpSpPr>
@@ -13034,7 +13358,7 @@
         </p:grpSpPr>
         <p:sp>
           <p:nvSpPr>
-            <p:cNvPr id="9" name="Rectangle 9"/>
+            <p:cNvPr id="10" name="Rectangle 10"/>
             <p:cNvSpPr/>
             <p:nvPr/>
           </p:nvSpPr>
@@ -13058,7 +13382,7 @@
         </p:sp>
         <p:sp>
           <p:nvSpPr>
-            <p:cNvPr id="10" name="Ellipse 10"/>
+            <p:cNvPr id="11" name="Ellipse 11"/>
             <p:cNvSpPr/>
             <p:nvPr/>
           </p:nvSpPr>
@@ -13080,7 +13404,7 @@
         </p:sp>
         <p:sp>
           <p:nvSpPr>
-            <p:cNvPr id="11" name="Ellipse 11"/>
+            <p:cNvPr id="12" name="Ellipse 12"/>
             <p:cNvSpPr/>
             <p:nvPr/>
           </p:nvSpPr>
@@ -13102,7 +13426,7 @@
         </p:sp>
         <p:sp>
           <p:nvSpPr>
-            <p:cNvPr id="12" name="Ellipse 12"/>
+            <p:cNvPr id="13" name="Ellipse 13"/>
             <p:cNvSpPr/>
             <p:nvPr/>
           </p:nvSpPr>
@@ -13124,7 +13448,7 @@
         </p:sp>
         <p:sp>
           <p:nvSpPr>
-            <p:cNvPr id="13" name="TextBox 13"/>
+            <p:cNvPr id="14" name="TextBox 14"/>
             <p:cNvSpPr txBox="1"/>
             <p:nvPr/>
           </p:nvSpPr>
@@ -13167,7 +13491,7 @@
       </p:grpSp>
       <p:grpSp>
         <p:nvGrpSpPr>
-          <p:cNvPr id="19" name="Group 19"/>
+          <p:cNvPr id="20" name="Group 20"/>
           <p:cNvGrpSpPr/>
           <p:nvPr/>
         </p:nvGrpSpPr>
@@ -13181,7 +13505,7 @@
         </p:grpSpPr>
         <p:sp>
           <p:nvSpPr>
-            <p:cNvPr id="15" name="Rectangle 15"/>
+            <p:cNvPr id="16" name="Rectangle 16"/>
             <p:cNvSpPr/>
             <p:nvPr/>
           </p:nvSpPr>
@@ -13207,7 +13531,7 @@
         </p:sp>
         <p:sp>
           <p:nvSpPr>
-            <p:cNvPr id="16" name="Rectangle 16"/>
+            <p:cNvPr id="17" name="Rectangle 17"/>
             <p:cNvSpPr/>
             <p:nvPr/>
           </p:nvSpPr>
@@ -13231,7 +13555,7 @@
         </p:sp>
         <p:sp>
           <p:nvSpPr>
-            <p:cNvPr id="17" name="TextBox 17"/>
+            <p:cNvPr id="18" name="TextBox 18"/>
             <p:cNvSpPr txBox="1"/>
             <p:nvPr/>
           </p:nvSpPr>
@@ -13271,7 +13595,7 @@
         </p:sp>
         <p:sp>
           <p:nvSpPr>
-            <p:cNvPr id="18" name="TextBox 18"/>
+            <p:cNvPr id="19" name="TextBox 19"/>
             <p:cNvSpPr txBox="1"/>
             <p:nvPr/>
           </p:nvSpPr>
@@ -13312,7 +13636,7 @@
       </p:grpSp>
       <p:grpSp>
         <p:nvGrpSpPr>
-          <p:cNvPr id="21" name="Group 21"/>
+          <p:cNvPr id="22" name="Group 22"/>
           <p:cNvGrpSpPr/>
           <p:nvPr/>
         </p:nvGrpSpPr>
@@ -13326,7 +13650,7 @@
         </p:grpSpPr>
         <p:sp>
           <p:nvSpPr>
-            <p:cNvPr id="20" name="TextBox 20"/>
+            <p:cNvPr id="21" name="TextBox 21"/>
             <p:cNvSpPr txBox="1"/>
             <p:nvPr/>
           </p:nvSpPr>
@@ -13367,7 +13691,7 @@
       </p:grpSp>
       <p:grpSp>
         <p:nvGrpSpPr>
-          <p:cNvPr id="24" name="Group 24"/>
+          <p:cNvPr id="25" name="Group 25"/>
           <p:cNvGrpSpPr/>
           <p:nvPr/>
         </p:nvGrpSpPr>
@@ -13381,7 +13705,7 @@
         </p:grpSpPr>
         <p:sp>
           <p:nvSpPr>
-            <p:cNvPr id="22" name="TextBox 22"/>
+            <p:cNvPr id="23" name="TextBox 23"/>
             <p:cNvSpPr txBox="1"/>
             <p:nvPr/>
           </p:nvSpPr>
@@ -13421,7 +13745,7 @@
         </p:sp>
         <p:sp>
           <p:nvSpPr>
-            <p:cNvPr id="23" name="TextBox 23"/>
+            <p:cNvPr id="24" name="TextBox 24"/>
             <p:cNvSpPr txBox="1"/>
             <p:nvPr/>
           </p:nvSpPr>
@@ -13496,9 +13820,36 @@
           <a:chExt cx="0" cy="0"/>
         </a:xfrm>
       </p:grpSpPr>
+      <p:pic>
+        <p:nvPicPr>
+          <p:cNvPr id="2" name="Image 2"/>
+          <p:cNvPicPr>
+            <a:picLocks noChangeAspect="1"/>
+          </p:cNvPicPr>
+          <p:nvPr/>
+        </p:nvPicPr>
+        <p:blipFill>
+          <a:blip r:embed="rId2">
+            <a:alphaModFix amt="14000"/>
+          </a:blip>
+          <a:srcRect l="0" t="27" r="0" b="27"/>
+          <a:stretch>
+            <a:fillRect/>
+          </a:stretch>
+        </p:blipFill>
+        <p:spPr>
+          <a:xfrm>
+            <a:off x="0" y="0"/>
+            <a:ext cx="12192000" cy="6858000"/>
+          </a:xfrm>
+          <a:prstGeom prst="rect">
+            <a:avLst/>
+          </a:prstGeom>
+        </p:spPr>
+      </p:pic>
       <p:grpSp>
         <p:nvGrpSpPr>
-          <p:cNvPr id="5" name="Group 5"/>
+          <p:cNvPr id="6" name="Group 6"/>
           <p:cNvGrpSpPr/>
           <p:nvPr/>
         </p:nvGrpSpPr>
@@ -13512,7 +13863,7 @@
         </p:grpSpPr>
         <p:sp>
           <p:nvSpPr>
-            <p:cNvPr id="2" name="TextBox 2"/>
+            <p:cNvPr id="3" name="TextBox 3"/>
             <p:cNvSpPr txBox="1"/>
             <p:nvPr/>
           </p:nvSpPr>
@@ -13552,7 +13903,7 @@
         </p:sp>
         <p:sp>
           <p:nvSpPr>
-            <p:cNvPr id="3" name="TextBox 3"/>
+            <p:cNvPr id="4" name="TextBox 4"/>
             <p:cNvSpPr txBox="1"/>
             <p:nvPr/>
           </p:nvSpPr>
@@ -13592,7 +13943,7 @@
         </p:sp>
         <p:sp>
           <p:nvSpPr>
-            <p:cNvPr id="4" name="Line 4"/>
+            <p:cNvPr id="5" name="Line 5"/>
             <p:cNvSpPr/>
             <p:nvPr/>
           </p:nvSpPr>
@@ -13629,7 +13980,7 @@
       </p:grpSp>
       <p:grpSp>
         <p:nvGrpSpPr>
-          <p:cNvPr id="10" name="Group 10"/>
+          <p:cNvPr id="11" name="Group 11"/>
           <p:cNvGrpSpPr/>
           <p:nvPr/>
         </p:nvGrpSpPr>
@@ -13643,7 +13994,7 @@
         </p:grpSpPr>
         <p:sp>
           <p:nvSpPr>
-            <p:cNvPr id="6" name="Rectangle 6"/>
+            <p:cNvPr id="7" name="Rectangle 7"/>
             <p:cNvSpPr/>
             <p:nvPr/>
           </p:nvSpPr>
@@ -13669,7 +14020,7 @@
         </p:sp>
         <p:sp>
           <p:nvSpPr>
-            <p:cNvPr id="7" name="TextBox 7"/>
+            <p:cNvPr id="8" name="TextBox 8"/>
             <p:cNvSpPr txBox="1"/>
             <p:nvPr/>
           </p:nvSpPr>
@@ -13709,7 +14060,7 @@
         </p:sp>
         <p:sp>
           <p:nvSpPr>
-            <p:cNvPr id="8" name="TextBox 8"/>
+            <p:cNvPr id="9" name="TextBox 9"/>
             <p:cNvSpPr txBox="1"/>
             <p:nvPr/>
           </p:nvSpPr>
@@ -13749,7 +14100,7 @@
         </p:sp>
         <p:sp>
           <p:nvSpPr>
-            <p:cNvPr id="9" name="TextBox 9"/>
+            <p:cNvPr id="10" name="TextBox 10"/>
             <p:cNvSpPr txBox="1"/>
             <p:nvPr/>
           </p:nvSpPr>
@@ -13790,7 +14141,7 @@
       </p:grpSp>
       <p:grpSp>
         <p:nvGrpSpPr>
-          <p:cNvPr id="15" name="Group 15"/>
+          <p:cNvPr id="16" name="Group 16"/>
           <p:cNvGrpSpPr/>
           <p:nvPr/>
         </p:nvGrpSpPr>
@@ -13804,7 +14155,7 @@
         </p:grpSpPr>
         <p:sp>
           <p:nvSpPr>
-            <p:cNvPr id="11" name="Rectangle 11"/>
+            <p:cNvPr id="12" name="Rectangle 12"/>
             <p:cNvSpPr/>
             <p:nvPr/>
           </p:nvSpPr>
@@ -13830,7 +14181,7 @@
         </p:sp>
         <p:sp>
           <p:nvSpPr>
-            <p:cNvPr id="12" name="TextBox 12"/>
+            <p:cNvPr id="13" name="TextBox 13"/>
             <p:cNvSpPr txBox="1"/>
             <p:nvPr/>
           </p:nvSpPr>
@@ -13870,7 +14221,7 @@
         </p:sp>
         <p:sp>
           <p:nvSpPr>
-            <p:cNvPr id="13" name="TextBox 13"/>
+            <p:cNvPr id="14" name="TextBox 14"/>
             <p:cNvSpPr txBox="1"/>
             <p:nvPr/>
           </p:nvSpPr>
@@ -13910,7 +14261,7 @@
         </p:sp>
         <p:sp>
           <p:nvSpPr>
-            <p:cNvPr id="14" name="TextBox 14"/>
+            <p:cNvPr id="15" name="TextBox 15"/>
             <p:cNvSpPr txBox="1"/>
             <p:nvPr/>
           </p:nvSpPr>
@@ -13951,7 +14302,7 @@
       </p:grpSp>
       <p:grpSp>
         <p:nvGrpSpPr>
-          <p:cNvPr id="20" name="Group 20"/>
+          <p:cNvPr id="21" name="Group 21"/>
           <p:cNvGrpSpPr/>
           <p:nvPr/>
         </p:nvGrpSpPr>
@@ -13965,7 +14316,7 @@
         </p:grpSpPr>
         <p:sp>
           <p:nvSpPr>
-            <p:cNvPr id="16" name="Rectangle 16"/>
+            <p:cNvPr id="17" name="Rectangle 17"/>
             <p:cNvSpPr/>
             <p:nvPr/>
           </p:nvSpPr>
@@ -13991,7 +14342,7 @@
         </p:sp>
         <p:sp>
           <p:nvSpPr>
-            <p:cNvPr id="17" name="TextBox 17"/>
+            <p:cNvPr id="18" name="TextBox 18"/>
             <p:cNvSpPr txBox="1"/>
             <p:nvPr/>
           </p:nvSpPr>
@@ -14031,7 +14382,7 @@
         </p:sp>
         <p:sp>
           <p:nvSpPr>
-            <p:cNvPr id="18" name="TextBox 18"/>
+            <p:cNvPr id="19" name="TextBox 19"/>
             <p:cNvSpPr txBox="1"/>
             <p:nvPr/>
           </p:nvSpPr>
@@ -14071,7 +14422,7 @@
         </p:sp>
         <p:sp>
           <p:nvSpPr>
-            <p:cNvPr id="19" name="TextBox 19"/>
+            <p:cNvPr id="20" name="TextBox 20"/>
             <p:cNvSpPr txBox="1"/>
             <p:nvPr/>
           </p:nvSpPr>
@@ -14112,7 +14463,7 @@
       </p:grpSp>
       <p:grpSp>
         <p:nvGrpSpPr>
-          <p:cNvPr id="25" name="Group 25"/>
+          <p:cNvPr id="26" name="Group 26"/>
           <p:cNvGrpSpPr/>
           <p:nvPr/>
         </p:nvGrpSpPr>
@@ -14126,7 +14477,7 @@
         </p:grpSpPr>
         <p:sp>
           <p:nvSpPr>
-            <p:cNvPr id="21" name="Rectangle 21"/>
+            <p:cNvPr id="22" name="Rectangle 22"/>
             <p:cNvSpPr/>
             <p:nvPr/>
           </p:nvSpPr>
@@ -14152,7 +14503,7 @@
         </p:sp>
         <p:sp>
           <p:nvSpPr>
-            <p:cNvPr id="22" name="TextBox 22"/>
+            <p:cNvPr id="23" name="TextBox 23"/>
             <p:cNvSpPr txBox="1"/>
             <p:nvPr/>
           </p:nvSpPr>
@@ -14192,7 +14543,7 @@
         </p:sp>
         <p:sp>
           <p:nvSpPr>
-            <p:cNvPr id="23" name="TextBox 23"/>
+            <p:cNvPr id="24" name="TextBox 24"/>
             <p:cNvSpPr txBox="1"/>
             <p:nvPr/>
           </p:nvSpPr>
@@ -14232,7 +14583,7 @@
         </p:sp>
         <p:sp>
           <p:nvSpPr>
-            <p:cNvPr id="24" name="TextBox 24"/>
+            <p:cNvPr id="25" name="TextBox 25"/>
             <p:cNvSpPr txBox="1"/>
             <p:nvPr/>
           </p:nvSpPr>
@@ -14273,7 +14624,7 @@
       </p:grpSp>
       <p:grpSp>
         <p:nvGrpSpPr>
-          <p:cNvPr id="45" name="Group 45"/>
+          <p:cNvPr id="46" name="Group 46"/>
           <p:cNvGrpSpPr/>
           <p:nvPr/>
         </p:nvGrpSpPr>
@@ -14287,7 +14638,7 @@
         </p:grpSpPr>
         <p:sp>
           <p:nvSpPr>
-            <p:cNvPr id="26" name="Rectangle 26"/>
+            <p:cNvPr id="27" name="Rectangle 27"/>
             <p:cNvSpPr/>
             <p:nvPr/>
           </p:nvSpPr>
@@ -14313,7 +14664,7 @@
         </p:sp>
         <p:sp>
           <p:nvSpPr>
-            <p:cNvPr id="27" name="Ellipse 27"/>
+            <p:cNvPr id="28" name="Ellipse 28"/>
             <p:cNvSpPr/>
             <p:nvPr/>
           </p:nvSpPr>
@@ -14335,7 +14686,7 @@
         </p:sp>
         <p:sp>
           <p:nvSpPr>
-            <p:cNvPr id="28" name="TextBox 28"/>
+            <p:cNvPr id="29" name="TextBox 29"/>
             <p:cNvSpPr txBox="1"/>
             <p:nvPr/>
           </p:nvSpPr>
@@ -14375,7 +14726,7 @@
         </p:sp>
         <p:sp>
           <p:nvSpPr>
-            <p:cNvPr id="29" name="TextBox 29"/>
+            <p:cNvPr id="30" name="TextBox 30"/>
             <p:cNvSpPr txBox="1"/>
             <p:nvPr/>
           </p:nvSpPr>
@@ -14415,7 +14766,7 @@
         </p:sp>
         <p:sp>
           <p:nvSpPr>
-            <p:cNvPr id="30" name="Freeform 30"/>
+            <p:cNvPr id="31" name="Freeform 31"/>
             <p:cNvSpPr/>
             <p:nvPr/>
           </p:nvSpPr>
@@ -14453,7 +14804,7 @@
         </p:sp>
         <p:sp>
           <p:nvSpPr>
-            <p:cNvPr id="31" name="Rectangle 31"/>
+            <p:cNvPr id="32" name="Rectangle 32"/>
             <p:cNvSpPr/>
             <p:nvPr/>
           </p:nvSpPr>
@@ -14479,7 +14830,7 @@
         </p:sp>
         <p:sp>
           <p:nvSpPr>
-            <p:cNvPr id="32" name="Ellipse 32"/>
+            <p:cNvPr id="33" name="Ellipse 33"/>
             <p:cNvSpPr/>
             <p:nvPr/>
           </p:nvSpPr>
@@ -14501,7 +14852,7 @@
         </p:sp>
         <p:sp>
           <p:nvSpPr>
-            <p:cNvPr id="33" name="TextBox 33"/>
+            <p:cNvPr id="34" name="TextBox 34"/>
             <p:cNvSpPr txBox="1"/>
             <p:nvPr/>
           </p:nvSpPr>
@@ -14541,7 +14892,7 @@
         </p:sp>
         <p:sp>
           <p:nvSpPr>
-            <p:cNvPr id="34" name="TextBox 34"/>
+            <p:cNvPr id="35" name="TextBox 35"/>
             <p:cNvSpPr txBox="1"/>
             <p:nvPr/>
           </p:nvSpPr>
@@ -14581,7 +14932,7 @@
         </p:sp>
         <p:sp>
           <p:nvSpPr>
-            <p:cNvPr id="35" name="Freeform 35"/>
+            <p:cNvPr id="36" name="Freeform 36"/>
             <p:cNvSpPr/>
             <p:nvPr/>
           </p:nvSpPr>
@@ -14619,7 +14970,7 @@
         </p:sp>
         <p:sp>
           <p:nvSpPr>
-            <p:cNvPr id="36" name="Rectangle 36"/>
+            <p:cNvPr id="37" name="Rectangle 37"/>
             <p:cNvSpPr/>
             <p:nvPr/>
           </p:nvSpPr>
@@ -14645,7 +14996,7 @@
         </p:sp>
         <p:sp>
           <p:nvSpPr>
-            <p:cNvPr id="37" name="Ellipse 37"/>
+            <p:cNvPr id="38" name="Ellipse 38"/>
             <p:cNvSpPr/>
             <p:nvPr/>
           </p:nvSpPr>
@@ -14667,7 +15018,7 @@
         </p:sp>
         <p:sp>
           <p:nvSpPr>
-            <p:cNvPr id="38" name="TextBox 38"/>
+            <p:cNvPr id="39" name="TextBox 39"/>
             <p:cNvSpPr txBox="1"/>
             <p:nvPr/>
           </p:nvSpPr>
@@ -14707,7 +15058,7 @@
         </p:sp>
         <p:sp>
           <p:nvSpPr>
-            <p:cNvPr id="39" name="TextBox 39"/>
+            <p:cNvPr id="40" name="TextBox 40"/>
             <p:cNvSpPr txBox="1"/>
             <p:nvPr/>
           </p:nvSpPr>
@@ -14747,7 +15098,7 @@
         </p:sp>
         <p:sp>
           <p:nvSpPr>
-            <p:cNvPr id="40" name="Freeform 40"/>
+            <p:cNvPr id="41" name="Freeform 41"/>
             <p:cNvSpPr/>
             <p:nvPr/>
           </p:nvSpPr>
@@ -14785,7 +15136,7 @@
         </p:sp>
         <p:sp>
           <p:nvSpPr>
-            <p:cNvPr id="41" name="Rectangle 41"/>
+            <p:cNvPr id="42" name="Rectangle 42"/>
             <p:cNvSpPr/>
             <p:nvPr/>
           </p:nvSpPr>
@@ -14811,7 +15162,7 @@
         </p:sp>
         <p:sp>
           <p:nvSpPr>
-            <p:cNvPr id="42" name="Ellipse 42"/>
+            <p:cNvPr id="43" name="Ellipse 43"/>
             <p:cNvSpPr/>
             <p:nvPr/>
           </p:nvSpPr>
@@ -14833,7 +15184,7 @@
         </p:sp>
         <p:sp>
           <p:nvSpPr>
-            <p:cNvPr id="43" name="TextBox 43"/>
+            <p:cNvPr id="44" name="TextBox 44"/>
             <p:cNvSpPr txBox="1"/>
             <p:nvPr/>
           </p:nvSpPr>
@@ -14873,7 +15224,7 @@
         </p:sp>
         <p:sp>
           <p:nvSpPr>
-            <p:cNvPr id="44" name="TextBox 44"/>
+            <p:cNvPr id="45" name="TextBox 45"/>
             <p:cNvSpPr txBox="1"/>
             <p:nvPr/>
           </p:nvSpPr>
@@ -14914,7 +15265,7 @@
       </p:grpSp>
       <p:grpSp>
         <p:nvGrpSpPr>
-          <p:cNvPr id="48" name="Group 48"/>
+          <p:cNvPr id="49" name="Group 49"/>
           <p:cNvGrpSpPr/>
           <p:nvPr/>
         </p:nvGrpSpPr>
@@ -14928,7 +15279,7 @@
         </p:grpSpPr>
         <p:sp>
           <p:nvSpPr>
-            <p:cNvPr id="46" name="Rectangle 46"/>
+            <p:cNvPr id="47" name="Rectangle 47"/>
             <p:cNvSpPr/>
             <p:nvPr/>
           </p:nvSpPr>
@@ -14952,7 +15303,7 @@
         </p:sp>
         <p:sp>
           <p:nvSpPr>
-            <p:cNvPr id="47" name="TextBox 47"/>
+            <p:cNvPr id="48" name="TextBox 48"/>
             <p:cNvSpPr txBox="1"/>
             <p:nvPr/>
           </p:nvSpPr>
@@ -14995,7 +15346,7 @@
       </p:grpSp>
       <p:grpSp>
         <p:nvGrpSpPr>
-          <p:cNvPr id="51" name="Group 51"/>
+          <p:cNvPr id="52" name="Group 52"/>
           <p:cNvGrpSpPr/>
           <p:nvPr/>
         </p:nvGrpSpPr>
@@ -15009,7 +15360,7 @@
         </p:grpSpPr>
         <p:sp>
           <p:nvSpPr>
-            <p:cNvPr id="49" name="TextBox 49"/>
+            <p:cNvPr id="50" name="TextBox 50"/>
             <p:cNvSpPr txBox="1"/>
             <p:nvPr/>
           </p:nvSpPr>
@@ -15049,7 +15400,7 @@
         </p:sp>
         <p:sp>
           <p:nvSpPr>
-            <p:cNvPr id="50" name="TextBox 50"/>
+            <p:cNvPr id="51" name="TextBox 51"/>
             <p:cNvSpPr txBox="1"/>
             <p:nvPr/>
           </p:nvSpPr>
@@ -15124,9 +15475,36 @@
           <a:chExt cx="0" cy="0"/>
         </a:xfrm>
       </p:grpSpPr>
+      <p:pic>
+        <p:nvPicPr>
+          <p:cNvPr id="2" name="Image 2"/>
+          <p:cNvPicPr>
+            <a:picLocks noChangeAspect="1"/>
+          </p:cNvPicPr>
+          <p:nvPr/>
+        </p:nvPicPr>
+        <p:blipFill>
+          <a:blip r:embed="rId2">
+            <a:alphaModFix amt="14000"/>
+          </a:blip>
+          <a:srcRect l="0" t="27" r="0" b="27"/>
+          <a:stretch>
+            <a:fillRect/>
+          </a:stretch>
+        </p:blipFill>
+        <p:spPr>
+          <a:xfrm>
+            <a:off x="0" y="0"/>
+            <a:ext cx="12192000" cy="6858000"/>
+          </a:xfrm>
+          <a:prstGeom prst="rect">
+            <a:avLst/>
+          </a:prstGeom>
+        </p:spPr>
+      </p:pic>
       <p:grpSp>
         <p:nvGrpSpPr>
-          <p:cNvPr id="5" name="Group 5"/>
+          <p:cNvPr id="6" name="Group 6"/>
           <p:cNvGrpSpPr/>
           <p:nvPr/>
         </p:nvGrpSpPr>
@@ -15140,7 +15518,7 @@
         </p:grpSpPr>
         <p:sp>
           <p:nvSpPr>
-            <p:cNvPr id="2" name="TextBox 2"/>
+            <p:cNvPr id="3" name="TextBox 3"/>
             <p:cNvSpPr txBox="1"/>
             <p:nvPr/>
           </p:nvSpPr>
@@ -15180,7 +15558,7 @@
         </p:sp>
         <p:sp>
           <p:nvSpPr>
-            <p:cNvPr id="3" name="TextBox 3"/>
+            <p:cNvPr id="4" name="TextBox 4"/>
             <p:cNvSpPr txBox="1"/>
             <p:nvPr/>
           </p:nvSpPr>
@@ -15220,7 +15598,7 @@
         </p:sp>
         <p:sp>
           <p:nvSpPr>
-            <p:cNvPr id="4" name="Line 4"/>
+            <p:cNvPr id="5" name="Line 5"/>
             <p:cNvSpPr/>
             <p:nvPr/>
           </p:nvSpPr>
@@ -15257,7 +15635,7 @@
       </p:grpSp>
       <p:grpSp>
         <p:nvGrpSpPr>
-          <p:cNvPr id="10" name="Group 10"/>
+          <p:cNvPr id="11" name="Group 11"/>
           <p:cNvGrpSpPr/>
           <p:nvPr/>
         </p:nvGrpSpPr>
@@ -15271,7 +15649,7 @@
         </p:grpSpPr>
         <p:sp>
           <p:nvSpPr>
-            <p:cNvPr id="6" name="Rectangle 6"/>
+            <p:cNvPr id="7" name="Rectangle 7"/>
             <p:cNvSpPr/>
             <p:nvPr/>
           </p:nvSpPr>
@@ -15297,7 +15675,7 @@
         </p:sp>
         <p:sp>
           <p:nvSpPr>
-            <p:cNvPr id="7" name="TextBox 7"/>
+            <p:cNvPr id="8" name="TextBox 8"/>
             <p:cNvSpPr txBox="1"/>
             <p:nvPr/>
           </p:nvSpPr>
@@ -15337,7 +15715,7 @@
         </p:sp>
         <p:sp>
           <p:nvSpPr>
-            <p:cNvPr id="8" name="TextBox 8"/>
+            <p:cNvPr id="9" name="TextBox 9"/>
             <p:cNvSpPr txBox="1"/>
             <p:nvPr/>
           </p:nvSpPr>
@@ -15377,7 +15755,7 @@
         </p:sp>
         <p:sp>
           <p:nvSpPr>
-            <p:cNvPr id="9" name="TextBox 9"/>
+            <p:cNvPr id="10" name="TextBox 10"/>
             <p:cNvSpPr txBox="1"/>
             <p:nvPr/>
           </p:nvSpPr>
@@ -15418,7 +15796,7 @@
       </p:grpSp>
       <p:grpSp>
         <p:nvGrpSpPr>
-          <p:cNvPr id="15" name="Group 15"/>
+          <p:cNvPr id="16" name="Group 16"/>
           <p:cNvGrpSpPr/>
           <p:nvPr/>
         </p:nvGrpSpPr>
@@ -15432,7 +15810,7 @@
         </p:grpSpPr>
         <p:sp>
           <p:nvSpPr>
-            <p:cNvPr id="11" name="Rectangle 11"/>
+            <p:cNvPr id="12" name="Rectangle 12"/>
             <p:cNvSpPr/>
             <p:nvPr/>
           </p:nvSpPr>
@@ -15458,7 +15836,7 @@
         </p:sp>
         <p:sp>
           <p:nvSpPr>
-            <p:cNvPr id="12" name="TextBox 12"/>
+            <p:cNvPr id="13" name="TextBox 13"/>
             <p:cNvSpPr txBox="1"/>
             <p:nvPr/>
           </p:nvSpPr>
@@ -15498,7 +15876,7 @@
         </p:sp>
         <p:sp>
           <p:nvSpPr>
-            <p:cNvPr id="13" name="TextBox 13"/>
+            <p:cNvPr id="14" name="TextBox 14"/>
             <p:cNvSpPr txBox="1"/>
             <p:nvPr/>
           </p:nvSpPr>
@@ -15538,7 +15916,7 @@
         </p:sp>
         <p:sp>
           <p:nvSpPr>
-            <p:cNvPr id="14" name="TextBox 14"/>
+            <p:cNvPr id="15" name="TextBox 15"/>
             <p:cNvSpPr txBox="1"/>
             <p:nvPr/>
           </p:nvSpPr>
@@ -15579,7 +15957,7 @@
       </p:grpSp>
       <p:grpSp>
         <p:nvGrpSpPr>
-          <p:cNvPr id="20" name="Group 20"/>
+          <p:cNvPr id="21" name="Group 21"/>
           <p:cNvGrpSpPr/>
           <p:nvPr/>
         </p:nvGrpSpPr>
@@ -15593,7 +15971,7 @@
         </p:grpSpPr>
         <p:sp>
           <p:nvSpPr>
-            <p:cNvPr id="16" name="Rectangle 16"/>
+            <p:cNvPr id="17" name="Rectangle 17"/>
             <p:cNvSpPr/>
             <p:nvPr/>
           </p:nvSpPr>
@@ -15619,7 +15997,7 @@
         </p:sp>
         <p:sp>
           <p:nvSpPr>
-            <p:cNvPr id="17" name="TextBox 17"/>
+            <p:cNvPr id="18" name="TextBox 18"/>
             <p:cNvSpPr txBox="1"/>
             <p:nvPr/>
           </p:nvSpPr>
@@ -15659,7 +16037,7 @@
         </p:sp>
         <p:sp>
           <p:nvSpPr>
-            <p:cNvPr id="18" name="TextBox 18"/>
+            <p:cNvPr id="19" name="TextBox 19"/>
             <p:cNvSpPr txBox="1"/>
             <p:nvPr/>
           </p:nvSpPr>
@@ -15699,7 +16077,7 @@
         </p:sp>
         <p:sp>
           <p:nvSpPr>
-            <p:cNvPr id="19" name="TextBox 19"/>
+            <p:cNvPr id="20" name="TextBox 20"/>
             <p:cNvSpPr txBox="1"/>
             <p:nvPr/>
           </p:nvSpPr>
@@ -15740,7 +16118,7 @@
       </p:grpSp>
       <p:grpSp>
         <p:nvGrpSpPr>
-          <p:cNvPr id="32" name="Group 32"/>
+          <p:cNvPr id="33" name="Group 33"/>
           <p:cNvGrpSpPr/>
           <p:nvPr/>
         </p:nvGrpSpPr>
@@ -15754,7 +16132,7 @@
         </p:grpSpPr>
         <p:sp>
           <p:nvSpPr>
-            <p:cNvPr id="21" name="Rectangle 21"/>
+            <p:cNvPr id="22" name="Rectangle 22"/>
             <p:cNvSpPr/>
             <p:nvPr/>
           </p:nvSpPr>
@@ -15780,7 +16158,7 @@
         </p:sp>
         <p:sp>
           <p:nvSpPr>
-            <p:cNvPr id="22" name="TextBox 22"/>
+            <p:cNvPr id="23" name="TextBox 23"/>
             <p:cNvSpPr txBox="1"/>
             <p:nvPr/>
           </p:nvSpPr>
@@ -15820,7 +16198,7 @@
         </p:sp>
         <p:sp>
           <p:nvSpPr>
-            <p:cNvPr id="23" name="TextBox 23"/>
+            <p:cNvPr id="24" name="TextBox 24"/>
             <p:cNvSpPr txBox="1"/>
             <p:nvPr/>
           </p:nvSpPr>
@@ -15860,7 +16238,7 @@
         </p:sp>
         <p:sp>
           <p:nvSpPr>
-            <p:cNvPr id="24" name="Rectangle 24"/>
+            <p:cNvPr id="25" name="Rectangle 25"/>
             <p:cNvSpPr/>
             <p:nvPr/>
           </p:nvSpPr>
@@ -15882,7 +16260,7 @@
         </p:sp>
         <p:sp>
           <p:nvSpPr>
-            <p:cNvPr id="25" name="TextBox 25"/>
+            <p:cNvPr id="26" name="TextBox 26"/>
             <p:cNvSpPr txBox="1"/>
             <p:nvPr/>
           </p:nvSpPr>
@@ -15922,7 +16300,7 @@
         </p:sp>
         <p:sp>
           <p:nvSpPr>
-            <p:cNvPr id="26" name="TextBox 26"/>
+            <p:cNvPr id="27" name="TextBox 27"/>
             <p:cNvSpPr txBox="1"/>
             <p:nvPr/>
           </p:nvSpPr>
@@ -15962,7 +16340,7 @@
         </p:sp>
         <p:sp>
           <p:nvSpPr>
-            <p:cNvPr id="27" name="Rectangle 27"/>
+            <p:cNvPr id="28" name="Rectangle 28"/>
             <p:cNvSpPr/>
             <p:nvPr/>
           </p:nvSpPr>
@@ -15984,7 +16362,7 @@
         </p:sp>
         <p:sp>
           <p:nvSpPr>
-            <p:cNvPr id="28" name="TextBox 28"/>
+            <p:cNvPr id="29" name="TextBox 29"/>
             <p:cNvSpPr txBox="1"/>
             <p:nvPr/>
           </p:nvSpPr>
@@ -16024,7 +16402,7 @@
         </p:sp>
         <p:sp>
           <p:nvSpPr>
-            <p:cNvPr id="29" name="TextBox 29"/>
+            <p:cNvPr id="30" name="TextBox 30"/>
             <p:cNvSpPr txBox="1"/>
             <p:nvPr/>
           </p:nvSpPr>
@@ -16064,7 +16442,7 @@
         </p:sp>
         <p:sp>
           <p:nvSpPr>
-            <p:cNvPr id="30" name="Rectangle 30"/>
+            <p:cNvPr id="31" name="Rectangle 31"/>
             <p:cNvSpPr/>
             <p:nvPr/>
           </p:nvSpPr>
@@ -16086,7 +16464,7 @@
         </p:sp>
         <p:sp>
           <p:nvSpPr>
-            <p:cNvPr id="31" name="TextBox 31"/>
+            <p:cNvPr id="32" name="TextBox 32"/>
             <p:cNvSpPr txBox="1"/>
             <p:nvPr/>
           </p:nvSpPr>
@@ -16127,7 +16505,7 @@
       </p:grpSp>
       <p:grpSp>
         <p:nvGrpSpPr>
-          <p:cNvPr id="35" name="Group 35"/>
+          <p:cNvPr id="36" name="Group 36"/>
           <p:cNvGrpSpPr/>
           <p:nvPr/>
         </p:nvGrpSpPr>
@@ -16141,7 +16519,7 @@
         </p:grpSpPr>
         <p:sp>
           <p:nvSpPr>
-            <p:cNvPr id="33" name="Rectangle 33"/>
+            <p:cNvPr id="34" name="Rectangle 34"/>
             <p:cNvSpPr/>
             <p:nvPr/>
           </p:nvSpPr>
@@ -16165,7 +16543,7 @@
         </p:sp>
         <p:sp>
           <p:nvSpPr>
-            <p:cNvPr id="34" name="TextBox 34"/>
+            <p:cNvPr id="35" name="TextBox 35"/>
             <p:cNvSpPr txBox="1"/>
             <p:nvPr/>
           </p:nvSpPr>
@@ -16206,7 +16584,7 @@
       </p:grpSp>
       <p:grpSp>
         <p:nvGrpSpPr>
-          <p:cNvPr id="38" name="Group 38"/>
+          <p:cNvPr id="39" name="Group 39"/>
           <p:cNvGrpSpPr/>
           <p:nvPr/>
         </p:nvGrpSpPr>
@@ -16220,7 +16598,7 @@
         </p:grpSpPr>
         <p:sp>
           <p:nvSpPr>
-            <p:cNvPr id="36" name="TextBox 36"/>
+            <p:cNvPr id="37" name="TextBox 37"/>
             <p:cNvSpPr txBox="1"/>
             <p:nvPr/>
           </p:nvSpPr>
@@ -16260,7 +16638,7 @@
         </p:sp>
         <p:sp>
           <p:nvSpPr>
-            <p:cNvPr id="37" name="TextBox 37"/>
+            <p:cNvPr id="38" name="TextBox 38"/>
             <p:cNvSpPr txBox="1"/>
             <p:nvPr/>
           </p:nvSpPr>
@@ -16335,9 +16713,36 @@
           <a:chExt cx="0" cy="0"/>
         </a:xfrm>
       </p:grpSpPr>
+      <p:pic>
+        <p:nvPicPr>
+          <p:cNvPr id="2" name="Image 2"/>
+          <p:cNvPicPr>
+            <a:picLocks noChangeAspect="1"/>
+          </p:cNvPicPr>
+          <p:nvPr/>
+        </p:nvPicPr>
+        <p:blipFill>
+          <a:blip r:embed="rId2">
+            <a:alphaModFix amt="14000"/>
+          </a:blip>
+          <a:srcRect l="0" t="27" r="0" b="27"/>
+          <a:stretch>
+            <a:fillRect/>
+          </a:stretch>
+        </p:blipFill>
+        <p:spPr>
+          <a:xfrm>
+            <a:off x="0" y="0"/>
+            <a:ext cx="12192000" cy="6858000"/>
+          </a:xfrm>
+          <a:prstGeom prst="rect">
+            <a:avLst/>
+          </a:prstGeom>
+        </p:spPr>
+      </p:pic>
       <p:grpSp>
         <p:nvGrpSpPr>
-          <p:cNvPr id="5" name="Group 5"/>
+          <p:cNvPr id="6" name="Group 6"/>
           <p:cNvGrpSpPr/>
           <p:nvPr/>
         </p:nvGrpSpPr>
@@ -16351,7 +16756,7 @@
         </p:grpSpPr>
         <p:sp>
           <p:nvSpPr>
-            <p:cNvPr id="2" name="TextBox 2"/>
+            <p:cNvPr id="3" name="TextBox 3"/>
             <p:cNvSpPr txBox="1"/>
             <p:nvPr/>
           </p:nvSpPr>
@@ -16391,7 +16796,7 @@
         </p:sp>
         <p:sp>
           <p:nvSpPr>
-            <p:cNvPr id="3" name="TextBox 3"/>
+            <p:cNvPr id="4" name="TextBox 4"/>
             <p:cNvSpPr txBox="1"/>
             <p:nvPr/>
           </p:nvSpPr>
@@ -16431,7 +16836,7 @@
         </p:sp>
         <p:sp>
           <p:nvSpPr>
-            <p:cNvPr id="4" name="Line 4"/>
+            <p:cNvPr id="5" name="Line 5"/>
             <p:cNvSpPr/>
             <p:nvPr/>
           </p:nvSpPr>
@@ -16468,7 +16873,7 @@
       </p:grpSp>
       <p:grpSp>
         <p:nvGrpSpPr>
-          <p:cNvPr id="10" name="Group 10"/>
+          <p:cNvPr id="11" name="Group 11"/>
           <p:cNvGrpSpPr/>
           <p:nvPr/>
         </p:nvGrpSpPr>
@@ -16482,7 +16887,7 @@
         </p:grpSpPr>
         <p:sp>
           <p:nvSpPr>
-            <p:cNvPr id="6" name="Rectangle 6"/>
+            <p:cNvPr id="7" name="Rectangle 7"/>
             <p:cNvSpPr/>
             <p:nvPr/>
           </p:nvSpPr>
@@ -16508,7 +16913,7 @@
         </p:sp>
         <p:sp>
           <p:nvSpPr>
-            <p:cNvPr id="7" name="TextBox 7"/>
+            <p:cNvPr id="8" name="TextBox 8"/>
             <p:cNvSpPr txBox="1"/>
             <p:nvPr/>
           </p:nvSpPr>
@@ -16548,7 +16953,7 @@
         </p:sp>
         <p:sp>
           <p:nvSpPr>
-            <p:cNvPr id="8" name="TextBox 8"/>
+            <p:cNvPr id="9" name="TextBox 9"/>
             <p:cNvSpPr txBox="1"/>
             <p:nvPr/>
           </p:nvSpPr>
@@ -16588,7 +16993,7 @@
         </p:sp>
         <p:sp>
           <p:nvSpPr>
-            <p:cNvPr id="9" name="TextBox 9"/>
+            <p:cNvPr id="10" name="TextBox 10"/>
             <p:cNvSpPr txBox="1"/>
             <p:nvPr/>
           </p:nvSpPr>
@@ -16629,7 +17034,7 @@
       </p:grpSp>
       <p:grpSp>
         <p:nvGrpSpPr>
-          <p:cNvPr id="15" name="Group 15"/>
+          <p:cNvPr id="16" name="Group 16"/>
           <p:cNvGrpSpPr/>
           <p:nvPr/>
         </p:nvGrpSpPr>
@@ -16643,7 +17048,7 @@
         </p:grpSpPr>
         <p:sp>
           <p:nvSpPr>
-            <p:cNvPr id="11" name="Rectangle 11"/>
+            <p:cNvPr id="12" name="Rectangle 12"/>
             <p:cNvSpPr/>
             <p:nvPr/>
           </p:nvSpPr>
@@ -16669,7 +17074,7 @@
         </p:sp>
         <p:sp>
           <p:nvSpPr>
-            <p:cNvPr id="12" name="TextBox 12"/>
+            <p:cNvPr id="13" name="TextBox 13"/>
             <p:cNvSpPr txBox="1"/>
             <p:nvPr/>
           </p:nvSpPr>
@@ -16709,7 +17114,7 @@
         </p:sp>
         <p:sp>
           <p:nvSpPr>
-            <p:cNvPr id="13" name="TextBox 13"/>
+            <p:cNvPr id="14" name="TextBox 14"/>
             <p:cNvSpPr txBox="1"/>
             <p:nvPr/>
           </p:nvSpPr>
@@ -16749,7 +17154,7 @@
         </p:sp>
         <p:sp>
           <p:nvSpPr>
-            <p:cNvPr id="14" name="TextBox 14"/>
+            <p:cNvPr id="15" name="TextBox 15"/>
             <p:cNvSpPr txBox="1"/>
             <p:nvPr/>
           </p:nvSpPr>
@@ -16790,7 +17195,7 @@
       </p:grpSp>
       <p:grpSp>
         <p:nvGrpSpPr>
-          <p:cNvPr id="20" name="Group 20"/>
+          <p:cNvPr id="21" name="Group 21"/>
           <p:cNvGrpSpPr/>
           <p:nvPr/>
         </p:nvGrpSpPr>
@@ -16804,7 +17209,7 @@
         </p:grpSpPr>
         <p:sp>
           <p:nvSpPr>
-            <p:cNvPr id="16" name="Rectangle 16"/>
+            <p:cNvPr id="17" name="Rectangle 17"/>
             <p:cNvSpPr/>
             <p:nvPr/>
           </p:nvSpPr>
@@ -16830,7 +17235,7 @@
         </p:sp>
         <p:sp>
           <p:nvSpPr>
-            <p:cNvPr id="17" name="TextBox 17"/>
+            <p:cNvPr id="18" name="TextBox 18"/>
             <p:cNvSpPr txBox="1"/>
             <p:nvPr/>
           </p:nvSpPr>
@@ -16870,7 +17275,7 @@
         </p:sp>
         <p:sp>
           <p:nvSpPr>
-            <p:cNvPr id="18" name="TextBox 18"/>
+            <p:cNvPr id="19" name="TextBox 19"/>
             <p:cNvSpPr txBox="1"/>
             <p:nvPr/>
           </p:nvSpPr>
@@ -16910,7 +17315,7 @@
         </p:sp>
         <p:sp>
           <p:nvSpPr>
-            <p:cNvPr id="19" name="TextBox 19"/>
+            <p:cNvPr id="20" name="TextBox 20"/>
             <p:cNvSpPr txBox="1"/>
             <p:nvPr/>
           </p:nvSpPr>
@@ -16951,7 +17356,7 @@
       </p:grpSp>
       <p:grpSp>
         <p:nvGrpSpPr>
-          <p:cNvPr id="25" name="Group 25"/>
+          <p:cNvPr id="26" name="Group 26"/>
           <p:cNvGrpSpPr/>
           <p:nvPr/>
         </p:nvGrpSpPr>
@@ -16965,7 +17370,7 @@
         </p:grpSpPr>
         <p:sp>
           <p:nvSpPr>
-            <p:cNvPr id="21" name="Rectangle 21"/>
+            <p:cNvPr id="22" name="Rectangle 22"/>
             <p:cNvSpPr/>
             <p:nvPr/>
           </p:nvSpPr>
@@ -16991,7 +17396,7 @@
         </p:sp>
         <p:sp>
           <p:nvSpPr>
-            <p:cNvPr id="22" name="Rectangle 22"/>
+            <p:cNvPr id="23" name="Rectangle 23"/>
             <p:cNvSpPr/>
             <p:nvPr/>
           </p:nvSpPr>
@@ -17015,7 +17420,7 @@
         </p:sp>
         <p:sp>
           <p:nvSpPr>
-            <p:cNvPr id="23" name="TextBox 23"/>
+            <p:cNvPr id="24" name="TextBox 24"/>
             <p:cNvSpPr txBox="1"/>
             <p:nvPr/>
           </p:nvSpPr>
@@ -17055,7 +17460,7 @@
         </p:sp>
         <p:sp>
           <p:nvSpPr>
-            <p:cNvPr id="24" name="TextBox 24"/>
+            <p:cNvPr id="25" name="TextBox 25"/>
             <p:cNvSpPr txBox="1"/>
             <p:nvPr/>
           </p:nvSpPr>
@@ -17098,7 +17503,7 @@
       </p:grpSp>
       <p:grpSp>
         <p:nvGrpSpPr>
-          <p:cNvPr id="30" name="Group 30"/>
+          <p:cNvPr id="31" name="Group 31"/>
           <p:cNvGrpSpPr/>
           <p:nvPr/>
         </p:nvGrpSpPr>
@@ -17112,7 +17517,7 @@
         </p:grpSpPr>
         <p:sp>
           <p:nvSpPr>
-            <p:cNvPr id="26" name="Rectangle 26"/>
+            <p:cNvPr id="27" name="Rectangle 27"/>
             <p:cNvSpPr/>
             <p:nvPr/>
           </p:nvSpPr>
@@ -17138,7 +17543,7 @@
         </p:sp>
         <p:sp>
           <p:nvSpPr>
-            <p:cNvPr id="27" name="Rectangle 27"/>
+            <p:cNvPr id="28" name="Rectangle 28"/>
             <p:cNvSpPr/>
             <p:nvPr/>
           </p:nvSpPr>
@@ -17162,7 +17567,7 @@
         </p:sp>
         <p:sp>
           <p:nvSpPr>
-            <p:cNvPr id="28" name="TextBox 28"/>
+            <p:cNvPr id="29" name="TextBox 29"/>
             <p:cNvSpPr txBox="1"/>
             <p:nvPr/>
           </p:nvSpPr>
@@ -17202,7 +17607,7 @@
         </p:sp>
         <p:sp>
           <p:nvSpPr>
-            <p:cNvPr id="29" name="TextBox 29"/>
+            <p:cNvPr id="30" name="TextBox 30"/>
             <p:cNvSpPr txBox="1"/>
             <p:nvPr/>
           </p:nvSpPr>
@@ -17245,7 +17650,7 @@
       </p:grpSp>
       <p:grpSp>
         <p:nvGrpSpPr>
-          <p:cNvPr id="32" name="Group 32"/>
+          <p:cNvPr id="33" name="Group 33"/>
           <p:cNvGrpSpPr/>
           <p:nvPr/>
         </p:nvGrpSpPr>
@@ -17259,7 +17664,7 @@
         </p:grpSpPr>
         <p:sp>
           <p:nvSpPr>
-            <p:cNvPr id="31" name="TextBox 31"/>
+            <p:cNvPr id="32" name="TextBox 32"/>
             <p:cNvSpPr txBox="1"/>
             <p:nvPr/>
           </p:nvSpPr>
@@ -17300,7 +17705,7 @@
       </p:grpSp>
       <p:grpSp>
         <p:nvGrpSpPr>
-          <p:cNvPr id="35" name="Group 35"/>
+          <p:cNvPr id="36" name="Group 36"/>
           <p:cNvGrpSpPr/>
           <p:nvPr/>
         </p:nvGrpSpPr>
@@ -17314,7 +17719,7 @@
         </p:grpSpPr>
         <p:sp>
           <p:nvSpPr>
-            <p:cNvPr id="33" name="TextBox 33"/>
+            <p:cNvPr id="34" name="TextBox 34"/>
             <p:cNvSpPr txBox="1"/>
             <p:nvPr/>
           </p:nvSpPr>
@@ -17354,7 +17759,7 @@
         </p:sp>
         <p:sp>
           <p:nvSpPr>
-            <p:cNvPr id="34" name="TextBox 34"/>
+            <p:cNvPr id="35" name="TextBox 35"/>
             <p:cNvSpPr txBox="1"/>
             <p:nvPr/>
           </p:nvSpPr>
@@ -17429,9 +17834,36 @@
           <a:chExt cx="0" cy="0"/>
         </a:xfrm>
       </p:grpSpPr>
+      <p:pic>
+        <p:nvPicPr>
+          <p:cNvPr id="2" name="Image 2"/>
+          <p:cNvPicPr>
+            <a:picLocks noChangeAspect="1"/>
+          </p:cNvPicPr>
+          <p:nvPr/>
+        </p:nvPicPr>
+        <p:blipFill>
+          <a:blip r:embed="rId2">
+            <a:alphaModFix amt="14000"/>
+          </a:blip>
+          <a:srcRect l="0" t="27" r="0" b="27"/>
+          <a:stretch>
+            <a:fillRect/>
+          </a:stretch>
+        </p:blipFill>
+        <p:spPr>
+          <a:xfrm>
+            <a:off x="0" y="0"/>
+            <a:ext cx="12192000" cy="6858000"/>
+          </a:xfrm>
+          <a:prstGeom prst="rect">
+            <a:avLst/>
+          </a:prstGeom>
+        </p:spPr>
+      </p:pic>
       <p:grpSp>
         <p:nvGrpSpPr>
-          <p:cNvPr id="5" name="Group 5"/>
+          <p:cNvPr id="6" name="Group 6"/>
           <p:cNvGrpSpPr/>
           <p:nvPr/>
         </p:nvGrpSpPr>
@@ -17445,7 +17877,7 @@
         </p:grpSpPr>
         <p:sp>
           <p:nvSpPr>
-            <p:cNvPr id="2" name="TextBox 2"/>
+            <p:cNvPr id="3" name="TextBox 3"/>
             <p:cNvSpPr txBox="1"/>
             <p:nvPr/>
           </p:nvSpPr>
@@ -17485,7 +17917,7 @@
         </p:sp>
         <p:sp>
           <p:nvSpPr>
-            <p:cNvPr id="3" name="TextBox 3"/>
+            <p:cNvPr id="4" name="TextBox 4"/>
             <p:cNvSpPr txBox="1"/>
             <p:nvPr/>
           </p:nvSpPr>
@@ -17525,7 +17957,7 @@
         </p:sp>
         <p:sp>
           <p:nvSpPr>
-            <p:cNvPr id="4" name="Line 4"/>
+            <p:cNvPr id="5" name="Line 5"/>
             <p:cNvSpPr/>
             <p:nvPr/>
           </p:nvSpPr>
@@ -17562,7 +17994,7 @@
       </p:grpSp>
       <p:grpSp>
         <p:nvGrpSpPr>
-          <p:cNvPr id="10" name="Group 10"/>
+          <p:cNvPr id="11" name="Group 11"/>
           <p:cNvGrpSpPr/>
           <p:nvPr/>
         </p:nvGrpSpPr>
@@ -17576,7 +18008,7 @@
         </p:grpSpPr>
         <p:sp>
           <p:nvSpPr>
-            <p:cNvPr id="6" name="Rectangle 6"/>
+            <p:cNvPr id="7" name="Rectangle 7"/>
             <p:cNvSpPr/>
             <p:nvPr/>
           </p:nvSpPr>
@@ -17602,7 +18034,7 @@
         </p:sp>
         <p:sp>
           <p:nvSpPr>
-            <p:cNvPr id="7" name="TextBox 7"/>
+            <p:cNvPr id="8" name="TextBox 8"/>
             <p:cNvSpPr txBox="1"/>
             <p:nvPr/>
           </p:nvSpPr>
@@ -17642,7 +18074,7 @@
         </p:sp>
         <p:sp>
           <p:nvSpPr>
-            <p:cNvPr id="8" name="TextBox 8"/>
+            <p:cNvPr id="9" name="TextBox 9"/>
             <p:cNvSpPr txBox="1"/>
             <p:nvPr/>
           </p:nvSpPr>
@@ -17682,7 +18114,7 @@
         </p:sp>
         <p:sp>
           <p:nvSpPr>
-            <p:cNvPr id="9" name="TextBox 9"/>
+            <p:cNvPr id="10" name="TextBox 10"/>
             <p:cNvSpPr txBox="1"/>
             <p:nvPr/>
           </p:nvSpPr>
@@ -17723,7 +18155,7 @@
       </p:grpSp>
       <p:grpSp>
         <p:nvGrpSpPr>
-          <p:cNvPr id="15" name="Group 15"/>
+          <p:cNvPr id="16" name="Group 16"/>
           <p:cNvGrpSpPr/>
           <p:nvPr/>
         </p:nvGrpSpPr>
@@ -17737,7 +18169,7 @@
         </p:grpSpPr>
         <p:sp>
           <p:nvSpPr>
-            <p:cNvPr id="11" name="Rectangle 11"/>
+            <p:cNvPr id="12" name="Rectangle 12"/>
             <p:cNvSpPr/>
             <p:nvPr/>
           </p:nvSpPr>
@@ -17763,7 +18195,7 @@
         </p:sp>
         <p:sp>
           <p:nvSpPr>
-            <p:cNvPr id="12" name="TextBox 12"/>
+            <p:cNvPr id="13" name="TextBox 13"/>
             <p:cNvSpPr txBox="1"/>
             <p:nvPr/>
           </p:nvSpPr>
@@ -17803,7 +18235,7 @@
         </p:sp>
         <p:sp>
           <p:nvSpPr>
-            <p:cNvPr id="13" name="TextBox 13"/>
+            <p:cNvPr id="14" name="TextBox 14"/>
             <p:cNvSpPr txBox="1"/>
             <p:nvPr/>
           </p:nvSpPr>
@@ -17843,7 +18275,7 @@
         </p:sp>
         <p:sp>
           <p:nvSpPr>
-            <p:cNvPr id="14" name="TextBox 14"/>
+            <p:cNvPr id="15" name="TextBox 15"/>
             <p:cNvSpPr txBox="1"/>
             <p:nvPr/>
           </p:nvSpPr>
@@ -17884,7 +18316,7 @@
       </p:grpSp>
       <p:grpSp>
         <p:nvGrpSpPr>
-          <p:cNvPr id="20" name="Group 20"/>
+          <p:cNvPr id="21" name="Group 21"/>
           <p:cNvGrpSpPr/>
           <p:nvPr/>
         </p:nvGrpSpPr>
@@ -17898,7 +18330,7 @@
         </p:grpSpPr>
         <p:sp>
           <p:nvSpPr>
-            <p:cNvPr id="16" name="Rectangle 16"/>
+            <p:cNvPr id="17" name="Rectangle 17"/>
             <p:cNvSpPr/>
             <p:nvPr/>
           </p:nvSpPr>
@@ -17924,7 +18356,7 @@
         </p:sp>
         <p:sp>
           <p:nvSpPr>
-            <p:cNvPr id="17" name="TextBox 17"/>
+            <p:cNvPr id="18" name="TextBox 18"/>
             <p:cNvSpPr txBox="1"/>
             <p:nvPr/>
           </p:nvSpPr>
@@ -17964,7 +18396,7 @@
         </p:sp>
         <p:sp>
           <p:nvSpPr>
-            <p:cNvPr id="18" name="TextBox 18"/>
+            <p:cNvPr id="19" name="TextBox 19"/>
             <p:cNvSpPr txBox="1"/>
             <p:nvPr/>
           </p:nvSpPr>
@@ -18004,7 +18436,7 @@
         </p:sp>
         <p:sp>
           <p:nvSpPr>
-            <p:cNvPr id="19" name="TextBox 19"/>
+            <p:cNvPr id="20" name="TextBox 20"/>
             <p:cNvSpPr txBox="1"/>
             <p:nvPr/>
           </p:nvSpPr>
@@ -18045,7 +18477,7 @@
       </p:grpSp>
       <p:grpSp>
         <p:nvGrpSpPr>
-          <p:cNvPr id="25" name="Group 25"/>
+          <p:cNvPr id="26" name="Group 26"/>
           <p:cNvGrpSpPr/>
           <p:nvPr/>
         </p:nvGrpSpPr>
@@ -18059,7 +18491,7 @@
         </p:grpSpPr>
         <p:sp>
           <p:nvSpPr>
-            <p:cNvPr id="21" name="Rectangle 21"/>
+            <p:cNvPr id="22" name="Rectangle 22"/>
             <p:cNvSpPr/>
             <p:nvPr/>
           </p:nvSpPr>
@@ -18085,7 +18517,7 @@
         </p:sp>
         <p:sp>
           <p:nvSpPr>
-            <p:cNvPr id="22" name="TextBox 22"/>
+            <p:cNvPr id="23" name="TextBox 23"/>
             <p:cNvSpPr txBox="1"/>
             <p:nvPr/>
           </p:nvSpPr>
@@ -18125,7 +18557,7 @@
         </p:sp>
         <p:sp>
           <p:nvSpPr>
-            <p:cNvPr id="23" name="TextBox 23"/>
+            <p:cNvPr id="24" name="TextBox 24"/>
             <p:cNvSpPr txBox="1"/>
             <p:nvPr/>
           </p:nvSpPr>
@@ -18165,7 +18597,7 @@
         </p:sp>
         <p:sp>
           <p:nvSpPr>
-            <p:cNvPr id="24" name="TextBox 24"/>
+            <p:cNvPr id="25" name="TextBox 25"/>
             <p:cNvSpPr txBox="1"/>
             <p:nvPr/>
           </p:nvSpPr>
@@ -18206,7 +18638,7 @@
       </p:grpSp>
       <p:grpSp>
         <p:nvGrpSpPr>
-          <p:cNvPr id="37" name="Group 37"/>
+          <p:cNvPr id="38" name="Group 38"/>
           <p:cNvGrpSpPr/>
           <p:nvPr/>
         </p:nvGrpSpPr>
@@ -18220,7 +18652,7 @@
         </p:grpSpPr>
         <p:sp>
           <p:nvSpPr>
-            <p:cNvPr id="26" name="Rectangle 26"/>
+            <p:cNvPr id="27" name="Rectangle 27"/>
             <p:cNvSpPr/>
             <p:nvPr/>
           </p:nvSpPr>
@@ -18246,7 +18678,7 @@
         </p:sp>
         <p:sp>
           <p:nvSpPr>
-            <p:cNvPr id="27" name="TextBox 27"/>
+            <p:cNvPr id="28" name="TextBox 28"/>
             <p:cNvSpPr txBox="1"/>
             <p:nvPr/>
           </p:nvSpPr>
@@ -18286,7 +18718,7 @@
         </p:sp>
         <p:sp>
           <p:nvSpPr>
-            <p:cNvPr id="28" name="TextBox 28"/>
+            <p:cNvPr id="29" name="TextBox 29"/>
             <p:cNvSpPr txBox="1"/>
             <p:nvPr/>
           </p:nvSpPr>
@@ -18326,7 +18758,7 @@
         </p:sp>
         <p:sp>
           <p:nvSpPr>
-            <p:cNvPr id="29" name="Rectangle 29"/>
+            <p:cNvPr id="30" name="Rectangle 30"/>
             <p:cNvSpPr/>
             <p:nvPr/>
           </p:nvSpPr>
@@ -18348,7 +18780,7 @@
         </p:sp>
         <p:sp>
           <p:nvSpPr>
-            <p:cNvPr id="30" name="TextBox 30"/>
+            <p:cNvPr id="31" name="TextBox 31"/>
             <p:cNvSpPr txBox="1"/>
             <p:nvPr/>
           </p:nvSpPr>
@@ -18388,7 +18820,7 @@
         </p:sp>
         <p:sp>
           <p:nvSpPr>
-            <p:cNvPr id="31" name="TextBox 31"/>
+            <p:cNvPr id="32" name="TextBox 32"/>
             <p:cNvSpPr txBox="1"/>
             <p:nvPr/>
           </p:nvSpPr>
@@ -18428,7 +18860,7 @@
         </p:sp>
         <p:sp>
           <p:nvSpPr>
-            <p:cNvPr id="32" name="Rectangle 32"/>
+            <p:cNvPr id="33" name="Rectangle 33"/>
             <p:cNvSpPr/>
             <p:nvPr/>
           </p:nvSpPr>
@@ -18450,7 +18882,7 @@
         </p:sp>
         <p:sp>
           <p:nvSpPr>
-            <p:cNvPr id="33" name="TextBox 33"/>
+            <p:cNvPr id="34" name="TextBox 34"/>
             <p:cNvSpPr txBox="1"/>
             <p:nvPr/>
           </p:nvSpPr>
@@ -18490,7 +18922,7 @@
         </p:sp>
         <p:sp>
           <p:nvSpPr>
-            <p:cNvPr id="34" name="TextBox 34"/>
+            <p:cNvPr id="35" name="TextBox 35"/>
             <p:cNvSpPr txBox="1"/>
             <p:nvPr/>
           </p:nvSpPr>
@@ -18530,7 +18962,7 @@
         </p:sp>
         <p:sp>
           <p:nvSpPr>
-            <p:cNvPr id="35" name="Rectangle 35"/>
+            <p:cNvPr id="36" name="Rectangle 36"/>
             <p:cNvSpPr/>
             <p:nvPr/>
           </p:nvSpPr>
@@ -18552,7 +18984,7 @@
         </p:sp>
         <p:sp>
           <p:nvSpPr>
-            <p:cNvPr id="36" name="TextBox 36"/>
+            <p:cNvPr id="37" name="TextBox 37"/>
             <p:cNvSpPr txBox="1"/>
             <p:nvPr/>
           </p:nvSpPr>
@@ -18593,7 +19025,7 @@
       </p:grpSp>
       <p:grpSp>
         <p:nvGrpSpPr>
-          <p:cNvPr id="40" name="Group 40"/>
+          <p:cNvPr id="41" name="Group 41"/>
           <p:cNvGrpSpPr/>
           <p:nvPr/>
         </p:nvGrpSpPr>
@@ -18607,7 +19039,7 @@
         </p:grpSpPr>
         <p:sp>
           <p:nvSpPr>
-            <p:cNvPr id="38" name="TextBox 38"/>
+            <p:cNvPr id="39" name="TextBox 39"/>
             <p:cNvSpPr txBox="1"/>
             <p:nvPr/>
           </p:nvSpPr>
@@ -18647,7 +19079,7 @@
         </p:sp>
         <p:sp>
           <p:nvSpPr>
-            <p:cNvPr id="39" name="TextBox 39"/>
+            <p:cNvPr id="40" name="TextBox 40"/>
             <p:cNvSpPr txBox="1"/>
             <p:nvPr/>
           </p:nvSpPr>
@@ -18722,9 +19154,36 @@
           <a:chExt cx="0" cy="0"/>
         </a:xfrm>
       </p:grpSpPr>
+      <p:pic>
+        <p:nvPicPr>
+          <p:cNvPr id="2" name="Image 2"/>
+          <p:cNvPicPr>
+            <a:picLocks noChangeAspect="1"/>
+          </p:cNvPicPr>
+          <p:nvPr/>
+        </p:nvPicPr>
+        <p:blipFill>
+          <a:blip r:embed="rId2">
+            <a:alphaModFix amt="14000"/>
+          </a:blip>
+          <a:srcRect l="0" t="27" r="0" b="27"/>
+          <a:stretch>
+            <a:fillRect/>
+          </a:stretch>
+        </p:blipFill>
+        <p:spPr>
+          <a:xfrm>
+            <a:off x="0" y="0"/>
+            <a:ext cx="12192000" cy="6858000"/>
+          </a:xfrm>
+          <a:prstGeom prst="rect">
+            <a:avLst/>
+          </a:prstGeom>
+        </p:spPr>
+      </p:pic>
       <p:grpSp>
         <p:nvGrpSpPr>
-          <p:cNvPr id="5" name="Group 5"/>
+          <p:cNvPr id="6" name="Group 6"/>
           <p:cNvGrpSpPr/>
           <p:nvPr/>
         </p:nvGrpSpPr>
@@ -18738,7 +19197,7 @@
         </p:grpSpPr>
         <p:sp>
           <p:nvSpPr>
-            <p:cNvPr id="2" name="TextBox 2"/>
+            <p:cNvPr id="3" name="TextBox 3"/>
             <p:cNvSpPr txBox="1"/>
             <p:nvPr/>
           </p:nvSpPr>
@@ -18778,7 +19237,7 @@
         </p:sp>
         <p:sp>
           <p:nvSpPr>
-            <p:cNvPr id="3" name="TextBox 3"/>
+            <p:cNvPr id="4" name="TextBox 4"/>
             <p:cNvSpPr txBox="1"/>
             <p:nvPr/>
           </p:nvSpPr>
@@ -18818,7 +19277,7 @@
         </p:sp>
         <p:sp>
           <p:nvSpPr>
-            <p:cNvPr id="4" name="Line 4"/>
+            <p:cNvPr id="5" name="Line 5"/>
             <p:cNvSpPr/>
             <p:nvPr/>
           </p:nvSpPr>
@@ -18855,7 +19314,7 @@
       </p:grpSp>
       <p:grpSp>
         <p:nvGrpSpPr>
-          <p:cNvPr id="10" name="Group 10"/>
+          <p:cNvPr id="11" name="Group 11"/>
           <p:cNvGrpSpPr/>
           <p:nvPr/>
         </p:nvGrpSpPr>
@@ -18869,7 +19328,7 @@
         </p:grpSpPr>
         <p:sp>
           <p:nvSpPr>
-            <p:cNvPr id="6" name="Rectangle 6"/>
+            <p:cNvPr id="7" name="Rectangle 7"/>
             <p:cNvSpPr/>
             <p:nvPr/>
           </p:nvSpPr>
@@ -18895,7 +19354,7 @@
         </p:sp>
         <p:sp>
           <p:nvSpPr>
-            <p:cNvPr id="7" name="Rectangle 7"/>
+            <p:cNvPr id="8" name="Rectangle 8"/>
             <p:cNvSpPr/>
             <p:nvPr/>
           </p:nvSpPr>
@@ -18919,7 +19378,7 @@
         </p:sp>
         <p:sp>
           <p:nvSpPr>
-            <p:cNvPr id="8" name="TextBox 8"/>
+            <p:cNvPr id="9" name="TextBox 9"/>
             <p:cNvSpPr txBox="1"/>
             <p:nvPr/>
           </p:nvSpPr>
@@ -18959,7 +19418,7 @@
         </p:sp>
         <p:sp>
           <p:nvSpPr>
-            <p:cNvPr id="9" name="TextBox 9"/>
+            <p:cNvPr id="10" name="TextBox 10"/>
             <p:cNvSpPr txBox="1"/>
             <p:nvPr/>
           </p:nvSpPr>
@@ -19002,7 +19461,7 @@
       </p:grpSp>
       <p:grpSp>
         <p:nvGrpSpPr>
-          <p:cNvPr id="15" name="Group 15"/>
+          <p:cNvPr id="16" name="Group 16"/>
           <p:cNvGrpSpPr/>
           <p:nvPr/>
         </p:nvGrpSpPr>
@@ -19016,7 +19475,7 @@
         </p:grpSpPr>
         <p:sp>
           <p:nvSpPr>
-            <p:cNvPr id="11" name="Rectangle 11"/>
+            <p:cNvPr id="12" name="Rectangle 12"/>
             <p:cNvSpPr/>
             <p:nvPr/>
           </p:nvSpPr>
@@ -19042,7 +19501,7 @@
         </p:sp>
         <p:sp>
           <p:nvSpPr>
-            <p:cNvPr id="12" name="Rectangle 12"/>
+            <p:cNvPr id="13" name="Rectangle 13"/>
             <p:cNvSpPr/>
             <p:nvPr/>
           </p:nvSpPr>
@@ -19066,7 +19525,7 @@
         </p:sp>
         <p:sp>
           <p:nvSpPr>
-            <p:cNvPr id="13" name="TextBox 13"/>
+            <p:cNvPr id="14" name="TextBox 14"/>
             <p:cNvSpPr txBox="1"/>
             <p:nvPr/>
           </p:nvSpPr>
@@ -19106,7 +19565,7 @@
         </p:sp>
         <p:sp>
           <p:nvSpPr>
-            <p:cNvPr id="14" name="TextBox 14"/>
+            <p:cNvPr id="15" name="TextBox 15"/>
             <p:cNvSpPr txBox="1"/>
             <p:nvPr/>
           </p:nvSpPr>
@@ -19149,7 +19608,7 @@
       </p:grpSp>
       <p:grpSp>
         <p:nvGrpSpPr>
-          <p:cNvPr id="20" name="Group 20"/>
+          <p:cNvPr id="21" name="Group 21"/>
           <p:cNvGrpSpPr/>
           <p:nvPr/>
         </p:nvGrpSpPr>
@@ -19163,7 +19622,7 @@
         </p:grpSpPr>
         <p:sp>
           <p:nvSpPr>
-            <p:cNvPr id="16" name="Rectangle 16"/>
+            <p:cNvPr id="17" name="Rectangle 17"/>
             <p:cNvSpPr/>
             <p:nvPr/>
           </p:nvSpPr>
@@ -19189,7 +19648,7 @@
         </p:sp>
         <p:sp>
           <p:nvSpPr>
-            <p:cNvPr id="17" name="Rectangle 17"/>
+            <p:cNvPr id="18" name="Rectangle 18"/>
             <p:cNvSpPr/>
             <p:nvPr/>
           </p:nvSpPr>
@@ -19213,7 +19672,7 @@
         </p:sp>
         <p:sp>
           <p:nvSpPr>
-            <p:cNvPr id="18" name="TextBox 18"/>
+            <p:cNvPr id="19" name="TextBox 19"/>
             <p:cNvSpPr txBox="1"/>
             <p:nvPr/>
           </p:nvSpPr>
@@ -19253,7 +19712,7 @@
         </p:sp>
         <p:sp>
           <p:nvSpPr>
-            <p:cNvPr id="19" name="TextBox 19"/>
+            <p:cNvPr id="20" name="TextBox 20"/>
             <p:cNvSpPr txBox="1"/>
             <p:nvPr/>
           </p:nvSpPr>
@@ -19296,7 +19755,7 @@
       </p:grpSp>
       <p:grpSp>
         <p:nvGrpSpPr>
-          <p:cNvPr id="23" name="Group 23"/>
+          <p:cNvPr id="24" name="Group 24"/>
           <p:cNvGrpSpPr/>
           <p:nvPr/>
         </p:nvGrpSpPr>
@@ -19310,7 +19769,7 @@
         </p:grpSpPr>
         <p:sp>
           <p:nvSpPr>
-            <p:cNvPr id="21" name="Rectangle 21"/>
+            <p:cNvPr id="22" name="Rectangle 22"/>
             <p:cNvSpPr/>
             <p:nvPr/>
           </p:nvSpPr>
@@ -19334,7 +19793,7 @@
         </p:sp>
         <p:sp>
           <p:nvSpPr>
-            <p:cNvPr id="22" name="TextBox 22"/>
+            <p:cNvPr id="23" name="TextBox 23"/>
             <p:cNvSpPr txBox="1"/>
             <p:nvPr/>
           </p:nvSpPr>
@@ -19375,7 +19834,7 @@
       </p:grpSp>
       <p:grpSp>
         <p:nvGrpSpPr>
-          <p:cNvPr id="26" name="Group 26"/>
+          <p:cNvPr id="27" name="Group 27"/>
           <p:cNvGrpSpPr/>
           <p:nvPr/>
         </p:nvGrpSpPr>
@@ -19389,7 +19848,7 @@
         </p:grpSpPr>
         <p:sp>
           <p:nvSpPr>
-            <p:cNvPr id="24" name="TextBox 24"/>
+            <p:cNvPr id="25" name="TextBox 25"/>
             <p:cNvSpPr txBox="1"/>
             <p:nvPr/>
           </p:nvSpPr>
@@ -19429,7 +19888,7 @@
         </p:sp>
         <p:sp>
           <p:nvSpPr>
-            <p:cNvPr id="25" name="TextBox 25"/>
+            <p:cNvPr id="26" name="TextBox 26"/>
             <p:cNvSpPr txBox="1"/>
             <p:nvPr/>
           </p:nvSpPr>
@@ -19504,9 +19963,36 @@
           <a:chExt cx="0" cy="0"/>
         </a:xfrm>
       </p:grpSpPr>
+      <p:pic>
+        <p:nvPicPr>
+          <p:cNvPr id="2" name="Image 2"/>
+          <p:cNvPicPr>
+            <a:picLocks noChangeAspect="1"/>
+          </p:cNvPicPr>
+          <p:nvPr/>
+        </p:nvPicPr>
+        <p:blipFill>
+          <a:blip r:embed="rId2">
+            <a:alphaModFix amt="48000"/>
+          </a:blip>
+          <a:srcRect l="0" t="27" r="0" b="27"/>
+          <a:stretch>
+            <a:fillRect/>
+          </a:stretch>
+        </p:blipFill>
+        <p:spPr>
+          <a:xfrm>
+            <a:off x="0" y="0"/>
+            <a:ext cx="12192000" cy="6858000"/>
+          </a:xfrm>
+          <a:prstGeom prst="rect">
+            <a:avLst/>
+          </a:prstGeom>
+        </p:spPr>
+      </p:pic>
       <p:grpSp>
         <p:nvGrpSpPr>
-          <p:cNvPr id="5" name="Group 5"/>
+          <p:cNvPr id="6" name="Group 6"/>
           <p:cNvGrpSpPr/>
           <p:nvPr/>
         </p:nvGrpSpPr>
@@ -19520,7 +20006,7 @@
         </p:grpSpPr>
         <p:sp>
           <p:nvSpPr>
-            <p:cNvPr id="2" name="TextBox 2"/>
+            <p:cNvPr id="3" name="TextBox 3"/>
             <p:cNvSpPr txBox="1"/>
             <p:nvPr/>
           </p:nvSpPr>
@@ -19560,7 +20046,7 @@
         </p:sp>
         <p:sp>
           <p:nvSpPr>
-            <p:cNvPr id="3" name="TextBox 3"/>
+            <p:cNvPr id="4" name="TextBox 4"/>
             <p:cNvSpPr txBox="1"/>
             <p:nvPr/>
           </p:nvSpPr>
@@ -19600,7 +20086,7 @@
         </p:sp>
         <p:sp>
           <p:nvSpPr>
-            <p:cNvPr id="4" name="Line 4"/>
+            <p:cNvPr id="5" name="Line 5"/>
             <p:cNvSpPr/>
             <p:nvPr/>
           </p:nvSpPr>
@@ -19637,73 +20123,7 @@
       </p:grpSp>
       <p:grpSp>
         <p:nvGrpSpPr>
-          <p:cNvPr id="8" name="Group 8"/>
-          <p:cNvGrpSpPr/>
-          <p:nvPr/>
-        </p:nvGrpSpPr>
-        <p:grpSpPr>
-          <a:xfrm>
-            <a:off x="685800" y="1695450"/>
-            <a:ext cx="10820400" cy="3000375"/>
-            <a:chOff x="685800" y="1695450"/>
-            <a:chExt cx="10820400" cy="3000375"/>
-          </a:xfrm>
-        </p:grpSpPr>
-        <p:sp>
-          <p:nvSpPr>
-            <p:cNvPr id="6" name="Rectangle 6"/>
-            <p:cNvSpPr/>
-            <p:nvPr/>
-          </p:nvSpPr>
-          <p:spPr>
-            <a:xfrm>
-              <a:off x="685800" y="1695450"/>
-              <a:ext cx="10820400" cy="3000375"/>
-            </a:xfrm>
-            <a:prstGeom prst="roundRect">
-              <a:avLst>
-                <a:gd name="adj" fmla="val 2540"/>
-              </a:avLst>
-            </a:prstGeom>
-            <a:solidFill>
-              <a:schemeClr val="lt2"/>
-            </a:solidFill>
-            <a:ln w="9525">
-              <a:solidFill>
-                <a:schemeClr val="accent6"/>
-              </a:solidFill>
-            </a:ln>
-          </p:spPr>
-        </p:sp>
-        <p:pic>
-          <p:nvPicPr>
-            <p:cNvPr id="7" name="Image 7"/>
-            <p:cNvPicPr>
-              <a:picLocks noChangeAspect="1"/>
-            </p:cNvPicPr>
-            <p:nvPr/>
-          </p:nvPicPr>
-          <p:blipFill>
-            <a:blip r:embed="rId2"/>
-            <a:srcRect l="0" t="26051" r="0" b="26051"/>
-            <a:stretch>
-              <a:fillRect/>
-            </a:stretch>
-          </p:blipFill>
-          <p:spPr>
-            <a:xfrm>
-              <a:off x="742950" y="1752600"/>
-              <a:ext cx="10706100" cy="2886075"/>
-            </a:xfrm>
-            <a:prstGeom prst="rect">
-              <a:avLst/>
-            </a:prstGeom>
-          </p:spPr>
-        </p:pic>
-      </p:grpSp>
-      <p:grpSp>
-        <p:nvGrpSpPr>
-          <p:cNvPr id="11" name="Group 11"/>
+          <p:cNvPr id="9" name="Group 9"/>
           <p:cNvGrpSpPr/>
           <p:nvPr/>
         </p:nvGrpSpPr>
@@ -19717,7 +20137,7 @@
         </p:grpSpPr>
         <p:sp>
           <p:nvSpPr>
-            <p:cNvPr id="9" name="Rectangle 9"/>
+            <p:cNvPr id="7" name="Rectangle 7"/>
             <p:cNvSpPr/>
             <p:nvPr/>
           </p:nvSpPr>
@@ -19741,7 +20161,7 @@
         </p:sp>
         <p:sp>
           <p:nvSpPr>
-            <p:cNvPr id="10" name="TextBox 10"/>
+            <p:cNvPr id="8" name="TextBox 8"/>
             <p:cNvSpPr txBox="1"/>
             <p:nvPr/>
           </p:nvSpPr>
@@ -19784,7 +20204,7 @@
       </p:grpSp>
       <p:grpSp>
         <p:nvGrpSpPr>
-          <p:cNvPr id="13" name="Group 13"/>
+          <p:cNvPr id="11" name="Group 11"/>
           <p:cNvGrpSpPr/>
           <p:nvPr/>
         </p:nvGrpSpPr>
@@ -19798,7 +20218,7 @@
         </p:grpSpPr>
         <p:sp>
           <p:nvSpPr>
-            <p:cNvPr id="12" name="TextBox 12"/>
+            <p:cNvPr id="10" name="TextBox 10"/>
             <p:cNvSpPr txBox="1"/>
             <p:nvPr/>
           </p:nvSpPr>
@@ -19839,7 +20259,7 @@
       </p:grpSp>
       <p:grpSp>
         <p:nvGrpSpPr>
-          <p:cNvPr id="16" name="Group 16"/>
+          <p:cNvPr id="14" name="Group 14"/>
           <p:cNvGrpSpPr/>
           <p:nvPr/>
         </p:nvGrpSpPr>
@@ -19853,7 +20273,7 @@
         </p:grpSpPr>
         <p:sp>
           <p:nvSpPr>
-            <p:cNvPr id="14" name="TextBox 14"/>
+            <p:cNvPr id="12" name="TextBox 12"/>
             <p:cNvSpPr txBox="1"/>
             <p:nvPr/>
           </p:nvSpPr>
@@ -19893,7 +20313,7 @@
         </p:sp>
         <p:sp>
           <p:nvSpPr>
-            <p:cNvPr id="15" name="TextBox 15"/>
+            <p:cNvPr id="13" name="TextBox 13"/>
             <p:cNvSpPr txBox="1"/>
             <p:nvPr/>
           </p:nvSpPr>
@@ -19968,9 +20388,36 @@
           <a:chExt cx="0" cy="0"/>
         </a:xfrm>
       </p:grpSpPr>
+      <p:pic>
+        <p:nvPicPr>
+          <p:cNvPr id="2" name="Image 2"/>
+          <p:cNvPicPr>
+            <a:picLocks noChangeAspect="1"/>
+          </p:cNvPicPr>
+          <p:nvPr/>
+        </p:nvPicPr>
+        <p:blipFill>
+          <a:blip r:embed="rId2">
+            <a:alphaModFix amt="14000"/>
+          </a:blip>
+          <a:srcRect l="0" t="27" r="0" b="27"/>
+          <a:stretch>
+            <a:fillRect/>
+          </a:stretch>
+        </p:blipFill>
+        <p:spPr>
+          <a:xfrm>
+            <a:off x="0" y="0"/>
+            <a:ext cx="12192000" cy="6858000"/>
+          </a:xfrm>
+          <a:prstGeom prst="rect">
+            <a:avLst/>
+          </a:prstGeom>
+        </p:spPr>
+      </p:pic>
       <p:grpSp>
         <p:nvGrpSpPr>
-          <p:cNvPr id="5" name="Group 5"/>
+          <p:cNvPr id="6" name="Group 6"/>
           <p:cNvGrpSpPr/>
           <p:nvPr/>
         </p:nvGrpSpPr>
@@ -19984,7 +20431,7 @@
         </p:grpSpPr>
         <p:sp>
           <p:nvSpPr>
-            <p:cNvPr id="2" name="TextBox 2"/>
+            <p:cNvPr id="3" name="TextBox 3"/>
             <p:cNvSpPr txBox="1"/>
             <p:nvPr/>
           </p:nvSpPr>
@@ -20024,7 +20471,7 @@
         </p:sp>
         <p:sp>
           <p:nvSpPr>
-            <p:cNvPr id="3" name="TextBox 3"/>
+            <p:cNvPr id="4" name="TextBox 4"/>
             <p:cNvSpPr txBox="1"/>
             <p:nvPr/>
           </p:nvSpPr>
@@ -20064,7 +20511,7 @@
         </p:sp>
         <p:sp>
           <p:nvSpPr>
-            <p:cNvPr id="4" name="Line 4"/>
+            <p:cNvPr id="5" name="Line 5"/>
             <p:cNvSpPr/>
             <p:nvPr/>
           </p:nvSpPr>
@@ -20101,7 +20548,7 @@
       </p:grpSp>
       <p:grpSp>
         <p:nvGrpSpPr>
-          <p:cNvPr id="10" name="Group 10"/>
+          <p:cNvPr id="11" name="Group 11"/>
           <p:cNvGrpSpPr/>
           <p:nvPr/>
         </p:nvGrpSpPr>
@@ -20115,7 +20562,7 @@
         </p:grpSpPr>
         <p:sp>
           <p:nvSpPr>
-            <p:cNvPr id="6" name="Rectangle 6"/>
+            <p:cNvPr id="7" name="Rectangle 7"/>
             <p:cNvSpPr/>
             <p:nvPr/>
           </p:nvSpPr>
@@ -20141,7 +20588,7 @@
         </p:sp>
         <p:sp>
           <p:nvSpPr>
-            <p:cNvPr id="7" name="Rectangle 7"/>
+            <p:cNvPr id="8" name="Rectangle 8"/>
             <p:cNvSpPr/>
             <p:nvPr/>
           </p:nvSpPr>
@@ -20165,7 +20612,7 @@
         </p:sp>
         <p:sp>
           <p:nvSpPr>
-            <p:cNvPr id="8" name="TextBox 8"/>
+            <p:cNvPr id="9" name="TextBox 9"/>
             <p:cNvSpPr txBox="1"/>
             <p:nvPr/>
           </p:nvSpPr>
@@ -20205,7 +20652,7 @@
         </p:sp>
         <p:sp>
           <p:nvSpPr>
-            <p:cNvPr id="9" name="TextBox 9"/>
+            <p:cNvPr id="10" name="TextBox 10"/>
             <p:cNvSpPr txBox="1"/>
             <p:nvPr/>
           </p:nvSpPr>
@@ -20248,7 +20695,7 @@
       </p:grpSp>
       <p:grpSp>
         <p:nvGrpSpPr>
-          <p:cNvPr id="15" name="Group 15"/>
+          <p:cNvPr id="16" name="Group 16"/>
           <p:cNvGrpSpPr/>
           <p:nvPr/>
         </p:nvGrpSpPr>
@@ -20262,7 +20709,7 @@
         </p:grpSpPr>
         <p:sp>
           <p:nvSpPr>
-            <p:cNvPr id="11" name="Rectangle 11"/>
+            <p:cNvPr id="12" name="Rectangle 12"/>
             <p:cNvSpPr/>
             <p:nvPr/>
           </p:nvSpPr>
@@ -20288,7 +20735,7 @@
         </p:sp>
         <p:sp>
           <p:nvSpPr>
-            <p:cNvPr id="12" name="Rectangle 12"/>
+            <p:cNvPr id="13" name="Rectangle 13"/>
             <p:cNvSpPr/>
             <p:nvPr/>
           </p:nvSpPr>
@@ -20312,7 +20759,7 @@
         </p:sp>
         <p:sp>
           <p:nvSpPr>
-            <p:cNvPr id="13" name="TextBox 13"/>
+            <p:cNvPr id="14" name="TextBox 14"/>
             <p:cNvSpPr txBox="1"/>
             <p:nvPr/>
           </p:nvSpPr>
@@ -20352,7 +20799,7 @@
         </p:sp>
         <p:sp>
           <p:nvSpPr>
-            <p:cNvPr id="14" name="TextBox 14"/>
+            <p:cNvPr id="15" name="TextBox 15"/>
             <p:cNvSpPr txBox="1"/>
             <p:nvPr/>
           </p:nvSpPr>
@@ -20395,7 +20842,7 @@
       </p:grpSp>
       <p:grpSp>
         <p:nvGrpSpPr>
-          <p:cNvPr id="18" name="Group 18"/>
+          <p:cNvPr id="19" name="Group 19"/>
           <p:cNvGrpSpPr/>
           <p:nvPr/>
         </p:nvGrpSpPr>
@@ -20409,7 +20856,7 @@
         </p:grpSpPr>
         <p:sp>
           <p:nvSpPr>
-            <p:cNvPr id="16" name="Rectangle 16"/>
+            <p:cNvPr id="17" name="Rectangle 17"/>
             <p:cNvSpPr/>
             <p:nvPr/>
           </p:nvSpPr>
@@ -20433,7 +20880,7 @@
         </p:sp>
         <p:sp>
           <p:nvSpPr>
-            <p:cNvPr id="17" name="TextBox 17"/>
+            <p:cNvPr id="18" name="TextBox 18"/>
             <p:cNvSpPr txBox="1"/>
             <p:nvPr/>
           </p:nvSpPr>
@@ -20476,7 +20923,7 @@
       </p:grpSp>
       <p:grpSp>
         <p:nvGrpSpPr>
-          <p:cNvPr id="21" name="Group 21"/>
+          <p:cNvPr id="22" name="Group 22"/>
           <p:cNvGrpSpPr/>
           <p:nvPr/>
         </p:nvGrpSpPr>
@@ -20490,7 +20937,7 @@
         </p:grpSpPr>
         <p:sp>
           <p:nvSpPr>
-            <p:cNvPr id="19" name="TextBox 19"/>
+            <p:cNvPr id="20" name="TextBox 20"/>
             <p:cNvSpPr txBox="1"/>
             <p:nvPr/>
           </p:nvSpPr>
@@ -20530,7 +20977,7 @@
         </p:sp>
         <p:sp>
           <p:nvSpPr>
-            <p:cNvPr id="20" name="TextBox 20"/>
+            <p:cNvPr id="21" name="TextBox 21"/>
             <p:cNvSpPr txBox="1"/>
             <p:nvPr/>
           </p:nvSpPr>
@@ -20605,9 +21052,36 @@
           <a:chExt cx="0" cy="0"/>
         </a:xfrm>
       </p:grpSpPr>
+      <p:pic>
+        <p:nvPicPr>
+          <p:cNvPr id="2" name="Image 2"/>
+          <p:cNvPicPr>
+            <a:picLocks noChangeAspect="1"/>
+          </p:cNvPicPr>
+          <p:nvPr/>
+        </p:nvPicPr>
+        <p:blipFill>
+          <a:blip r:embed="rId2">
+            <a:alphaModFix amt="14000"/>
+          </a:blip>
+          <a:srcRect l="0" t="27" r="0" b="27"/>
+          <a:stretch>
+            <a:fillRect/>
+          </a:stretch>
+        </p:blipFill>
+        <p:spPr>
+          <a:xfrm>
+            <a:off x="0" y="0"/>
+            <a:ext cx="12192000" cy="6858000"/>
+          </a:xfrm>
+          <a:prstGeom prst="rect">
+            <a:avLst/>
+          </a:prstGeom>
+        </p:spPr>
+      </p:pic>
       <p:grpSp>
         <p:nvGrpSpPr>
-          <p:cNvPr id="5" name="Group 5"/>
+          <p:cNvPr id="6" name="Group 6"/>
           <p:cNvGrpSpPr/>
           <p:nvPr/>
         </p:nvGrpSpPr>
@@ -20621,7 +21095,7 @@
         </p:grpSpPr>
         <p:sp>
           <p:nvSpPr>
-            <p:cNvPr id="2" name="TextBox 2"/>
+            <p:cNvPr id="3" name="TextBox 3"/>
             <p:cNvSpPr txBox="1"/>
             <p:nvPr/>
           </p:nvSpPr>
@@ -20661,7 +21135,7 @@
         </p:sp>
         <p:sp>
           <p:nvSpPr>
-            <p:cNvPr id="3" name="TextBox 3"/>
+            <p:cNvPr id="4" name="TextBox 4"/>
             <p:cNvSpPr txBox="1"/>
             <p:nvPr/>
           </p:nvSpPr>
@@ -20701,7 +21175,7 @@
         </p:sp>
         <p:sp>
           <p:nvSpPr>
-            <p:cNvPr id="4" name="Line 4"/>
+            <p:cNvPr id="5" name="Line 5"/>
             <p:cNvSpPr/>
             <p:nvPr/>
           </p:nvSpPr>
@@ -20738,7 +21212,7 @@
       </p:grpSp>
       <p:grpSp>
         <p:nvGrpSpPr>
-          <p:cNvPr id="8" name="Group 8"/>
+          <p:cNvPr id="9" name="Group 9"/>
           <p:cNvGrpSpPr/>
           <p:nvPr/>
         </p:nvGrpSpPr>
@@ -20752,7 +21226,7 @@
         </p:grpSpPr>
         <p:sp>
           <p:nvSpPr>
-            <p:cNvPr id="6" name="Rectangle 6"/>
+            <p:cNvPr id="7" name="Rectangle 7"/>
             <p:cNvSpPr/>
             <p:nvPr/>
           </p:nvSpPr>
@@ -20778,14 +21252,14 @@
         </p:sp>
         <p:pic>
           <p:nvPicPr>
-            <p:cNvPr id="7" name="Image 7"/>
+            <p:cNvPr id="8" name="Image 8"/>
             <p:cNvPicPr>
               <a:picLocks noChangeAspect="1"/>
             </p:cNvPicPr>
             <p:nvPr/>
           </p:nvPicPr>
           <p:blipFill>
-            <a:blip r:embed="rId2"/>
+            <a:blip r:embed="rId3"/>
             <a:srcRect l="14273" t="0" r="14273" b="0"/>
             <a:stretch>
               <a:fillRect/>
@@ -20804,7 +21278,7 @@
       </p:grpSp>
       <p:grpSp>
         <p:nvGrpSpPr>
-          <p:cNvPr id="13" name="Group 13"/>
+          <p:cNvPr id="14" name="Group 14"/>
           <p:cNvGrpSpPr/>
           <p:nvPr/>
         </p:nvGrpSpPr>
@@ -20818,7 +21292,7 @@
         </p:grpSpPr>
         <p:sp>
           <p:nvSpPr>
-            <p:cNvPr id="9" name="Rectangle 9"/>
+            <p:cNvPr id="10" name="Rectangle 10"/>
             <p:cNvSpPr/>
             <p:nvPr/>
           </p:nvSpPr>
@@ -20844,7 +21318,7 @@
         </p:sp>
         <p:sp>
           <p:nvSpPr>
-            <p:cNvPr id="10" name="Rectangle 10"/>
+            <p:cNvPr id="11" name="Rectangle 11"/>
             <p:cNvSpPr/>
             <p:nvPr/>
           </p:nvSpPr>
@@ -20868,7 +21342,7 @@
         </p:sp>
         <p:sp>
           <p:nvSpPr>
-            <p:cNvPr id="11" name="TextBox 11"/>
+            <p:cNvPr id="12" name="TextBox 12"/>
             <p:cNvSpPr txBox="1"/>
             <p:nvPr/>
           </p:nvSpPr>
@@ -20908,7 +21382,7 @@
         </p:sp>
         <p:sp>
           <p:nvSpPr>
-            <p:cNvPr id="12" name="TextBox 12"/>
+            <p:cNvPr id="13" name="TextBox 13"/>
             <p:cNvSpPr txBox="1"/>
             <p:nvPr/>
           </p:nvSpPr>
@@ -20949,7 +21423,7 @@
       </p:grpSp>
       <p:grpSp>
         <p:nvGrpSpPr>
-          <p:cNvPr id="18" name="Group 18"/>
+          <p:cNvPr id="19" name="Group 19"/>
           <p:cNvGrpSpPr/>
           <p:nvPr/>
         </p:nvGrpSpPr>
@@ -20963,7 +21437,7 @@
         </p:grpSpPr>
         <p:sp>
           <p:nvSpPr>
-            <p:cNvPr id="14" name="Rectangle 14"/>
+            <p:cNvPr id="15" name="Rectangle 15"/>
             <p:cNvSpPr/>
             <p:nvPr/>
           </p:nvSpPr>
@@ -20989,7 +21463,7 @@
         </p:sp>
         <p:sp>
           <p:nvSpPr>
-            <p:cNvPr id="15" name="Rectangle 15"/>
+            <p:cNvPr id="16" name="Rectangle 16"/>
             <p:cNvSpPr/>
             <p:nvPr/>
           </p:nvSpPr>
@@ -21013,7 +21487,7 @@
         </p:sp>
         <p:sp>
           <p:nvSpPr>
-            <p:cNvPr id="16" name="TextBox 16"/>
+            <p:cNvPr id="17" name="TextBox 17"/>
             <p:cNvSpPr txBox="1"/>
             <p:nvPr/>
           </p:nvSpPr>
@@ -21053,7 +21527,7 @@
         </p:sp>
         <p:sp>
           <p:nvSpPr>
-            <p:cNvPr id="17" name="TextBox 17"/>
+            <p:cNvPr id="18" name="TextBox 18"/>
             <p:cNvSpPr txBox="1"/>
             <p:nvPr/>
           </p:nvSpPr>
@@ -21094,7 +21568,7 @@
       </p:grpSp>
       <p:grpSp>
         <p:nvGrpSpPr>
-          <p:cNvPr id="23" name="Group 23"/>
+          <p:cNvPr id="24" name="Group 24"/>
           <p:cNvGrpSpPr/>
           <p:nvPr/>
         </p:nvGrpSpPr>
@@ -21108,7 +21582,7 @@
         </p:grpSpPr>
         <p:sp>
           <p:nvSpPr>
-            <p:cNvPr id="19" name="Rectangle 19"/>
+            <p:cNvPr id="20" name="Rectangle 20"/>
             <p:cNvSpPr/>
             <p:nvPr/>
           </p:nvSpPr>
@@ -21134,7 +21608,7 @@
         </p:sp>
         <p:sp>
           <p:nvSpPr>
-            <p:cNvPr id="20" name="Rectangle 20"/>
+            <p:cNvPr id="21" name="Rectangle 21"/>
             <p:cNvSpPr/>
             <p:nvPr/>
           </p:nvSpPr>
@@ -21158,7 +21632,7 @@
         </p:sp>
         <p:sp>
           <p:nvSpPr>
-            <p:cNvPr id="21" name="TextBox 21"/>
+            <p:cNvPr id="22" name="TextBox 22"/>
             <p:cNvSpPr txBox="1"/>
             <p:nvPr/>
           </p:nvSpPr>
@@ -21198,7 +21672,7 @@
         </p:sp>
         <p:sp>
           <p:nvSpPr>
-            <p:cNvPr id="22" name="TextBox 22"/>
+            <p:cNvPr id="23" name="TextBox 23"/>
             <p:cNvSpPr txBox="1"/>
             <p:nvPr/>
           </p:nvSpPr>
@@ -21239,7 +21713,7 @@
       </p:grpSp>
       <p:grpSp>
         <p:nvGrpSpPr>
-          <p:cNvPr id="25" name="Group 25"/>
+          <p:cNvPr id="26" name="Group 26"/>
           <p:cNvGrpSpPr/>
           <p:nvPr/>
         </p:nvGrpSpPr>
@@ -21253,7 +21727,7 @@
         </p:grpSpPr>
         <p:sp>
           <p:nvSpPr>
-            <p:cNvPr id="24" name="TextBox 24"/>
+            <p:cNvPr id="25" name="TextBox 25"/>
             <p:cNvSpPr txBox="1"/>
             <p:nvPr/>
           </p:nvSpPr>
@@ -21294,7 +21768,7 @@
       </p:grpSp>
       <p:grpSp>
         <p:nvGrpSpPr>
-          <p:cNvPr id="28" name="Group 28"/>
+          <p:cNvPr id="29" name="Group 29"/>
           <p:cNvGrpSpPr/>
           <p:nvPr/>
         </p:nvGrpSpPr>
@@ -21308,7 +21782,7 @@
         </p:grpSpPr>
         <p:sp>
           <p:nvSpPr>
-            <p:cNvPr id="26" name="TextBox 26"/>
+            <p:cNvPr id="27" name="TextBox 27"/>
             <p:cNvSpPr txBox="1"/>
             <p:nvPr/>
           </p:nvSpPr>
@@ -21348,7 +21822,7 @@
         </p:sp>
         <p:sp>
           <p:nvSpPr>
-            <p:cNvPr id="27" name="TextBox 27"/>
+            <p:cNvPr id="28" name="TextBox 28"/>
             <p:cNvSpPr txBox="1"/>
             <p:nvPr/>
           </p:nvSpPr>
@@ -21423,9 +21897,36 @@
           <a:chExt cx="0" cy="0"/>
         </a:xfrm>
       </p:grpSpPr>
+      <p:pic>
+        <p:nvPicPr>
+          <p:cNvPr id="2" name="Image 2"/>
+          <p:cNvPicPr>
+            <a:picLocks noChangeAspect="1"/>
+          </p:cNvPicPr>
+          <p:nvPr/>
+        </p:nvPicPr>
+        <p:blipFill>
+          <a:blip r:embed="rId2">
+            <a:alphaModFix amt="14000"/>
+          </a:blip>
+          <a:srcRect l="0" t="27" r="0" b="27"/>
+          <a:stretch>
+            <a:fillRect/>
+          </a:stretch>
+        </p:blipFill>
+        <p:spPr>
+          <a:xfrm>
+            <a:off x="0" y="0"/>
+            <a:ext cx="12192000" cy="6858000"/>
+          </a:xfrm>
+          <a:prstGeom prst="rect">
+            <a:avLst/>
+          </a:prstGeom>
+        </p:spPr>
+      </p:pic>
       <p:grpSp>
         <p:nvGrpSpPr>
-          <p:cNvPr id="5" name="Group 5"/>
+          <p:cNvPr id="6" name="Group 6"/>
           <p:cNvGrpSpPr/>
           <p:nvPr/>
         </p:nvGrpSpPr>
@@ -21439,7 +21940,7 @@
         </p:grpSpPr>
         <p:sp>
           <p:nvSpPr>
-            <p:cNvPr id="2" name="TextBox 2"/>
+            <p:cNvPr id="3" name="TextBox 3"/>
             <p:cNvSpPr txBox="1"/>
             <p:nvPr/>
           </p:nvSpPr>
@@ -21479,7 +21980,7 @@
         </p:sp>
         <p:sp>
           <p:nvSpPr>
-            <p:cNvPr id="3" name="TextBox 3"/>
+            <p:cNvPr id="4" name="TextBox 4"/>
             <p:cNvSpPr txBox="1"/>
             <p:nvPr/>
           </p:nvSpPr>
@@ -21519,7 +22020,7 @@
         </p:sp>
         <p:sp>
           <p:nvSpPr>
-            <p:cNvPr id="4" name="Line 4"/>
+            <p:cNvPr id="5" name="Line 5"/>
             <p:cNvSpPr/>
             <p:nvPr/>
           </p:nvSpPr>
@@ -21556,7 +22057,7 @@
       </p:grpSp>
       <p:grpSp>
         <p:nvGrpSpPr>
-          <p:cNvPr id="10" name="Group 10"/>
+          <p:cNvPr id="11" name="Group 11"/>
           <p:cNvGrpSpPr/>
           <p:nvPr/>
         </p:nvGrpSpPr>
@@ -21570,7 +22071,7 @@
         </p:grpSpPr>
         <p:sp>
           <p:nvSpPr>
-            <p:cNvPr id="6" name="Rectangle 6"/>
+            <p:cNvPr id="7" name="Rectangle 7"/>
             <p:cNvSpPr/>
             <p:nvPr/>
           </p:nvSpPr>
@@ -21596,7 +22097,7 @@
         </p:sp>
         <p:sp>
           <p:nvSpPr>
-            <p:cNvPr id="7" name="Rectangle 7"/>
+            <p:cNvPr id="8" name="Rectangle 8"/>
             <p:cNvSpPr/>
             <p:nvPr/>
           </p:nvSpPr>
@@ -21620,7 +22121,7 @@
         </p:sp>
         <p:sp>
           <p:nvSpPr>
-            <p:cNvPr id="8" name="TextBox 8"/>
+            <p:cNvPr id="9" name="TextBox 9"/>
             <p:cNvSpPr txBox="1"/>
             <p:nvPr/>
           </p:nvSpPr>
@@ -21660,7 +22161,7 @@
         </p:sp>
         <p:sp>
           <p:nvSpPr>
-            <p:cNvPr id="9" name="TextBox 9"/>
+            <p:cNvPr id="10" name="TextBox 10"/>
             <p:cNvSpPr txBox="1"/>
             <p:nvPr/>
           </p:nvSpPr>
@@ -21703,7 +22204,7 @@
       </p:grpSp>
       <p:grpSp>
         <p:nvGrpSpPr>
-          <p:cNvPr id="15" name="Group 15"/>
+          <p:cNvPr id="16" name="Group 16"/>
           <p:cNvGrpSpPr/>
           <p:nvPr/>
         </p:nvGrpSpPr>
@@ -21717,7 +22218,7 @@
         </p:grpSpPr>
         <p:sp>
           <p:nvSpPr>
-            <p:cNvPr id="11" name="Rectangle 11"/>
+            <p:cNvPr id="12" name="Rectangle 12"/>
             <p:cNvSpPr/>
             <p:nvPr/>
           </p:nvSpPr>
@@ -21743,7 +22244,7 @@
         </p:sp>
         <p:sp>
           <p:nvSpPr>
-            <p:cNvPr id="12" name="Rectangle 12"/>
+            <p:cNvPr id="13" name="Rectangle 13"/>
             <p:cNvSpPr/>
             <p:nvPr/>
           </p:nvSpPr>
@@ -21767,7 +22268,7 @@
         </p:sp>
         <p:sp>
           <p:nvSpPr>
-            <p:cNvPr id="13" name="TextBox 13"/>
+            <p:cNvPr id="14" name="TextBox 14"/>
             <p:cNvSpPr txBox="1"/>
             <p:nvPr/>
           </p:nvSpPr>
@@ -21807,7 +22308,7 @@
         </p:sp>
         <p:sp>
           <p:nvSpPr>
-            <p:cNvPr id="14" name="TextBox 14"/>
+            <p:cNvPr id="15" name="TextBox 15"/>
             <p:cNvSpPr txBox="1"/>
             <p:nvPr/>
           </p:nvSpPr>
@@ -21850,7 +22351,7 @@
       </p:grpSp>
       <p:grpSp>
         <p:nvGrpSpPr>
-          <p:cNvPr id="20" name="Group 20"/>
+          <p:cNvPr id="21" name="Group 21"/>
           <p:cNvGrpSpPr/>
           <p:nvPr/>
         </p:nvGrpSpPr>
@@ -21864,7 +22365,7 @@
         </p:grpSpPr>
         <p:sp>
           <p:nvSpPr>
-            <p:cNvPr id="16" name="Rectangle 16"/>
+            <p:cNvPr id="17" name="Rectangle 17"/>
             <p:cNvSpPr/>
             <p:nvPr/>
           </p:nvSpPr>
@@ -21890,7 +22391,7 @@
         </p:sp>
         <p:sp>
           <p:nvSpPr>
-            <p:cNvPr id="17" name="Rectangle 17"/>
+            <p:cNvPr id="18" name="Rectangle 18"/>
             <p:cNvSpPr/>
             <p:nvPr/>
           </p:nvSpPr>
@@ -21914,7 +22415,7 @@
         </p:sp>
         <p:sp>
           <p:nvSpPr>
-            <p:cNvPr id="18" name="TextBox 18"/>
+            <p:cNvPr id="19" name="TextBox 19"/>
             <p:cNvSpPr txBox="1"/>
             <p:nvPr/>
           </p:nvSpPr>
@@ -21954,7 +22455,7 @@
         </p:sp>
         <p:sp>
           <p:nvSpPr>
-            <p:cNvPr id="19" name="TextBox 19"/>
+            <p:cNvPr id="20" name="TextBox 20"/>
             <p:cNvSpPr txBox="1"/>
             <p:nvPr/>
           </p:nvSpPr>
@@ -21997,7 +22498,7 @@
       </p:grpSp>
       <p:grpSp>
         <p:nvGrpSpPr>
-          <p:cNvPr id="25" name="Group 25"/>
+          <p:cNvPr id="26" name="Group 26"/>
           <p:cNvGrpSpPr/>
           <p:nvPr/>
         </p:nvGrpSpPr>
@@ -22011,7 +22512,7 @@
         </p:grpSpPr>
         <p:sp>
           <p:nvSpPr>
-            <p:cNvPr id="21" name="Rectangle 21"/>
+            <p:cNvPr id="22" name="Rectangle 22"/>
             <p:cNvSpPr/>
             <p:nvPr/>
           </p:nvSpPr>
@@ -22037,7 +22538,7 @@
         </p:sp>
         <p:sp>
           <p:nvSpPr>
-            <p:cNvPr id="22" name="Rectangle 22"/>
+            <p:cNvPr id="23" name="Rectangle 23"/>
             <p:cNvSpPr/>
             <p:nvPr/>
           </p:nvSpPr>
@@ -22061,7 +22562,7 @@
         </p:sp>
         <p:sp>
           <p:nvSpPr>
-            <p:cNvPr id="23" name="TextBox 23"/>
+            <p:cNvPr id="24" name="TextBox 24"/>
             <p:cNvSpPr txBox="1"/>
             <p:nvPr/>
           </p:nvSpPr>
@@ -22101,7 +22602,7 @@
         </p:sp>
         <p:sp>
           <p:nvSpPr>
-            <p:cNvPr id="24" name="TextBox 24"/>
+            <p:cNvPr id="25" name="TextBox 25"/>
             <p:cNvSpPr txBox="1"/>
             <p:nvPr/>
           </p:nvSpPr>
@@ -22144,7 +22645,7 @@
       </p:grpSp>
       <p:grpSp>
         <p:nvGrpSpPr>
-          <p:cNvPr id="28" name="Group 28"/>
+          <p:cNvPr id="29" name="Group 29"/>
           <p:cNvGrpSpPr/>
           <p:nvPr/>
         </p:nvGrpSpPr>
@@ -22158,7 +22659,7 @@
         </p:grpSpPr>
         <p:sp>
           <p:nvSpPr>
-            <p:cNvPr id="26" name="Rectangle 26"/>
+            <p:cNvPr id="27" name="Rectangle 27"/>
             <p:cNvSpPr/>
             <p:nvPr/>
           </p:nvSpPr>
@@ -22182,7 +22683,7 @@
         </p:sp>
         <p:sp>
           <p:nvSpPr>
-            <p:cNvPr id="27" name="TextBox 27"/>
+            <p:cNvPr id="28" name="TextBox 28"/>
             <p:cNvSpPr txBox="1"/>
             <p:nvPr/>
           </p:nvSpPr>
@@ -22223,7 +22724,7 @@
       </p:grpSp>
       <p:grpSp>
         <p:nvGrpSpPr>
-          <p:cNvPr id="31" name="Group 31"/>
+          <p:cNvPr id="32" name="Group 32"/>
           <p:cNvGrpSpPr/>
           <p:nvPr/>
         </p:nvGrpSpPr>
@@ -22237,7 +22738,7 @@
         </p:grpSpPr>
         <p:sp>
           <p:nvSpPr>
-            <p:cNvPr id="29" name="TextBox 29"/>
+            <p:cNvPr id="30" name="TextBox 30"/>
             <p:cNvSpPr txBox="1"/>
             <p:nvPr/>
           </p:nvSpPr>
@@ -22277,7 +22778,7 @@
         </p:sp>
         <p:sp>
           <p:nvSpPr>
-            <p:cNvPr id="30" name="TextBox 30"/>
+            <p:cNvPr id="31" name="TextBox 31"/>
             <p:cNvSpPr txBox="1"/>
             <p:nvPr/>
           </p:nvSpPr>
@@ -22352,9 +22853,36 @@
           <a:chExt cx="0" cy="0"/>
         </a:xfrm>
       </p:grpSpPr>
+      <p:pic>
+        <p:nvPicPr>
+          <p:cNvPr id="2" name="Image 2"/>
+          <p:cNvPicPr>
+            <a:picLocks noChangeAspect="1"/>
+          </p:cNvPicPr>
+          <p:nvPr/>
+        </p:nvPicPr>
+        <p:blipFill>
+          <a:blip r:embed="rId2">
+            <a:alphaModFix amt="14000"/>
+          </a:blip>
+          <a:srcRect l="0" t="27" r="0" b="27"/>
+          <a:stretch>
+            <a:fillRect/>
+          </a:stretch>
+        </p:blipFill>
+        <p:spPr>
+          <a:xfrm>
+            <a:off x="0" y="0"/>
+            <a:ext cx="12192000" cy="6858000"/>
+          </a:xfrm>
+          <a:prstGeom prst="rect">
+            <a:avLst/>
+          </a:prstGeom>
+        </p:spPr>
+      </p:pic>
       <p:grpSp>
         <p:nvGrpSpPr>
-          <p:cNvPr id="5" name="Group 5"/>
+          <p:cNvPr id="6" name="Group 6"/>
           <p:cNvGrpSpPr/>
           <p:nvPr/>
         </p:nvGrpSpPr>
@@ -22368,7 +22896,7 @@
         </p:grpSpPr>
         <p:sp>
           <p:nvSpPr>
-            <p:cNvPr id="2" name="TextBox 2"/>
+            <p:cNvPr id="3" name="TextBox 3"/>
             <p:cNvSpPr txBox="1"/>
             <p:nvPr/>
           </p:nvSpPr>
@@ -22408,7 +22936,7 @@
         </p:sp>
         <p:sp>
           <p:nvSpPr>
-            <p:cNvPr id="3" name="TextBox 3"/>
+            <p:cNvPr id="4" name="TextBox 4"/>
             <p:cNvSpPr txBox="1"/>
             <p:nvPr/>
           </p:nvSpPr>
@@ -22448,7 +22976,7 @@
         </p:sp>
         <p:sp>
           <p:nvSpPr>
-            <p:cNvPr id="4" name="Line 4"/>
+            <p:cNvPr id="5" name="Line 5"/>
             <p:cNvSpPr/>
             <p:nvPr/>
           </p:nvSpPr>
@@ -22485,7 +23013,7 @@
       </p:grpSp>
       <p:grpSp>
         <p:nvGrpSpPr>
-          <p:cNvPr id="36" name="Group 36"/>
+          <p:cNvPr id="37" name="Group 37"/>
           <p:cNvGrpSpPr/>
           <p:nvPr/>
         </p:nvGrpSpPr>
@@ -22499,7 +23027,7 @@
         </p:grpSpPr>
         <p:sp>
           <p:nvSpPr>
-            <p:cNvPr id="6" name="Rectangle 6"/>
+            <p:cNvPr id="7" name="Rectangle 7"/>
             <p:cNvSpPr/>
             <p:nvPr/>
           </p:nvSpPr>
@@ -22525,7 +23053,7 @@
         </p:sp>
         <p:sp>
           <p:nvSpPr>
-            <p:cNvPr id="7" name="Rectangle 7"/>
+            <p:cNvPr id="8" name="Rectangle 8"/>
             <p:cNvSpPr/>
             <p:nvPr/>
           </p:nvSpPr>
@@ -22549,7 +23077,7 @@
         </p:sp>
         <p:sp>
           <p:nvSpPr>
-            <p:cNvPr id="8" name="TextBox 8"/>
+            <p:cNvPr id="9" name="TextBox 9"/>
             <p:cNvSpPr txBox="1"/>
             <p:nvPr/>
           </p:nvSpPr>
@@ -22589,7 +23117,7 @@
         </p:sp>
         <p:sp>
           <p:nvSpPr>
-            <p:cNvPr id="9" name="Rectangle 9"/>
+            <p:cNvPr id="10" name="Rectangle 10"/>
             <p:cNvSpPr/>
             <p:nvPr/>
           </p:nvSpPr>
@@ -22615,7 +23143,7 @@
         </p:sp>
         <p:sp>
           <p:nvSpPr>
-            <p:cNvPr id="10" name="TextBox 10"/>
+            <p:cNvPr id="11" name="TextBox 11"/>
             <p:cNvSpPr txBox="1"/>
             <p:nvPr/>
           </p:nvSpPr>
@@ -22655,7 +23183,7 @@
         </p:sp>
         <p:sp>
           <p:nvSpPr>
-            <p:cNvPr id="11" name="Rectangle 11"/>
+            <p:cNvPr id="12" name="Rectangle 12"/>
             <p:cNvSpPr/>
             <p:nvPr/>
           </p:nvSpPr>
@@ -22681,7 +23209,7 @@
         </p:sp>
         <p:sp>
           <p:nvSpPr>
-            <p:cNvPr id="12" name="TextBox 12"/>
+            <p:cNvPr id="13" name="TextBox 13"/>
             <p:cNvSpPr txBox="1"/>
             <p:nvPr/>
           </p:nvSpPr>
@@ -22721,7 +23249,7 @@
         </p:sp>
         <p:sp>
           <p:nvSpPr>
-            <p:cNvPr id="13" name="Rectangle 13"/>
+            <p:cNvPr id="14" name="Rectangle 14"/>
             <p:cNvSpPr/>
             <p:nvPr/>
           </p:nvSpPr>
@@ -22747,7 +23275,7 @@
         </p:sp>
         <p:sp>
           <p:nvSpPr>
-            <p:cNvPr id="14" name="TextBox 14"/>
+            <p:cNvPr id="15" name="TextBox 15"/>
             <p:cNvSpPr txBox="1"/>
             <p:nvPr/>
           </p:nvSpPr>
@@ -22787,7 +23315,7 @@
         </p:sp>
         <p:sp>
           <p:nvSpPr>
-            <p:cNvPr id="15" name="Rectangle 15"/>
+            <p:cNvPr id="16" name="Rectangle 16"/>
             <p:cNvSpPr/>
             <p:nvPr/>
           </p:nvSpPr>
@@ -22813,7 +23341,7 @@
         </p:sp>
         <p:sp>
           <p:nvSpPr>
-            <p:cNvPr id="16" name="TextBox 16"/>
+            <p:cNvPr id="17" name="TextBox 17"/>
             <p:cNvSpPr txBox="1"/>
             <p:nvPr/>
           </p:nvSpPr>
@@ -22853,7 +23381,7 @@
         </p:sp>
         <p:sp>
           <p:nvSpPr>
-            <p:cNvPr id="17" name="Freeform 17"/>
+            <p:cNvPr id="18" name="Freeform 18"/>
             <p:cNvSpPr/>
             <p:nvPr/>
           </p:nvSpPr>
@@ -22891,7 +23419,7 @@
         </p:sp>
         <p:sp>
           <p:nvSpPr>
-            <p:cNvPr id="18" name="Rectangle 18"/>
+            <p:cNvPr id="19" name="Rectangle 19"/>
             <p:cNvSpPr/>
             <p:nvPr/>
           </p:nvSpPr>
@@ -22915,7 +23443,7 @@
         </p:sp>
         <p:sp>
           <p:nvSpPr>
-            <p:cNvPr id="19" name="TextBox 19"/>
+            <p:cNvPr id="20" name="TextBox 20"/>
             <p:cNvSpPr txBox="1"/>
             <p:nvPr/>
           </p:nvSpPr>
@@ -22955,7 +23483,7 @@
         </p:sp>
         <p:sp>
           <p:nvSpPr>
-            <p:cNvPr id="20" name="TextBox 20"/>
+            <p:cNvPr id="21" name="TextBox 21"/>
             <p:cNvSpPr txBox="1"/>
             <p:nvPr/>
           </p:nvSpPr>
@@ -23002,7 +23530,7 @@
         </p:sp>
         <p:sp>
           <p:nvSpPr>
-            <p:cNvPr id="21" name="TextBox 21"/>
+            <p:cNvPr id="22" name="TextBox 22"/>
             <p:cNvSpPr txBox="1"/>
             <p:nvPr/>
           </p:nvSpPr>
@@ -23049,7 +23577,7 @@
         </p:sp>
         <p:sp>
           <p:nvSpPr>
-            <p:cNvPr id="22" name="TextBox 22"/>
+            <p:cNvPr id="23" name="TextBox 23"/>
             <p:cNvSpPr txBox="1"/>
             <p:nvPr/>
           </p:nvSpPr>
@@ -23096,7 +23624,7 @@
         </p:sp>
         <p:sp>
           <p:nvSpPr>
-            <p:cNvPr id="23" name="TextBox 23"/>
+            <p:cNvPr id="24" name="TextBox 24"/>
             <p:cNvSpPr txBox="1"/>
             <p:nvPr/>
           </p:nvSpPr>
@@ -23143,7 +23671,7 @@
         </p:sp>
         <p:sp>
           <p:nvSpPr>
-            <p:cNvPr id="24" name="Freeform 24"/>
+            <p:cNvPr id="25" name="Freeform 25"/>
             <p:cNvSpPr/>
             <p:nvPr/>
           </p:nvSpPr>
@@ -23181,7 +23709,7 @@
         </p:sp>
         <p:sp>
           <p:nvSpPr>
-            <p:cNvPr id="25" name="Rectangle 25"/>
+            <p:cNvPr id="26" name="Rectangle 26"/>
             <p:cNvSpPr/>
             <p:nvPr/>
           </p:nvSpPr>
@@ -23207,7 +23735,7 @@
         </p:sp>
         <p:sp>
           <p:nvSpPr>
-            <p:cNvPr id="26" name="TextBox 26"/>
+            <p:cNvPr id="27" name="TextBox 27"/>
             <p:cNvSpPr txBox="1"/>
             <p:nvPr/>
           </p:nvSpPr>
@@ -23247,7 +23775,7 @@
         </p:sp>
         <p:sp>
           <p:nvSpPr>
-            <p:cNvPr id="27" name="Rectangle 27"/>
+            <p:cNvPr id="28" name="Rectangle 28"/>
             <p:cNvSpPr/>
             <p:nvPr/>
           </p:nvSpPr>
@@ -23273,7 +23801,7 @@
         </p:sp>
         <p:sp>
           <p:nvSpPr>
-            <p:cNvPr id="28" name="TextBox 28"/>
+            <p:cNvPr id="29" name="TextBox 29"/>
             <p:cNvSpPr txBox="1"/>
             <p:nvPr/>
           </p:nvSpPr>
@@ -23313,7 +23841,7 @@
         </p:sp>
         <p:sp>
           <p:nvSpPr>
-            <p:cNvPr id="29" name="TextBox 29"/>
+            <p:cNvPr id="30" name="TextBox 30"/>
             <p:cNvSpPr txBox="1"/>
             <p:nvPr/>
           </p:nvSpPr>
@@ -23353,7 +23881,7 @@
         </p:sp>
         <p:sp>
           <p:nvSpPr>
-            <p:cNvPr id="30" name="Rectangle 30"/>
+            <p:cNvPr id="31" name="Rectangle 31"/>
             <p:cNvSpPr/>
             <p:nvPr/>
           </p:nvSpPr>
@@ -23379,7 +23907,7 @@
         </p:sp>
         <p:sp>
           <p:nvSpPr>
-            <p:cNvPr id="31" name="TextBox 31"/>
+            <p:cNvPr id="32" name="TextBox 32"/>
             <p:cNvSpPr txBox="1"/>
             <p:nvPr/>
           </p:nvSpPr>
@@ -23419,7 +23947,7 @@
         </p:sp>
         <p:sp>
           <p:nvSpPr>
-            <p:cNvPr id="32" name="TextBox 32"/>
+            <p:cNvPr id="33" name="TextBox 33"/>
             <p:cNvSpPr txBox="1"/>
             <p:nvPr/>
           </p:nvSpPr>
@@ -23459,7 +23987,7 @@
         </p:sp>
         <p:sp>
           <p:nvSpPr>
-            <p:cNvPr id="33" name="Rectangle 33"/>
+            <p:cNvPr id="34" name="Rectangle 34"/>
             <p:cNvSpPr/>
             <p:nvPr/>
           </p:nvSpPr>
@@ -23485,7 +24013,7 @@
         </p:sp>
         <p:sp>
           <p:nvSpPr>
-            <p:cNvPr id="34" name="TextBox 34"/>
+            <p:cNvPr id="35" name="TextBox 35"/>
             <p:cNvSpPr txBox="1"/>
             <p:nvPr/>
           </p:nvSpPr>
@@ -23525,7 +24053,7 @@
         </p:sp>
         <p:sp>
           <p:nvSpPr>
-            <p:cNvPr id="35" name="TextBox 35"/>
+            <p:cNvPr id="36" name="TextBox 36"/>
             <p:cNvSpPr txBox="1"/>
             <p:nvPr/>
           </p:nvSpPr>
@@ -23566,7 +24094,7 @@
       </p:grpSp>
       <p:grpSp>
         <p:nvGrpSpPr>
-          <p:cNvPr id="39" name="Group 39"/>
+          <p:cNvPr id="40" name="Group 40"/>
           <p:cNvGrpSpPr/>
           <p:nvPr/>
         </p:nvGrpSpPr>
@@ -23580,7 +24108,7 @@
         </p:grpSpPr>
         <p:sp>
           <p:nvSpPr>
-            <p:cNvPr id="37" name="TextBox 37"/>
+            <p:cNvPr id="38" name="TextBox 38"/>
             <p:cNvSpPr txBox="1"/>
             <p:nvPr/>
           </p:nvSpPr>
@@ -23620,7 +24148,7 @@
         </p:sp>
         <p:sp>
           <p:nvSpPr>
-            <p:cNvPr id="38" name="TextBox 38"/>
+            <p:cNvPr id="39" name="TextBox 39"/>
             <p:cNvSpPr txBox="1"/>
             <p:nvPr/>
           </p:nvSpPr>
@@ -23695,9 +24223,36 @@
           <a:chExt cx="0" cy="0"/>
         </a:xfrm>
       </p:grpSpPr>
+      <p:pic>
+        <p:nvPicPr>
+          <p:cNvPr id="2" name="Image 2"/>
+          <p:cNvPicPr>
+            <a:picLocks noChangeAspect="1"/>
+          </p:cNvPicPr>
+          <p:nvPr/>
+        </p:nvPicPr>
+        <p:blipFill>
+          <a:blip r:embed="rId2">
+            <a:alphaModFix amt="14000"/>
+          </a:blip>
+          <a:srcRect l="0" t="27" r="0" b="27"/>
+          <a:stretch>
+            <a:fillRect/>
+          </a:stretch>
+        </p:blipFill>
+        <p:spPr>
+          <a:xfrm>
+            <a:off x="0" y="0"/>
+            <a:ext cx="12192000" cy="6858000"/>
+          </a:xfrm>
+          <a:prstGeom prst="rect">
+            <a:avLst/>
+          </a:prstGeom>
+        </p:spPr>
+      </p:pic>
       <p:grpSp>
         <p:nvGrpSpPr>
-          <p:cNvPr id="5" name="Group 5"/>
+          <p:cNvPr id="6" name="Group 6"/>
           <p:cNvGrpSpPr/>
           <p:nvPr/>
         </p:nvGrpSpPr>
@@ -23711,7 +24266,7 @@
         </p:grpSpPr>
         <p:sp>
           <p:nvSpPr>
-            <p:cNvPr id="2" name="TextBox 2"/>
+            <p:cNvPr id="3" name="TextBox 3"/>
             <p:cNvSpPr txBox="1"/>
             <p:nvPr/>
           </p:nvSpPr>
@@ -23751,7 +24306,7 @@
         </p:sp>
         <p:sp>
           <p:nvSpPr>
-            <p:cNvPr id="3" name="TextBox 3"/>
+            <p:cNvPr id="4" name="TextBox 4"/>
             <p:cNvSpPr txBox="1"/>
             <p:nvPr/>
           </p:nvSpPr>
@@ -23791,7 +24346,7 @@
         </p:sp>
         <p:sp>
           <p:nvSpPr>
-            <p:cNvPr id="4" name="Line 4"/>
+            <p:cNvPr id="5" name="Line 5"/>
             <p:cNvSpPr/>
             <p:nvPr/>
           </p:nvSpPr>
@@ -23828,7 +24383,7 @@
       </p:grpSp>
       <p:grpSp>
         <p:nvGrpSpPr>
-          <p:cNvPr id="8" name="Group 8"/>
+          <p:cNvPr id="9" name="Group 9"/>
           <p:cNvGrpSpPr/>
           <p:nvPr/>
         </p:nvGrpSpPr>
@@ -23842,7 +24397,7 @@
         </p:grpSpPr>
         <p:sp>
           <p:nvSpPr>
-            <p:cNvPr id="6" name="Rectangle 6"/>
+            <p:cNvPr id="7" name="Rectangle 7"/>
             <p:cNvSpPr/>
             <p:nvPr/>
           </p:nvSpPr>
@@ -23868,14 +24423,14 @@
         </p:sp>
         <p:pic>
           <p:nvPicPr>
-            <p:cNvPr id="7" name="Image 7"/>
+            <p:cNvPr id="8" name="Image 8"/>
             <p:cNvPicPr>
               <a:picLocks noChangeAspect="1"/>
             </p:cNvPicPr>
             <p:nvPr/>
           </p:nvPicPr>
           <p:blipFill>
-            <a:blip r:embed="rId2"/>
+            <a:blip r:embed="rId3"/>
             <a:srcRect l="0" t="23284" r="0" b="23284"/>
             <a:stretch>
               <a:fillRect/>
@@ -23894,7 +24449,7 @@
       </p:grpSp>
       <p:grpSp>
         <p:nvGrpSpPr>
-          <p:cNvPr id="17" name="Group 17"/>
+          <p:cNvPr id="18" name="Group 18"/>
           <p:cNvGrpSpPr/>
           <p:nvPr/>
         </p:nvGrpSpPr>
@@ -23908,7 +24463,7 @@
         </p:grpSpPr>
         <p:sp>
           <p:nvSpPr>
-            <p:cNvPr id="9" name="TextBox 9"/>
+            <p:cNvPr id="10" name="TextBox 10"/>
             <p:cNvSpPr txBox="1"/>
             <p:nvPr/>
           </p:nvSpPr>
@@ -23948,7 +24503,7 @@
         </p:sp>
         <p:sp>
           <p:nvSpPr>
-            <p:cNvPr id="10" name="TextBox 10"/>
+            <p:cNvPr id="11" name="TextBox 11"/>
             <p:cNvSpPr txBox="1"/>
             <p:nvPr/>
           </p:nvSpPr>
@@ -23988,7 +24543,7 @@
         </p:sp>
         <p:sp>
           <p:nvSpPr>
-            <p:cNvPr id="11" name="TextBox 11"/>
+            <p:cNvPr id="12" name="TextBox 12"/>
             <p:cNvSpPr txBox="1"/>
             <p:nvPr/>
           </p:nvSpPr>
@@ -24028,7 +24583,7 @@
         </p:sp>
         <p:sp>
           <p:nvSpPr>
-            <p:cNvPr id="12" name="TextBox 12"/>
+            <p:cNvPr id="13" name="TextBox 13"/>
             <p:cNvSpPr txBox="1"/>
             <p:nvPr/>
           </p:nvSpPr>
@@ -24068,7 +24623,7 @@
         </p:sp>
         <p:sp>
           <p:nvSpPr>
-            <p:cNvPr id="13" name="TextBox 13"/>
+            <p:cNvPr id="14" name="TextBox 14"/>
             <p:cNvSpPr txBox="1"/>
             <p:nvPr/>
           </p:nvSpPr>
@@ -24108,7 +24663,7 @@
         </p:sp>
         <p:sp>
           <p:nvSpPr>
-            <p:cNvPr id="14" name="TextBox 14"/>
+            <p:cNvPr id="15" name="TextBox 15"/>
             <p:cNvSpPr txBox="1"/>
             <p:nvPr/>
           </p:nvSpPr>
@@ -24148,7 +24703,7 @@
         </p:sp>
         <p:sp>
           <p:nvSpPr>
-            <p:cNvPr id="15" name="TextBox 15"/>
+            <p:cNvPr id="16" name="TextBox 16"/>
             <p:cNvSpPr txBox="1"/>
             <p:nvPr/>
           </p:nvSpPr>
@@ -24188,7 +24743,7 @@
         </p:sp>
         <p:sp>
           <p:nvSpPr>
-            <p:cNvPr id="16" name="TextBox 16"/>
+            <p:cNvPr id="17" name="TextBox 17"/>
             <p:cNvSpPr txBox="1"/>
             <p:nvPr/>
           </p:nvSpPr>
@@ -24229,7 +24784,7 @@
       </p:grpSp>
       <p:grpSp>
         <p:nvGrpSpPr>
-          <p:cNvPr id="20" name="Group 20"/>
+          <p:cNvPr id="21" name="Group 21"/>
           <p:cNvGrpSpPr/>
           <p:nvPr/>
         </p:nvGrpSpPr>
@@ -24243,7 +24798,7 @@
         </p:grpSpPr>
         <p:sp>
           <p:nvSpPr>
-            <p:cNvPr id="18" name="TextBox 18"/>
+            <p:cNvPr id="19" name="TextBox 19"/>
             <p:cNvSpPr txBox="1"/>
             <p:nvPr/>
           </p:nvSpPr>
@@ -24283,7 +24838,7 @@
         </p:sp>
         <p:sp>
           <p:nvSpPr>
-            <p:cNvPr id="19" name="TextBox 19"/>
+            <p:cNvPr id="20" name="TextBox 20"/>
             <p:cNvSpPr txBox="1"/>
             <p:nvPr/>
           </p:nvSpPr>
@@ -24358,9 +24913,36 @@
           <a:chExt cx="0" cy="0"/>
         </a:xfrm>
       </p:grpSpPr>
+      <p:pic>
+        <p:nvPicPr>
+          <p:cNvPr id="2" name="Image 2"/>
+          <p:cNvPicPr>
+            <a:picLocks noChangeAspect="1"/>
+          </p:cNvPicPr>
+          <p:nvPr/>
+        </p:nvPicPr>
+        <p:blipFill>
+          <a:blip r:embed="rId2">
+            <a:alphaModFix amt="14000"/>
+          </a:blip>
+          <a:srcRect l="0" t="27" r="0" b="27"/>
+          <a:stretch>
+            <a:fillRect/>
+          </a:stretch>
+        </p:blipFill>
+        <p:spPr>
+          <a:xfrm>
+            <a:off x="0" y="0"/>
+            <a:ext cx="12192000" cy="6858000"/>
+          </a:xfrm>
+          <a:prstGeom prst="rect">
+            <a:avLst/>
+          </a:prstGeom>
+        </p:spPr>
+      </p:pic>
       <p:grpSp>
         <p:nvGrpSpPr>
-          <p:cNvPr id="5" name="Group 5"/>
+          <p:cNvPr id="6" name="Group 6"/>
           <p:cNvGrpSpPr/>
           <p:nvPr/>
         </p:nvGrpSpPr>
@@ -24374,7 +24956,7 @@
         </p:grpSpPr>
         <p:sp>
           <p:nvSpPr>
-            <p:cNvPr id="2" name="TextBox 2"/>
+            <p:cNvPr id="3" name="TextBox 3"/>
             <p:cNvSpPr txBox="1"/>
             <p:nvPr/>
           </p:nvSpPr>
@@ -24414,7 +24996,7 @@
         </p:sp>
         <p:sp>
           <p:nvSpPr>
-            <p:cNvPr id="3" name="TextBox 3"/>
+            <p:cNvPr id="4" name="TextBox 4"/>
             <p:cNvSpPr txBox="1"/>
             <p:nvPr/>
           </p:nvSpPr>
@@ -24454,7 +25036,7 @@
         </p:sp>
         <p:sp>
           <p:nvSpPr>
-            <p:cNvPr id="4" name="Line 4"/>
+            <p:cNvPr id="5" name="Line 5"/>
             <p:cNvSpPr/>
             <p:nvPr/>
           </p:nvSpPr>
@@ -24491,7 +25073,7 @@
       </p:grpSp>
       <p:grpSp>
         <p:nvGrpSpPr>
-          <p:cNvPr id="10" name="Group 10"/>
+          <p:cNvPr id="11" name="Group 11"/>
           <p:cNvGrpSpPr/>
           <p:nvPr/>
         </p:nvGrpSpPr>
@@ -24505,7 +25087,7 @@
         </p:grpSpPr>
         <p:sp>
           <p:nvSpPr>
-            <p:cNvPr id="6" name="Rectangle 6"/>
+            <p:cNvPr id="7" name="Rectangle 7"/>
             <p:cNvSpPr/>
             <p:nvPr/>
           </p:nvSpPr>
@@ -24531,7 +25113,7 @@
         </p:sp>
         <p:sp>
           <p:nvSpPr>
-            <p:cNvPr id="7" name="Rectangle 7"/>
+            <p:cNvPr id="8" name="Rectangle 8"/>
             <p:cNvSpPr/>
             <p:nvPr/>
           </p:nvSpPr>
@@ -24555,7 +25137,7 @@
         </p:sp>
         <p:sp>
           <p:nvSpPr>
-            <p:cNvPr id="8" name="TextBox 8"/>
+            <p:cNvPr id="9" name="TextBox 9"/>
             <p:cNvSpPr txBox="1"/>
             <p:nvPr/>
           </p:nvSpPr>
@@ -24595,7 +25177,7 @@
         </p:sp>
         <p:sp>
           <p:nvSpPr>
-            <p:cNvPr id="9" name="TextBox 9"/>
+            <p:cNvPr id="10" name="TextBox 10"/>
             <p:cNvSpPr txBox="1"/>
             <p:nvPr/>
           </p:nvSpPr>
@@ -24638,7 +25220,7 @@
       </p:grpSp>
       <p:grpSp>
         <p:nvGrpSpPr>
-          <p:cNvPr id="15" name="Group 15"/>
+          <p:cNvPr id="16" name="Group 16"/>
           <p:cNvGrpSpPr/>
           <p:nvPr/>
         </p:nvGrpSpPr>
@@ -24652,7 +25234,7 @@
         </p:grpSpPr>
         <p:sp>
           <p:nvSpPr>
-            <p:cNvPr id="11" name="Rectangle 11"/>
+            <p:cNvPr id="12" name="Rectangle 12"/>
             <p:cNvSpPr/>
             <p:nvPr/>
           </p:nvSpPr>
@@ -24678,7 +25260,7 @@
         </p:sp>
         <p:sp>
           <p:nvSpPr>
-            <p:cNvPr id="12" name="Rectangle 12"/>
+            <p:cNvPr id="13" name="Rectangle 13"/>
             <p:cNvSpPr/>
             <p:nvPr/>
           </p:nvSpPr>
@@ -24702,7 +25284,7 @@
         </p:sp>
         <p:sp>
           <p:nvSpPr>
-            <p:cNvPr id="13" name="TextBox 13"/>
+            <p:cNvPr id="14" name="TextBox 14"/>
             <p:cNvSpPr txBox="1"/>
             <p:nvPr/>
           </p:nvSpPr>
@@ -24742,7 +25324,7 @@
         </p:sp>
         <p:sp>
           <p:nvSpPr>
-            <p:cNvPr id="14" name="TextBox 14"/>
+            <p:cNvPr id="15" name="TextBox 15"/>
             <p:cNvSpPr txBox="1"/>
             <p:nvPr/>
           </p:nvSpPr>
@@ -24785,7 +25367,7 @@
       </p:grpSp>
       <p:grpSp>
         <p:nvGrpSpPr>
-          <p:cNvPr id="20" name="Group 20"/>
+          <p:cNvPr id="21" name="Group 21"/>
           <p:cNvGrpSpPr/>
           <p:nvPr/>
         </p:nvGrpSpPr>
@@ -24799,7 +25381,7 @@
         </p:grpSpPr>
         <p:sp>
           <p:nvSpPr>
-            <p:cNvPr id="16" name="Rectangle 16"/>
+            <p:cNvPr id="17" name="Rectangle 17"/>
             <p:cNvSpPr/>
             <p:nvPr/>
           </p:nvSpPr>
@@ -24825,7 +25407,7 @@
         </p:sp>
         <p:sp>
           <p:nvSpPr>
-            <p:cNvPr id="17" name="Rectangle 17"/>
+            <p:cNvPr id="18" name="Rectangle 18"/>
             <p:cNvSpPr/>
             <p:nvPr/>
           </p:nvSpPr>
@@ -24849,7 +25431,7 @@
         </p:sp>
         <p:sp>
           <p:nvSpPr>
-            <p:cNvPr id="18" name="TextBox 18"/>
+            <p:cNvPr id="19" name="TextBox 19"/>
             <p:cNvSpPr txBox="1"/>
             <p:nvPr/>
           </p:nvSpPr>
@@ -24889,7 +25471,7 @@
         </p:sp>
         <p:sp>
           <p:nvSpPr>
-            <p:cNvPr id="19" name="TextBox 19"/>
+            <p:cNvPr id="20" name="TextBox 20"/>
             <p:cNvSpPr txBox="1"/>
             <p:nvPr/>
           </p:nvSpPr>
@@ -24932,7 +25514,7 @@
       </p:grpSp>
       <p:grpSp>
         <p:nvGrpSpPr>
-          <p:cNvPr id="25" name="Group 25"/>
+          <p:cNvPr id="26" name="Group 26"/>
           <p:cNvGrpSpPr/>
           <p:nvPr/>
         </p:nvGrpSpPr>
@@ -24946,7 +25528,7 @@
         </p:grpSpPr>
         <p:sp>
           <p:nvSpPr>
-            <p:cNvPr id="21" name="Rectangle 21"/>
+            <p:cNvPr id="22" name="Rectangle 22"/>
             <p:cNvSpPr/>
             <p:nvPr/>
           </p:nvSpPr>
@@ -24972,7 +25554,7 @@
         </p:sp>
         <p:sp>
           <p:nvSpPr>
-            <p:cNvPr id="22" name="Rectangle 22"/>
+            <p:cNvPr id="23" name="Rectangle 23"/>
             <p:cNvSpPr/>
             <p:nvPr/>
           </p:nvSpPr>
@@ -24996,7 +25578,7 @@
         </p:sp>
         <p:sp>
           <p:nvSpPr>
-            <p:cNvPr id="23" name="TextBox 23"/>
+            <p:cNvPr id="24" name="TextBox 24"/>
             <p:cNvSpPr txBox="1"/>
             <p:nvPr/>
           </p:nvSpPr>
@@ -25036,7 +25618,7 @@
         </p:sp>
         <p:sp>
           <p:nvSpPr>
-            <p:cNvPr id="24" name="TextBox 24"/>
+            <p:cNvPr id="25" name="TextBox 25"/>
             <p:cNvSpPr txBox="1"/>
             <p:nvPr/>
           </p:nvSpPr>
@@ -25079,7 +25661,7 @@
       </p:grpSp>
       <p:grpSp>
         <p:nvGrpSpPr>
-          <p:cNvPr id="28" name="Group 28"/>
+          <p:cNvPr id="29" name="Group 29"/>
           <p:cNvGrpSpPr/>
           <p:nvPr/>
         </p:nvGrpSpPr>
@@ -25093,7 +25675,7 @@
         </p:grpSpPr>
         <p:sp>
           <p:nvSpPr>
-            <p:cNvPr id="26" name="TextBox 26"/>
+            <p:cNvPr id="27" name="TextBox 27"/>
             <p:cNvSpPr txBox="1"/>
             <p:nvPr/>
           </p:nvSpPr>
@@ -25133,7 +25715,7 @@
         </p:sp>
         <p:sp>
           <p:nvSpPr>
-            <p:cNvPr id="27" name="TextBox 27"/>
+            <p:cNvPr id="28" name="TextBox 28"/>
             <p:cNvSpPr txBox="1"/>
             <p:nvPr/>
           </p:nvSpPr>
@@ -25208,9 +25790,36 @@
           <a:chExt cx="0" cy="0"/>
         </a:xfrm>
       </p:grpSpPr>
+      <p:pic>
+        <p:nvPicPr>
+          <p:cNvPr id="2" name="Image 2"/>
+          <p:cNvPicPr>
+            <a:picLocks noChangeAspect="1"/>
+          </p:cNvPicPr>
+          <p:nvPr/>
+        </p:nvPicPr>
+        <p:blipFill>
+          <a:blip r:embed="rId2">
+            <a:alphaModFix amt="14000"/>
+          </a:blip>
+          <a:srcRect l="0" t="27" r="0" b="27"/>
+          <a:stretch>
+            <a:fillRect/>
+          </a:stretch>
+        </p:blipFill>
+        <p:spPr>
+          <a:xfrm>
+            <a:off x="0" y="0"/>
+            <a:ext cx="12192000" cy="6858000"/>
+          </a:xfrm>
+          <a:prstGeom prst="rect">
+            <a:avLst/>
+          </a:prstGeom>
+        </p:spPr>
+      </p:pic>
       <p:grpSp>
         <p:nvGrpSpPr>
-          <p:cNvPr id="5" name="Group 5"/>
+          <p:cNvPr id="6" name="Group 6"/>
           <p:cNvGrpSpPr/>
           <p:nvPr/>
         </p:nvGrpSpPr>
@@ -25224,7 +25833,7 @@
         </p:grpSpPr>
         <p:sp>
           <p:nvSpPr>
-            <p:cNvPr id="2" name="TextBox 2"/>
+            <p:cNvPr id="3" name="TextBox 3"/>
             <p:cNvSpPr txBox="1"/>
             <p:nvPr/>
           </p:nvSpPr>
@@ -25264,7 +25873,7 @@
         </p:sp>
         <p:sp>
           <p:nvSpPr>
-            <p:cNvPr id="3" name="TextBox 3"/>
+            <p:cNvPr id="4" name="TextBox 4"/>
             <p:cNvSpPr txBox="1"/>
             <p:nvPr/>
           </p:nvSpPr>
@@ -25304,7 +25913,7 @@
         </p:sp>
         <p:sp>
           <p:nvSpPr>
-            <p:cNvPr id="4" name="Line 4"/>
+            <p:cNvPr id="5" name="Line 5"/>
             <p:cNvSpPr/>
             <p:nvPr/>
           </p:nvSpPr>
@@ -25341,7 +25950,7 @@
       </p:grpSp>
       <p:grpSp>
         <p:nvGrpSpPr>
-          <p:cNvPr id="11" name="Group 11"/>
+          <p:cNvPr id="12" name="Group 12"/>
           <p:cNvGrpSpPr/>
           <p:nvPr/>
         </p:nvGrpSpPr>
@@ -25355,7 +25964,7 @@
         </p:grpSpPr>
         <p:sp>
           <p:nvSpPr>
-            <p:cNvPr id="6" name="Rectangle 6"/>
+            <p:cNvPr id="7" name="Rectangle 7"/>
             <p:cNvSpPr/>
             <p:nvPr/>
           </p:nvSpPr>
@@ -25379,7 +25988,7 @@
         </p:sp>
         <p:sp>
           <p:nvSpPr>
-            <p:cNvPr id="7" name="Ellipse 7"/>
+            <p:cNvPr id="8" name="Ellipse 8"/>
             <p:cNvSpPr/>
             <p:nvPr/>
           </p:nvSpPr>
@@ -25401,7 +26010,7 @@
         </p:sp>
         <p:sp>
           <p:nvSpPr>
-            <p:cNvPr id="8" name="Ellipse 8"/>
+            <p:cNvPr id="9" name="Ellipse 9"/>
             <p:cNvSpPr/>
             <p:nvPr/>
           </p:nvSpPr>
@@ -25423,7 +26032,7 @@
         </p:sp>
         <p:sp>
           <p:nvSpPr>
-            <p:cNvPr id="9" name="Ellipse 9"/>
+            <p:cNvPr id="10" name="Ellipse 10"/>
             <p:cNvSpPr/>
             <p:nvPr/>
           </p:nvSpPr>
@@ -25445,7 +26054,7 @@
         </p:sp>
         <p:sp>
           <p:nvSpPr>
-            <p:cNvPr id="10" name="TextBox 10"/>
+            <p:cNvPr id="11" name="TextBox 11"/>
             <p:cNvSpPr txBox="1"/>
             <p:nvPr/>
           </p:nvSpPr>
@@ -25532,7 +26141,7 @@
       </p:grpSp>
       <p:grpSp>
         <p:nvGrpSpPr>
-          <p:cNvPr id="16" name="Group 16"/>
+          <p:cNvPr id="17" name="Group 17"/>
           <p:cNvGrpSpPr/>
           <p:nvPr/>
         </p:nvGrpSpPr>
@@ -25546,7 +26155,7 @@
         </p:grpSpPr>
         <p:sp>
           <p:nvSpPr>
-            <p:cNvPr id="12" name="Rectangle 12"/>
+            <p:cNvPr id="13" name="Rectangle 13"/>
             <p:cNvSpPr/>
             <p:nvPr/>
           </p:nvSpPr>
@@ -25572,7 +26181,7 @@
         </p:sp>
         <p:sp>
           <p:nvSpPr>
-            <p:cNvPr id="13" name="Rectangle 13"/>
+            <p:cNvPr id="14" name="Rectangle 14"/>
             <p:cNvSpPr/>
             <p:nvPr/>
           </p:nvSpPr>
@@ -25596,7 +26205,7 @@
         </p:sp>
         <p:sp>
           <p:nvSpPr>
-            <p:cNvPr id="14" name="TextBox 14"/>
+            <p:cNvPr id="15" name="TextBox 15"/>
             <p:cNvSpPr txBox="1"/>
             <p:nvPr/>
           </p:nvSpPr>
@@ -25636,7 +26245,7 @@
         </p:sp>
         <p:sp>
           <p:nvSpPr>
-            <p:cNvPr id="15" name="TextBox 15"/>
+            <p:cNvPr id="16" name="TextBox 16"/>
             <p:cNvSpPr txBox="1"/>
             <p:nvPr/>
           </p:nvSpPr>
@@ -25679,7 +26288,7 @@
       </p:grpSp>
       <p:grpSp>
         <p:nvGrpSpPr>
-          <p:cNvPr id="21" name="Group 21"/>
+          <p:cNvPr id="22" name="Group 22"/>
           <p:cNvGrpSpPr/>
           <p:nvPr/>
         </p:nvGrpSpPr>
@@ -25693,7 +26302,7 @@
         </p:grpSpPr>
         <p:sp>
           <p:nvSpPr>
-            <p:cNvPr id="17" name="Rectangle 17"/>
+            <p:cNvPr id="18" name="Rectangle 18"/>
             <p:cNvSpPr/>
             <p:nvPr/>
           </p:nvSpPr>
@@ -25719,7 +26328,7 @@
         </p:sp>
         <p:sp>
           <p:nvSpPr>
-            <p:cNvPr id="18" name="Rectangle 18"/>
+            <p:cNvPr id="19" name="Rectangle 19"/>
             <p:cNvSpPr/>
             <p:nvPr/>
           </p:nvSpPr>
@@ -25743,7 +26352,7 @@
         </p:sp>
         <p:sp>
           <p:nvSpPr>
-            <p:cNvPr id="19" name="TextBox 19"/>
+            <p:cNvPr id="20" name="TextBox 20"/>
             <p:cNvSpPr txBox="1"/>
             <p:nvPr/>
           </p:nvSpPr>
@@ -25783,7 +26392,7 @@
         </p:sp>
         <p:sp>
           <p:nvSpPr>
-            <p:cNvPr id="20" name="TextBox 20"/>
+            <p:cNvPr id="21" name="TextBox 21"/>
             <p:cNvSpPr txBox="1"/>
             <p:nvPr/>
           </p:nvSpPr>
@@ -25826,7 +26435,7 @@
       </p:grpSp>
       <p:grpSp>
         <p:nvGrpSpPr>
-          <p:cNvPr id="24" name="Group 24"/>
+          <p:cNvPr id="25" name="Group 25"/>
           <p:cNvGrpSpPr/>
           <p:nvPr/>
         </p:nvGrpSpPr>
@@ -25840,7 +26449,7 @@
         </p:grpSpPr>
         <p:sp>
           <p:nvSpPr>
-            <p:cNvPr id="22" name="TextBox 22"/>
+            <p:cNvPr id="23" name="TextBox 23"/>
             <p:cNvSpPr txBox="1"/>
             <p:nvPr/>
           </p:nvSpPr>
@@ -25880,7 +26489,7 @@
         </p:sp>
         <p:sp>
           <p:nvSpPr>
-            <p:cNvPr id="23" name="TextBox 23"/>
+            <p:cNvPr id="24" name="TextBox 24"/>
             <p:cNvSpPr txBox="1"/>
             <p:nvPr/>
           </p:nvSpPr>

--- a/deliverables/course/ChainGrade_课程答辩_重制版.pptx
+++ b/deliverables/course/ChainGrade_课程答辩_重制版.pptx
@@ -2721,7 +2721,7 @@
         </p:nvPicPr>
         <p:blipFill>
           <a:blip r:embed="rId2">
-            <a:alphaModFix amt="5500"/>
+            <a:alphaModFix amt="14000"/>
           </a:blip>
           <a:srcRect l="0" t="27" r="0" b="27"/>
           <a:stretch>
@@ -2738,33 +2738,9 @@
           </a:prstGeom>
         </p:spPr>
       </p:pic>
-      <p:sp>
-        <p:nvSpPr>
-          <p:cNvPr id="3" name="Rectangle 3"/>
-          <p:cNvSpPr/>
-          <p:nvPr/>
-        </p:nvSpPr>
-        <p:spPr>
-          <a:xfrm>
-            <a:off x="0" y="0"/>
-            <a:ext cx="12192000" cy="6858000"/>
-          </a:xfrm>
-          <a:prstGeom prst="rect">
-            <a:avLst/>
-          </a:prstGeom>
-          <a:solidFill>
-            <a:schemeClr val="lt1">
-              <a:alpha val="82000"/>
-            </a:schemeClr>
-          </a:solidFill>
-          <a:ln>
-            <a:noFill/>
-          </a:ln>
-        </p:spPr>
-      </p:sp>
       <p:grpSp>
         <p:nvGrpSpPr>
-          <p:cNvPr id="8" name="Group 8"/>
+          <p:cNvPr id="7" name="Group 7"/>
           <p:cNvGrpSpPr/>
           <p:nvPr/>
         </p:nvGrpSpPr>
@@ -2778,7 +2754,7 @@
         </p:grpSpPr>
         <p:sp>
           <p:nvSpPr>
-            <p:cNvPr id="4" name="TextBox 4"/>
+            <p:cNvPr id="3" name="TextBox 3"/>
             <p:cNvSpPr txBox="1"/>
             <p:nvPr/>
           </p:nvSpPr>
@@ -2818,7 +2794,7 @@
         </p:sp>
         <p:sp>
           <p:nvSpPr>
-            <p:cNvPr id="5" name="TextBox 5"/>
+            <p:cNvPr id="4" name="TextBox 4"/>
             <p:cNvSpPr txBox="1"/>
             <p:nvPr/>
           </p:nvSpPr>
@@ -2858,7 +2834,7 @@
         </p:sp>
         <p:sp>
           <p:nvSpPr>
-            <p:cNvPr id="6" name="TextBox 6"/>
+            <p:cNvPr id="5" name="TextBox 5"/>
             <p:cNvSpPr txBox="1"/>
             <p:nvPr/>
           </p:nvSpPr>
@@ -2898,7 +2874,7 @@
         </p:sp>
         <p:sp>
           <p:nvSpPr>
-            <p:cNvPr id="7" name="Line 7"/>
+            <p:cNvPr id="6" name="Line 6"/>
             <p:cNvSpPr/>
             <p:nvPr/>
           </p:nvSpPr>
@@ -2935,7 +2911,7 @@
       </p:grpSp>
       <p:grpSp>
         <p:nvGrpSpPr>
-          <p:cNvPr id="18" name="Group 18"/>
+          <p:cNvPr id="17" name="Group 17"/>
           <p:cNvGrpSpPr/>
           <p:nvPr/>
         </p:nvGrpSpPr>
@@ -2949,7 +2925,7 @@
         </p:grpSpPr>
         <p:sp>
           <p:nvSpPr>
-            <p:cNvPr id="9" name="Rectangle 9"/>
+            <p:cNvPr id="8" name="Rectangle 8"/>
             <p:cNvSpPr/>
             <p:nvPr/>
           </p:nvSpPr>
@@ -2975,7 +2951,7 @@
         </p:sp>
         <p:sp>
           <p:nvSpPr>
-            <p:cNvPr id="10" name="Rectangle 10"/>
+            <p:cNvPr id="9" name="Rectangle 9"/>
             <p:cNvSpPr/>
             <p:nvPr/>
           </p:nvSpPr>
@@ -2999,7 +2975,7 @@
         </p:sp>
         <p:sp>
           <p:nvSpPr>
-            <p:cNvPr id="11" name="TextBox 11"/>
+            <p:cNvPr id="10" name="TextBox 10"/>
             <p:cNvSpPr txBox="1"/>
             <p:nvPr/>
           </p:nvSpPr>
@@ -3039,7 +3015,7 @@
         </p:sp>
         <p:sp>
           <p:nvSpPr>
-            <p:cNvPr id="12" name="TextBox 12"/>
+            <p:cNvPr id="11" name="TextBox 11"/>
             <p:cNvSpPr txBox="1"/>
             <p:nvPr/>
           </p:nvSpPr>
@@ -3079,7 +3055,7 @@
         </p:sp>
         <p:sp>
           <p:nvSpPr>
-            <p:cNvPr id="13" name="TextBox 13"/>
+            <p:cNvPr id="12" name="TextBox 12"/>
             <p:cNvSpPr txBox="1"/>
             <p:nvPr/>
           </p:nvSpPr>
@@ -3119,7 +3095,7 @@
         </p:sp>
         <p:sp>
           <p:nvSpPr>
-            <p:cNvPr id="14" name="TextBox 14"/>
+            <p:cNvPr id="13" name="TextBox 13"/>
             <p:cNvSpPr txBox="1"/>
             <p:nvPr/>
           </p:nvSpPr>
@@ -3159,7 +3135,7 @@
         </p:sp>
         <p:sp>
           <p:nvSpPr>
-            <p:cNvPr id="15" name="TextBox 15"/>
+            <p:cNvPr id="14" name="TextBox 14"/>
             <p:cNvSpPr txBox="1"/>
             <p:nvPr/>
           </p:nvSpPr>
@@ -3199,7 +3175,7 @@
         </p:sp>
         <p:sp>
           <p:nvSpPr>
-            <p:cNvPr id="16" name="TextBox 16"/>
+            <p:cNvPr id="15" name="TextBox 15"/>
             <p:cNvSpPr txBox="1"/>
             <p:nvPr/>
           </p:nvSpPr>
@@ -3239,7 +3215,7 @@
         </p:sp>
         <p:sp>
           <p:nvSpPr>
-            <p:cNvPr id="17" name="TextBox 17"/>
+            <p:cNvPr id="16" name="TextBox 16"/>
             <p:cNvSpPr txBox="1"/>
             <p:nvPr/>
           </p:nvSpPr>
@@ -3280,7 +3256,7 @@
       </p:grpSp>
       <p:grpSp>
         <p:nvGrpSpPr>
-          <p:cNvPr id="26" name="Group 26"/>
+          <p:cNvPr id="25" name="Group 25"/>
           <p:cNvGrpSpPr/>
           <p:nvPr/>
         </p:nvGrpSpPr>
@@ -3294,7 +3270,7 @@
         </p:grpSpPr>
         <p:sp>
           <p:nvSpPr>
-            <p:cNvPr id="19" name="Rectangle 19"/>
+            <p:cNvPr id="18" name="Rectangle 18"/>
             <p:cNvSpPr/>
             <p:nvPr/>
           </p:nvSpPr>
@@ -3320,7 +3296,7 @@
         </p:sp>
         <p:sp>
           <p:nvSpPr>
-            <p:cNvPr id="20" name="Rectangle 20"/>
+            <p:cNvPr id="19" name="Rectangle 19"/>
             <p:cNvSpPr/>
             <p:nvPr/>
           </p:nvSpPr>
@@ -3344,7 +3320,7 @@
         </p:sp>
         <p:sp>
           <p:nvSpPr>
-            <p:cNvPr id="21" name="TextBox 21"/>
+            <p:cNvPr id="20" name="TextBox 20"/>
             <p:cNvSpPr txBox="1"/>
             <p:nvPr/>
           </p:nvSpPr>
@@ -3384,7 +3360,7 @@
         </p:sp>
         <p:sp>
           <p:nvSpPr>
-            <p:cNvPr id="22" name="TextBox 22"/>
+            <p:cNvPr id="21" name="TextBox 21"/>
             <p:cNvSpPr txBox="1"/>
             <p:nvPr/>
           </p:nvSpPr>
@@ -3424,7 +3400,7 @@
         </p:sp>
         <p:sp>
           <p:nvSpPr>
-            <p:cNvPr id="23" name="TextBox 23"/>
+            <p:cNvPr id="22" name="TextBox 22"/>
             <p:cNvSpPr txBox="1"/>
             <p:nvPr/>
           </p:nvSpPr>
@@ -3464,7 +3440,7 @@
         </p:sp>
         <p:sp>
           <p:nvSpPr>
-            <p:cNvPr id="24" name="TextBox 24"/>
+            <p:cNvPr id="23" name="TextBox 23"/>
             <p:cNvSpPr txBox="1"/>
             <p:nvPr/>
           </p:nvSpPr>
@@ -3504,7 +3480,7 @@
         </p:sp>
         <p:sp>
           <p:nvSpPr>
-            <p:cNvPr id="25" name="TextBox 25"/>
+            <p:cNvPr id="24" name="TextBox 24"/>
             <p:cNvSpPr txBox="1"/>
             <p:nvPr/>
           </p:nvSpPr>
@@ -3545,7 +3521,7 @@
       </p:grpSp>
       <p:grpSp>
         <p:nvGrpSpPr>
-          <p:cNvPr id="36" name="Group 36"/>
+          <p:cNvPr id="35" name="Group 35"/>
           <p:cNvGrpSpPr/>
           <p:nvPr/>
         </p:nvGrpSpPr>
@@ -3559,7 +3535,7 @@
         </p:grpSpPr>
         <p:sp>
           <p:nvSpPr>
-            <p:cNvPr id="27" name="Rectangle 27"/>
+            <p:cNvPr id="26" name="Rectangle 26"/>
             <p:cNvSpPr/>
             <p:nvPr/>
           </p:nvSpPr>
@@ -3585,7 +3561,7 @@
         </p:sp>
         <p:sp>
           <p:nvSpPr>
-            <p:cNvPr id="28" name="TextBox 28"/>
+            <p:cNvPr id="27" name="TextBox 27"/>
             <p:cNvSpPr txBox="1"/>
             <p:nvPr/>
           </p:nvSpPr>
@@ -3625,7 +3601,7 @@
         </p:sp>
         <p:sp>
           <p:nvSpPr>
-            <p:cNvPr id="29" name="Rectangle 29"/>
+            <p:cNvPr id="28" name="Rectangle 28"/>
             <p:cNvSpPr/>
             <p:nvPr/>
           </p:nvSpPr>
@@ -3649,7 +3625,7 @@
         </p:sp>
         <p:sp>
           <p:nvSpPr>
-            <p:cNvPr id="30" name="TextBox 30"/>
+            <p:cNvPr id="29" name="TextBox 29"/>
             <p:cNvSpPr txBox="1"/>
             <p:nvPr/>
           </p:nvSpPr>
@@ -3689,7 +3665,7 @@
         </p:sp>
         <p:sp>
           <p:nvSpPr>
-            <p:cNvPr id="31" name="Freeform 31"/>
+            <p:cNvPr id="30" name="Freeform 30"/>
             <p:cNvSpPr/>
             <p:nvPr/>
           </p:nvSpPr>
@@ -3727,7 +3703,7 @@
         </p:sp>
         <p:sp>
           <p:nvSpPr>
-            <p:cNvPr id="32" name="Freeform 32"/>
+            <p:cNvPr id="31" name="Freeform 31"/>
             <p:cNvSpPr/>
             <p:nvPr/>
           </p:nvSpPr>
@@ -3766,7 +3742,7 @@
         </p:sp>
         <p:sp>
           <p:nvSpPr>
-            <p:cNvPr id="33" name="Rectangle 33"/>
+            <p:cNvPr id="32" name="Rectangle 32"/>
             <p:cNvSpPr/>
             <p:nvPr/>
           </p:nvSpPr>
@@ -3790,7 +3766,7 @@
         </p:sp>
         <p:sp>
           <p:nvSpPr>
-            <p:cNvPr id="34" name="TextBox 34"/>
+            <p:cNvPr id="33" name="TextBox 33"/>
             <p:cNvSpPr txBox="1"/>
             <p:nvPr/>
           </p:nvSpPr>
@@ -3830,7 +3806,7 @@
         </p:sp>
         <p:sp>
           <p:nvSpPr>
-            <p:cNvPr id="35" name="TextBox 35"/>
+            <p:cNvPr id="34" name="TextBox 34"/>
             <p:cNvSpPr txBox="1"/>
             <p:nvPr/>
           </p:nvSpPr>
@@ -3871,7 +3847,7 @@
       </p:grpSp>
       <p:grpSp>
         <p:nvGrpSpPr>
-          <p:cNvPr id="39" name="Group 39"/>
+          <p:cNvPr id="38" name="Group 38"/>
           <p:cNvGrpSpPr/>
           <p:nvPr/>
         </p:nvGrpSpPr>
@@ -3885,7 +3861,7 @@
         </p:grpSpPr>
         <p:sp>
           <p:nvSpPr>
-            <p:cNvPr id="37" name="Rectangle 37"/>
+            <p:cNvPr id="36" name="Rectangle 36"/>
             <p:cNvSpPr/>
             <p:nvPr/>
           </p:nvSpPr>
@@ -3909,7 +3885,7 @@
         </p:sp>
         <p:sp>
           <p:nvSpPr>
-            <p:cNvPr id="38" name="TextBox 38"/>
+            <p:cNvPr id="37" name="TextBox 37"/>
             <p:cNvSpPr txBox="1"/>
             <p:nvPr/>
           </p:nvSpPr>
@@ -3950,7 +3926,7 @@
       </p:grpSp>
       <p:grpSp>
         <p:nvGrpSpPr>
-          <p:cNvPr id="42" name="Group 42"/>
+          <p:cNvPr id="41" name="Group 41"/>
           <p:cNvGrpSpPr/>
           <p:nvPr/>
         </p:nvGrpSpPr>
@@ -3964,7 +3940,7 @@
         </p:grpSpPr>
         <p:sp>
           <p:nvSpPr>
-            <p:cNvPr id="40" name="TextBox 40"/>
+            <p:cNvPr id="39" name="TextBox 39"/>
             <p:cNvSpPr txBox="1"/>
             <p:nvPr/>
           </p:nvSpPr>
@@ -4004,7 +3980,7 @@
         </p:sp>
         <p:sp>
           <p:nvSpPr>
-            <p:cNvPr id="41" name="TextBox 41"/>
+            <p:cNvPr id="40" name="TextBox 40"/>
             <p:cNvSpPr txBox="1"/>
             <p:nvPr/>
           </p:nvSpPr>
@@ -4089,7 +4065,7 @@
         </p:nvPicPr>
         <p:blipFill>
           <a:blip r:embed="rId2">
-            <a:alphaModFix amt="5500"/>
+            <a:alphaModFix amt="14000"/>
           </a:blip>
           <a:srcRect l="0" t="27" r="0" b="27"/>
           <a:stretch>
@@ -4106,33 +4082,9 @@
           </a:prstGeom>
         </p:spPr>
       </p:pic>
-      <p:sp>
-        <p:nvSpPr>
-          <p:cNvPr id="3" name="Rectangle 3"/>
-          <p:cNvSpPr/>
-          <p:nvPr/>
-        </p:nvSpPr>
-        <p:spPr>
-          <a:xfrm>
-            <a:off x="0" y="0"/>
-            <a:ext cx="12192000" cy="6858000"/>
-          </a:xfrm>
-          <a:prstGeom prst="rect">
-            <a:avLst/>
-          </a:prstGeom>
-          <a:solidFill>
-            <a:schemeClr val="lt1">
-              <a:alpha val="82000"/>
-            </a:schemeClr>
-          </a:solidFill>
-          <a:ln>
-            <a:noFill/>
-          </a:ln>
-        </p:spPr>
-      </p:sp>
       <p:grpSp>
         <p:nvGrpSpPr>
-          <p:cNvPr id="8" name="Group 8"/>
+          <p:cNvPr id="7" name="Group 7"/>
           <p:cNvGrpSpPr/>
           <p:nvPr/>
         </p:nvGrpSpPr>
@@ -4146,7 +4098,7 @@
         </p:grpSpPr>
         <p:sp>
           <p:nvSpPr>
-            <p:cNvPr id="4" name="TextBox 4"/>
+            <p:cNvPr id="3" name="TextBox 3"/>
             <p:cNvSpPr txBox="1"/>
             <p:nvPr/>
           </p:nvSpPr>
@@ -4186,7 +4138,7 @@
         </p:sp>
         <p:sp>
           <p:nvSpPr>
-            <p:cNvPr id="5" name="TextBox 5"/>
+            <p:cNvPr id="4" name="TextBox 4"/>
             <p:cNvSpPr txBox="1"/>
             <p:nvPr/>
           </p:nvSpPr>
@@ -4226,7 +4178,7 @@
         </p:sp>
         <p:sp>
           <p:nvSpPr>
-            <p:cNvPr id="6" name="TextBox 6"/>
+            <p:cNvPr id="5" name="TextBox 5"/>
             <p:cNvSpPr txBox="1"/>
             <p:nvPr/>
           </p:nvSpPr>
@@ -4266,7 +4218,7 @@
         </p:sp>
         <p:sp>
           <p:nvSpPr>
-            <p:cNvPr id="7" name="Line 7"/>
+            <p:cNvPr id="6" name="Line 6"/>
             <p:cNvSpPr/>
             <p:nvPr/>
           </p:nvSpPr>
@@ -4303,7 +4255,7 @@
       </p:grpSp>
       <p:grpSp>
         <p:nvGrpSpPr>
-          <p:cNvPr id="17" name="Group 17"/>
+          <p:cNvPr id="16" name="Group 16"/>
           <p:cNvGrpSpPr/>
           <p:nvPr/>
         </p:nvGrpSpPr>
@@ -4317,7 +4269,7 @@
         </p:grpSpPr>
         <p:sp>
           <p:nvSpPr>
-            <p:cNvPr id="9" name="Rectangle 9"/>
+            <p:cNvPr id="8" name="Rectangle 8"/>
             <p:cNvSpPr/>
             <p:nvPr/>
           </p:nvSpPr>
@@ -4343,7 +4295,7 @@
         </p:sp>
         <p:sp>
           <p:nvSpPr>
-            <p:cNvPr id="10" name="Rectangle 10"/>
+            <p:cNvPr id="9" name="Rectangle 9"/>
             <p:cNvSpPr/>
             <p:nvPr/>
           </p:nvSpPr>
@@ -4367,7 +4319,7 @@
         </p:sp>
         <p:sp>
           <p:nvSpPr>
-            <p:cNvPr id="11" name="TextBox 11"/>
+            <p:cNvPr id="10" name="TextBox 10"/>
             <p:cNvSpPr txBox="1"/>
             <p:nvPr/>
           </p:nvSpPr>
@@ -4407,7 +4359,7 @@
         </p:sp>
         <p:sp>
           <p:nvSpPr>
-            <p:cNvPr id="12" name="TextBox 12"/>
+            <p:cNvPr id="11" name="TextBox 11"/>
             <p:cNvSpPr txBox="1"/>
             <p:nvPr/>
           </p:nvSpPr>
@@ -4447,7 +4399,7 @@
         </p:sp>
         <p:sp>
           <p:nvSpPr>
-            <p:cNvPr id="13" name="TextBox 13"/>
+            <p:cNvPr id="12" name="TextBox 12"/>
             <p:cNvSpPr txBox="1"/>
             <p:nvPr/>
           </p:nvSpPr>
@@ -4487,7 +4439,7 @@
         </p:sp>
         <p:sp>
           <p:nvSpPr>
-            <p:cNvPr id="14" name="TextBox 14"/>
+            <p:cNvPr id="13" name="TextBox 13"/>
             <p:cNvSpPr txBox="1"/>
             <p:nvPr/>
           </p:nvSpPr>
@@ -4527,7 +4479,7 @@
         </p:sp>
         <p:sp>
           <p:nvSpPr>
-            <p:cNvPr id="15" name="TextBox 15"/>
+            <p:cNvPr id="14" name="TextBox 14"/>
             <p:cNvSpPr txBox="1"/>
             <p:nvPr/>
           </p:nvSpPr>
@@ -4567,7 +4519,7 @@
         </p:sp>
         <p:sp>
           <p:nvSpPr>
-            <p:cNvPr id="16" name="TextBox 16"/>
+            <p:cNvPr id="15" name="TextBox 15"/>
             <p:cNvSpPr txBox="1"/>
             <p:nvPr/>
           </p:nvSpPr>
@@ -4608,7 +4560,7 @@
       </p:grpSp>
       <p:grpSp>
         <p:nvGrpSpPr>
-          <p:cNvPr id="27" name="Group 27"/>
+          <p:cNvPr id="26" name="Group 26"/>
           <p:cNvGrpSpPr/>
           <p:nvPr/>
         </p:nvGrpSpPr>
@@ -4622,7 +4574,7 @@
         </p:grpSpPr>
         <p:sp>
           <p:nvSpPr>
-            <p:cNvPr id="18" name="Rectangle 18"/>
+            <p:cNvPr id="17" name="Rectangle 17"/>
             <p:cNvSpPr/>
             <p:nvPr/>
           </p:nvSpPr>
@@ -4646,7 +4598,7 @@
         </p:sp>
         <p:sp>
           <p:nvSpPr>
-            <p:cNvPr id="19" name="Ellipse 19"/>
+            <p:cNvPr id="18" name="Ellipse 18"/>
             <p:cNvSpPr/>
             <p:nvPr/>
           </p:nvSpPr>
@@ -4668,7 +4620,7 @@
         </p:sp>
         <p:sp>
           <p:nvSpPr>
-            <p:cNvPr id="20" name="Ellipse 20"/>
+            <p:cNvPr id="19" name="Ellipse 19"/>
             <p:cNvSpPr/>
             <p:nvPr/>
           </p:nvSpPr>
@@ -4690,7 +4642,7 @@
         </p:sp>
         <p:sp>
           <p:nvSpPr>
-            <p:cNvPr id="21" name="Ellipse 21"/>
+            <p:cNvPr id="20" name="Ellipse 20"/>
             <p:cNvSpPr/>
             <p:nvPr/>
           </p:nvSpPr>
@@ -4712,7 +4664,7 @@
         </p:sp>
         <p:sp>
           <p:nvSpPr>
-            <p:cNvPr id="22" name="TextBox 22"/>
+            <p:cNvPr id="21" name="TextBox 21"/>
             <p:cNvSpPr txBox="1"/>
             <p:nvPr/>
           </p:nvSpPr>
@@ -4752,7 +4704,7 @@
         </p:sp>
         <p:sp>
           <p:nvSpPr>
-            <p:cNvPr id="23" name="TextBox 23"/>
+            <p:cNvPr id="22" name="TextBox 22"/>
             <p:cNvSpPr txBox="1"/>
             <p:nvPr/>
           </p:nvSpPr>
@@ -4792,7 +4744,7 @@
         </p:sp>
         <p:sp>
           <p:nvSpPr>
-            <p:cNvPr id="24" name="TextBox 24"/>
+            <p:cNvPr id="23" name="TextBox 23"/>
             <p:cNvSpPr txBox="1"/>
             <p:nvPr/>
           </p:nvSpPr>
@@ -4832,7 +4784,7 @@
         </p:sp>
         <p:sp>
           <p:nvSpPr>
-            <p:cNvPr id="25" name="TextBox 25"/>
+            <p:cNvPr id="24" name="TextBox 24"/>
             <p:cNvSpPr txBox="1"/>
             <p:nvPr/>
           </p:nvSpPr>
@@ -4872,7 +4824,7 @@
         </p:sp>
         <p:sp>
           <p:nvSpPr>
-            <p:cNvPr id="26" name="TextBox 26"/>
+            <p:cNvPr id="25" name="TextBox 25"/>
             <p:cNvSpPr txBox="1"/>
             <p:nvPr/>
           </p:nvSpPr>
@@ -4913,7 +4865,7 @@
       </p:grpSp>
       <p:grpSp>
         <p:nvGrpSpPr>
-          <p:cNvPr id="33" name="Group 33"/>
+          <p:cNvPr id="32" name="Group 32"/>
           <p:cNvGrpSpPr/>
           <p:nvPr/>
         </p:nvGrpSpPr>
@@ -4927,7 +4879,7 @@
         </p:grpSpPr>
         <p:sp>
           <p:nvSpPr>
-            <p:cNvPr id="28" name="Rectangle 28"/>
+            <p:cNvPr id="27" name="Rectangle 27"/>
             <p:cNvSpPr/>
             <p:nvPr/>
           </p:nvSpPr>
@@ -4953,7 +4905,7 @@
         </p:sp>
         <p:sp>
           <p:nvSpPr>
-            <p:cNvPr id="29" name="Rectangle 29"/>
+            <p:cNvPr id="28" name="Rectangle 28"/>
             <p:cNvSpPr/>
             <p:nvPr/>
           </p:nvSpPr>
@@ -4977,7 +4929,7 @@
         </p:sp>
         <p:sp>
           <p:nvSpPr>
-            <p:cNvPr id="30" name="TextBox 30"/>
+            <p:cNvPr id="29" name="TextBox 29"/>
             <p:cNvSpPr txBox="1"/>
             <p:nvPr/>
           </p:nvSpPr>
@@ -5017,7 +4969,7 @@
         </p:sp>
         <p:sp>
           <p:nvSpPr>
-            <p:cNvPr id="31" name="TextBox 31"/>
+            <p:cNvPr id="30" name="TextBox 30"/>
             <p:cNvSpPr txBox="1"/>
             <p:nvPr/>
           </p:nvSpPr>
@@ -5057,7 +5009,7 @@
         </p:sp>
         <p:sp>
           <p:nvSpPr>
-            <p:cNvPr id="32" name="TextBox 32"/>
+            <p:cNvPr id="31" name="TextBox 31"/>
             <p:cNvSpPr txBox="1"/>
             <p:nvPr/>
           </p:nvSpPr>
@@ -5098,7 +5050,7 @@
       </p:grpSp>
       <p:sp>
         <p:nvSpPr>
-          <p:cNvPr id="34" name="Rectangle 34"/>
+          <p:cNvPr id="33" name="Rectangle 33"/>
           <p:cNvSpPr/>
           <p:nvPr/>
         </p:nvSpPr>
@@ -5122,7 +5074,7 @@
       </p:sp>
       <p:sp>
         <p:nvSpPr>
-          <p:cNvPr id="35" name="TextBox 35"/>
+          <p:cNvPr id="34" name="TextBox 34"/>
           <p:cNvSpPr txBox="1"/>
           <p:nvPr/>
         </p:nvSpPr>
@@ -5162,7 +5114,7 @@
       </p:sp>
       <p:sp>
         <p:nvSpPr>
-          <p:cNvPr id="36" name="TextBox 36"/>
+          <p:cNvPr id="35" name="TextBox 35"/>
           <p:cNvSpPr txBox="1"/>
           <p:nvPr/>
         </p:nvSpPr>
@@ -5202,7 +5154,7 @@
       </p:sp>
       <p:grpSp>
         <p:nvGrpSpPr>
-          <p:cNvPr id="39" name="Group 39"/>
+          <p:cNvPr id="38" name="Group 38"/>
           <p:cNvGrpSpPr/>
           <p:nvPr/>
         </p:nvGrpSpPr>
@@ -5216,7 +5168,7 @@
         </p:grpSpPr>
         <p:sp>
           <p:nvSpPr>
-            <p:cNvPr id="37" name="TextBox 37"/>
+            <p:cNvPr id="36" name="TextBox 36"/>
             <p:cNvSpPr txBox="1"/>
             <p:nvPr/>
           </p:nvSpPr>
@@ -5256,7 +5208,7 @@
         </p:sp>
         <p:sp>
           <p:nvSpPr>
-            <p:cNvPr id="38" name="TextBox 38"/>
+            <p:cNvPr id="37" name="TextBox 37"/>
             <p:cNvSpPr txBox="1"/>
             <p:nvPr/>
           </p:nvSpPr>
@@ -5341,7 +5293,7 @@
         </p:nvPicPr>
         <p:blipFill>
           <a:blip r:embed="rId2">
-            <a:alphaModFix amt="5500"/>
+            <a:alphaModFix amt="14000"/>
           </a:blip>
           <a:srcRect l="0" t="27" r="0" b="27"/>
           <a:stretch>
@@ -5358,33 +5310,9 @@
           </a:prstGeom>
         </p:spPr>
       </p:pic>
-      <p:sp>
-        <p:nvSpPr>
-          <p:cNvPr id="3" name="Rectangle 3"/>
-          <p:cNvSpPr/>
-          <p:nvPr/>
-        </p:nvSpPr>
-        <p:spPr>
-          <a:xfrm>
-            <a:off x="0" y="0"/>
-            <a:ext cx="12192000" cy="6858000"/>
-          </a:xfrm>
-          <a:prstGeom prst="rect">
-            <a:avLst/>
-          </a:prstGeom>
-          <a:solidFill>
-            <a:schemeClr val="lt1">
-              <a:alpha val="82000"/>
-            </a:schemeClr>
-          </a:solidFill>
-          <a:ln>
-            <a:noFill/>
-          </a:ln>
-        </p:spPr>
-      </p:sp>
       <p:grpSp>
         <p:nvGrpSpPr>
-          <p:cNvPr id="8" name="Group 8"/>
+          <p:cNvPr id="7" name="Group 7"/>
           <p:cNvGrpSpPr/>
           <p:nvPr/>
         </p:nvGrpSpPr>
@@ -5398,7 +5326,7 @@
         </p:grpSpPr>
         <p:sp>
           <p:nvSpPr>
-            <p:cNvPr id="4" name="TextBox 4"/>
+            <p:cNvPr id="3" name="TextBox 3"/>
             <p:cNvSpPr txBox="1"/>
             <p:nvPr/>
           </p:nvSpPr>
@@ -5438,7 +5366,7 @@
         </p:sp>
         <p:sp>
           <p:nvSpPr>
-            <p:cNvPr id="5" name="TextBox 5"/>
+            <p:cNvPr id="4" name="TextBox 4"/>
             <p:cNvSpPr txBox="1"/>
             <p:nvPr/>
           </p:nvSpPr>
@@ -5478,7 +5406,7 @@
         </p:sp>
         <p:sp>
           <p:nvSpPr>
-            <p:cNvPr id="6" name="TextBox 6"/>
+            <p:cNvPr id="5" name="TextBox 5"/>
             <p:cNvSpPr txBox="1"/>
             <p:nvPr/>
           </p:nvSpPr>
@@ -5518,7 +5446,7 @@
         </p:sp>
         <p:sp>
           <p:nvSpPr>
-            <p:cNvPr id="7" name="Line 7"/>
+            <p:cNvPr id="6" name="Line 6"/>
             <p:cNvSpPr/>
             <p:nvPr/>
           </p:nvSpPr>
@@ -5555,7 +5483,7 @@
       </p:grpSp>
       <p:grpSp>
         <p:nvGrpSpPr>
-          <p:cNvPr id="22" name="Group 22"/>
+          <p:cNvPr id="21" name="Group 21"/>
           <p:cNvGrpSpPr/>
           <p:nvPr/>
         </p:nvGrpSpPr>
@@ -5569,7 +5497,7 @@
         </p:grpSpPr>
         <p:sp>
           <p:nvSpPr>
-            <p:cNvPr id="9" name="Rectangle 9"/>
+            <p:cNvPr id="8" name="Rectangle 8"/>
             <p:cNvSpPr/>
             <p:nvPr/>
           </p:nvSpPr>
@@ -5595,7 +5523,7 @@
         </p:sp>
         <p:sp>
           <p:nvSpPr>
-            <p:cNvPr id="10" name="TextBox 10"/>
+            <p:cNvPr id="9" name="TextBox 9"/>
             <p:cNvSpPr txBox="1"/>
             <p:nvPr/>
           </p:nvSpPr>
@@ -5635,7 +5563,7 @@
         </p:sp>
         <p:sp>
           <p:nvSpPr>
-            <p:cNvPr id="11" name="Rectangle 11"/>
+            <p:cNvPr id="10" name="Rectangle 10"/>
             <p:cNvSpPr/>
             <p:nvPr/>
           </p:nvSpPr>
@@ -5659,7 +5587,7 @@
         </p:sp>
         <p:sp>
           <p:nvSpPr>
-            <p:cNvPr id="12" name="TextBox 12"/>
+            <p:cNvPr id="11" name="TextBox 11"/>
             <p:cNvSpPr txBox="1"/>
             <p:nvPr/>
           </p:nvSpPr>
@@ -5699,7 +5627,7 @@
         </p:sp>
         <p:sp>
           <p:nvSpPr>
-            <p:cNvPr id="13" name="Rectangle 13"/>
+            <p:cNvPr id="12" name="Rectangle 12"/>
             <p:cNvSpPr/>
             <p:nvPr/>
           </p:nvSpPr>
@@ -5723,7 +5651,7 @@
         </p:sp>
         <p:sp>
           <p:nvSpPr>
-            <p:cNvPr id="14" name="TextBox 14"/>
+            <p:cNvPr id="13" name="TextBox 13"/>
             <p:cNvSpPr txBox="1"/>
             <p:nvPr/>
           </p:nvSpPr>
@@ -5763,7 +5691,7 @@
         </p:sp>
         <p:sp>
           <p:nvSpPr>
-            <p:cNvPr id="15" name="Rectangle 15"/>
+            <p:cNvPr id="14" name="Rectangle 14"/>
             <p:cNvSpPr/>
             <p:nvPr/>
           </p:nvSpPr>
@@ -5787,7 +5715,7 @@
         </p:sp>
         <p:sp>
           <p:nvSpPr>
-            <p:cNvPr id="16" name="TextBox 16"/>
+            <p:cNvPr id="15" name="TextBox 15"/>
             <p:cNvSpPr txBox="1"/>
             <p:nvPr/>
           </p:nvSpPr>
@@ -5827,7 +5755,7 @@
         </p:sp>
         <p:sp>
           <p:nvSpPr>
-            <p:cNvPr id="17" name="Rectangle 17"/>
+            <p:cNvPr id="16" name="Rectangle 16"/>
             <p:cNvSpPr/>
             <p:nvPr/>
           </p:nvSpPr>
@@ -5851,7 +5779,7 @@
         </p:sp>
         <p:sp>
           <p:nvSpPr>
-            <p:cNvPr id="18" name="TextBox 18"/>
+            <p:cNvPr id="17" name="TextBox 17"/>
             <p:cNvSpPr txBox="1"/>
             <p:nvPr/>
           </p:nvSpPr>
@@ -5891,7 +5819,7 @@
         </p:sp>
         <p:sp>
           <p:nvSpPr>
-            <p:cNvPr id="19" name="Rectangle 19"/>
+            <p:cNvPr id="18" name="Rectangle 18"/>
             <p:cNvSpPr/>
             <p:nvPr/>
           </p:nvSpPr>
@@ -5915,7 +5843,7 @@
         </p:sp>
         <p:sp>
           <p:nvSpPr>
-            <p:cNvPr id="20" name="TextBox 20"/>
+            <p:cNvPr id="19" name="TextBox 19"/>
             <p:cNvSpPr txBox="1"/>
             <p:nvPr/>
           </p:nvSpPr>
@@ -5955,7 +5883,7 @@
         </p:sp>
         <p:sp>
           <p:nvSpPr>
-            <p:cNvPr id="21" name="Freeform 21"/>
+            <p:cNvPr id="20" name="Freeform 20"/>
             <p:cNvSpPr/>
             <p:nvPr/>
           </p:nvSpPr>
@@ -5997,7 +5925,7 @@
       </p:grpSp>
       <p:grpSp>
         <p:nvGrpSpPr>
-          <p:cNvPr id="32" name="Group 32"/>
+          <p:cNvPr id="31" name="Group 31"/>
           <p:cNvGrpSpPr/>
           <p:nvPr/>
         </p:nvGrpSpPr>
@@ -6011,7 +5939,7 @@
         </p:grpSpPr>
         <p:sp>
           <p:nvSpPr>
-            <p:cNvPr id="23" name="Rectangle 23"/>
+            <p:cNvPr id="22" name="Rectangle 22"/>
             <p:cNvSpPr/>
             <p:nvPr/>
           </p:nvSpPr>
@@ -6037,7 +5965,7 @@
         </p:sp>
         <p:sp>
           <p:nvSpPr>
-            <p:cNvPr id="24" name="TextBox 24"/>
+            <p:cNvPr id="23" name="TextBox 23"/>
             <p:cNvSpPr txBox="1"/>
             <p:nvPr/>
           </p:nvSpPr>
@@ -6077,7 +6005,7 @@
         </p:sp>
         <p:sp>
           <p:nvSpPr>
-            <p:cNvPr id="25" name="Rectangle 25"/>
+            <p:cNvPr id="24" name="Rectangle 24"/>
             <p:cNvSpPr/>
             <p:nvPr/>
           </p:nvSpPr>
@@ -6101,7 +6029,7 @@
         </p:sp>
         <p:sp>
           <p:nvSpPr>
-            <p:cNvPr id="26" name="TextBox 26"/>
+            <p:cNvPr id="25" name="TextBox 25"/>
             <p:cNvSpPr txBox="1"/>
             <p:nvPr/>
           </p:nvSpPr>
@@ -6141,7 +6069,7 @@
         </p:sp>
         <p:sp>
           <p:nvSpPr>
-            <p:cNvPr id="27" name="Rectangle 27"/>
+            <p:cNvPr id="26" name="Rectangle 26"/>
             <p:cNvSpPr/>
             <p:nvPr/>
           </p:nvSpPr>
@@ -6165,7 +6093,7 @@
         </p:sp>
         <p:sp>
           <p:nvSpPr>
-            <p:cNvPr id="28" name="TextBox 28"/>
+            <p:cNvPr id="27" name="TextBox 27"/>
             <p:cNvSpPr txBox="1"/>
             <p:nvPr/>
           </p:nvSpPr>
@@ -6205,7 +6133,7 @@
         </p:sp>
         <p:sp>
           <p:nvSpPr>
-            <p:cNvPr id="29" name="Rectangle 29"/>
+            <p:cNvPr id="28" name="Rectangle 28"/>
             <p:cNvSpPr/>
             <p:nvPr/>
           </p:nvSpPr>
@@ -6229,7 +6157,7 @@
         </p:sp>
         <p:sp>
           <p:nvSpPr>
-            <p:cNvPr id="30" name="TextBox 30"/>
+            <p:cNvPr id="29" name="TextBox 29"/>
             <p:cNvSpPr txBox="1"/>
             <p:nvPr/>
           </p:nvSpPr>
@@ -6269,7 +6197,7 @@
         </p:sp>
         <p:sp>
           <p:nvSpPr>
-            <p:cNvPr id="31" name="TextBox 31"/>
+            <p:cNvPr id="30" name="TextBox 30"/>
             <p:cNvSpPr txBox="1"/>
             <p:nvPr/>
           </p:nvSpPr>
@@ -6310,7 +6238,7 @@
       </p:grpSp>
       <p:grpSp>
         <p:nvGrpSpPr>
-          <p:cNvPr id="37" name="Group 37"/>
+          <p:cNvPr id="36" name="Group 36"/>
           <p:cNvGrpSpPr/>
           <p:nvPr/>
         </p:nvGrpSpPr>
@@ -6324,7 +6252,7 @@
         </p:grpSpPr>
         <p:sp>
           <p:nvSpPr>
-            <p:cNvPr id="33" name="Rectangle 33"/>
+            <p:cNvPr id="32" name="Rectangle 32"/>
             <p:cNvSpPr/>
             <p:nvPr/>
           </p:nvSpPr>
@@ -6348,7 +6276,7 @@
         </p:sp>
         <p:sp>
           <p:nvSpPr>
-            <p:cNvPr id="34" name="TextBox 34"/>
+            <p:cNvPr id="33" name="TextBox 33"/>
             <p:cNvSpPr txBox="1"/>
             <p:nvPr/>
           </p:nvSpPr>
@@ -6388,7 +6316,7 @@
         </p:sp>
         <p:sp>
           <p:nvSpPr>
-            <p:cNvPr id="35" name="TextBox 35"/>
+            <p:cNvPr id="34" name="TextBox 34"/>
             <p:cNvSpPr txBox="1"/>
             <p:nvPr/>
           </p:nvSpPr>
@@ -6428,7 +6356,7 @@
         </p:sp>
         <p:sp>
           <p:nvSpPr>
-            <p:cNvPr id="36" name="TextBox 36"/>
+            <p:cNvPr id="35" name="TextBox 35"/>
             <p:cNvSpPr txBox="1"/>
             <p:nvPr/>
           </p:nvSpPr>
@@ -6469,7 +6397,7 @@
       </p:grpSp>
       <p:grpSp>
         <p:nvGrpSpPr>
-          <p:cNvPr id="40" name="Group 40"/>
+          <p:cNvPr id="39" name="Group 39"/>
           <p:cNvGrpSpPr/>
           <p:nvPr/>
         </p:nvGrpSpPr>
@@ -6483,7 +6411,7 @@
         </p:grpSpPr>
         <p:sp>
           <p:nvSpPr>
-            <p:cNvPr id="38" name="TextBox 38"/>
+            <p:cNvPr id="37" name="TextBox 37"/>
             <p:cNvSpPr txBox="1"/>
             <p:nvPr/>
           </p:nvSpPr>
@@ -6523,7 +6451,7 @@
         </p:sp>
         <p:sp>
           <p:nvSpPr>
-            <p:cNvPr id="39" name="TextBox 39"/>
+            <p:cNvPr id="38" name="TextBox 38"/>
             <p:cNvSpPr txBox="1"/>
             <p:nvPr/>
           </p:nvSpPr>
@@ -6608,7 +6536,7 @@
         </p:nvPicPr>
         <p:blipFill>
           <a:blip r:embed="rId2">
-            <a:alphaModFix amt="5500"/>
+            <a:alphaModFix amt="14000"/>
           </a:blip>
           <a:srcRect l="0" t="27" r="0" b="27"/>
           <a:stretch>
@@ -6625,33 +6553,9 @@
           </a:prstGeom>
         </p:spPr>
       </p:pic>
-      <p:sp>
-        <p:nvSpPr>
-          <p:cNvPr id="3" name="Rectangle 3"/>
-          <p:cNvSpPr/>
-          <p:nvPr/>
-        </p:nvSpPr>
-        <p:spPr>
-          <a:xfrm>
-            <a:off x="0" y="0"/>
-            <a:ext cx="12192000" cy="6858000"/>
-          </a:xfrm>
-          <a:prstGeom prst="rect">
-            <a:avLst/>
-          </a:prstGeom>
-          <a:solidFill>
-            <a:schemeClr val="lt1">
-              <a:alpha val="82000"/>
-            </a:schemeClr>
-          </a:solidFill>
-          <a:ln>
-            <a:noFill/>
-          </a:ln>
-        </p:spPr>
-      </p:sp>
       <p:grpSp>
         <p:nvGrpSpPr>
-          <p:cNvPr id="8" name="Group 8"/>
+          <p:cNvPr id="7" name="Group 7"/>
           <p:cNvGrpSpPr/>
           <p:nvPr/>
         </p:nvGrpSpPr>
@@ -6665,7 +6569,7 @@
         </p:grpSpPr>
         <p:sp>
           <p:nvSpPr>
-            <p:cNvPr id="4" name="TextBox 4"/>
+            <p:cNvPr id="3" name="TextBox 3"/>
             <p:cNvSpPr txBox="1"/>
             <p:nvPr/>
           </p:nvSpPr>
@@ -6705,7 +6609,7 @@
         </p:sp>
         <p:sp>
           <p:nvSpPr>
-            <p:cNvPr id="5" name="TextBox 5"/>
+            <p:cNvPr id="4" name="TextBox 4"/>
             <p:cNvSpPr txBox="1"/>
             <p:nvPr/>
           </p:nvSpPr>
@@ -6745,7 +6649,7 @@
         </p:sp>
         <p:sp>
           <p:nvSpPr>
-            <p:cNvPr id="6" name="TextBox 6"/>
+            <p:cNvPr id="5" name="TextBox 5"/>
             <p:cNvSpPr txBox="1"/>
             <p:nvPr/>
           </p:nvSpPr>
@@ -6785,7 +6689,7 @@
         </p:sp>
         <p:sp>
           <p:nvSpPr>
-            <p:cNvPr id="7" name="Line 7"/>
+            <p:cNvPr id="6" name="Line 6"/>
             <p:cNvSpPr/>
             <p:nvPr/>
           </p:nvSpPr>
@@ -6822,7 +6726,7 @@
       </p:grpSp>
       <p:grpSp>
         <p:nvGrpSpPr>
-          <p:cNvPr id="25" name="Group 25"/>
+          <p:cNvPr id="24" name="Group 24"/>
           <p:cNvGrpSpPr/>
           <p:nvPr/>
         </p:nvGrpSpPr>
@@ -6836,7 +6740,7 @@
         </p:grpSpPr>
         <p:sp>
           <p:nvSpPr>
-            <p:cNvPr id="9" name="Rectangle 9"/>
+            <p:cNvPr id="8" name="Rectangle 8"/>
             <p:cNvSpPr/>
             <p:nvPr/>
           </p:nvSpPr>
@@ -6862,7 +6766,7 @@
         </p:sp>
         <p:sp>
           <p:nvSpPr>
-            <p:cNvPr id="10" name="Rectangle 10"/>
+            <p:cNvPr id="9" name="Rectangle 9"/>
             <p:cNvSpPr/>
             <p:nvPr/>
           </p:nvSpPr>
@@ -6888,7 +6792,7 @@
         </p:sp>
         <p:sp>
           <p:nvSpPr>
-            <p:cNvPr id="11" name="TextBox 11"/>
+            <p:cNvPr id="10" name="TextBox 10"/>
             <p:cNvSpPr txBox="1"/>
             <p:nvPr/>
           </p:nvSpPr>
@@ -6928,7 +6832,7 @@
         </p:sp>
         <p:sp>
           <p:nvSpPr>
-            <p:cNvPr id="12" name="TextBox 12"/>
+            <p:cNvPr id="11" name="TextBox 11"/>
             <p:cNvSpPr txBox="1"/>
             <p:nvPr/>
           </p:nvSpPr>
@@ -6968,7 +6872,7 @@
         </p:sp>
         <p:sp>
           <p:nvSpPr>
-            <p:cNvPr id="13" name="Rectangle 13"/>
+            <p:cNvPr id="12" name="Rectangle 12"/>
             <p:cNvSpPr/>
             <p:nvPr/>
           </p:nvSpPr>
@@ -6992,7 +6896,7 @@
         </p:sp>
         <p:sp>
           <p:nvSpPr>
-            <p:cNvPr id="14" name="TextBox 14"/>
+            <p:cNvPr id="13" name="TextBox 13"/>
             <p:cNvSpPr txBox="1"/>
             <p:nvPr/>
           </p:nvSpPr>
@@ -7032,7 +6936,7 @@
         </p:sp>
         <p:sp>
           <p:nvSpPr>
-            <p:cNvPr id="15" name="TextBox 15"/>
+            <p:cNvPr id="14" name="TextBox 14"/>
             <p:cNvSpPr txBox="1"/>
             <p:nvPr/>
           </p:nvSpPr>
@@ -7072,7 +6976,7 @@
         </p:sp>
         <p:sp>
           <p:nvSpPr>
-            <p:cNvPr id="16" name="Freeform 16"/>
+            <p:cNvPr id="15" name="Freeform 15"/>
             <p:cNvSpPr/>
             <p:nvPr/>
           </p:nvSpPr>
@@ -7110,7 +7014,7 @@
         </p:sp>
         <p:sp>
           <p:nvSpPr>
-            <p:cNvPr id="17" name="Freeform 17"/>
+            <p:cNvPr id="16" name="Freeform 16"/>
             <p:cNvSpPr/>
             <p:nvPr/>
           </p:nvSpPr>
@@ -7150,7 +7054,7 @@
         </p:sp>
         <p:sp>
           <p:nvSpPr>
-            <p:cNvPr id="18" name="TextBox 18"/>
+            <p:cNvPr id="17" name="TextBox 17"/>
             <p:cNvSpPr txBox="1"/>
             <p:nvPr/>
           </p:nvSpPr>
@@ -7190,7 +7094,7 @@
         </p:sp>
         <p:sp>
           <p:nvSpPr>
-            <p:cNvPr id="19" name="Rectangle 19"/>
+            <p:cNvPr id="18" name="Rectangle 18"/>
             <p:cNvSpPr/>
             <p:nvPr/>
           </p:nvSpPr>
@@ -7216,7 +7120,7 @@
         </p:sp>
         <p:sp>
           <p:nvSpPr>
-            <p:cNvPr id="20" name="TextBox 20"/>
+            <p:cNvPr id="19" name="TextBox 19"/>
             <p:cNvSpPr txBox="1"/>
             <p:nvPr/>
           </p:nvSpPr>
@@ -7256,7 +7160,7 @@
         </p:sp>
         <p:sp>
           <p:nvSpPr>
-            <p:cNvPr id="21" name="TextBox 21"/>
+            <p:cNvPr id="20" name="TextBox 20"/>
             <p:cNvSpPr txBox="1"/>
             <p:nvPr/>
           </p:nvSpPr>
@@ -7296,7 +7200,7 @@
         </p:sp>
         <p:sp>
           <p:nvSpPr>
-            <p:cNvPr id="22" name="Rectangle 22"/>
+            <p:cNvPr id="21" name="Rectangle 21"/>
             <p:cNvSpPr/>
             <p:nvPr/>
           </p:nvSpPr>
@@ -7320,7 +7224,7 @@
         </p:sp>
         <p:sp>
           <p:nvSpPr>
-            <p:cNvPr id="23" name="TextBox 23"/>
+            <p:cNvPr id="22" name="TextBox 22"/>
             <p:cNvSpPr txBox="1"/>
             <p:nvPr/>
           </p:nvSpPr>
@@ -7360,7 +7264,7 @@
         </p:sp>
         <p:sp>
           <p:nvSpPr>
-            <p:cNvPr id="24" name="TextBox 24"/>
+            <p:cNvPr id="23" name="TextBox 23"/>
             <p:cNvSpPr txBox="1"/>
             <p:nvPr/>
           </p:nvSpPr>
@@ -7401,7 +7305,7 @@
       </p:grpSp>
       <p:grpSp>
         <p:nvGrpSpPr>
-          <p:cNvPr id="28" name="Group 28"/>
+          <p:cNvPr id="27" name="Group 27"/>
           <p:cNvGrpSpPr/>
           <p:nvPr/>
         </p:nvGrpSpPr>
@@ -7415,7 +7319,7 @@
         </p:grpSpPr>
         <p:sp>
           <p:nvSpPr>
-            <p:cNvPr id="26" name="Rectangle 26"/>
+            <p:cNvPr id="25" name="Rectangle 25"/>
             <p:cNvSpPr/>
             <p:nvPr/>
           </p:nvSpPr>
@@ -7439,7 +7343,7 @@
         </p:sp>
         <p:sp>
           <p:nvSpPr>
-            <p:cNvPr id="27" name="TextBox 27"/>
+            <p:cNvPr id="26" name="TextBox 26"/>
             <p:cNvSpPr txBox="1"/>
             <p:nvPr/>
           </p:nvSpPr>
@@ -7480,7 +7384,7 @@
       </p:grpSp>
       <p:grpSp>
         <p:nvGrpSpPr>
-          <p:cNvPr id="31" name="Group 31"/>
+          <p:cNvPr id="30" name="Group 30"/>
           <p:cNvGrpSpPr/>
           <p:nvPr/>
         </p:nvGrpSpPr>
@@ -7494,7 +7398,7 @@
         </p:grpSpPr>
         <p:sp>
           <p:nvSpPr>
-            <p:cNvPr id="29" name="TextBox 29"/>
+            <p:cNvPr id="28" name="TextBox 28"/>
             <p:cNvSpPr txBox="1"/>
             <p:nvPr/>
           </p:nvSpPr>
@@ -7534,7 +7438,7 @@
         </p:sp>
         <p:sp>
           <p:nvSpPr>
-            <p:cNvPr id="30" name="TextBox 30"/>
+            <p:cNvPr id="29" name="TextBox 29"/>
             <p:cNvSpPr txBox="1"/>
             <p:nvPr/>
           </p:nvSpPr>
@@ -7619,7 +7523,7 @@
         </p:nvPicPr>
         <p:blipFill>
           <a:blip r:embed="rId2">
-            <a:alphaModFix amt="5500"/>
+            <a:alphaModFix amt="14000"/>
           </a:blip>
           <a:srcRect l="0" t="27" r="0" b="27"/>
           <a:stretch>
@@ -7636,33 +7540,9 @@
           </a:prstGeom>
         </p:spPr>
       </p:pic>
-      <p:sp>
-        <p:nvSpPr>
-          <p:cNvPr id="3" name="Rectangle 3"/>
-          <p:cNvSpPr/>
-          <p:nvPr/>
-        </p:nvSpPr>
-        <p:spPr>
-          <a:xfrm>
-            <a:off x="0" y="0"/>
-            <a:ext cx="12192000" cy="6858000"/>
-          </a:xfrm>
-          <a:prstGeom prst="rect">
-            <a:avLst/>
-          </a:prstGeom>
-          <a:solidFill>
-            <a:schemeClr val="lt1">
-              <a:alpha val="82000"/>
-            </a:schemeClr>
-          </a:solidFill>
-          <a:ln>
-            <a:noFill/>
-          </a:ln>
-        </p:spPr>
-      </p:sp>
       <p:grpSp>
         <p:nvGrpSpPr>
-          <p:cNvPr id="8" name="Group 8"/>
+          <p:cNvPr id="7" name="Group 7"/>
           <p:cNvGrpSpPr/>
           <p:nvPr/>
         </p:nvGrpSpPr>
@@ -7676,7 +7556,7 @@
         </p:grpSpPr>
         <p:sp>
           <p:nvSpPr>
-            <p:cNvPr id="4" name="TextBox 4"/>
+            <p:cNvPr id="3" name="TextBox 3"/>
             <p:cNvSpPr txBox="1"/>
             <p:nvPr/>
           </p:nvSpPr>
@@ -7716,7 +7596,7 @@
         </p:sp>
         <p:sp>
           <p:nvSpPr>
-            <p:cNvPr id="5" name="TextBox 5"/>
+            <p:cNvPr id="4" name="TextBox 4"/>
             <p:cNvSpPr txBox="1"/>
             <p:nvPr/>
           </p:nvSpPr>
@@ -7756,7 +7636,7 @@
         </p:sp>
         <p:sp>
           <p:nvSpPr>
-            <p:cNvPr id="6" name="TextBox 6"/>
+            <p:cNvPr id="5" name="TextBox 5"/>
             <p:cNvSpPr txBox="1"/>
             <p:nvPr/>
           </p:nvSpPr>
@@ -7796,7 +7676,7 @@
         </p:sp>
         <p:sp>
           <p:nvSpPr>
-            <p:cNvPr id="7" name="Line 7"/>
+            <p:cNvPr id="6" name="Line 6"/>
             <p:cNvSpPr/>
             <p:nvPr/>
           </p:nvSpPr>
@@ -7833,7 +7713,7 @@
       </p:grpSp>
       <p:grpSp>
         <p:nvGrpSpPr>
-          <p:cNvPr id="33" name="Group 33"/>
+          <p:cNvPr id="32" name="Group 32"/>
           <p:cNvGrpSpPr/>
           <p:nvPr/>
         </p:nvGrpSpPr>
@@ -7847,7 +7727,7 @@
         </p:grpSpPr>
         <p:sp>
           <p:nvSpPr>
-            <p:cNvPr id="9" name="Rectangle 9"/>
+            <p:cNvPr id="8" name="Rectangle 8"/>
             <p:cNvSpPr/>
             <p:nvPr/>
           </p:nvSpPr>
@@ -7873,7 +7753,7 @@
         </p:sp>
         <p:sp>
           <p:nvSpPr>
-            <p:cNvPr id="10" name="Ellipse 10"/>
+            <p:cNvPr id="9" name="Ellipse 9"/>
             <p:cNvSpPr/>
             <p:nvPr/>
           </p:nvSpPr>
@@ -7895,7 +7775,7 @@
         </p:sp>
         <p:sp>
           <p:nvSpPr>
-            <p:cNvPr id="11" name="TextBox 11"/>
+            <p:cNvPr id="10" name="TextBox 10"/>
             <p:cNvSpPr txBox="1"/>
             <p:nvPr/>
           </p:nvSpPr>
@@ -7935,7 +7815,7 @@
         </p:sp>
         <p:sp>
           <p:nvSpPr>
-            <p:cNvPr id="12" name="TextBox 12"/>
+            <p:cNvPr id="11" name="TextBox 11"/>
             <p:cNvSpPr txBox="1"/>
             <p:nvPr/>
           </p:nvSpPr>
@@ -7975,7 +7855,7 @@
         </p:sp>
         <p:sp>
           <p:nvSpPr>
-            <p:cNvPr id="13" name="TextBox 13"/>
+            <p:cNvPr id="12" name="TextBox 12"/>
             <p:cNvSpPr txBox="1"/>
             <p:nvPr/>
           </p:nvSpPr>
@@ -8015,7 +7895,7 @@
         </p:sp>
         <p:sp>
           <p:nvSpPr>
-            <p:cNvPr id="14" name="Freeform 14"/>
+            <p:cNvPr id="13" name="Freeform 13"/>
             <p:cNvSpPr/>
             <p:nvPr/>
           </p:nvSpPr>
@@ -8053,7 +7933,7 @@
         </p:sp>
         <p:sp>
           <p:nvSpPr>
-            <p:cNvPr id="15" name="Freeform 15"/>
+            <p:cNvPr id="14" name="Freeform 14"/>
             <p:cNvSpPr/>
             <p:nvPr/>
           </p:nvSpPr>
@@ -8093,7 +7973,7 @@
         </p:sp>
         <p:sp>
           <p:nvSpPr>
-            <p:cNvPr id="16" name="Ellipse 16"/>
+            <p:cNvPr id="15" name="Ellipse 15"/>
             <p:cNvSpPr/>
             <p:nvPr/>
           </p:nvSpPr>
@@ -8115,7 +7995,7 @@
         </p:sp>
         <p:sp>
           <p:nvSpPr>
-            <p:cNvPr id="17" name="TextBox 17"/>
+            <p:cNvPr id="16" name="TextBox 16"/>
             <p:cNvSpPr txBox="1"/>
             <p:nvPr/>
           </p:nvSpPr>
@@ -8155,7 +8035,7 @@
         </p:sp>
         <p:sp>
           <p:nvSpPr>
-            <p:cNvPr id="18" name="TextBox 18"/>
+            <p:cNvPr id="17" name="TextBox 17"/>
             <p:cNvSpPr txBox="1"/>
             <p:nvPr/>
           </p:nvSpPr>
@@ -8195,7 +8075,7 @@
         </p:sp>
         <p:sp>
           <p:nvSpPr>
-            <p:cNvPr id="19" name="TextBox 19"/>
+            <p:cNvPr id="18" name="TextBox 18"/>
             <p:cNvSpPr txBox="1"/>
             <p:nvPr/>
           </p:nvSpPr>
@@ -8235,7 +8115,7 @@
         </p:sp>
         <p:sp>
           <p:nvSpPr>
-            <p:cNvPr id="20" name="Freeform 20"/>
+            <p:cNvPr id="19" name="Freeform 19"/>
             <p:cNvSpPr/>
             <p:nvPr/>
           </p:nvSpPr>
@@ -8273,7 +8153,7 @@
         </p:sp>
         <p:sp>
           <p:nvSpPr>
-            <p:cNvPr id="21" name="Freeform 21"/>
+            <p:cNvPr id="20" name="Freeform 20"/>
             <p:cNvSpPr/>
             <p:nvPr/>
           </p:nvSpPr>
@@ -8313,7 +8193,7 @@
         </p:sp>
         <p:sp>
           <p:nvSpPr>
-            <p:cNvPr id="22" name="Ellipse 22"/>
+            <p:cNvPr id="21" name="Ellipse 21"/>
             <p:cNvSpPr/>
             <p:nvPr/>
           </p:nvSpPr>
@@ -8335,7 +8215,7 @@
         </p:sp>
         <p:sp>
           <p:nvSpPr>
-            <p:cNvPr id="23" name="TextBox 23"/>
+            <p:cNvPr id="22" name="TextBox 22"/>
             <p:cNvSpPr txBox="1"/>
             <p:nvPr/>
           </p:nvSpPr>
@@ -8375,7 +8255,7 @@
         </p:sp>
         <p:sp>
           <p:nvSpPr>
-            <p:cNvPr id="24" name="TextBox 24"/>
+            <p:cNvPr id="23" name="TextBox 23"/>
             <p:cNvSpPr txBox="1"/>
             <p:nvPr/>
           </p:nvSpPr>
@@ -8415,7 +8295,7 @@
         </p:sp>
         <p:sp>
           <p:nvSpPr>
-            <p:cNvPr id="25" name="TextBox 25"/>
+            <p:cNvPr id="24" name="TextBox 24"/>
             <p:cNvSpPr txBox="1"/>
             <p:nvPr/>
           </p:nvSpPr>
@@ -8455,7 +8335,7 @@
         </p:sp>
         <p:sp>
           <p:nvSpPr>
-            <p:cNvPr id="26" name="Freeform 26"/>
+            <p:cNvPr id="25" name="Freeform 25"/>
             <p:cNvSpPr/>
             <p:nvPr/>
           </p:nvSpPr>
@@ -8493,7 +8373,7 @@
         </p:sp>
         <p:sp>
           <p:nvSpPr>
-            <p:cNvPr id="27" name="Freeform 27"/>
+            <p:cNvPr id="26" name="Freeform 26"/>
             <p:cNvSpPr/>
             <p:nvPr/>
           </p:nvSpPr>
@@ -8533,7 +8413,7 @@
         </p:sp>
         <p:sp>
           <p:nvSpPr>
-            <p:cNvPr id="28" name="Ellipse 28"/>
+            <p:cNvPr id="27" name="Ellipse 27"/>
             <p:cNvSpPr/>
             <p:nvPr/>
           </p:nvSpPr>
@@ -8555,7 +8435,7 @@
         </p:sp>
         <p:sp>
           <p:nvSpPr>
-            <p:cNvPr id="29" name="TextBox 29"/>
+            <p:cNvPr id="28" name="TextBox 28"/>
             <p:cNvSpPr txBox="1"/>
             <p:nvPr/>
           </p:nvSpPr>
@@ -8595,7 +8475,7 @@
         </p:sp>
         <p:sp>
           <p:nvSpPr>
-            <p:cNvPr id="30" name="TextBox 30"/>
+            <p:cNvPr id="29" name="TextBox 29"/>
             <p:cNvSpPr txBox="1"/>
             <p:nvPr/>
           </p:nvSpPr>
@@ -8635,7 +8515,7 @@
         </p:sp>
         <p:sp>
           <p:nvSpPr>
-            <p:cNvPr id="31" name="TextBox 31"/>
+            <p:cNvPr id="30" name="TextBox 30"/>
             <p:cNvSpPr txBox="1"/>
             <p:nvPr/>
           </p:nvSpPr>
@@ -8675,7 +8555,7 @@
         </p:sp>
         <p:sp>
           <p:nvSpPr>
-            <p:cNvPr id="32" name="TextBox 32"/>
+            <p:cNvPr id="31" name="TextBox 31"/>
             <p:cNvSpPr txBox="1"/>
             <p:nvPr/>
           </p:nvSpPr>
@@ -8716,7 +8596,7 @@
       </p:grpSp>
       <p:grpSp>
         <p:nvGrpSpPr>
-          <p:cNvPr id="42" name="Group 42"/>
+          <p:cNvPr id="41" name="Group 41"/>
           <p:cNvGrpSpPr/>
           <p:nvPr/>
         </p:nvGrpSpPr>
@@ -8730,7 +8610,7 @@
         </p:grpSpPr>
         <p:sp>
           <p:nvSpPr>
-            <p:cNvPr id="34" name="Rectangle 34"/>
+            <p:cNvPr id="33" name="Rectangle 33"/>
             <p:cNvSpPr/>
             <p:nvPr/>
           </p:nvSpPr>
@@ -8756,7 +8636,7 @@
         </p:sp>
         <p:sp>
           <p:nvSpPr>
-            <p:cNvPr id="35" name="Rectangle 35"/>
+            <p:cNvPr id="34" name="Rectangle 34"/>
             <p:cNvSpPr/>
             <p:nvPr/>
           </p:nvSpPr>
@@ -8780,7 +8660,7 @@
         </p:sp>
         <p:sp>
           <p:nvSpPr>
-            <p:cNvPr id="36" name="TextBox 36"/>
+            <p:cNvPr id="35" name="TextBox 35"/>
             <p:cNvSpPr txBox="1"/>
             <p:nvPr/>
           </p:nvSpPr>
@@ -8820,7 +8700,7 @@
         </p:sp>
         <p:sp>
           <p:nvSpPr>
-            <p:cNvPr id="37" name="TextBox 37"/>
+            <p:cNvPr id="36" name="TextBox 36"/>
             <p:cNvSpPr txBox="1"/>
             <p:nvPr/>
           </p:nvSpPr>
@@ -8860,7 +8740,7 @@
         </p:sp>
         <p:sp>
           <p:nvSpPr>
-            <p:cNvPr id="38" name="TextBox 38"/>
+            <p:cNvPr id="37" name="TextBox 37"/>
             <p:cNvSpPr txBox="1"/>
             <p:nvPr/>
           </p:nvSpPr>
@@ -8900,7 +8780,7 @@
         </p:sp>
         <p:sp>
           <p:nvSpPr>
-            <p:cNvPr id="39" name="TextBox 39"/>
+            <p:cNvPr id="38" name="TextBox 38"/>
             <p:cNvSpPr txBox="1"/>
             <p:nvPr/>
           </p:nvSpPr>
@@ -8940,7 +8820,7 @@
         </p:sp>
         <p:sp>
           <p:nvSpPr>
-            <p:cNvPr id="40" name="TextBox 40"/>
+            <p:cNvPr id="39" name="TextBox 39"/>
             <p:cNvSpPr txBox="1"/>
             <p:nvPr/>
           </p:nvSpPr>
@@ -8980,7 +8860,7 @@
         </p:sp>
         <p:sp>
           <p:nvSpPr>
-            <p:cNvPr id="41" name="TextBox 41"/>
+            <p:cNvPr id="40" name="TextBox 40"/>
             <p:cNvSpPr txBox="1"/>
             <p:nvPr/>
           </p:nvSpPr>
@@ -9021,7 +8901,7 @@
       </p:grpSp>
       <p:grpSp>
         <p:nvGrpSpPr>
-          <p:cNvPr id="45" name="Group 45"/>
+          <p:cNvPr id="44" name="Group 44"/>
           <p:cNvGrpSpPr/>
           <p:nvPr/>
         </p:nvGrpSpPr>
@@ -9035,7 +8915,7 @@
         </p:grpSpPr>
         <p:sp>
           <p:nvSpPr>
-            <p:cNvPr id="43" name="Rectangle 43"/>
+            <p:cNvPr id="42" name="Rectangle 42"/>
             <p:cNvSpPr/>
             <p:nvPr/>
           </p:nvSpPr>
@@ -9059,7 +8939,7 @@
         </p:sp>
         <p:sp>
           <p:nvSpPr>
-            <p:cNvPr id="44" name="TextBox 44"/>
+            <p:cNvPr id="43" name="TextBox 43"/>
             <p:cNvSpPr txBox="1"/>
             <p:nvPr/>
           </p:nvSpPr>
@@ -9100,7 +8980,7 @@
       </p:grpSp>
       <p:grpSp>
         <p:nvGrpSpPr>
-          <p:cNvPr id="48" name="Group 48"/>
+          <p:cNvPr id="47" name="Group 47"/>
           <p:cNvGrpSpPr/>
           <p:nvPr/>
         </p:nvGrpSpPr>
@@ -9114,7 +8994,7 @@
         </p:grpSpPr>
         <p:sp>
           <p:nvSpPr>
-            <p:cNvPr id="46" name="TextBox 46"/>
+            <p:cNvPr id="45" name="TextBox 45"/>
             <p:cNvSpPr txBox="1"/>
             <p:nvPr/>
           </p:nvSpPr>
@@ -9154,7 +9034,7 @@
         </p:sp>
         <p:sp>
           <p:nvSpPr>
-            <p:cNvPr id="47" name="TextBox 47"/>
+            <p:cNvPr id="46" name="TextBox 46"/>
             <p:cNvSpPr txBox="1"/>
             <p:nvPr/>
           </p:nvSpPr>
@@ -9239,7 +9119,7 @@
         </p:nvPicPr>
         <p:blipFill>
           <a:blip r:embed="rId2">
-            <a:alphaModFix amt="5500"/>
+            <a:alphaModFix amt="14000"/>
           </a:blip>
           <a:srcRect l="0" t="27" r="0" b="27"/>
           <a:stretch>
@@ -9256,33 +9136,9 @@
           </a:prstGeom>
         </p:spPr>
       </p:pic>
-      <p:sp>
-        <p:nvSpPr>
-          <p:cNvPr id="3" name="Rectangle 3"/>
-          <p:cNvSpPr/>
-          <p:nvPr/>
-        </p:nvSpPr>
-        <p:spPr>
-          <a:xfrm>
-            <a:off x="0" y="0"/>
-            <a:ext cx="12192000" cy="6858000"/>
-          </a:xfrm>
-          <a:prstGeom prst="rect">
-            <a:avLst/>
-          </a:prstGeom>
-          <a:solidFill>
-            <a:schemeClr val="lt1">
-              <a:alpha val="82000"/>
-            </a:schemeClr>
-          </a:solidFill>
-          <a:ln>
-            <a:noFill/>
-          </a:ln>
-        </p:spPr>
-      </p:sp>
       <p:grpSp>
         <p:nvGrpSpPr>
-          <p:cNvPr id="8" name="Group 8"/>
+          <p:cNvPr id="7" name="Group 7"/>
           <p:cNvGrpSpPr/>
           <p:nvPr/>
         </p:nvGrpSpPr>
@@ -9296,7 +9152,7 @@
         </p:grpSpPr>
         <p:sp>
           <p:nvSpPr>
-            <p:cNvPr id="4" name="TextBox 4"/>
+            <p:cNvPr id="3" name="TextBox 3"/>
             <p:cNvSpPr txBox="1"/>
             <p:nvPr/>
           </p:nvSpPr>
@@ -9336,7 +9192,7 @@
         </p:sp>
         <p:sp>
           <p:nvSpPr>
-            <p:cNvPr id="5" name="TextBox 5"/>
+            <p:cNvPr id="4" name="TextBox 4"/>
             <p:cNvSpPr txBox="1"/>
             <p:nvPr/>
           </p:nvSpPr>
@@ -9376,7 +9232,7 @@
         </p:sp>
         <p:sp>
           <p:nvSpPr>
-            <p:cNvPr id="6" name="TextBox 6"/>
+            <p:cNvPr id="5" name="TextBox 5"/>
             <p:cNvSpPr txBox="1"/>
             <p:nvPr/>
           </p:nvSpPr>
@@ -9416,7 +9272,7 @@
         </p:sp>
         <p:sp>
           <p:nvSpPr>
-            <p:cNvPr id="7" name="Line 7"/>
+            <p:cNvPr id="6" name="Line 6"/>
             <p:cNvSpPr/>
             <p:nvPr/>
           </p:nvSpPr>
@@ -9453,7 +9309,7 @@
       </p:grpSp>
       <p:grpSp>
         <p:nvGrpSpPr>
-          <p:cNvPr id="11" name="Group 11"/>
+          <p:cNvPr id="10" name="Group 10"/>
           <p:cNvGrpSpPr/>
           <p:nvPr/>
         </p:nvGrpSpPr>
@@ -9467,7 +9323,7 @@
         </p:grpSpPr>
         <p:sp>
           <p:nvSpPr>
-            <p:cNvPr id="9" name="Rectangle 9"/>
+            <p:cNvPr id="8" name="Rectangle 8"/>
             <p:cNvSpPr/>
             <p:nvPr/>
           </p:nvSpPr>
@@ -9493,7 +9349,7 @@
         </p:sp>
         <p:pic>
           <p:nvPicPr>
-            <p:cNvPr id="10" name="Image 10"/>
+            <p:cNvPr id="9" name="Image 9"/>
             <p:cNvPicPr>
               <a:picLocks noChangeAspect="1"/>
             </p:cNvPicPr>
@@ -9518,7 +9374,7 @@
       </p:grpSp>
       <p:grpSp>
         <p:nvGrpSpPr>
-          <p:cNvPr id="14" name="Group 14"/>
+          <p:cNvPr id="13" name="Group 13"/>
           <p:cNvGrpSpPr/>
           <p:nvPr/>
         </p:nvGrpSpPr>
@@ -9532,7 +9388,7 @@
         </p:grpSpPr>
         <p:sp>
           <p:nvSpPr>
-            <p:cNvPr id="12" name="Rectangle 12"/>
+            <p:cNvPr id="11" name="Rectangle 11"/>
             <p:cNvSpPr/>
             <p:nvPr/>
           </p:nvSpPr>
@@ -9558,7 +9414,7 @@
         </p:sp>
         <p:pic>
           <p:nvPicPr>
-            <p:cNvPr id="13" name="Image 13"/>
+            <p:cNvPr id="12" name="Image 12"/>
             <p:cNvPicPr>
               <a:picLocks noChangeAspect="1"/>
             </p:cNvPicPr>
@@ -9583,7 +9439,7 @@
       </p:grpSp>
       <p:grpSp>
         <p:nvGrpSpPr>
-          <p:cNvPr id="17" name="Group 17"/>
+          <p:cNvPr id="16" name="Group 16"/>
           <p:cNvGrpSpPr/>
           <p:nvPr/>
         </p:nvGrpSpPr>
@@ -9597,7 +9453,7 @@
         </p:grpSpPr>
         <p:sp>
           <p:nvSpPr>
-            <p:cNvPr id="15" name="Rectangle 15"/>
+            <p:cNvPr id="14" name="Rectangle 14"/>
             <p:cNvSpPr/>
             <p:nvPr/>
           </p:nvSpPr>
@@ -9623,7 +9479,7 @@
         </p:sp>
         <p:pic>
           <p:nvPicPr>
-            <p:cNvPr id="16" name="Image 16"/>
+            <p:cNvPr id="15" name="Image 15"/>
             <p:cNvPicPr>
               <a:picLocks noChangeAspect="1"/>
             </p:cNvPicPr>
@@ -9648,7 +9504,7 @@
       </p:grpSp>
       <p:grpSp>
         <p:nvGrpSpPr>
-          <p:cNvPr id="22" name="Group 22"/>
+          <p:cNvPr id="21" name="Group 21"/>
           <p:cNvGrpSpPr/>
           <p:nvPr/>
         </p:nvGrpSpPr>
@@ -9662,7 +9518,7 @@
         </p:grpSpPr>
         <p:sp>
           <p:nvSpPr>
-            <p:cNvPr id="18" name="TextBox 18"/>
+            <p:cNvPr id="17" name="TextBox 17"/>
             <p:cNvSpPr txBox="1"/>
             <p:nvPr/>
           </p:nvSpPr>
@@ -9702,7 +9558,7 @@
         </p:sp>
         <p:sp>
           <p:nvSpPr>
-            <p:cNvPr id="19" name="TextBox 19"/>
+            <p:cNvPr id="18" name="TextBox 18"/>
             <p:cNvSpPr txBox="1"/>
             <p:nvPr/>
           </p:nvSpPr>
@@ -9742,7 +9598,7 @@
         </p:sp>
         <p:sp>
           <p:nvSpPr>
-            <p:cNvPr id="20" name="TextBox 20"/>
+            <p:cNvPr id="19" name="TextBox 19"/>
             <p:cNvSpPr txBox="1"/>
             <p:nvPr/>
           </p:nvSpPr>
@@ -9782,7 +9638,7 @@
         </p:sp>
         <p:sp>
           <p:nvSpPr>
-            <p:cNvPr id="21" name="TextBox 21"/>
+            <p:cNvPr id="20" name="TextBox 20"/>
             <p:cNvSpPr txBox="1"/>
             <p:nvPr/>
           </p:nvSpPr>
@@ -9823,7 +9679,7 @@
       </p:grpSp>
       <p:grpSp>
         <p:nvGrpSpPr>
-          <p:cNvPr id="25" name="Group 25"/>
+          <p:cNvPr id="24" name="Group 24"/>
           <p:cNvGrpSpPr/>
           <p:nvPr/>
         </p:nvGrpSpPr>
@@ -9837,7 +9693,7 @@
         </p:grpSpPr>
         <p:sp>
           <p:nvSpPr>
-            <p:cNvPr id="23" name="TextBox 23"/>
+            <p:cNvPr id="22" name="TextBox 22"/>
             <p:cNvSpPr txBox="1"/>
             <p:nvPr/>
           </p:nvSpPr>
@@ -9877,7 +9733,7 @@
         </p:sp>
         <p:sp>
           <p:nvSpPr>
-            <p:cNvPr id="24" name="TextBox 24"/>
+            <p:cNvPr id="23" name="TextBox 23"/>
             <p:cNvSpPr txBox="1"/>
             <p:nvPr/>
           </p:nvSpPr>
@@ -9962,7 +9818,7 @@
         </p:nvPicPr>
         <p:blipFill>
           <a:blip r:embed="rId2">
-            <a:alphaModFix amt="5500"/>
+            <a:alphaModFix amt="14000"/>
           </a:blip>
           <a:srcRect l="0" t="27" r="0" b="27"/>
           <a:stretch>
@@ -9979,33 +9835,9 @@
           </a:prstGeom>
         </p:spPr>
       </p:pic>
-      <p:sp>
-        <p:nvSpPr>
-          <p:cNvPr id="3" name="Rectangle 3"/>
-          <p:cNvSpPr/>
-          <p:nvPr/>
-        </p:nvSpPr>
-        <p:spPr>
-          <a:xfrm>
-            <a:off x="0" y="0"/>
-            <a:ext cx="12192000" cy="6858000"/>
-          </a:xfrm>
-          <a:prstGeom prst="rect">
-            <a:avLst/>
-          </a:prstGeom>
-          <a:solidFill>
-            <a:schemeClr val="lt1">
-              <a:alpha val="82000"/>
-            </a:schemeClr>
-          </a:solidFill>
-          <a:ln>
-            <a:noFill/>
-          </a:ln>
-        </p:spPr>
-      </p:sp>
       <p:grpSp>
         <p:nvGrpSpPr>
-          <p:cNvPr id="8" name="Group 8"/>
+          <p:cNvPr id="7" name="Group 7"/>
           <p:cNvGrpSpPr/>
           <p:nvPr/>
         </p:nvGrpSpPr>
@@ -10019,7 +9851,7 @@
         </p:grpSpPr>
         <p:sp>
           <p:nvSpPr>
-            <p:cNvPr id="4" name="TextBox 4"/>
+            <p:cNvPr id="3" name="TextBox 3"/>
             <p:cNvSpPr txBox="1"/>
             <p:nvPr/>
           </p:nvSpPr>
@@ -10059,7 +9891,7 @@
         </p:sp>
         <p:sp>
           <p:nvSpPr>
-            <p:cNvPr id="5" name="TextBox 5"/>
+            <p:cNvPr id="4" name="TextBox 4"/>
             <p:cNvSpPr txBox="1"/>
             <p:nvPr/>
           </p:nvSpPr>
@@ -10099,7 +9931,7 @@
         </p:sp>
         <p:sp>
           <p:nvSpPr>
-            <p:cNvPr id="6" name="TextBox 6"/>
+            <p:cNvPr id="5" name="TextBox 5"/>
             <p:cNvSpPr txBox="1"/>
             <p:nvPr/>
           </p:nvSpPr>
@@ -10139,7 +9971,7 @@
         </p:sp>
         <p:sp>
           <p:nvSpPr>
-            <p:cNvPr id="7" name="Line 7"/>
+            <p:cNvPr id="6" name="Line 6"/>
             <p:cNvSpPr/>
             <p:nvPr/>
           </p:nvSpPr>
@@ -10176,7 +10008,7 @@
       </p:grpSp>
       <p:grpSp>
         <p:nvGrpSpPr>
-          <p:cNvPr id="11" name="Group 11"/>
+          <p:cNvPr id="10" name="Group 10"/>
           <p:cNvGrpSpPr/>
           <p:nvPr/>
         </p:nvGrpSpPr>
@@ -10190,7 +10022,7 @@
         </p:grpSpPr>
         <p:sp>
           <p:nvSpPr>
-            <p:cNvPr id="9" name="Rectangle 9"/>
+            <p:cNvPr id="8" name="Rectangle 8"/>
             <p:cNvSpPr/>
             <p:nvPr/>
           </p:nvSpPr>
@@ -10216,7 +10048,7 @@
         </p:sp>
         <p:pic>
           <p:nvPicPr>
-            <p:cNvPr id="10" name="Image 10"/>
+            <p:cNvPr id="9" name="Image 9"/>
             <p:cNvPicPr>
               <a:picLocks noChangeAspect="1"/>
             </p:cNvPicPr>
@@ -10241,7 +10073,7 @@
       </p:grpSp>
       <p:grpSp>
         <p:nvGrpSpPr>
-          <p:cNvPr id="29" name="Group 29"/>
+          <p:cNvPr id="28" name="Group 28"/>
           <p:cNvGrpSpPr/>
           <p:nvPr/>
         </p:nvGrpSpPr>
@@ -10255,7 +10087,7 @@
         </p:grpSpPr>
         <p:sp>
           <p:nvSpPr>
-            <p:cNvPr id="12" name="Rectangle 12"/>
+            <p:cNvPr id="11" name="Rectangle 11"/>
             <p:cNvSpPr/>
             <p:nvPr/>
           </p:nvSpPr>
@@ -10281,7 +10113,7 @@
         </p:sp>
         <p:sp>
           <p:nvSpPr>
-            <p:cNvPr id="13" name="TextBox 13"/>
+            <p:cNvPr id="12" name="TextBox 12"/>
             <p:cNvSpPr txBox="1"/>
             <p:nvPr/>
           </p:nvSpPr>
@@ -10321,7 +10153,7 @@
         </p:sp>
         <p:sp>
           <p:nvSpPr>
-            <p:cNvPr id="14" name="Rectangle 14"/>
+            <p:cNvPr id="13" name="Rectangle 13"/>
             <p:cNvSpPr/>
             <p:nvPr/>
           </p:nvSpPr>
@@ -10345,7 +10177,7 @@
         </p:sp>
         <p:sp>
           <p:nvSpPr>
-            <p:cNvPr id="15" name="TextBox 15"/>
+            <p:cNvPr id="14" name="TextBox 14"/>
             <p:cNvSpPr txBox="1"/>
             <p:nvPr/>
           </p:nvSpPr>
@@ -10385,7 +10217,7 @@
         </p:sp>
         <p:sp>
           <p:nvSpPr>
-            <p:cNvPr id="16" name="TextBox 16"/>
+            <p:cNvPr id="15" name="TextBox 15"/>
             <p:cNvSpPr txBox="1"/>
             <p:nvPr/>
           </p:nvSpPr>
@@ -10425,7 +10257,7 @@
         </p:sp>
         <p:sp>
           <p:nvSpPr>
-            <p:cNvPr id="17" name="Rectangle 17"/>
+            <p:cNvPr id="16" name="Rectangle 16"/>
             <p:cNvSpPr/>
             <p:nvPr/>
           </p:nvSpPr>
@@ -10449,7 +10281,7 @@
         </p:sp>
         <p:sp>
           <p:nvSpPr>
-            <p:cNvPr id="18" name="TextBox 18"/>
+            <p:cNvPr id="17" name="TextBox 17"/>
             <p:cNvSpPr txBox="1"/>
             <p:nvPr/>
           </p:nvSpPr>
@@ -10489,7 +10321,7 @@
         </p:sp>
         <p:sp>
           <p:nvSpPr>
-            <p:cNvPr id="19" name="TextBox 19"/>
+            <p:cNvPr id="18" name="TextBox 18"/>
             <p:cNvSpPr txBox="1"/>
             <p:nvPr/>
           </p:nvSpPr>
@@ -10529,7 +10361,7 @@
         </p:sp>
         <p:sp>
           <p:nvSpPr>
-            <p:cNvPr id="20" name="Rectangle 20"/>
+            <p:cNvPr id="19" name="Rectangle 19"/>
             <p:cNvSpPr/>
             <p:nvPr/>
           </p:nvSpPr>
@@ -10553,7 +10385,7 @@
         </p:sp>
         <p:sp>
           <p:nvSpPr>
-            <p:cNvPr id="21" name="TextBox 21"/>
+            <p:cNvPr id="20" name="TextBox 20"/>
             <p:cNvSpPr txBox="1"/>
             <p:nvPr/>
           </p:nvSpPr>
@@ -10593,7 +10425,7 @@
         </p:sp>
         <p:sp>
           <p:nvSpPr>
-            <p:cNvPr id="22" name="TextBox 22"/>
+            <p:cNvPr id="21" name="TextBox 21"/>
             <p:cNvSpPr txBox="1"/>
             <p:nvPr/>
           </p:nvSpPr>
@@ -10633,7 +10465,7 @@
         </p:sp>
         <p:sp>
           <p:nvSpPr>
-            <p:cNvPr id="23" name="Rectangle 23"/>
+            <p:cNvPr id="22" name="Rectangle 22"/>
             <p:cNvSpPr/>
             <p:nvPr/>
           </p:nvSpPr>
@@ -10657,7 +10489,7 @@
         </p:sp>
         <p:sp>
           <p:nvSpPr>
-            <p:cNvPr id="24" name="TextBox 24"/>
+            <p:cNvPr id="23" name="TextBox 23"/>
             <p:cNvSpPr txBox="1"/>
             <p:nvPr/>
           </p:nvSpPr>
@@ -10697,7 +10529,7 @@
         </p:sp>
         <p:sp>
           <p:nvSpPr>
-            <p:cNvPr id="25" name="TextBox 25"/>
+            <p:cNvPr id="24" name="TextBox 24"/>
             <p:cNvSpPr txBox="1"/>
             <p:nvPr/>
           </p:nvSpPr>
@@ -10737,7 +10569,7 @@
         </p:sp>
         <p:sp>
           <p:nvSpPr>
-            <p:cNvPr id="26" name="Rectangle 26"/>
+            <p:cNvPr id="25" name="Rectangle 25"/>
             <p:cNvSpPr/>
             <p:nvPr/>
           </p:nvSpPr>
@@ -10761,7 +10593,7 @@
         </p:sp>
         <p:sp>
           <p:nvSpPr>
-            <p:cNvPr id="27" name="TextBox 27"/>
+            <p:cNvPr id="26" name="TextBox 26"/>
             <p:cNvSpPr txBox="1"/>
             <p:nvPr/>
           </p:nvSpPr>
@@ -10801,7 +10633,7 @@
         </p:sp>
         <p:sp>
           <p:nvSpPr>
-            <p:cNvPr id="28" name="TextBox 28"/>
+            <p:cNvPr id="27" name="TextBox 27"/>
             <p:cNvSpPr txBox="1"/>
             <p:nvPr/>
           </p:nvSpPr>
@@ -10842,7 +10674,7 @@
       </p:grpSp>
       <p:grpSp>
         <p:nvGrpSpPr>
-          <p:cNvPr id="35" name="Group 35"/>
+          <p:cNvPr id="34" name="Group 34"/>
           <p:cNvGrpSpPr/>
           <p:nvPr/>
         </p:nvGrpSpPr>
@@ -10856,7 +10688,7 @@
         </p:grpSpPr>
         <p:sp>
           <p:nvSpPr>
-            <p:cNvPr id="30" name="Rectangle 30"/>
+            <p:cNvPr id="29" name="Rectangle 29"/>
             <p:cNvSpPr/>
             <p:nvPr/>
           </p:nvSpPr>
@@ -10882,7 +10714,7 @@
         </p:sp>
         <p:sp>
           <p:nvSpPr>
-            <p:cNvPr id="31" name="Rectangle 31"/>
+            <p:cNvPr id="30" name="Rectangle 30"/>
             <p:cNvSpPr/>
             <p:nvPr/>
           </p:nvSpPr>
@@ -10906,7 +10738,7 @@
         </p:sp>
         <p:sp>
           <p:nvSpPr>
-            <p:cNvPr id="32" name="TextBox 32"/>
+            <p:cNvPr id="31" name="TextBox 31"/>
             <p:cNvSpPr txBox="1"/>
             <p:nvPr/>
           </p:nvSpPr>
@@ -10946,7 +10778,7 @@
         </p:sp>
         <p:sp>
           <p:nvSpPr>
-            <p:cNvPr id="33" name="TextBox 33"/>
+            <p:cNvPr id="32" name="TextBox 32"/>
             <p:cNvSpPr txBox="1"/>
             <p:nvPr/>
           </p:nvSpPr>
@@ -10986,7 +10818,7 @@
         </p:sp>
         <p:sp>
           <p:nvSpPr>
-            <p:cNvPr id="34" name="TextBox 34"/>
+            <p:cNvPr id="33" name="TextBox 33"/>
             <p:cNvSpPr txBox="1"/>
             <p:nvPr/>
           </p:nvSpPr>
@@ -11027,7 +10859,7 @@
       </p:grpSp>
       <p:grpSp>
         <p:nvGrpSpPr>
-          <p:cNvPr id="38" name="Group 38"/>
+          <p:cNvPr id="37" name="Group 37"/>
           <p:cNvGrpSpPr/>
           <p:nvPr/>
         </p:nvGrpSpPr>
@@ -11041,7 +10873,7 @@
         </p:grpSpPr>
         <p:sp>
           <p:nvSpPr>
-            <p:cNvPr id="36" name="TextBox 36"/>
+            <p:cNvPr id="35" name="TextBox 35"/>
             <p:cNvSpPr txBox="1"/>
             <p:nvPr/>
           </p:nvSpPr>
@@ -11081,7 +10913,7 @@
         </p:sp>
         <p:sp>
           <p:nvSpPr>
-            <p:cNvPr id="37" name="TextBox 37"/>
+            <p:cNvPr id="36" name="TextBox 36"/>
             <p:cNvSpPr txBox="1"/>
             <p:nvPr/>
           </p:nvSpPr>
@@ -11515,7 +11347,7 @@
         </p:nvPicPr>
         <p:blipFill>
           <a:blip r:embed="rId2">
-            <a:alphaModFix amt="5500"/>
+            <a:alphaModFix amt="14000"/>
           </a:blip>
           <a:srcRect l="0" t="27" r="0" b="27"/>
           <a:stretch>
@@ -11532,33 +11364,9 @@
           </a:prstGeom>
         </p:spPr>
       </p:pic>
-      <p:sp>
-        <p:nvSpPr>
-          <p:cNvPr id="3" name="Rectangle 3"/>
-          <p:cNvSpPr/>
-          <p:nvPr/>
-        </p:nvSpPr>
-        <p:spPr>
-          <a:xfrm>
-            <a:off x="0" y="0"/>
-            <a:ext cx="12192000" cy="6858000"/>
-          </a:xfrm>
-          <a:prstGeom prst="rect">
-            <a:avLst/>
-          </a:prstGeom>
-          <a:solidFill>
-            <a:schemeClr val="lt1">
-              <a:alpha val="82000"/>
-            </a:schemeClr>
-          </a:solidFill>
-          <a:ln>
-            <a:noFill/>
-          </a:ln>
-        </p:spPr>
-      </p:sp>
       <p:grpSp>
         <p:nvGrpSpPr>
-          <p:cNvPr id="8" name="Group 8"/>
+          <p:cNvPr id="7" name="Group 7"/>
           <p:cNvGrpSpPr/>
           <p:nvPr/>
         </p:nvGrpSpPr>
@@ -11572,7 +11380,7 @@
         </p:grpSpPr>
         <p:sp>
           <p:nvSpPr>
-            <p:cNvPr id="4" name="TextBox 4"/>
+            <p:cNvPr id="3" name="TextBox 3"/>
             <p:cNvSpPr txBox="1"/>
             <p:nvPr/>
           </p:nvSpPr>
@@ -11612,7 +11420,7 @@
         </p:sp>
         <p:sp>
           <p:nvSpPr>
-            <p:cNvPr id="5" name="TextBox 5"/>
+            <p:cNvPr id="4" name="TextBox 4"/>
             <p:cNvSpPr txBox="1"/>
             <p:nvPr/>
           </p:nvSpPr>
@@ -11652,7 +11460,7 @@
         </p:sp>
         <p:sp>
           <p:nvSpPr>
-            <p:cNvPr id="6" name="TextBox 6"/>
+            <p:cNvPr id="5" name="TextBox 5"/>
             <p:cNvSpPr txBox="1"/>
             <p:nvPr/>
           </p:nvSpPr>
@@ -11692,7 +11500,7 @@
         </p:sp>
         <p:sp>
           <p:nvSpPr>
-            <p:cNvPr id="7" name="Line 7"/>
+            <p:cNvPr id="6" name="Line 6"/>
             <p:cNvSpPr/>
             <p:nvPr/>
           </p:nvSpPr>
@@ -11729,7 +11537,7 @@
       </p:grpSp>
       <p:grpSp>
         <p:nvGrpSpPr>
-          <p:cNvPr id="13" name="Group 13"/>
+          <p:cNvPr id="12" name="Group 12"/>
           <p:cNvGrpSpPr/>
           <p:nvPr/>
         </p:nvGrpSpPr>
@@ -11743,7 +11551,7 @@
         </p:grpSpPr>
         <p:sp>
           <p:nvSpPr>
-            <p:cNvPr id="9" name="Rectangle 9"/>
+            <p:cNvPr id="8" name="Rectangle 8"/>
             <p:cNvSpPr/>
             <p:nvPr/>
           </p:nvSpPr>
@@ -11769,7 +11577,7 @@
         </p:sp>
         <p:sp>
           <p:nvSpPr>
-            <p:cNvPr id="10" name="TextBox 10"/>
+            <p:cNvPr id="9" name="TextBox 9"/>
             <p:cNvSpPr txBox="1"/>
             <p:nvPr/>
           </p:nvSpPr>
@@ -11809,7 +11617,7 @@
         </p:sp>
         <p:sp>
           <p:nvSpPr>
-            <p:cNvPr id="11" name="TextBox 11"/>
+            <p:cNvPr id="10" name="TextBox 10"/>
             <p:cNvSpPr txBox="1"/>
             <p:nvPr/>
           </p:nvSpPr>
@@ -11849,7 +11657,7 @@
         </p:sp>
         <p:sp>
           <p:nvSpPr>
-            <p:cNvPr id="12" name="TextBox 12"/>
+            <p:cNvPr id="11" name="TextBox 11"/>
             <p:cNvSpPr txBox="1"/>
             <p:nvPr/>
           </p:nvSpPr>
@@ -11890,7 +11698,7 @@
       </p:grpSp>
       <p:grpSp>
         <p:nvGrpSpPr>
-          <p:cNvPr id="18" name="Group 18"/>
+          <p:cNvPr id="17" name="Group 17"/>
           <p:cNvGrpSpPr/>
           <p:nvPr/>
         </p:nvGrpSpPr>
@@ -11904,7 +11712,7 @@
         </p:grpSpPr>
         <p:sp>
           <p:nvSpPr>
-            <p:cNvPr id="14" name="Rectangle 14"/>
+            <p:cNvPr id="13" name="Rectangle 13"/>
             <p:cNvSpPr/>
             <p:nvPr/>
           </p:nvSpPr>
@@ -11930,7 +11738,7 @@
         </p:sp>
         <p:sp>
           <p:nvSpPr>
-            <p:cNvPr id="15" name="TextBox 15"/>
+            <p:cNvPr id="14" name="TextBox 14"/>
             <p:cNvSpPr txBox="1"/>
             <p:nvPr/>
           </p:nvSpPr>
@@ -11970,7 +11778,7 @@
         </p:sp>
         <p:sp>
           <p:nvSpPr>
-            <p:cNvPr id="16" name="TextBox 16"/>
+            <p:cNvPr id="15" name="TextBox 15"/>
             <p:cNvSpPr txBox="1"/>
             <p:nvPr/>
           </p:nvSpPr>
@@ -12010,7 +11818,7 @@
         </p:sp>
         <p:sp>
           <p:nvSpPr>
-            <p:cNvPr id="17" name="TextBox 17"/>
+            <p:cNvPr id="16" name="TextBox 16"/>
             <p:cNvSpPr txBox="1"/>
             <p:nvPr/>
           </p:nvSpPr>
@@ -12051,7 +11859,7 @@
       </p:grpSp>
       <p:grpSp>
         <p:nvGrpSpPr>
-          <p:cNvPr id="23" name="Group 23"/>
+          <p:cNvPr id="22" name="Group 22"/>
           <p:cNvGrpSpPr/>
           <p:nvPr/>
         </p:nvGrpSpPr>
@@ -12065,7 +11873,7 @@
         </p:grpSpPr>
         <p:sp>
           <p:nvSpPr>
-            <p:cNvPr id="19" name="Rectangle 19"/>
+            <p:cNvPr id="18" name="Rectangle 18"/>
             <p:cNvSpPr/>
             <p:nvPr/>
           </p:nvSpPr>
@@ -12091,7 +11899,7 @@
         </p:sp>
         <p:sp>
           <p:nvSpPr>
-            <p:cNvPr id="20" name="TextBox 20"/>
+            <p:cNvPr id="19" name="TextBox 19"/>
             <p:cNvSpPr txBox="1"/>
             <p:nvPr/>
           </p:nvSpPr>
@@ -12131,7 +11939,7 @@
         </p:sp>
         <p:sp>
           <p:nvSpPr>
-            <p:cNvPr id="21" name="TextBox 21"/>
+            <p:cNvPr id="20" name="TextBox 20"/>
             <p:cNvSpPr txBox="1"/>
             <p:nvPr/>
           </p:nvSpPr>
@@ -12171,7 +11979,7 @@
         </p:sp>
         <p:sp>
           <p:nvSpPr>
-            <p:cNvPr id="22" name="TextBox 22"/>
+            <p:cNvPr id="21" name="TextBox 21"/>
             <p:cNvSpPr txBox="1"/>
             <p:nvPr/>
           </p:nvSpPr>
@@ -12212,7 +12020,7 @@
       </p:grpSp>
       <p:grpSp>
         <p:nvGrpSpPr>
-          <p:cNvPr id="43" name="Group 43"/>
+          <p:cNvPr id="42" name="Group 42"/>
           <p:cNvGrpSpPr/>
           <p:nvPr/>
         </p:nvGrpSpPr>
@@ -12226,7 +12034,7 @@
         </p:grpSpPr>
         <p:sp>
           <p:nvSpPr>
-            <p:cNvPr id="24" name="Rectangle 24"/>
+            <p:cNvPr id="23" name="Rectangle 23"/>
             <p:cNvSpPr/>
             <p:nvPr/>
           </p:nvSpPr>
@@ -12252,7 +12060,7 @@
         </p:sp>
         <p:sp>
           <p:nvSpPr>
-            <p:cNvPr id="25" name="TextBox 25"/>
+            <p:cNvPr id="24" name="TextBox 24"/>
             <p:cNvSpPr txBox="1"/>
             <p:nvPr/>
           </p:nvSpPr>
@@ -12292,7 +12100,7 @@
         </p:sp>
         <p:sp>
           <p:nvSpPr>
-            <p:cNvPr id="26" name="Rectangle 26"/>
+            <p:cNvPr id="25" name="Rectangle 25"/>
             <p:cNvSpPr/>
             <p:nvPr/>
           </p:nvSpPr>
@@ -12318,7 +12126,7 @@
         </p:sp>
         <p:sp>
           <p:nvSpPr>
-            <p:cNvPr id="27" name="TextBox 27"/>
+            <p:cNvPr id="26" name="TextBox 26"/>
             <p:cNvSpPr txBox="1"/>
             <p:nvPr/>
           </p:nvSpPr>
@@ -12358,7 +12166,7 @@
         </p:sp>
         <p:sp>
           <p:nvSpPr>
-            <p:cNvPr id="28" name="Rectangle 28"/>
+            <p:cNvPr id="27" name="Rectangle 27"/>
             <p:cNvSpPr/>
             <p:nvPr/>
           </p:nvSpPr>
@@ -12384,7 +12192,7 @@
         </p:sp>
         <p:sp>
           <p:nvSpPr>
-            <p:cNvPr id="29" name="TextBox 29"/>
+            <p:cNvPr id="28" name="TextBox 28"/>
             <p:cNvSpPr txBox="1"/>
             <p:nvPr/>
           </p:nvSpPr>
@@ -12424,7 +12232,7 @@
         </p:sp>
         <p:sp>
           <p:nvSpPr>
-            <p:cNvPr id="30" name="Rectangle 30"/>
+            <p:cNvPr id="29" name="Rectangle 29"/>
             <p:cNvSpPr/>
             <p:nvPr/>
           </p:nvSpPr>
@@ -12450,7 +12258,7 @@
         </p:sp>
         <p:sp>
           <p:nvSpPr>
-            <p:cNvPr id="31" name="TextBox 31"/>
+            <p:cNvPr id="30" name="TextBox 30"/>
             <p:cNvSpPr txBox="1"/>
             <p:nvPr/>
           </p:nvSpPr>
@@ -12490,7 +12298,7 @@
         </p:sp>
         <p:sp>
           <p:nvSpPr>
-            <p:cNvPr id="32" name="Rectangle 32"/>
+            <p:cNvPr id="31" name="Rectangle 31"/>
             <p:cNvSpPr/>
             <p:nvPr/>
           </p:nvSpPr>
@@ -12516,7 +12324,7 @@
         </p:sp>
         <p:sp>
           <p:nvSpPr>
-            <p:cNvPr id="33" name="TextBox 33"/>
+            <p:cNvPr id="32" name="TextBox 32"/>
             <p:cNvSpPr txBox="1"/>
             <p:nvPr/>
           </p:nvSpPr>
@@ -12556,7 +12364,7 @@
         </p:sp>
         <p:sp>
           <p:nvSpPr>
-            <p:cNvPr id="34" name="Rectangle 34"/>
+            <p:cNvPr id="33" name="Rectangle 33"/>
             <p:cNvSpPr/>
             <p:nvPr/>
           </p:nvSpPr>
@@ -12582,7 +12390,7 @@
         </p:sp>
         <p:sp>
           <p:nvSpPr>
-            <p:cNvPr id="35" name="TextBox 35"/>
+            <p:cNvPr id="34" name="TextBox 34"/>
             <p:cNvSpPr txBox="1"/>
             <p:nvPr/>
           </p:nvSpPr>
@@ -12622,7 +12430,7 @@
         </p:sp>
         <p:sp>
           <p:nvSpPr>
-            <p:cNvPr id="36" name="Rectangle 36"/>
+            <p:cNvPr id="35" name="Rectangle 35"/>
             <p:cNvSpPr/>
             <p:nvPr/>
           </p:nvSpPr>
@@ -12648,7 +12456,7 @@
         </p:sp>
         <p:sp>
           <p:nvSpPr>
-            <p:cNvPr id="37" name="TextBox 37"/>
+            <p:cNvPr id="36" name="TextBox 36"/>
             <p:cNvSpPr txBox="1"/>
             <p:nvPr/>
           </p:nvSpPr>
@@ -12688,7 +12496,7 @@
         </p:sp>
         <p:sp>
           <p:nvSpPr>
-            <p:cNvPr id="38" name="Rectangle 38"/>
+            <p:cNvPr id="37" name="Rectangle 37"/>
             <p:cNvSpPr/>
             <p:nvPr/>
           </p:nvSpPr>
@@ -12714,7 +12522,7 @@
         </p:sp>
         <p:sp>
           <p:nvSpPr>
-            <p:cNvPr id="39" name="TextBox 39"/>
+            <p:cNvPr id="38" name="TextBox 38"/>
             <p:cNvSpPr txBox="1"/>
             <p:nvPr/>
           </p:nvSpPr>
@@ -12754,7 +12562,7 @@
         </p:sp>
         <p:sp>
           <p:nvSpPr>
-            <p:cNvPr id="40" name="Freeform 40"/>
+            <p:cNvPr id="39" name="Freeform 39"/>
             <p:cNvSpPr/>
             <p:nvPr/>
           </p:nvSpPr>
@@ -12792,7 +12600,7 @@
         </p:sp>
         <p:sp>
           <p:nvSpPr>
-            <p:cNvPr id="41" name="TextBox 41"/>
+            <p:cNvPr id="40" name="TextBox 40"/>
             <p:cNvSpPr txBox="1"/>
             <p:nvPr/>
           </p:nvSpPr>
@@ -12832,7 +12640,7 @@
         </p:sp>
         <p:sp>
           <p:nvSpPr>
-            <p:cNvPr id="42" name="TextBox 42"/>
+            <p:cNvPr id="41" name="TextBox 41"/>
             <p:cNvSpPr txBox="1"/>
             <p:nvPr/>
           </p:nvSpPr>
@@ -12873,7 +12681,7 @@
       </p:grpSp>
       <p:grpSp>
         <p:nvGrpSpPr>
-          <p:cNvPr id="46" name="Group 46"/>
+          <p:cNvPr id="45" name="Group 45"/>
           <p:cNvGrpSpPr/>
           <p:nvPr/>
         </p:nvGrpSpPr>
@@ -12887,7 +12695,7 @@
         </p:grpSpPr>
         <p:sp>
           <p:nvSpPr>
-            <p:cNvPr id="44" name="TextBox 44"/>
+            <p:cNvPr id="43" name="TextBox 43"/>
             <p:cNvSpPr txBox="1"/>
             <p:nvPr/>
           </p:nvSpPr>
@@ -12927,7 +12735,7 @@
         </p:sp>
         <p:sp>
           <p:nvSpPr>
-            <p:cNvPr id="45" name="TextBox 45"/>
+            <p:cNvPr id="44" name="TextBox 44"/>
             <p:cNvSpPr txBox="1"/>
             <p:nvPr/>
           </p:nvSpPr>
@@ -13012,7 +12820,7 @@
         </p:nvPicPr>
         <p:blipFill>
           <a:blip r:embed="rId2">
-            <a:alphaModFix amt="5500"/>
+            <a:alphaModFix amt="14000"/>
           </a:blip>
           <a:srcRect l="0" t="27" r="0" b="27"/>
           <a:stretch>
@@ -13029,33 +12837,9 @@
           </a:prstGeom>
         </p:spPr>
       </p:pic>
-      <p:sp>
-        <p:nvSpPr>
-          <p:cNvPr id="3" name="Rectangle 3"/>
-          <p:cNvSpPr/>
-          <p:nvPr/>
-        </p:nvSpPr>
-        <p:spPr>
-          <a:xfrm>
-            <a:off x="0" y="0"/>
-            <a:ext cx="12192000" cy="6858000"/>
-          </a:xfrm>
-          <a:prstGeom prst="rect">
-            <a:avLst/>
-          </a:prstGeom>
-          <a:solidFill>
-            <a:schemeClr val="lt1">
-              <a:alpha val="82000"/>
-            </a:schemeClr>
-          </a:solidFill>
-          <a:ln>
-            <a:noFill/>
-          </a:ln>
-        </p:spPr>
-      </p:sp>
       <p:grpSp>
         <p:nvGrpSpPr>
-          <p:cNvPr id="8" name="Group 8"/>
+          <p:cNvPr id="7" name="Group 7"/>
           <p:cNvGrpSpPr/>
           <p:nvPr/>
         </p:nvGrpSpPr>
@@ -13069,7 +12853,7 @@
         </p:grpSpPr>
         <p:sp>
           <p:nvSpPr>
-            <p:cNvPr id="4" name="TextBox 4"/>
+            <p:cNvPr id="3" name="TextBox 3"/>
             <p:cNvSpPr txBox="1"/>
             <p:nvPr/>
           </p:nvSpPr>
@@ -13109,7 +12893,7 @@
         </p:sp>
         <p:sp>
           <p:nvSpPr>
-            <p:cNvPr id="5" name="TextBox 5"/>
+            <p:cNvPr id="4" name="TextBox 4"/>
             <p:cNvSpPr txBox="1"/>
             <p:nvPr/>
           </p:nvSpPr>
@@ -13149,7 +12933,7 @@
         </p:sp>
         <p:sp>
           <p:nvSpPr>
-            <p:cNvPr id="6" name="TextBox 6"/>
+            <p:cNvPr id="5" name="TextBox 5"/>
             <p:cNvSpPr txBox="1"/>
             <p:nvPr/>
           </p:nvSpPr>
@@ -13189,7 +12973,7 @@
         </p:sp>
         <p:sp>
           <p:nvSpPr>
-            <p:cNvPr id="7" name="Line 7"/>
+            <p:cNvPr id="6" name="Line 6"/>
             <p:cNvSpPr/>
             <p:nvPr/>
           </p:nvSpPr>
@@ -13226,7 +13010,7 @@
       </p:grpSp>
       <p:grpSp>
         <p:nvGrpSpPr>
-          <p:cNvPr id="34" name="Group 34"/>
+          <p:cNvPr id="33" name="Group 33"/>
           <p:cNvGrpSpPr/>
           <p:nvPr/>
         </p:nvGrpSpPr>
@@ -13240,7 +13024,7 @@
         </p:grpSpPr>
         <p:sp>
           <p:nvSpPr>
-            <p:cNvPr id="9" name="Rectangle 9"/>
+            <p:cNvPr id="8" name="Rectangle 8"/>
             <p:cNvSpPr/>
             <p:nvPr/>
           </p:nvSpPr>
@@ -13266,7 +13050,7 @@
         </p:sp>
         <p:sp>
           <p:nvSpPr>
-            <p:cNvPr id="10" name="Rectangle 10"/>
+            <p:cNvPr id="9" name="Rectangle 9"/>
             <p:cNvSpPr/>
             <p:nvPr/>
           </p:nvSpPr>
@@ -13290,7 +13074,7 @@
         </p:sp>
         <p:sp>
           <p:nvSpPr>
-            <p:cNvPr id="11" name="TextBox 11"/>
+            <p:cNvPr id="10" name="TextBox 10"/>
             <p:cNvSpPr txBox="1"/>
             <p:nvPr/>
           </p:nvSpPr>
@@ -13330,7 +13114,7 @@
         </p:sp>
         <p:sp>
           <p:nvSpPr>
-            <p:cNvPr id="12" name="TextBox 12"/>
+            <p:cNvPr id="11" name="TextBox 11"/>
             <p:cNvSpPr txBox="1"/>
             <p:nvPr/>
           </p:nvSpPr>
@@ -13370,7 +13154,7 @@
         </p:sp>
         <p:sp>
           <p:nvSpPr>
-            <p:cNvPr id="13" name="TextBox 13"/>
+            <p:cNvPr id="12" name="TextBox 12"/>
             <p:cNvSpPr txBox="1"/>
             <p:nvPr/>
           </p:nvSpPr>
@@ -13410,7 +13194,7 @@
         </p:sp>
         <p:sp>
           <p:nvSpPr>
-            <p:cNvPr id="14" name="Rectangle 14"/>
+            <p:cNvPr id="13" name="Rectangle 13"/>
             <p:cNvSpPr/>
             <p:nvPr/>
           </p:nvSpPr>
@@ -13432,7 +13216,7 @@
         </p:sp>
         <p:sp>
           <p:nvSpPr>
-            <p:cNvPr id="15" name="Line 15"/>
+            <p:cNvPr id="14" name="Line 14"/>
             <p:cNvSpPr/>
             <p:nvPr/>
           </p:nvSpPr>
@@ -13468,7 +13252,7 @@
         </p:sp>
         <p:sp>
           <p:nvSpPr>
-            <p:cNvPr id="16" name="TextBox 16"/>
+            <p:cNvPr id="15" name="TextBox 15"/>
             <p:cNvSpPr txBox="1"/>
             <p:nvPr/>
           </p:nvSpPr>
@@ -13508,7 +13292,7 @@
         </p:sp>
         <p:sp>
           <p:nvSpPr>
-            <p:cNvPr id="17" name="TextBox 17"/>
+            <p:cNvPr id="16" name="TextBox 16"/>
             <p:cNvSpPr txBox="1"/>
             <p:nvPr/>
           </p:nvSpPr>
@@ -13548,7 +13332,7 @@
         </p:sp>
         <p:sp>
           <p:nvSpPr>
-            <p:cNvPr id="18" name="TextBox 18"/>
+            <p:cNvPr id="17" name="TextBox 17"/>
             <p:cNvSpPr txBox="1"/>
             <p:nvPr/>
           </p:nvSpPr>
@@ -13588,7 +13372,7 @@
         </p:sp>
         <p:sp>
           <p:nvSpPr>
-            <p:cNvPr id="19" name="Rectangle 19"/>
+            <p:cNvPr id="18" name="Rectangle 18"/>
             <p:cNvSpPr/>
             <p:nvPr/>
           </p:nvSpPr>
@@ -13610,7 +13394,7 @@
         </p:sp>
         <p:sp>
           <p:nvSpPr>
-            <p:cNvPr id="20" name="Line 20"/>
+            <p:cNvPr id="19" name="Line 19"/>
             <p:cNvSpPr/>
             <p:nvPr/>
           </p:nvSpPr>
@@ -13646,7 +13430,7 @@
         </p:sp>
         <p:sp>
           <p:nvSpPr>
-            <p:cNvPr id="21" name="TextBox 21"/>
+            <p:cNvPr id="20" name="TextBox 20"/>
             <p:cNvSpPr txBox="1"/>
             <p:nvPr/>
           </p:nvSpPr>
@@ -13686,7 +13470,7 @@
         </p:sp>
         <p:sp>
           <p:nvSpPr>
-            <p:cNvPr id="22" name="TextBox 22"/>
+            <p:cNvPr id="21" name="TextBox 21"/>
             <p:cNvSpPr txBox="1"/>
             <p:nvPr/>
           </p:nvSpPr>
@@ -13726,7 +13510,7 @@
         </p:sp>
         <p:sp>
           <p:nvSpPr>
-            <p:cNvPr id="23" name="TextBox 23"/>
+            <p:cNvPr id="22" name="TextBox 22"/>
             <p:cNvSpPr txBox="1"/>
             <p:nvPr/>
           </p:nvSpPr>
@@ -13766,7 +13550,7 @@
         </p:sp>
         <p:sp>
           <p:nvSpPr>
-            <p:cNvPr id="24" name="Rectangle 24"/>
+            <p:cNvPr id="23" name="Rectangle 23"/>
             <p:cNvSpPr/>
             <p:nvPr/>
           </p:nvSpPr>
@@ -13788,7 +13572,7 @@
         </p:sp>
         <p:sp>
           <p:nvSpPr>
-            <p:cNvPr id="25" name="Line 25"/>
+            <p:cNvPr id="24" name="Line 24"/>
             <p:cNvSpPr/>
             <p:nvPr/>
           </p:nvSpPr>
@@ -13824,7 +13608,7 @@
         </p:sp>
         <p:sp>
           <p:nvSpPr>
-            <p:cNvPr id="26" name="TextBox 26"/>
+            <p:cNvPr id="25" name="TextBox 25"/>
             <p:cNvSpPr txBox="1"/>
             <p:nvPr/>
           </p:nvSpPr>
@@ -13864,7 +13648,7 @@
         </p:sp>
         <p:sp>
           <p:nvSpPr>
-            <p:cNvPr id="27" name="TextBox 27"/>
+            <p:cNvPr id="26" name="TextBox 26"/>
             <p:cNvSpPr txBox="1"/>
             <p:nvPr/>
           </p:nvSpPr>
@@ -13904,7 +13688,7 @@
         </p:sp>
         <p:sp>
           <p:nvSpPr>
-            <p:cNvPr id="28" name="TextBox 28"/>
+            <p:cNvPr id="27" name="TextBox 27"/>
             <p:cNvSpPr txBox="1"/>
             <p:nvPr/>
           </p:nvSpPr>
@@ -13944,7 +13728,7 @@
         </p:sp>
         <p:sp>
           <p:nvSpPr>
-            <p:cNvPr id="29" name="Rectangle 29"/>
+            <p:cNvPr id="28" name="Rectangle 28"/>
             <p:cNvSpPr/>
             <p:nvPr/>
           </p:nvSpPr>
@@ -13966,7 +13750,7 @@
         </p:sp>
         <p:sp>
           <p:nvSpPr>
-            <p:cNvPr id="30" name="Line 30"/>
+            <p:cNvPr id="29" name="Line 29"/>
             <p:cNvSpPr/>
             <p:nvPr/>
           </p:nvSpPr>
@@ -14002,7 +13786,7 @@
         </p:sp>
         <p:sp>
           <p:nvSpPr>
-            <p:cNvPr id="31" name="TextBox 31"/>
+            <p:cNvPr id="30" name="TextBox 30"/>
             <p:cNvSpPr txBox="1"/>
             <p:nvPr/>
           </p:nvSpPr>
@@ -14042,7 +13826,7 @@
         </p:sp>
         <p:sp>
           <p:nvSpPr>
-            <p:cNvPr id="32" name="TextBox 32"/>
+            <p:cNvPr id="31" name="TextBox 31"/>
             <p:cNvSpPr txBox="1"/>
             <p:nvPr/>
           </p:nvSpPr>
@@ -14082,7 +13866,7 @@
         </p:sp>
         <p:sp>
           <p:nvSpPr>
-            <p:cNvPr id="33" name="TextBox 33"/>
+            <p:cNvPr id="32" name="TextBox 32"/>
             <p:cNvSpPr txBox="1"/>
             <p:nvPr/>
           </p:nvSpPr>
@@ -14123,7 +13907,7 @@
       </p:grpSp>
       <p:grpSp>
         <p:nvGrpSpPr>
-          <p:cNvPr id="37" name="Group 37"/>
+          <p:cNvPr id="36" name="Group 36"/>
           <p:cNvGrpSpPr/>
           <p:nvPr/>
         </p:nvGrpSpPr>
@@ -14137,7 +13921,7 @@
         </p:grpSpPr>
         <p:sp>
           <p:nvSpPr>
-            <p:cNvPr id="35" name="TextBox 35"/>
+            <p:cNvPr id="34" name="TextBox 34"/>
             <p:cNvSpPr txBox="1"/>
             <p:nvPr/>
           </p:nvSpPr>
@@ -14177,7 +13961,7 @@
         </p:sp>
         <p:sp>
           <p:nvSpPr>
-            <p:cNvPr id="36" name="TextBox 36"/>
+            <p:cNvPr id="35" name="TextBox 35"/>
             <p:cNvSpPr txBox="1"/>
             <p:nvPr/>
           </p:nvSpPr>
@@ -14262,7 +14046,7 @@
         </p:nvPicPr>
         <p:blipFill>
           <a:blip r:embed="rId2">
-            <a:alphaModFix amt="5500"/>
+            <a:alphaModFix amt="14000"/>
           </a:blip>
           <a:srcRect l="0" t="27" r="0" b="27"/>
           <a:stretch>
@@ -14279,33 +14063,9 @@
           </a:prstGeom>
         </p:spPr>
       </p:pic>
-      <p:sp>
-        <p:nvSpPr>
-          <p:cNvPr id="3" name="Rectangle 3"/>
-          <p:cNvSpPr/>
-          <p:nvPr/>
-        </p:nvSpPr>
-        <p:spPr>
-          <a:xfrm>
-            <a:off x="0" y="0"/>
-            <a:ext cx="12192000" cy="6858000"/>
-          </a:xfrm>
-          <a:prstGeom prst="rect">
-            <a:avLst/>
-          </a:prstGeom>
-          <a:solidFill>
-            <a:schemeClr val="lt1">
-              <a:alpha val="82000"/>
-            </a:schemeClr>
-          </a:solidFill>
-          <a:ln>
-            <a:noFill/>
-          </a:ln>
-        </p:spPr>
-      </p:sp>
       <p:grpSp>
         <p:nvGrpSpPr>
-          <p:cNvPr id="8" name="Group 8"/>
+          <p:cNvPr id="7" name="Group 7"/>
           <p:cNvGrpSpPr/>
           <p:nvPr/>
         </p:nvGrpSpPr>
@@ -14319,7 +14079,7 @@
         </p:grpSpPr>
         <p:sp>
           <p:nvSpPr>
-            <p:cNvPr id="4" name="TextBox 4"/>
+            <p:cNvPr id="3" name="TextBox 3"/>
             <p:cNvSpPr txBox="1"/>
             <p:nvPr/>
           </p:nvSpPr>
@@ -14359,7 +14119,7 @@
         </p:sp>
         <p:sp>
           <p:nvSpPr>
-            <p:cNvPr id="5" name="TextBox 5"/>
+            <p:cNvPr id="4" name="TextBox 4"/>
             <p:cNvSpPr txBox="1"/>
             <p:nvPr/>
           </p:nvSpPr>
@@ -14399,7 +14159,7 @@
         </p:sp>
         <p:sp>
           <p:nvSpPr>
-            <p:cNvPr id="6" name="TextBox 6"/>
+            <p:cNvPr id="5" name="TextBox 5"/>
             <p:cNvSpPr txBox="1"/>
             <p:nvPr/>
           </p:nvSpPr>
@@ -14439,7 +14199,7 @@
         </p:sp>
         <p:sp>
           <p:nvSpPr>
-            <p:cNvPr id="7" name="Line 7"/>
+            <p:cNvPr id="6" name="Line 6"/>
             <p:cNvSpPr/>
             <p:nvPr/>
           </p:nvSpPr>
@@ -14476,7 +14236,7 @@
       </p:grpSp>
       <p:grpSp>
         <p:nvGrpSpPr>
-          <p:cNvPr id="26" name="Group 26"/>
+          <p:cNvPr id="25" name="Group 25"/>
           <p:cNvGrpSpPr/>
           <p:nvPr/>
         </p:nvGrpSpPr>
@@ -14490,7 +14250,7 @@
         </p:grpSpPr>
         <p:sp>
           <p:nvSpPr>
-            <p:cNvPr id="9" name="Freeform 9"/>
+            <p:cNvPr id="8" name="Freeform 8"/>
             <p:cNvSpPr/>
             <p:nvPr/>
           </p:nvSpPr>
@@ -14528,7 +14288,7 @@
         </p:sp>
         <p:sp>
           <p:nvSpPr>
-            <p:cNvPr id="10" name="Ellipse 10"/>
+            <p:cNvPr id="9" name="Ellipse 9"/>
             <p:cNvSpPr/>
             <p:nvPr/>
           </p:nvSpPr>
@@ -14550,7 +14310,7 @@
         </p:sp>
         <p:sp>
           <p:nvSpPr>
-            <p:cNvPr id="11" name="TextBox 11"/>
+            <p:cNvPr id="10" name="TextBox 10"/>
             <p:cNvSpPr txBox="1"/>
             <p:nvPr/>
           </p:nvSpPr>
@@ -14590,7 +14350,7 @@
         </p:sp>
         <p:sp>
           <p:nvSpPr>
-            <p:cNvPr id="12" name="TextBox 12"/>
+            <p:cNvPr id="11" name="TextBox 11"/>
             <p:cNvSpPr txBox="1"/>
             <p:nvPr/>
           </p:nvSpPr>
@@ -14630,7 +14390,7 @@
         </p:sp>
         <p:sp>
           <p:nvSpPr>
-            <p:cNvPr id="13" name="TextBox 13"/>
+            <p:cNvPr id="12" name="TextBox 12"/>
             <p:cNvSpPr txBox="1"/>
             <p:nvPr/>
           </p:nvSpPr>
@@ -14670,7 +14430,7 @@
         </p:sp>
         <p:sp>
           <p:nvSpPr>
-            <p:cNvPr id="14" name="Ellipse 14"/>
+            <p:cNvPr id="13" name="Ellipse 13"/>
             <p:cNvSpPr/>
             <p:nvPr/>
           </p:nvSpPr>
@@ -14692,7 +14452,7 @@
         </p:sp>
         <p:sp>
           <p:nvSpPr>
-            <p:cNvPr id="15" name="TextBox 15"/>
+            <p:cNvPr id="14" name="TextBox 14"/>
             <p:cNvSpPr txBox="1"/>
             <p:nvPr/>
           </p:nvSpPr>
@@ -14732,7 +14492,7 @@
         </p:sp>
         <p:sp>
           <p:nvSpPr>
-            <p:cNvPr id="16" name="TextBox 16"/>
+            <p:cNvPr id="15" name="TextBox 15"/>
             <p:cNvSpPr txBox="1"/>
             <p:nvPr/>
           </p:nvSpPr>
@@ -14772,7 +14532,7 @@
         </p:sp>
         <p:sp>
           <p:nvSpPr>
-            <p:cNvPr id="17" name="TextBox 17"/>
+            <p:cNvPr id="16" name="TextBox 16"/>
             <p:cNvSpPr txBox="1"/>
             <p:nvPr/>
           </p:nvSpPr>
@@ -14812,7 +14572,7 @@
         </p:sp>
         <p:sp>
           <p:nvSpPr>
-            <p:cNvPr id="18" name="Ellipse 18"/>
+            <p:cNvPr id="17" name="Ellipse 17"/>
             <p:cNvSpPr/>
             <p:nvPr/>
           </p:nvSpPr>
@@ -14834,7 +14594,7 @@
         </p:sp>
         <p:sp>
           <p:nvSpPr>
-            <p:cNvPr id="19" name="TextBox 19"/>
+            <p:cNvPr id="18" name="TextBox 18"/>
             <p:cNvSpPr txBox="1"/>
             <p:nvPr/>
           </p:nvSpPr>
@@ -14874,7 +14634,7 @@
         </p:sp>
         <p:sp>
           <p:nvSpPr>
-            <p:cNvPr id="20" name="TextBox 20"/>
+            <p:cNvPr id="19" name="TextBox 19"/>
             <p:cNvSpPr txBox="1"/>
             <p:nvPr/>
           </p:nvSpPr>
@@ -14914,7 +14674,7 @@
         </p:sp>
         <p:sp>
           <p:nvSpPr>
-            <p:cNvPr id="21" name="TextBox 21"/>
+            <p:cNvPr id="20" name="TextBox 20"/>
             <p:cNvSpPr txBox="1"/>
             <p:nvPr/>
           </p:nvSpPr>
@@ -14954,7 +14714,7 @@
         </p:sp>
         <p:sp>
           <p:nvSpPr>
-            <p:cNvPr id="22" name="Ellipse 22"/>
+            <p:cNvPr id="21" name="Ellipse 21"/>
             <p:cNvSpPr/>
             <p:nvPr/>
           </p:nvSpPr>
@@ -14976,7 +14736,7 @@
         </p:sp>
         <p:sp>
           <p:nvSpPr>
-            <p:cNvPr id="23" name="TextBox 23"/>
+            <p:cNvPr id="22" name="TextBox 22"/>
             <p:cNvSpPr txBox="1"/>
             <p:nvPr/>
           </p:nvSpPr>
@@ -15016,7 +14776,7 @@
         </p:sp>
         <p:sp>
           <p:nvSpPr>
-            <p:cNvPr id="24" name="TextBox 24"/>
+            <p:cNvPr id="23" name="TextBox 23"/>
             <p:cNvSpPr txBox="1"/>
             <p:nvPr/>
           </p:nvSpPr>
@@ -15056,7 +14816,7 @@
         </p:sp>
         <p:sp>
           <p:nvSpPr>
-            <p:cNvPr id="25" name="TextBox 25"/>
+            <p:cNvPr id="24" name="TextBox 24"/>
             <p:cNvSpPr txBox="1"/>
             <p:nvPr/>
           </p:nvSpPr>
@@ -15097,7 +14857,7 @@
       </p:grpSp>
       <p:grpSp>
         <p:nvGrpSpPr>
-          <p:cNvPr id="29" name="Group 29"/>
+          <p:cNvPr id="28" name="Group 28"/>
           <p:cNvGrpSpPr/>
           <p:nvPr/>
         </p:nvGrpSpPr>
@@ -15111,7 +14871,7 @@
         </p:grpSpPr>
         <p:sp>
           <p:nvSpPr>
-            <p:cNvPr id="27" name="TextBox 27"/>
+            <p:cNvPr id="26" name="TextBox 26"/>
             <p:cNvSpPr txBox="1"/>
             <p:nvPr/>
           </p:nvSpPr>
@@ -15151,7 +14911,7 @@
         </p:sp>
         <p:sp>
           <p:nvSpPr>
-            <p:cNvPr id="28" name="TextBox 28"/>
+            <p:cNvPr id="27" name="TextBox 27"/>
             <p:cNvSpPr txBox="1"/>
             <p:nvPr/>
           </p:nvSpPr>
@@ -15236,7 +14996,7 @@
         </p:nvPicPr>
         <p:blipFill>
           <a:blip r:embed="rId2">
-            <a:alphaModFix amt="5500"/>
+            <a:alphaModFix amt="14000"/>
           </a:blip>
           <a:srcRect l="0" t="27" r="0" b="27"/>
           <a:stretch>
@@ -15253,33 +15013,9 @@
           </a:prstGeom>
         </p:spPr>
       </p:pic>
-      <p:sp>
-        <p:nvSpPr>
-          <p:cNvPr id="3" name="Rectangle 3"/>
-          <p:cNvSpPr/>
-          <p:nvPr/>
-        </p:nvSpPr>
-        <p:spPr>
-          <a:xfrm>
-            <a:off x="0" y="0"/>
-            <a:ext cx="12192000" cy="6858000"/>
-          </a:xfrm>
-          <a:prstGeom prst="rect">
-            <a:avLst/>
-          </a:prstGeom>
-          <a:solidFill>
-            <a:schemeClr val="lt1">
-              <a:alpha val="82000"/>
-            </a:schemeClr>
-          </a:solidFill>
-          <a:ln>
-            <a:noFill/>
-          </a:ln>
-        </p:spPr>
-      </p:sp>
       <p:grpSp>
         <p:nvGrpSpPr>
-          <p:cNvPr id="8" name="Group 8"/>
+          <p:cNvPr id="7" name="Group 7"/>
           <p:cNvGrpSpPr/>
           <p:nvPr/>
         </p:nvGrpSpPr>
@@ -15293,7 +15029,7 @@
         </p:grpSpPr>
         <p:sp>
           <p:nvSpPr>
-            <p:cNvPr id="4" name="TextBox 4"/>
+            <p:cNvPr id="3" name="TextBox 3"/>
             <p:cNvSpPr txBox="1"/>
             <p:nvPr/>
           </p:nvSpPr>
@@ -15333,7 +15069,7 @@
         </p:sp>
         <p:sp>
           <p:nvSpPr>
-            <p:cNvPr id="5" name="TextBox 5"/>
+            <p:cNvPr id="4" name="TextBox 4"/>
             <p:cNvSpPr txBox="1"/>
             <p:nvPr/>
           </p:nvSpPr>
@@ -15373,7 +15109,7 @@
         </p:sp>
         <p:sp>
           <p:nvSpPr>
-            <p:cNvPr id="6" name="TextBox 6"/>
+            <p:cNvPr id="5" name="TextBox 5"/>
             <p:cNvSpPr txBox="1"/>
             <p:nvPr/>
           </p:nvSpPr>
@@ -15413,7 +15149,7 @@
         </p:sp>
         <p:sp>
           <p:nvSpPr>
-            <p:cNvPr id="7" name="Line 7"/>
+            <p:cNvPr id="6" name="Line 6"/>
             <p:cNvSpPr/>
             <p:nvPr/>
           </p:nvSpPr>
@@ -15450,7 +15186,7 @@
       </p:grpSp>
       <p:grpSp>
         <p:nvGrpSpPr>
-          <p:cNvPr id="13" name="Group 13"/>
+          <p:cNvPr id="12" name="Group 12"/>
           <p:cNvGrpSpPr/>
           <p:nvPr/>
         </p:nvGrpSpPr>
@@ -15464,7 +15200,7 @@
         </p:grpSpPr>
         <p:sp>
           <p:nvSpPr>
-            <p:cNvPr id="9" name="Rectangle 9"/>
+            <p:cNvPr id="8" name="Rectangle 8"/>
             <p:cNvSpPr/>
             <p:nvPr/>
           </p:nvSpPr>
@@ -15490,7 +15226,7 @@
         </p:sp>
         <p:sp>
           <p:nvSpPr>
-            <p:cNvPr id="10" name="TextBox 10"/>
+            <p:cNvPr id="9" name="TextBox 9"/>
             <p:cNvSpPr txBox="1"/>
             <p:nvPr/>
           </p:nvSpPr>
@@ -15530,7 +15266,7 @@
         </p:sp>
         <p:sp>
           <p:nvSpPr>
-            <p:cNvPr id="11" name="TextBox 11"/>
+            <p:cNvPr id="10" name="TextBox 10"/>
             <p:cNvSpPr txBox="1"/>
             <p:nvPr/>
           </p:nvSpPr>
@@ -15570,7 +15306,7 @@
         </p:sp>
         <p:sp>
           <p:nvSpPr>
-            <p:cNvPr id="12" name="TextBox 12"/>
+            <p:cNvPr id="11" name="TextBox 11"/>
             <p:cNvSpPr txBox="1"/>
             <p:nvPr/>
           </p:nvSpPr>
@@ -15611,7 +15347,7 @@
       </p:grpSp>
       <p:grpSp>
         <p:nvGrpSpPr>
-          <p:cNvPr id="18" name="Group 18"/>
+          <p:cNvPr id="17" name="Group 17"/>
           <p:cNvGrpSpPr/>
           <p:nvPr/>
         </p:nvGrpSpPr>
@@ -15625,7 +15361,7 @@
         </p:grpSpPr>
         <p:sp>
           <p:nvSpPr>
-            <p:cNvPr id="14" name="Rectangle 14"/>
+            <p:cNvPr id="13" name="Rectangle 13"/>
             <p:cNvSpPr/>
             <p:nvPr/>
           </p:nvSpPr>
@@ -15651,7 +15387,7 @@
         </p:sp>
         <p:sp>
           <p:nvSpPr>
-            <p:cNvPr id="15" name="TextBox 15"/>
+            <p:cNvPr id="14" name="TextBox 14"/>
             <p:cNvSpPr txBox="1"/>
             <p:nvPr/>
           </p:nvSpPr>
@@ -15691,7 +15427,7 @@
         </p:sp>
         <p:sp>
           <p:nvSpPr>
-            <p:cNvPr id="16" name="TextBox 16"/>
+            <p:cNvPr id="15" name="TextBox 15"/>
             <p:cNvSpPr txBox="1"/>
             <p:nvPr/>
           </p:nvSpPr>
@@ -15731,7 +15467,7 @@
         </p:sp>
         <p:sp>
           <p:nvSpPr>
-            <p:cNvPr id="17" name="TextBox 17"/>
+            <p:cNvPr id="16" name="TextBox 16"/>
             <p:cNvSpPr txBox="1"/>
             <p:nvPr/>
           </p:nvSpPr>
@@ -15772,7 +15508,7 @@
       </p:grpSp>
       <p:grpSp>
         <p:nvGrpSpPr>
-          <p:cNvPr id="23" name="Group 23"/>
+          <p:cNvPr id="22" name="Group 22"/>
           <p:cNvGrpSpPr/>
           <p:nvPr/>
         </p:nvGrpSpPr>
@@ -15786,7 +15522,7 @@
         </p:grpSpPr>
         <p:sp>
           <p:nvSpPr>
-            <p:cNvPr id="19" name="Rectangle 19"/>
+            <p:cNvPr id="18" name="Rectangle 18"/>
             <p:cNvSpPr/>
             <p:nvPr/>
           </p:nvSpPr>
@@ -15812,7 +15548,7 @@
         </p:sp>
         <p:sp>
           <p:nvSpPr>
-            <p:cNvPr id="20" name="TextBox 20"/>
+            <p:cNvPr id="19" name="TextBox 19"/>
             <p:cNvSpPr txBox="1"/>
             <p:nvPr/>
           </p:nvSpPr>
@@ -15852,7 +15588,7 @@
         </p:sp>
         <p:sp>
           <p:nvSpPr>
-            <p:cNvPr id="21" name="TextBox 21"/>
+            <p:cNvPr id="20" name="TextBox 20"/>
             <p:cNvSpPr txBox="1"/>
             <p:nvPr/>
           </p:nvSpPr>
@@ -15892,7 +15628,7 @@
         </p:sp>
         <p:sp>
           <p:nvSpPr>
-            <p:cNvPr id="22" name="TextBox 22"/>
+            <p:cNvPr id="21" name="TextBox 21"/>
             <p:cNvSpPr txBox="1"/>
             <p:nvPr/>
           </p:nvSpPr>
@@ -15933,7 +15669,7 @@
       </p:grpSp>
       <p:grpSp>
         <p:nvGrpSpPr>
-          <p:cNvPr id="36" name="Group 36"/>
+          <p:cNvPr id="35" name="Group 35"/>
           <p:cNvGrpSpPr/>
           <p:nvPr/>
         </p:nvGrpSpPr>
@@ -15947,7 +15683,7 @@
         </p:grpSpPr>
         <p:sp>
           <p:nvSpPr>
-            <p:cNvPr id="24" name="Rectangle 24"/>
+            <p:cNvPr id="23" name="Rectangle 23"/>
             <p:cNvSpPr/>
             <p:nvPr/>
           </p:nvSpPr>
@@ -15973,7 +15709,7 @@
         </p:sp>
         <p:sp>
           <p:nvSpPr>
-            <p:cNvPr id="25" name="TextBox 25"/>
+            <p:cNvPr id="24" name="TextBox 24"/>
             <p:cNvSpPr txBox="1"/>
             <p:nvPr/>
           </p:nvSpPr>
@@ -16013,7 +15749,7 @@
         </p:sp>
         <p:sp>
           <p:nvSpPr>
-            <p:cNvPr id="26" name="TextBox 26"/>
+            <p:cNvPr id="25" name="TextBox 25"/>
             <p:cNvSpPr txBox="1"/>
             <p:nvPr/>
           </p:nvSpPr>
@@ -16053,7 +15789,7 @@
         </p:sp>
         <p:sp>
           <p:nvSpPr>
-            <p:cNvPr id="27" name="Rectangle 27"/>
+            <p:cNvPr id="26" name="Rectangle 26"/>
             <p:cNvSpPr/>
             <p:nvPr/>
           </p:nvSpPr>
@@ -16075,7 +15811,7 @@
         </p:sp>
         <p:sp>
           <p:nvSpPr>
-            <p:cNvPr id="28" name="TextBox 28"/>
+            <p:cNvPr id="27" name="TextBox 27"/>
             <p:cNvSpPr txBox="1"/>
             <p:nvPr/>
           </p:nvSpPr>
@@ -16115,7 +15851,7 @@
         </p:sp>
         <p:sp>
           <p:nvSpPr>
-            <p:cNvPr id="29" name="TextBox 29"/>
+            <p:cNvPr id="28" name="TextBox 28"/>
             <p:cNvSpPr txBox="1"/>
             <p:nvPr/>
           </p:nvSpPr>
@@ -16155,7 +15891,7 @@
         </p:sp>
         <p:sp>
           <p:nvSpPr>
-            <p:cNvPr id="30" name="Rectangle 30"/>
+            <p:cNvPr id="29" name="Rectangle 29"/>
             <p:cNvSpPr/>
             <p:nvPr/>
           </p:nvSpPr>
@@ -16177,7 +15913,7 @@
         </p:sp>
         <p:sp>
           <p:nvSpPr>
-            <p:cNvPr id="31" name="TextBox 31"/>
+            <p:cNvPr id="30" name="TextBox 30"/>
             <p:cNvSpPr txBox="1"/>
             <p:nvPr/>
           </p:nvSpPr>
@@ -16217,7 +15953,7 @@
         </p:sp>
         <p:sp>
           <p:nvSpPr>
-            <p:cNvPr id="32" name="TextBox 32"/>
+            <p:cNvPr id="31" name="TextBox 31"/>
             <p:cNvSpPr txBox="1"/>
             <p:nvPr/>
           </p:nvSpPr>
@@ -16257,7 +15993,7 @@
         </p:sp>
         <p:sp>
           <p:nvSpPr>
-            <p:cNvPr id="33" name="Rectangle 33"/>
+            <p:cNvPr id="32" name="Rectangle 32"/>
             <p:cNvSpPr/>
             <p:nvPr/>
           </p:nvSpPr>
@@ -16279,7 +16015,7 @@
         </p:sp>
         <p:sp>
           <p:nvSpPr>
-            <p:cNvPr id="34" name="TextBox 34"/>
+            <p:cNvPr id="33" name="TextBox 33"/>
             <p:cNvSpPr txBox="1"/>
             <p:nvPr/>
           </p:nvSpPr>
@@ -16319,7 +16055,7 @@
         </p:sp>
         <p:sp>
           <p:nvSpPr>
-            <p:cNvPr id="35" name="TextBox 35"/>
+            <p:cNvPr id="34" name="TextBox 34"/>
             <p:cNvSpPr txBox="1"/>
             <p:nvPr/>
           </p:nvSpPr>
@@ -16360,7 +16096,7 @@
       </p:grpSp>
       <p:grpSp>
         <p:nvGrpSpPr>
-          <p:cNvPr id="39" name="Group 39"/>
+          <p:cNvPr id="38" name="Group 38"/>
           <p:cNvGrpSpPr/>
           <p:nvPr/>
         </p:nvGrpSpPr>
@@ -16374,7 +16110,7 @@
         </p:grpSpPr>
         <p:sp>
           <p:nvSpPr>
-            <p:cNvPr id="37" name="TextBox 37"/>
+            <p:cNvPr id="36" name="TextBox 36"/>
             <p:cNvSpPr txBox="1"/>
             <p:nvPr/>
           </p:nvSpPr>
@@ -16414,7 +16150,7 @@
         </p:sp>
         <p:sp>
           <p:nvSpPr>
-            <p:cNvPr id="38" name="TextBox 38"/>
+            <p:cNvPr id="37" name="TextBox 37"/>
             <p:cNvSpPr txBox="1"/>
             <p:nvPr/>
           </p:nvSpPr>
@@ -16499,7 +16235,7 @@
         </p:nvPicPr>
         <p:blipFill>
           <a:blip r:embed="rId2">
-            <a:alphaModFix amt="5500"/>
+            <a:alphaModFix amt="14000"/>
           </a:blip>
           <a:srcRect l="0" t="27" r="0" b="27"/>
           <a:stretch>
@@ -16516,33 +16252,9 @@
           </a:prstGeom>
         </p:spPr>
       </p:pic>
-      <p:sp>
-        <p:nvSpPr>
-          <p:cNvPr id="3" name="Rectangle 3"/>
-          <p:cNvSpPr/>
-          <p:nvPr/>
-        </p:nvSpPr>
-        <p:spPr>
-          <a:xfrm>
-            <a:off x="0" y="0"/>
-            <a:ext cx="12192000" cy="6858000"/>
-          </a:xfrm>
-          <a:prstGeom prst="rect">
-            <a:avLst/>
-          </a:prstGeom>
-          <a:solidFill>
-            <a:schemeClr val="lt1">
-              <a:alpha val="82000"/>
-            </a:schemeClr>
-          </a:solidFill>
-          <a:ln>
-            <a:noFill/>
-          </a:ln>
-        </p:spPr>
-      </p:sp>
       <p:grpSp>
         <p:nvGrpSpPr>
-          <p:cNvPr id="8" name="Group 8"/>
+          <p:cNvPr id="7" name="Group 7"/>
           <p:cNvGrpSpPr/>
           <p:nvPr/>
         </p:nvGrpSpPr>
@@ -16556,7 +16268,7 @@
         </p:grpSpPr>
         <p:sp>
           <p:nvSpPr>
-            <p:cNvPr id="4" name="TextBox 4"/>
+            <p:cNvPr id="3" name="TextBox 3"/>
             <p:cNvSpPr txBox="1"/>
             <p:nvPr/>
           </p:nvSpPr>
@@ -16596,7 +16308,7 @@
         </p:sp>
         <p:sp>
           <p:nvSpPr>
-            <p:cNvPr id="5" name="TextBox 5"/>
+            <p:cNvPr id="4" name="TextBox 4"/>
             <p:cNvSpPr txBox="1"/>
             <p:nvPr/>
           </p:nvSpPr>
@@ -16636,7 +16348,7 @@
         </p:sp>
         <p:sp>
           <p:nvSpPr>
-            <p:cNvPr id="6" name="TextBox 6"/>
+            <p:cNvPr id="5" name="TextBox 5"/>
             <p:cNvSpPr txBox="1"/>
             <p:nvPr/>
           </p:nvSpPr>
@@ -16676,7 +16388,7 @@
         </p:sp>
         <p:sp>
           <p:nvSpPr>
-            <p:cNvPr id="7" name="Line 7"/>
+            <p:cNvPr id="6" name="Line 6"/>
             <p:cNvSpPr/>
             <p:nvPr/>
           </p:nvSpPr>
@@ -16713,7 +16425,7 @@
       </p:grpSp>
       <p:grpSp>
         <p:nvGrpSpPr>
-          <p:cNvPr id="13" name="Group 13"/>
+          <p:cNvPr id="12" name="Group 12"/>
           <p:cNvGrpSpPr/>
           <p:nvPr/>
         </p:nvGrpSpPr>
@@ -16727,7 +16439,7 @@
         </p:grpSpPr>
         <p:sp>
           <p:nvSpPr>
-            <p:cNvPr id="9" name="Rectangle 9"/>
+            <p:cNvPr id="8" name="Rectangle 8"/>
             <p:cNvSpPr/>
             <p:nvPr/>
           </p:nvSpPr>
@@ -16753,7 +16465,7 @@
         </p:sp>
         <p:sp>
           <p:nvSpPr>
-            <p:cNvPr id="10" name="TextBox 10"/>
+            <p:cNvPr id="9" name="TextBox 9"/>
             <p:cNvSpPr txBox="1"/>
             <p:nvPr/>
           </p:nvSpPr>
@@ -16793,7 +16505,7 @@
         </p:sp>
         <p:sp>
           <p:nvSpPr>
-            <p:cNvPr id="11" name="TextBox 11"/>
+            <p:cNvPr id="10" name="TextBox 10"/>
             <p:cNvSpPr txBox="1"/>
             <p:nvPr/>
           </p:nvSpPr>
@@ -16833,7 +16545,7 @@
         </p:sp>
         <p:sp>
           <p:nvSpPr>
-            <p:cNvPr id="12" name="TextBox 12"/>
+            <p:cNvPr id="11" name="TextBox 11"/>
             <p:cNvSpPr txBox="1"/>
             <p:nvPr/>
           </p:nvSpPr>
@@ -16874,7 +16586,7 @@
       </p:grpSp>
       <p:grpSp>
         <p:nvGrpSpPr>
-          <p:cNvPr id="18" name="Group 18"/>
+          <p:cNvPr id="17" name="Group 17"/>
           <p:cNvGrpSpPr/>
           <p:nvPr/>
         </p:nvGrpSpPr>
@@ -16888,7 +16600,7 @@
         </p:grpSpPr>
         <p:sp>
           <p:nvSpPr>
-            <p:cNvPr id="14" name="Rectangle 14"/>
+            <p:cNvPr id="13" name="Rectangle 13"/>
             <p:cNvSpPr/>
             <p:nvPr/>
           </p:nvSpPr>
@@ -16914,7 +16626,7 @@
         </p:sp>
         <p:sp>
           <p:nvSpPr>
-            <p:cNvPr id="15" name="TextBox 15"/>
+            <p:cNvPr id="14" name="TextBox 14"/>
             <p:cNvSpPr txBox="1"/>
             <p:nvPr/>
           </p:nvSpPr>
@@ -16954,7 +16666,7 @@
         </p:sp>
         <p:sp>
           <p:nvSpPr>
-            <p:cNvPr id="16" name="TextBox 16"/>
+            <p:cNvPr id="15" name="TextBox 15"/>
             <p:cNvSpPr txBox="1"/>
             <p:nvPr/>
           </p:nvSpPr>
@@ -16994,7 +16706,7 @@
         </p:sp>
         <p:sp>
           <p:nvSpPr>
-            <p:cNvPr id="17" name="TextBox 17"/>
+            <p:cNvPr id="16" name="TextBox 16"/>
             <p:cNvSpPr txBox="1"/>
             <p:nvPr/>
           </p:nvSpPr>
@@ -17035,7 +16747,7 @@
       </p:grpSp>
       <p:grpSp>
         <p:nvGrpSpPr>
-          <p:cNvPr id="23" name="Group 23"/>
+          <p:cNvPr id="22" name="Group 22"/>
           <p:cNvGrpSpPr/>
           <p:nvPr/>
         </p:nvGrpSpPr>
@@ -17049,7 +16761,7 @@
         </p:grpSpPr>
         <p:sp>
           <p:nvSpPr>
-            <p:cNvPr id="19" name="Rectangle 19"/>
+            <p:cNvPr id="18" name="Rectangle 18"/>
             <p:cNvSpPr/>
             <p:nvPr/>
           </p:nvSpPr>
@@ -17075,7 +16787,7 @@
         </p:sp>
         <p:sp>
           <p:nvSpPr>
-            <p:cNvPr id="20" name="TextBox 20"/>
+            <p:cNvPr id="19" name="TextBox 19"/>
             <p:cNvSpPr txBox="1"/>
             <p:nvPr/>
           </p:nvSpPr>
@@ -17115,7 +16827,7 @@
         </p:sp>
         <p:sp>
           <p:nvSpPr>
-            <p:cNvPr id="21" name="TextBox 21"/>
+            <p:cNvPr id="20" name="TextBox 20"/>
             <p:cNvSpPr txBox="1"/>
             <p:nvPr/>
           </p:nvSpPr>
@@ -17155,7 +16867,7 @@
         </p:sp>
         <p:sp>
           <p:nvSpPr>
-            <p:cNvPr id="22" name="TextBox 22"/>
+            <p:cNvPr id="21" name="TextBox 21"/>
             <p:cNvSpPr txBox="1"/>
             <p:nvPr/>
           </p:nvSpPr>
@@ -17196,7 +16908,7 @@
       </p:grpSp>
       <p:grpSp>
         <p:nvGrpSpPr>
-          <p:cNvPr id="31" name="Group 31"/>
+          <p:cNvPr id="30" name="Group 30"/>
           <p:cNvGrpSpPr/>
           <p:nvPr/>
         </p:nvGrpSpPr>
@@ -17210,7 +16922,7 @@
         </p:grpSpPr>
         <p:sp>
           <p:nvSpPr>
-            <p:cNvPr id="24" name="Rectangle 24"/>
+            <p:cNvPr id="23" name="Rectangle 23"/>
             <p:cNvSpPr/>
             <p:nvPr/>
           </p:nvSpPr>
@@ -17236,7 +16948,7 @@
         </p:sp>
         <p:sp>
           <p:nvSpPr>
-            <p:cNvPr id="25" name="Rectangle 25"/>
+            <p:cNvPr id="24" name="Rectangle 24"/>
             <p:cNvSpPr/>
             <p:nvPr/>
           </p:nvSpPr>
@@ -17260,7 +16972,7 @@
         </p:sp>
         <p:sp>
           <p:nvSpPr>
-            <p:cNvPr id="26" name="TextBox 26"/>
+            <p:cNvPr id="25" name="TextBox 25"/>
             <p:cNvSpPr txBox="1"/>
             <p:nvPr/>
           </p:nvSpPr>
@@ -17300,7 +17012,7 @@
         </p:sp>
         <p:sp>
           <p:nvSpPr>
-            <p:cNvPr id="27" name="TextBox 27"/>
+            <p:cNvPr id="26" name="TextBox 26"/>
             <p:cNvSpPr txBox="1"/>
             <p:nvPr/>
           </p:nvSpPr>
@@ -17340,7 +17052,7 @@
         </p:sp>
         <p:sp>
           <p:nvSpPr>
-            <p:cNvPr id="28" name="TextBox 28"/>
+            <p:cNvPr id="27" name="TextBox 27"/>
             <p:cNvSpPr txBox="1"/>
             <p:nvPr/>
           </p:nvSpPr>
@@ -17380,7 +17092,7 @@
         </p:sp>
         <p:sp>
           <p:nvSpPr>
-            <p:cNvPr id="29" name="TextBox 29"/>
+            <p:cNvPr id="28" name="TextBox 28"/>
             <p:cNvSpPr txBox="1"/>
             <p:nvPr/>
           </p:nvSpPr>
@@ -17420,7 +17132,7 @@
         </p:sp>
         <p:sp>
           <p:nvSpPr>
-            <p:cNvPr id="30" name="TextBox 30"/>
+            <p:cNvPr id="29" name="TextBox 29"/>
             <p:cNvSpPr txBox="1"/>
             <p:nvPr/>
           </p:nvSpPr>
@@ -17461,7 +17173,7 @@
       </p:grpSp>
       <p:grpSp>
         <p:nvGrpSpPr>
-          <p:cNvPr id="39" name="Group 39"/>
+          <p:cNvPr id="38" name="Group 38"/>
           <p:cNvGrpSpPr/>
           <p:nvPr/>
         </p:nvGrpSpPr>
@@ -17475,7 +17187,7 @@
         </p:grpSpPr>
         <p:sp>
           <p:nvSpPr>
-            <p:cNvPr id="32" name="Rectangle 32"/>
+            <p:cNvPr id="31" name="Rectangle 31"/>
             <p:cNvSpPr/>
             <p:nvPr/>
           </p:nvSpPr>
@@ -17501,7 +17213,7 @@
         </p:sp>
         <p:sp>
           <p:nvSpPr>
-            <p:cNvPr id="33" name="Rectangle 33"/>
+            <p:cNvPr id="32" name="Rectangle 32"/>
             <p:cNvSpPr/>
             <p:nvPr/>
           </p:nvSpPr>
@@ -17525,7 +17237,7 @@
         </p:sp>
         <p:sp>
           <p:nvSpPr>
-            <p:cNvPr id="34" name="TextBox 34"/>
+            <p:cNvPr id="33" name="TextBox 33"/>
             <p:cNvSpPr txBox="1"/>
             <p:nvPr/>
           </p:nvSpPr>
@@ -17565,7 +17277,7 @@
         </p:sp>
         <p:sp>
           <p:nvSpPr>
-            <p:cNvPr id="35" name="TextBox 35"/>
+            <p:cNvPr id="34" name="TextBox 34"/>
             <p:cNvSpPr txBox="1"/>
             <p:nvPr/>
           </p:nvSpPr>
@@ -17605,7 +17317,7 @@
         </p:sp>
         <p:sp>
           <p:nvSpPr>
-            <p:cNvPr id="36" name="TextBox 36"/>
+            <p:cNvPr id="35" name="TextBox 35"/>
             <p:cNvSpPr txBox="1"/>
             <p:nvPr/>
           </p:nvSpPr>
@@ -17645,7 +17357,7 @@
         </p:sp>
         <p:sp>
           <p:nvSpPr>
-            <p:cNvPr id="37" name="TextBox 37"/>
+            <p:cNvPr id="36" name="TextBox 36"/>
             <p:cNvSpPr txBox="1"/>
             <p:nvPr/>
           </p:nvSpPr>
@@ -17685,7 +17397,7 @@
         </p:sp>
         <p:sp>
           <p:nvSpPr>
-            <p:cNvPr id="38" name="TextBox 38"/>
+            <p:cNvPr id="37" name="TextBox 37"/>
             <p:cNvSpPr txBox="1"/>
             <p:nvPr/>
           </p:nvSpPr>
@@ -17726,7 +17438,7 @@
       </p:grpSp>
       <p:sp>
         <p:nvSpPr>
-          <p:cNvPr id="40" name="TextBox 40"/>
+          <p:cNvPr id="39" name="TextBox 39"/>
           <p:cNvSpPr txBox="1"/>
           <p:nvPr/>
         </p:nvSpPr>
@@ -17766,7 +17478,7 @@
       </p:sp>
       <p:grpSp>
         <p:nvGrpSpPr>
-          <p:cNvPr id="43" name="Group 43"/>
+          <p:cNvPr id="42" name="Group 42"/>
           <p:cNvGrpSpPr/>
           <p:nvPr/>
         </p:nvGrpSpPr>
@@ -17780,7 +17492,7 @@
         </p:grpSpPr>
         <p:sp>
           <p:nvSpPr>
-            <p:cNvPr id="41" name="TextBox 41"/>
+            <p:cNvPr id="40" name="TextBox 40"/>
             <p:cNvSpPr txBox="1"/>
             <p:nvPr/>
           </p:nvSpPr>
@@ -17820,7 +17532,7 @@
         </p:sp>
         <p:sp>
           <p:nvSpPr>
-            <p:cNvPr id="42" name="TextBox 42"/>
+            <p:cNvPr id="41" name="TextBox 41"/>
             <p:cNvSpPr txBox="1"/>
             <p:nvPr/>
           </p:nvSpPr>
@@ -18254,7 +17966,7 @@
         </p:nvPicPr>
         <p:blipFill>
           <a:blip r:embed="rId2">
-            <a:alphaModFix amt="5500"/>
+            <a:alphaModFix amt="14000"/>
           </a:blip>
           <a:srcRect l="0" t="27" r="0" b="27"/>
           <a:stretch>
@@ -18271,33 +17983,9 @@
           </a:prstGeom>
         </p:spPr>
       </p:pic>
-      <p:sp>
-        <p:nvSpPr>
-          <p:cNvPr id="3" name="Rectangle 3"/>
-          <p:cNvSpPr/>
-          <p:nvPr/>
-        </p:nvSpPr>
-        <p:spPr>
-          <a:xfrm>
-            <a:off x="0" y="0"/>
-            <a:ext cx="12192000" cy="6858000"/>
-          </a:xfrm>
-          <a:prstGeom prst="rect">
-            <a:avLst/>
-          </a:prstGeom>
-          <a:solidFill>
-            <a:schemeClr val="lt1">
-              <a:alpha val="82000"/>
-            </a:schemeClr>
-          </a:solidFill>
-          <a:ln>
-            <a:noFill/>
-          </a:ln>
-        </p:spPr>
-      </p:sp>
       <p:grpSp>
         <p:nvGrpSpPr>
-          <p:cNvPr id="8" name="Group 8"/>
+          <p:cNvPr id="7" name="Group 7"/>
           <p:cNvGrpSpPr/>
           <p:nvPr/>
         </p:nvGrpSpPr>
@@ -18311,7 +17999,7 @@
         </p:grpSpPr>
         <p:sp>
           <p:nvSpPr>
-            <p:cNvPr id="4" name="TextBox 4"/>
+            <p:cNvPr id="3" name="TextBox 3"/>
             <p:cNvSpPr txBox="1"/>
             <p:nvPr/>
           </p:nvSpPr>
@@ -18351,7 +18039,7 @@
         </p:sp>
         <p:sp>
           <p:nvSpPr>
-            <p:cNvPr id="5" name="TextBox 5"/>
+            <p:cNvPr id="4" name="TextBox 4"/>
             <p:cNvSpPr txBox="1"/>
             <p:nvPr/>
           </p:nvSpPr>
@@ -18391,7 +18079,7 @@
         </p:sp>
         <p:sp>
           <p:nvSpPr>
-            <p:cNvPr id="6" name="TextBox 6"/>
+            <p:cNvPr id="5" name="TextBox 5"/>
             <p:cNvSpPr txBox="1"/>
             <p:nvPr/>
           </p:nvSpPr>
@@ -18431,7 +18119,7 @@
         </p:sp>
         <p:sp>
           <p:nvSpPr>
-            <p:cNvPr id="7" name="Line 7"/>
+            <p:cNvPr id="6" name="Line 6"/>
             <p:cNvSpPr/>
             <p:nvPr/>
           </p:nvSpPr>
@@ -18468,7 +18156,7 @@
       </p:grpSp>
       <p:grpSp>
         <p:nvGrpSpPr>
-          <p:cNvPr id="15" name="Group 15"/>
+          <p:cNvPr id="14" name="Group 14"/>
           <p:cNvGrpSpPr/>
           <p:nvPr/>
         </p:nvGrpSpPr>
@@ -18482,7 +18170,7 @@
         </p:grpSpPr>
         <p:sp>
           <p:nvSpPr>
-            <p:cNvPr id="9" name="Rectangle 9"/>
+            <p:cNvPr id="8" name="Rectangle 8"/>
             <p:cNvSpPr/>
             <p:nvPr/>
           </p:nvSpPr>
@@ -18508,7 +18196,7 @@
         </p:sp>
         <p:sp>
           <p:nvSpPr>
-            <p:cNvPr id="10" name="Rectangle 10"/>
+            <p:cNvPr id="9" name="Rectangle 9"/>
             <p:cNvSpPr/>
             <p:nvPr/>
           </p:nvSpPr>
@@ -18532,7 +18220,7 @@
         </p:sp>
         <p:sp>
           <p:nvSpPr>
-            <p:cNvPr id="11" name="TextBox 11"/>
+            <p:cNvPr id="10" name="TextBox 10"/>
             <p:cNvSpPr txBox="1"/>
             <p:nvPr/>
           </p:nvSpPr>
@@ -18572,7 +18260,7 @@
         </p:sp>
         <p:sp>
           <p:nvSpPr>
-            <p:cNvPr id="12" name="TextBox 12"/>
+            <p:cNvPr id="11" name="TextBox 11"/>
             <p:cNvSpPr txBox="1"/>
             <p:nvPr/>
           </p:nvSpPr>
@@ -18612,7 +18300,7 @@
         </p:sp>
         <p:sp>
           <p:nvSpPr>
-            <p:cNvPr id="13" name="TextBox 13"/>
+            <p:cNvPr id="12" name="TextBox 12"/>
             <p:cNvSpPr txBox="1"/>
             <p:nvPr/>
           </p:nvSpPr>
@@ -18652,7 +18340,7 @@
         </p:sp>
         <p:sp>
           <p:nvSpPr>
-            <p:cNvPr id="14" name="TextBox 14"/>
+            <p:cNvPr id="13" name="TextBox 13"/>
             <p:cNvSpPr txBox="1"/>
             <p:nvPr/>
           </p:nvSpPr>
@@ -18693,7 +18381,7 @@
       </p:grpSp>
       <p:grpSp>
         <p:nvGrpSpPr>
-          <p:cNvPr id="22" name="Group 22"/>
+          <p:cNvPr id="21" name="Group 21"/>
           <p:cNvGrpSpPr/>
           <p:nvPr/>
         </p:nvGrpSpPr>
@@ -18707,7 +18395,7 @@
         </p:grpSpPr>
         <p:sp>
           <p:nvSpPr>
-            <p:cNvPr id="16" name="Rectangle 16"/>
+            <p:cNvPr id="15" name="Rectangle 15"/>
             <p:cNvSpPr/>
             <p:nvPr/>
           </p:nvSpPr>
@@ -18733,7 +18421,7 @@
         </p:sp>
         <p:sp>
           <p:nvSpPr>
-            <p:cNvPr id="17" name="Rectangle 17"/>
+            <p:cNvPr id="16" name="Rectangle 16"/>
             <p:cNvSpPr/>
             <p:nvPr/>
           </p:nvSpPr>
@@ -18757,7 +18445,7 @@
         </p:sp>
         <p:sp>
           <p:nvSpPr>
-            <p:cNvPr id="18" name="TextBox 18"/>
+            <p:cNvPr id="17" name="TextBox 17"/>
             <p:cNvSpPr txBox="1"/>
             <p:nvPr/>
           </p:nvSpPr>
@@ -18797,7 +18485,7 @@
         </p:sp>
         <p:sp>
           <p:nvSpPr>
-            <p:cNvPr id="19" name="TextBox 19"/>
+            <p:cNvPr id="18" name="TextBox 18"/>
             <p:cNvSpPr txBox="1"/>
             <p:nvPr/>
           </p:nvSpPr>
@@ -18837,7 +18525,7 @@
         </p:sp>
         <p:sp>
           <p:nvSpPr>
-            <p:cNvPr id="20" name="TextBox 20"/>
+            <p:cNvPr id="19" name="TextBox 19"/>
             <p:cNvSpPr txBox="1"/>
             <p:nvPr/>
           </p:nvSpPr>
@@ -18877,7 +18565,7 @@
         </p:sp>
         <p:sp>
           <p:nvSpPr>
-            <p:cNvPr id="21" name="TextBox 21"/>
+            <p:cNvPr id="20" name="TextBox 20"/>
             <p:cNvSpPr txBox="1"/>
             <p:nvPr/>
           </p:nvSpPr>
@@ -18918,7 +18606,7 @@
       </p:grpSp>
       <p:grpSp>
         <p:nvGrpSpPr>
-          <p:cNvPr id="29" name="Group 29"/>
+          <p:cNvPr id="28" name="Group 28"/>
           <p:cNvGrpSpPr/>
           <p:nvPr/>
         </p:nvGrpSpPr>
@@ -18932,7 +18620,7 @@
         </p:grpSpPr>
         <p:sp>
           <p:nvSpPr>
-            <p:cNvPr id="23" name="Rectangle 23"/>
+            <p:cNvPr id="22" name="Rectangle 22"/>
             <p:cNvSpPr/>
             <p:nvPr/>
           </p:nvSpPr>
@@ -18958,7 +18646,7 @@
         </p:sp>
         <p:sp>
           <p:nvSpPr>
-            <p:cNvPr id="24" name="Rectangle 24"/>
+            <p:cNvPr id="23" name="Rectangle 23"/>
             <p:cNvSpPr/>
             <p:nvPr/>
           </p:nvSpPr>
@@ -18982,7 +18670,7 @@
         </p:sp>
         <p:sp>
           <p:nvSpPr>
-            <p:cNvPr id="25" name="TextBox 25"/>
+            <p:cNvPr id="24" name="TextBox 24"/>
             <p:cNvSpPr txBox="1"/>
             <p:nvPr/>
           </p:nvSpPr>
@@ -19022,7 +18710,7 @@
         </p:sp>
         <p:sp>
           <p:nvSpPr>
-            <p:cNvPr id="26" name="TextBox 26"/>
+            <p:cNvPr id="25" name="TextBox 25"/>
             <p:cNvSpPr txBox="1"/>
             <p:nvPr/>
           </p:nvSpPr>
@@ -19062,7 +18750,7 @@
         </p:sp>
         <p:sp>
           <p:nvSpPr>
-            <p:cNvPr id="27" name="TextBox 27"/>
+            <p:cNvPr id="26" name="TextBox 26"/>
             <p:cNvSpPr txBox="1"/>
             <p:nvPr/>
           </p:nvSpPr>
@@ -19102,7 +18790,7 @@
         </p:sp>
         <p:sp>
           <p:nvSpPr>
-            <p:cNvPr id="28" name="TextBox 28"/>
+            <p:cNvPr id="27" name="TextBox 27"/>
             <p:cNvSpPr txBox="1"/>
             <p:nvPr/>
           </p:nvSpPr>
@@ -19143,7 +18831,7 @@
       </p:grpSp>
       <p:grpSp>
         <p:nvGrpSpPr>
-          <p:cNvPr id="41" name="Group 41"/>
+          <p:cNvPr id="40" name="Group 40"/>
           <p:cNvGrpSpPr/>
           <p:nvPr/>
         </p:nvGrpSpPr>
@@ -19157,7 +18845,7 @@
         </p:grpSpPr>
         <p:sp>
           <p:nvSpPr>
-            <p:cNvPr id="30" name="Rectangle 30"/>
+            <p:cNvPr id="29" name="Rectangle 29"/>
             <p:cNvSpPr/>
             <p:nvPr/>
           </p:nvSpPr>
@@ -19183,7 +18871,7 @@
         </p:sp>
         <p:sp>
           <p:nvSpPr>
-            <p:cNvPr id="31" name="TextBox 31"/>
+            <p:cNvPr id="30" name="TextBox 30"/>
             <p:cNvSpPr txBox="1"/>
             <p:nvPr/>
           </p:nvSpPr>
@@ -19223,7 +18911,7 @@
         </p:sp>
         <p:sp>
           <p:nvSpPr>
-            <p:cNvPr id="32" name="TextBox 32"/>
+            <p:cNvPr id="31" name="TextBox 31"/>
             <p:cNvSpPr txBox="1"/>
             <p:nvPr/>
           </p:nvSpPr>
@@ -19263,7 +18951,7 @@
         </p:sp>
         <p:sp>
           <p:nvSpPr>
-            <p:cNvPr id="33" name="Rectangle 33"/>
+            <p:cNvPr id="32" name="Rectangle 32"/>
             <p:cNvSpPr/>
             <p:nvPr/>
           </p:nvSpPr>
@@ -19285,7 +18973,7 @@
         </p:sp>
         <p:sp>
           <p:nvSpPr>
-            <p:cNvPr id="34" name="TextBox 34"/>
+            <p:cNvPr id="33" name="TextBox 33"/>
             <p:cNvSpPr txBox="1"/>
             <p:nvPr/>
           </p:nvSpPr>
@@ -19325,7 +19013,7 @@
         </p:sp>
         <p:sp>
           <p:nvSpPr>
-            <p:cNvPr id="35" name="TextBox 35"/>
+            <p:cNvPr id="34" name="TextBox 34"/>
             <p:cNvSpPr txBox="1"/>
             <p:nvPr/>
           </p:nvSpPr>
@@ -19365,7 +19053,7 @@
         </p:sp>
         <p:sp>
           <p:nvSpPr>
-            <p:cNvPr id="36" name="Rectangle 36"/>
+            <p:cNvPr id="35" name="Rectangle 35"/>
             <p:cNvSpPr/>
             <p:nvPr/>
           </p:nvSpPr>
@@ -19387,7 +19075,7 @@
         </p:sp>
         <p:sp>
           <p:nvSpPr>
-            <p:cNvPr id="37" name="TextBox 37"/>
+            <p:cNvPr id="36" name="TextBox 36"/>
             <p:cNvSpPr txBox="1"/>
             <p:nvPr/>
           </p:nvSpPr>
@@ -19427,7 +19115,7 @@
         </p:sp>
         <p:sp>
           <p:nvSpPr>
-            <p:cNvPr id="38" name="TextBox 38"/>
+            <p:cNvPr id="37" name="TextBox 37"/>
             <p:cNvSpPr txBox="1"/>
             <p:nvPr/>
           </p:nvSpPr>
@@ -19467,7 +19155,7 @@
         </p:sp>
         <p:sp>
           <p:nvSpPr>
-            <p:cNvPr id="39" name="Rectangle 39"/>
+            <p:cNvPr id="38" name="Rectangle 38"/>
             <p:cNvSpPr/>
             <p:nvPr/>
           </p:nvSpPr>
@@ -19489,7 +19177,7 @@
         </p:sp>
         <p:sp>
           <p:nvSpPr>
-            <p:cNvPr id="40" name="TextBox 40"/>
+            <p:cNvPr id="39" name="TextBox 39"/>
             <p:cNvSpPr txBox="1"/>
             <p:nvPr/>
           </p:nvSpPr>
@@ -19530,7 +19218,7 @@
       </p:grpSp>
       <p:grpSp>
         <p:nvGrpSpPr>
-          <p:cNvPr id="44" name="Group 44"/>
+          <p:cNvPr id="43" name="Group 43"/>
           <p:cNvGrpSpPr/>
           <p:nvPr/>
         </p:nvGrpSpPr>
@@ -19544,7 +19232,7 @@
         </p:grpSpPr>
         <p:sp>
           <p:nvSpPr>
-            <p:cNvPr id="42" name="TextBox 42"/>
+            <p:cNvPr id="41" name="TextBox 41"/>
             <p:cNvSpPr txBox="1"/>
             <p:nvPr/>
           </p:nvSpPr>
@@ -19584,7 +19272,7 @@
         </p:sp>
         <p:sp>
           <p:nvSpPr>
-            <p:cNvPr id="43" name="TextBox 43"/>
+            <p:cNvPr id="42" name="TextBox 42"/>
             <p:cNvSpPr txBox="1"/>
             <p:nvPr/>
           </p:nvSpPr>
@@ -19669,7 +19357,7 @@
         </p:nvPicPr>
         <p:blipFill>
           <a:blip r:embed="rId2">
-            <a:alphaModFix amt="5500"/>
+            <a:alphaModFix amt="14000"/>
           </a:blip>
           <a:srcRect l="0" t="27" r="0" b="27"/>
           <a:stretch>
@@ -19686,33 +19374,9 @@
           </a:prstGeom>
         </p:spPr>
       </p:pic>
-      <p:sp>
-        <p:nvSpPr>
-          <p:cNvPr id="3" name="Rectangle 3"/>
-          <p:cNvSpPr/>
-          <p:nvPr/>
-        </p:nvSpPr>
-        <p:spPr>
-          <a:xfrm>
-            <a:off x="0" y="0"/>
-            <a:ext cx="12192000" cy="6858000"/>
-          </a:xfrm>
-          <a:prstGeom prst="rect">
-            <a:avLst/>
-          </a:prstGeom>
-          <a:solidFill>
-            <a:schemeClr val="lt1">
-              <a:alpha val="82000"/>
-            </a:schemeClr>
-          </a:solidFill>
-          <a:ln>
-            <a:noFill/>
-          </a:ln>
-        </p:spPr>
-      </p:sp>
       <p:grpSp>
         <p:nvGrpSpPr>
-          <p:cNvPr id="8" name="Group 8"/>
+          <p:cNvPr id="7" name="Group 7"/>
           <p:cNvGrpSpPr/>
           <p:nvPr/>
         </p:nvGrpSpPr>
@@ -19726,7 +19390,7 @@
         </p:grpSpPr>
         <p:sp>
           <p:nvSpPr>
-            <p:cNvPr id="4" name="TextBox 4"/>
+            <p:cNvPr id="3" name="TextBox 3"/>
             <p:cNvSpPr txBox="1"/>
             <p:nvPr/>
           </p:nvSpPr>
@@ -19766,7 +19430,7 @@
         </p:sp>
         <p:sp>
           <p:nvSpPr>
-            <p:cNvPr id="5" name="TextBox 5"/>
+            <p:cNvPr id="4" name="TextBox 4"/>
             <p:cNvSpPr txBox="1"/>
             <p:nvPr/>
           </p:nvSpPr>
@@ -19806,7 +19470,7 @@
         </p:sp>
         <p:sp>
           <p:nvSpPr>
-            <p:cNvPr id="6" name="TextBox 6"/>
+            <p:cNvPr id="5" name="TextBox 5"/>
             <p:cNvSpPr txBox="1"/>
             <p:nvPr/>
           </p:nvSpPr>
@@ -19846,7 +19510,7 @@
         </p:sp>
         <p:sp>
           <p:nvSpPr>
-            <p:cNvPr id="7" name="Line 7"/>
+            <p:cNvPr id="6" name="Line 6"/>
             <p:cNvSpPr/>
             <p:nvPr/>
           </p:nvSpPr>
@@ -19883,7 +19547,7 @@
       </p:grpSp>
       <p:grpSp>
         <p:nvGrpSpPr>
-          <p:cNvPr id="27" name="Group 27"/>
+          <p:cNvPr id="26" name="Group 26"/>
           <p:cNvGrpSpPr/>
           <p:nvPr/>
         </p:nvGrpSpPr>
@@ -19897,7 +19561,7 @@
         </p:grpSpPr>
         <p:sp>
           <p:nvSpPr>
-            <p:cNvPr id="9" name="Rectangle 9"/>
+            <p:cNvPr id="8" name="Rectangle 8"/>
             <p:cNvSpPr/>
             <p:nvPr/>
           </p:nvSpPr>
@@ -19923,7 +19587,7 @@
         </p:sp>
         <p:sp>
           <p:nvSpPr>
-            <p:cNvPr id="10" name="TextBox 10"/>
+            <p:cNvPr id="9" name="TextBox 9"/>
             <p:cNvSpPr txBox="1"/>
             <p:nvPr/>
           </p:nvSpPr>
@@ -19963,7 +19627,7 @@
         </p:sp>
         <p:sp>
           <p:nvSpPr>
-            <p:cNvPr id="11" name="Freeform 11"/>
+            <p:cNvPr id="10" name="Freeform 10"/>
             <p:cNvSpPr/>
             <p:nvPr/>
           </p:nvSpPr>
@@ -20001,7 +19665,7 @@
         </p:sp>
         <p:sp>
           <p:nvSpPr>
-            <p:cNvPr id="12" name="Freeform 12"/>
+            <p:cNvPr id="11" name="Freeform 11"/>
             <p:cNvSpPr/>
             <p:nvPr/>
           </p:nvSpPr>
@@ -20040,7 +19704,7 @@
         </p:sp>
         <p:sp>
           <p:nvSpPr>
-            <p:cNvPr id="13" name="TextBox 13"/>
+            <p:cNvPr id="12" name="TextBox 12"/>
             <p:cNvSpPr txBox="1"/>
             <p:nvPr/>
           </p:nvSpPr>
@@ -20080,7 +19744,7 @@
         </p:sp>
         <p:sp>
           <p:nvSpPr>
-            <p:cNvPr id="14" name="TextBox 14"/>
+            <p:cNvPr id="13" name="TextBox 13"/>
             <p:cNvSpPr txBox="1"/>
             <p:nvPr/>
           </p:nvSpPr>
@@ -20120,7 +19784,7 @@
         </p:sp>
         <p:sp>
           <p:nvSpPr>
-            <p:cNvPr id="15" name="Line 15"/>
+            <p:cNvPr id="14" name="Line 14"/>
             <p:cNvSpPr/>
             <p:nvPr/>
           </p:nvSpPr>
@@ -20156,7 +19820,7 @@
         </p:sp>
         <p:sp>
           <p:nvSpPr>
-            <p:cNvPr id="16" name="TextBox 16"/>
+            <p:cNvPr id="15" name="TextBox 15"/>
             <p:cNvSpPr txBox="1"/>
             <p:nvPr/>
           </p:nvSpPr>
@@ -20196,7 +19860,7 @@
         </p:sp>
         <p:sp>
           <p:nvSpPr>
-            <p:cNvPr id="17" name="Freeform 17"/>
+            <p:cNvPr id="16" name="Freeform 16"/>
             <p:cNvSpPr/>
             <p:nvPr/>
           </p:nvSpPr>
@@ -20234,7 +19898,7 @@
         </p:sp>
         <p:sp>
           <p:nvSpPr>
-            <p:cNvPr id="18" name="Freeform 18"/>
+            <p:cNvPr id="17" name="Freeform 17"/>
             <p:cNvSpPr/>
             <p:nvPr/>
           </p:nvSpPr>
@@ -20273,7 +19937,7 @@
         </p:sp>
         <p:sp>
           <p:nvSpPr>
-            <p:cNvPr id="19" name="TextBox 19"/>
+            <p:cNvPr id="18" name="TextBox 18"/>
             <p:cNvSpPr txBox="1"/>
             <p:nvPr/>
           </p:nvSpPr>
@@ -20313,7 +19977,7 @@
         </p:sp>
         <p:sp>
           <p:nvSpPr>
-            <p:cNvPr id="20" name="TextBox 20"/>
+            <p:cNvPr id="19" name="TextBox 19"/>
             <p:cNvSpPr txBox="1"/>
             <p:nvPr/>
           </p:nvSpPr>
@@ -20353,7 +20017,7 @@
         </p:sp>
         <p:sp>
           <p:nvSpPr>
-            <p:cNvPr id="21" name="Line 21"/>
+            <p:cNvPr id="20" name="Line 20"/>
             <p:cNvSpPr/>
             <p:nvPr/>
           </p:nvSpPr>
@@ -20389,7 +20053,7 @@
         </p:sp>
         <p:sp>
           <p:nvSpPr>
-            <p:cNvPr id="22" name="TextBox 22"/>
+            <p:cNvPr id="21" name="TextBox 21"/>
             <p:cNvSpPr txBox="1"/>
             <p:nvPr/>
           </p:nvSpPr>
@@ -20429,7 +20093,7 @@
         </p:sp>
         <p:sp>
           <p:nvSpPr>
-            <p:cNvPr id="23" name="Freeform 23"/>
+            <p:cNvPr id="22" name="Freeform 22"/>
             <p:cNvSpPr/>
             <p:nvPr/>
           </p:nvSpPr>
@@ -20467,7 +20131,7 @@
         </p:sp>
         <p:sp>
           <p:nvSpPr>
-            <p:cNvPr id="24" name="Freeform 24"/>
+            <p:cNvPr id="23" name="Freeform 23"/>
             <p:cNvSpPr/>
             <p:nvPr/>
           </p:nvSpPr>
@@ -20506,7 +20170,7 @@
         </p:sp>
         <p:sp>
           <p:nvSpPr>
-            <p:cNvPr id="25" name="TextBox 25"/>
+            <p:cNvPr id="24" name="TextBox 24"/>
             <p:cNvSpPr txBox="1"/>
             <p:nvPr/>
           </p:nvSpPr>
@@ -20546,7 +20210,7 @@
         </p:sp>
         <p:sp>
           <p:nvSpPr>
-            <p:cNvPr id="26" name="TextBox 26"/>
+            <p:cNvPr id="25" name="TextBox 25"/>
             <p:cNvSpPr txBox="1"/>
             <p:nvPr/>
           </p:nvSpPr>
@@ -20587,7 +20251,7 @@
       </p:grpSp>
       <p:sp>
         <p:nvSpPr>
-          <p:cNvPr id="28" name="TextBox 28"/>
+          <p:cNvPr id="27" name="TextBox 27"/>
           <p:cNvSpPr txBox="1"/>
           <p:nvPr/>
         </p:nvSpPr>
@@ -20627,7 +20291,7 @@
       </p:sp>
       <p:grpSp>
         <p:nvGrpSpPr>
-          <p:cNvPr id="31" name="Group 31"/>
+          <p:cNvPr id="30" name="Group 30"/>
           <p:cNvGrpSpPr/>
           <p:nvPr/>
         </p:nvGrpSpPr>
@@ -20641,7 +20305,7 @@
         </p:grpSpPr>
         <p:sp>
           <p:nvSpPr>
-            <p:cNvPr id="29" name="TextBox 29"/>
+            <p:cNvPr id="28" name="TextBox 28"/>
             <p:cNvSpPr txBox="1"/>
             <p:nvPr/>
           </p:nvSpPr>
@@ -20681,7 +20345,7 @@
         </p:sp>
         <p:sp>
           <p:nvSpPr>
-            <p:cNvPr id="30" name="TextBox 30"/>
+            <p:cNvPr id="29" name="TextBox 29"/>
             <p:cNvSpPr txBox="1"/>
             <p:nvPr/>
           </p:nvSpPr>
@@ -21816,7 +21480,7 @@
         </p:nvPicPr>
         <p:blipFill>
           <a:blip r:embed="rId2">
-            <a:alphaModFix amt="5500"/>
+            <a:alphaModFix amt="14000"/>
           </a:blip>
           <a:srcRect l="0" t="27" r="0" b="27"/>
           <a:stretch>
@@ -21833,33 +21497,9 @@
           </a:prstGeom>
         </p:spPr>
       </p:pic>
-      <p:sp>
-        <p:nvSpPr>
-          <p:cNvPr id="3" name="Rectangle 3"/>
-          <p:cNvSpPr/>
-          <p:nvPr/>
-        </p:nvSpPr>
-        <p:spPr>
-          <a:xfrm>
-            <a:off x="0" y="0"/>
-            <a:ext cx="12192000" cy="6858000"/>
-          </a:xfrm>
-          <a:prstGeom prst="rect">
-            <a:avLst/>
-          </a:prstGeom>
-          <a:solidFill>
-            <a:schemeClr val="lt1">
-              <a:alpha val="82000"/>
-            </a:schemeClr>
-          </a:solidFill>
-          <a:ln>
-            <a:noFill/>
-          </a:ln>
-        </p:spPr>
-      </p:sp>
       <p:grpSp>
         <p:nvGrpSpPr>
-          <p:cNvPr id="8" name="Group 8"/>
+          <p:cNvPr id="7" name="Group 7"/>
           <p:cNvGrpSpPr/>
           <p:nvPr/>
         </p:nvGrpSpPr>
@@ -21873,7 +21513,7 @@
         </p:grpSpPr>
         <p:sp>
           <p:nvSpPr>
-            <p:cNvPr id="4" name="TextBox 4"/>
+            <p:cNvPr id="3" name="TextBox 3"/>
             <p:cNvSpPr txBox="1"/>
             <p:nvPr/>
           </p:nvSpPr>
@@ -21913,7 +21553,7 @@
         </p:sp>
         <p:sp>
           <p:nvSpPr>
-            <p:cNvPr id="5" name="TextBox 5"/>
+            <p:cNvPr id="4" name="TextBox 4"/>
             <p:cNvSpPr txBox="1"/>
             <p:nvPr/>
           </p:nvSpPr>
@@ -21953,7 +21593,7 @@
         </p:sp>
         <p:sp>
           <p:nvSpPr>
-            <p:cNvPr id="6" name="TextBox 6"/>
+            <p:cNvPr id="5" name="TextBox 5"/>
             <p:cNvSpPr txBox="1"/>
             <p:nvPr/>
           </p:nvSpPr>
@@ -21993,7 +21633,7 @@
         </p:sp>
         <p:sp>
           <p:nvSpPr>
-            <p:cNvPr id="7" name="Line 7"/>
+            <p:cNvPr id="6" name="Line 6"/>
             <p:cNvSpPr/>
             <p:nvPr/>
           </p:nvSpPr>
@@ -22030,7 +21670,7 @@
       </p:grpSp>
       <p:grpSp>
         <p:nvGrpSpPr>
-          <p:cNvPr id="15" name="Group 15"/>
+          <p:cNvPr id="14" name="Group 14"/>
           <p:cNvGrpSpPr/>
           <p:nvPr/>
         </p:nvGrpSpPr>
@@ -22044,7 +21684,7 @@
         </p:grpSpPr>
         <p:sp>
           <p:nvSpPr>
-            <p:cNvPr id="9" name="Rectangle 9"/>
+            <p:cNvPr id="8" name="Rectangle 8"/>
             <p:cNvSpPr/>
             <p:nvPr/>
           </p:nvSpPr>
@@ -22070,7 +21710,7 @@
         </p:sp>
         <p:sp>
           <p:nvSpPr>
-            <p:cNvPr id="10" name="Rectangle 10"/>
+            <p:cNvPr id="9" name="Rectangle 9"/>
             <p:cNvSpPr/>
             <p:nvPr/>
           </p:nvSpPr>
@@ -22094,7 +21734,7 @@
         </p:sp>
         <p:sp>
           <p:nvSpPr>
-            <p:cNvPr id="11" name="TextBox 11"/>
+            <p:cNvPr id="10" name="TextBox 10"/>
             <p:cNvSpPr txBox="1"/>
             <p:nvPr/>
           </p:nvSpPr>
@@ -22134,7 +21774,7 @@
         </p:sp>
         <p:sp>
           <p:nvSpPr>
-            <p:cNvPr id="12" name="TextBox 12"/>
+            <p:cNvPr id="11" name="TextBox 11"/>
             <p:cNvSpPr txBox="1"/>
             <p:nvPr/>
           </p:nvSpPr>
@@ -22174,7 +21814,7 @@
         </p:sp>
         <p:sp>
           <p:nvSpPr>
-            <p:cNvPr id="13" name="TextBox 13"/>
+            <p:cNvPr id="12" name="TextBox 12"/>
             <p:cNvSpPr txBox="1"/>
             <p:nvPr/>
           </p:nvSpPr>
@@ -22214,7 +21854,7 @@
         </p:sp>
         <p:sp>
           <p:nvSpPr>
-            <p:cNvPr id="14" name="TextBox 14"/>
+            <p:cNvPr id="13" name="TextBox 13"/>
             <p:cNvSpPr txBox="1"/>
             <p:nvPr/>
           </p:nvSpPr>
@@ -22255,7 +21895,7 @@
       </p:grpSp>
       <p:grpSp>
         <p:nvGrpSpPr>
-          <p:cNvPr id="22" name="Group 22"/>
+          <p:cNvPr id="21" name="Group 21"/>
           <p:cNvGrpSpPr/>
           <p:nvPr/>
         </p:nvGrpSpPr>
@@ -22269,7 +21909,7 @@
         </p:grpSpPr>
         <p:sp>
           <p:nvSpPr>
-            <p:cNvPr id="16" name="Rectangle 16"/>
+            <p:cNvPr id="15" name="Rectangle 15"/>
             <p:cNvSpPr/>
             <p:nvPr/>
           </p:nvSpPr>
@@ -22295,7 +21935,7 @@
         </p:sp>
         <p:sp>
           <p:nvSpPr>
-            <p:cNvPr id="17" name="Rectangle 17"/>
+            <p:cNvPr id="16" name="Rectangle 16"/>
             <p:cNvSpPr/>
             <p:nvPr/>
           </p:nvSpPr>
@@ -22319,7 +21959,7 @@
         </p:sp>
         <p:sp>
           <p:nvSpPr>
-            <p:cNvPr id="18" name="TextBox 18"/>
+            <p:cNvPr id="17" name="TextBox 17"/>
             <p:cNvSpPr txBox="1"/>
             <p:nvPr/>
           </p:nvSpPr>
@@ -22359,7 +21999,7 @@
         </p:sp>
         <p:sp>
           <p:nvSpPr>
-            <p:cNvPr id="19" name="TextBox 19"/>
+            <p:cNvPr id="18" name="TextBox 18"/>
             <p:cNvSpPr txBox="1"/>
             <p:nvPr/>
           </p:nvSpPr>
@@ -22399,7 +22039,7 @@
         </p:sp>
         <p:sp>
           <p:nvSpPr>
-            <p:cNvPr id="20" name="TextBox 20"/>
+            <p:cNvPr id="19" name="TextBox 19"/>
             <p:cNvSpPr txBox="1"/>
             <p:nvPr/>
           </p:nvSpPr>
@@ -22439,7 +22079,7 @@
         </p:sp>
         <p:sp>
           <p:nvSpPr>
-            <p:cNvPr id="21" name="TextBox 21"/>
+            <p:cNvPr id="20" name="TextBox 20"/>
             <p:cNvSpPr txBox="1"/>
             <p:nvPr/>
           </p:nvSpPr>
@@ -22480,7 +22120,7 @@
       </p:grpSp>
       <p:sp>
         <p:nvSpPr>
-          <p:cNvPr id="23" name="Freeform 23"/>
+          <p:cNvPr id="22" name="Freeform 22"/>
           <p:cNvSpPr/>
           <p:nvPr/>
         </p:nvSpPr>
@@ -22518,7 +22158,7 @@
       </p:sp>
       <p:sp>
         <p:nvSpPr>
-          <p:cNvPr id="24" name="Freeform 24"/>
+          <p:cNvPr id="23" name="Freeform 23"/>
           <p:cNvSpPr/>
           <p:nvPr/>
         </p:nvSpPr>
@@ -22558,7 +22198,7 @@
       </p:sp>
       <p:grpSp>
         <p:nvGrpSpPr>
-          <p:cNvPr id="28" name="Group 28"/>
+          <p:cNvPr id="27" name="Group 27"/>
           <p:cNvGrpSpPr/>
           <p:nvPr/>
         </p:nvGrpSpPr>
@@ -22572,7 +22212,7 @@
         </p:grpSpPr>
         <p:sp>
           <p:nvSpPr>
-            <p:cNvPr id="25" name="Rectangle 25"/>
+            <p:cNvPr id="24" name="Rectangle 24"/>
             <p:cNvSpPr/>
             <p:nvPr/>
           </p:nvSpPr>
@@ -22596,7 +22236,7 @@
         </p:sp>
         <p:sp>
           <p:nvSpPr>
-            <p:cNvPr id="26" name="TextBox 26"/>
+            <p:cNvPr id="25" name="TextBox 25"/>
             <p:cNvSpPr txBox="1"/>
             <p:nvPr/>
           </p:nvSpPr>
@@ -22636,7 +22276,7 @@
         </p:sp>
         <p:sp>
           <p:nvSpPr>
-            <p:cNvPr id="27" name="TextBox 27"/>
+            <p:cNvPr id="26" name="TextBox 26"/>
             <p:cNvSpPr txBox="1"/>
             <p:nvPr/>
           </p:nvSpPr>
@@ -22677,7 +22317,7 @@
       </p:grpSp>
       <p:grpSp>
         <p:nvGrpSpPr>
-          <p:cNvPr id="31" name="Group 31"/>
+          <p:cNvPr id="30" name="Group 30"/>
           <p:cNvGrpSpPr/>
           <p:nvPr/>
         </p:nvGrpSpPr>
@@ -22691,7 +22331,7 @@
         </p:grpSpPr>
         <p:sp>
           <p:nvSpPr>
-            <p:cNvPr id="29" name="TextBox 29"/>
+            <p:cNvPr id="28" name="TextBox 28"/>
             <p:cNvSpPr txBox="1"/>
             <p:nvPr/>
           </p:nvSpPr>
@@ -22731,7 +22371,7 @@
         </p:sp>
         <p:sp>
           <p:nvSpPr>
-            <p:cNvPr id="30" name="TextBox 30"/>
+            <p:cNvPr id="29" name="TextBox 29"/>
             <p:cNvSpPr txBox="1"/>
             <p:nvPr/>
           </p:nvSpPr>
@@ -22816,7 +22456,7 @@
         </p:nvPicPr>
         <p:blipFill>
           <a:blip r:embed="rId2">
-            <a:alphaModFix amt="5500"/>
+            <a:alphaModFix amt="14000"/>
           </a:blip>
           <a:srcRect l="0" t="27" r="0" b="27"/>
           <a:stretch>
@@ -22833,33 +22473,9 @@
           </a:prstGeom>
         </p:spPr>
       </p:pic>
-      <p:sp>
-        <p:nvSpPr>
-          <p:cNvPr id="3" name="Rectangle 3"/>
-          <p:cNvSpPr/>
-          <p:nvPr/>
-        </p:nvSpPr>
-        <p:spPr>
-          <a:xfrm>
-            <a:off x="0" y="0"/>
-            <a:ext cx="12192000" cy="6858000"/>
-          </a:xfrm>
-          <a:prstGeom prst="rect">
-            <a:avLst/>
-          </a:prstGeom>
-          <a:solidFill>
-            <a:schemeClr val="lt1">
-              <a:alpha val="82000"/>
-            </a:schemeClr>
-          </a:solidFill>
-          <a:ln>
-            <a:noFill/>
-          </a:ln>
-        </p:spPr>
-      </p:sp>
       <p:grpSp>
         <p:nvGrpSpPr>
-          <p:cNvPr id="8" name="Group 8"/>
+          <p:cNvPr id="7" name="Group 7"/>
           <p:cNvGrpSpPr/>
           <p:nvPr/>
         </p:nvGrpSpPr>
@@ -22873,7 +22489,7 @@
         </p:grpSpPr>
         <p:sp>
           <p:nvSpPr>
-            <p:cNvPr id="4" name="TextBox 4"/>
+            <p:cNvPr id="3" name="TextBox 3"/>
             <p:cNvSpPr txBox="1"/>
             <p:nvPr/>
           </p:nvSpPr>
@@ -22913,7 +22529,7 @@
         </p:sp>
         <p:sp>
           <p:nvSpPr>
-            <p:cNvPr id="5" name="TextBox 5"/>
+            <p:cNvPr id="4" name="TextBox 4"/>
             <p:cNvSpPr txBox="1"/>
             <p:nvPr/>
           </p:nvSpPr>
@@ -22953,7 +22569,7 @@
         </p:sp>
         <p:sp>
           <p:nvSpPr>
-            <p:cNvPr id="6" name="TextBox 6"/>
+            <p:cNvPr id="5" name="TextBox 5"/>
             <p:cNvSpPr txBox="1"/>
             <p:nvPr/>
           </p:nvSpPr>
@@ -22993,7 +22609,7 @@
         </p:sp>
         <p:sp>
           <p:nvSpPr>
-            <p:cNvPr id="7" name="Line 7"/>
+            <p:cNvPr id="6" name="Line 6"/>
             <p:cNvSpPr/>
             <p:nvPr/>
           </p:nvSpPr>
@@ -23030,7 +22646,7 @@
       </p:grpSp>
       <p:grpSp>
         <p:nvGrpSpPr>
-          <p:cNvPr id="16" name="Group 16"/>
+          <p:cNvPr id="15" name="Group 15"/>
           <p:cNvGrpSpPr/>
           <p:nvPr/>
         </p:nvGrpSpPr>
@@ -23044,7 +22660,7 @@
         </p:grpSpPr>
         <p:sp>
           <p:nvSpPr>
-            <p:cNvPr id="9" name="Rectangle 9"/>
+            <p:cNvPr id="8" name="Rectangle 8"/>
             <p:cNvSpPr/>
             <p:nvPr/>
           </p:nvSpPr>
@@ -23070,7 +22686,7 @@
         </p:sp>
         <p:sp>
           <p:nvSpPr>
-            <p:cNvPr id="10" name="Rectangle 10"/>
+            <p:cNvPr id="9" name="Rectangle 9"/>
             <p:cNvSpPr/>
             <p:nvPr/>
           </p:nvSpPr>
@@ -23094,7 +22710,7 @@
         </p:sp>
         <p:sp>
           <p:nvSpPr>
-            <p:cNvPr id="11" name="TextBox 11"/>
+            <p:cNvPr id="10" name="TextBox 10"/>
             <p:cNvSpPr txBox="1"/>
             <p:nvPr/>
           </p:nvSpPr>
@@ -23134,7 +22750,7 @@
         </p:sp>
         <p:sp>
           <p:nvSpPr>
-            <p:cNvPr id="12" name="TextBox 12"/>
+            <p:cNvPr id="11" name="TextBox 11"/>
             <p:cNvSpPr txBox="1"/>
             <p:nvPr/>
           </p:nvSpPr>
@@ -23174,7 +22790,7 @@
         </p:sp>
         <p:sp>
           <p:nvSpPr>
-            <p:cNvPr id="13" name="TextBox 13"/>
+            <p:cNvPr id="12" name="TextBox 12"/>
             <p:cNvSpPr txBox="1"/>
             <p:nvPr/>
           </p:nvSpPr>
@@ -23214,7 +22830,7 @@
         </p:sp>
         <p:sp>
           <p:nvSpPr>
-            <p:cNvPr id="14" name="TextBox 14"/>
+            <p:cNvPr id="13" name="TextBox 13"/>
             <p:cNvSpPr txBox="1"/>
             <p:nvPr/>
           </p:nvSpPr>
@@ -23254,7 +22870,7 @@
         </p:sp>
         <p:sp>
           <p:nvSpPr>
-            <p:cNvPr id="15" name="TextBox 15"/>
+            <p:cNvPr id="14" name="TextBox 14"/>
             <p:cNvSpPr txBox="1"/>
             <p:nvPr/>
           </p:nvSpPr>
@@ -23295,7 +22911,7 @@
       </p:grpSp>
       <p:grpSp>
         <p:nvGrpSpPr>
-          <p:cNvPr id="24" name="Group 24"/>
+          <p:cNvPr id="23" name="Group 23"/>
           <p:cNvGrpSpPr/>
           <p:nvPr/>
         </p:nvGrpSpPr>
@@ -23309,7 +22925,7 @@
         </p:grpSpPr>
         <p:sp>
           <p:nvSpPr>
-            <p:cNvPr id="17" name="Rectangle 17"/>
+            <p:cNvPr id="16" name="Rectangle 16"/>
             <p:cNvSpPr/>
             <p:nvPr/>
           </p:nvSpPr>
@@ -23335,7 +22951,7 @@
         </p:sp>
         <p:sp>
           <p:nvSpPr>
-            <p:cNvPr id="18" name="Rectangle 18"/>
+            <p:cNvPr id="17" name="Rectangle 17"/>
             <p:cNvSpPr/>
             <p:nvPr/>
           </p:nvSpPr>
@@ -23359,7 +22975,7 @@
         </p:sp>
         <p:sp>
           <p:nvSpPr>
-            <p:cNvPr id="19" name="TextBox 19"/>
+            <p:cNvPr id="18" name="TextBox 18"/>
             <p:cNvSpPr txBox="1"/>
             <p:nvPr/>
           </p:nvSpPr>
@@ -23399,7 +23015,7 @@
         </p:sp>
         <p:sp>
           <p:nvSpPr>
-            <p:cNvPr id="20" name="TextBox 20"/>
+            <p:cNvPr id="19" name="TextBox 19"/>
             <p:cNvSpPr txBox="1"/>
             <p:nvPr/>
           </p:nvSpPr>
@@ -23439,7 +23055,7 @@
         </p:sp>
         <p:sp>
           <p:nvSpPr>
-            <p:cNvPr id="21" name="TextBox 21"/>
+            <p:cNvPr id="20" name="TextBox 20"/>
             <p:cNvSpPr txBox="1"/>
             <p:nvPr/>
           </p:nvSpPr>
@@ -23479,7 +23095,7 @@
         </p:sp>
         <p:sp>
           <p:nvSpPr>
-            <p:cNvPr id="22" name="TextBox 22"/>
+            <p:cNvPr id="21" name="TextBox 21"/>
             <p:cNvSpPr txBox="1"/>
             <p:nvPr/>
           </p:nvSpPr>
@@ -23519,7 +23135,7 @@
         </p:sp>
         <p:sp>
           <p:nvSpPr>
-            <p:cNvPr id="23" name="TextBox 23"/>
+            <p:cNvPr id="22" name="TextBox 22"/>
             <p:cNvSpPr txBox="1"/>
             <p:nvPr/>
           </p:nvSpPr>
@@ -23560,7 +23176,7 @@
       </p:grpSp>
       <p:grpSp>
         <p:nvGrpSpPr>
-          <p:cNvPr id="32" name="Group 32"/>
+          <p:cNvPr id="31" name="Group 31"/>
           <p:cNvGrpSpPr/>
           <p:nvPr/>
         </p:nvGrpSpPr>
@@ -23574,7 +23190,7 @@
         </p:grpSpPr>
         <p:sp>
           <p:nvSpPr>
-            <p:cNvPr id="25" name="Rectangle 25"/>
+            <p:cNvPr id="24" name="Rectangle 24"/>
             <p:cNvSpPr/>
             <p:nvPr/>
           </p:nvSpPr>
@@ -23600,7 +23216,7 @@
         </p:sp>
         <p:sp>
           <p:nvSpPr>
-            <p:cNvPr id="26" name="Rectangle 26"/>
+            <p:cNvPr id="25" name="Rectangle 25"/>
             <p:cNvSpPr/>
             <p:nvPr/>
           </p:nvSpPr>
@@ -23624,7 +23240,7 @@
         </p:sp>
         <p:sp>
           <p:nvSpPr>
-            <p:cNvPr id="27" name="TextBox 27"/>
+            <p:cNvPr id="26" name="TextBox 26"/>
             <p:cNvSpPr txBox="1"/>
             <p:nvPr/>
           </p:nvSpPr>
@@ -23664,7 +23280,7 @@
         </p:sp>
         <p:sp>
           <p:nvSpPr>
-            <p:cNvPr id="28" name="TextBox 28"/>
+            <p:cNvPr id="27" name="TextBox 27"/>
             <p:cNvSpPr txBox="1"/>
             <p:nvPr/>
           </p:nvSpPr>
@@ -23704,7 +23320,7 @@
         </p:sp>
         <p:sp>
           <p:nvSpPr>
-            <p:cNvPr id="29" name="TextBox 29"/>
+            <p:cNvPr id="28" name="TextBox 28"/>
             <p:cNvSpPr txBox="1"/>
             <p:nvPr/>
           </p:nvSpPr>
@@ -23744,7 +23360,7 @@
         </p:sp>
         <p:sp>
           <p:nvSpPr>
-            <p:cNvPr id="30" name="TextBox 30"/>
+            <p:cNvPr id="29" name="TextBox 29"/>
             <p:cNvSpPr txBox="1"/>
             <p:nvPr/>
           </p:nvSpPr>
@@ -23784,7 +23400,7 @@
         </p:sp>
         <p:sp>
           <p:nvSpPr>
-            <p:cNvPr id="31" name="TextBox 31"/>
+            <p:cNvPr id="30" name="TextBox 30"/>
             <p:cNvSpPr txBox="1"/>
             <p:nvPr/>
           </p:nvSpPr>
@@ -23825,7 +23441,7 @@
       </p:grpSp>
       <p:grpSp>
         <p:nvGrpSpPr>
-          <p:cNvPr id="35" name="Group 35"/>
+          <p:cNvPr id="34" name="Group 34"/>
           <p:cNvGrpSpPr/>
           <p:nvPr/>
         </p:nvGrpSpPr>
@@ -23839,7 +23455,7 @@
         </p:grpSpPr>
         <p:sp>
           <p:nvSpPr>
-            <p:cNvPr id="33" name="Rectangle 33"/>
+            <p:cNvPr id="32" name="Rectangle 32"/>
             <p:cNvSpPr/>
             <p:nvPr/>
           </p:nvSpPr>
@@ -23863,7 +23479,7 @@
         </p:sp>
         <p:sp>
           <p:nvSpPr>
-            <p:cNvPr id="34" name="TextBox 34"/>
+            <p:cNvPr id="33" name="TextBox 33"/>
             <p:cNvSpPr txBox="1"/>
             <p:nvPr/>
           </p:nvSpPr>
@@ -23904,7 +23520,7 @@
       </p:grpSp>
       <p:grpSp>
         <p:nvGrpSpPr>
-          <p:cNvPr id="38" name="Group 38"/>
+          <p:cNvPr id="37" name="Group 37"/>
           <p:cNvGrpSpPr/>
           <p:nvPr/>
         </p:nvGrpSpPr>
@@ -23918,7 +23534,7 @@
         </p:grpSpPr>
         <p:sp>
           <p:nvSpPr>
-            <p:cNvPr id="36" name="TextBox 36"/>
+            <p:cNvPr id="35" name="TextBox 35"/>
             <p:cNvSpPr txBox="1"/>
             <p:nvPr/>
           </p:nvSpPr>
@@ -23958,7 +23574,7 @@
         </p:sp>
         <p:sp>
           <p:nvSpPr>
-            <p:cNvPr id="37" name="TextBox 37"/>
+            <p:cNvPr id="36" name="TextBox 36"/>
             <p:cNvSpPr txBox="1"/>
             <p:nvPr/>
           </p:nvSpPr>
@@ -24043,7 +23659,7 @@
         </p:nvPicPr>
         <p:blipFill>
           <a:blip r:embed="rId2">
-            <a:alphaModFix amt="5500"/>
+            <a:alphaModFix amt="14000"/>
           </a:blip>
           <a:srcRect l="0" t="27" r="0" b="27"/>
           <a:stretch>
@@ -24060,33 +23676,9 @@
           </a:prstGeom>
         </p:spPr>
       </p:pic>
-      <p:sp>
-        <p:nvSpPr>
-          <p:cNvPr id="3" name="Rectangle 3"/>
-          <p:cNvSpPr/>
-          <p:nvPr/>
-        </p:nvSpPr>
-        <p:spPr>
-          <a:xfrm>
-            <a:off x="0" y="0"/>
-            <a:ext cx="12192000" cy="6858000"/>
-          </a:xfrm>
-          <a:prstGeom prst="rect">
-            <a:avLst/>
-          </a:prstGeom>
-          <a:solidFill>
-            <a:schemeClr val="lt1">
-              <a:alpha val="82000"/>
-            </a:schemeClr>
-          </a:solidFill>
-          <a:ln>
-            <a:noFill/>
-          </a:ln>
-        </p:spPr>
-      </p:sp>
       <p:grpSp>
         <p:nvGrpSpPr>
-          <p:cNvPr id="8" name="Group 8"/>
+          <p:cNvPr id="7" name="Group 7"/>
           <p:cNvGrpSpPr/>
           <p:nvPr/>
         </p:nvGrpSpPr>
@@ -24100,7 +23692,7 @@
         </p:grpSpPr>
         <p:sp>
           <p:nvSpPr>
-            <p:cNvPr id="4" name="TextBox 4"/>
+            <p:cNvPr id="3" name="TextBox 3"/>
             <p:cNvSpPr txBox="1"/>
             <p:nvPr/>
           </p:nvSpPr>
@@ -24140,7 +23732,7 @@
         </p:sp>
         <p:sp>
           <p:nvSpPr>
-            <p:cNvPr id="5" name="TextBox 5"/>
+            <p:cNvPr id="4" name="TextBox 4"/>
             <p:cNvSpPr txBox="1"/>
             <p:nvPr/>
           </p:nvSpPr>
@@ -24180,7 +23772,7 @@
         </p:sp>
         <p:sp>
           <p:nvSpPr>
-            <p:cNvPr id="6" name="TextBox 6"/>
+            <p:cNvPr id="5" name="TextBox 5"/>
             <p:cNvSpPr txBox="1"/>
             <p:nvPr/>
           </p:nvSpPr>
@@ -24220,7 +23812,7 @@
         </p:sp>
         <p:sp>
           <p:nvSpPr>
-            <p:cNvPr id="7" name="Line 7"/>
+            <p:cNvPr id="6" name="Line 6"/>
             <p:cNvSpPr/>
             <p:nvPr/>
           </p:nvSpPr>
@@ -24257,7 +23849,7 @@
       </p:grpSp>
       <p:grpSp>
         <p:nvGrpSpPr>
-          <p:cNvPr id="15" name="Group 15"/>
+          <p:cNvPr id="14" name="Group 14"/>
           <p:cNvGrpSpPr/>
           <p:nvPr/>
         </p:nvGrpSpPr>
@@ -24271,7 +23863,7 @@
         </p:grpSpPr>
         <p:sp>
           <p:nvSpPr>
-            <p:cNvPr id="9" name="Rectangle 9"/>
+            <p:cNvPr id="8" name="Rectangle 8"/>
             <p:cNvSpPr/>
             <p:nvPr/>
           </p:nvSpPr>
@@ -24297,7 +23889,7 @@
         </p:sp>
         <p:sp>
           <p:nvSpPr>
-            <p:cNvPr id="10" name="Rectangle 10"/>
+            <p:cNvPr id="9" name="Rectangle 9"/>
             <p:cNvSpPr/>
             <p:nvPr/>
           </p:nvSpPr>
@@ -24321,7 +23913,7 @@
         </p:sp>
         <p:sp>
           <p:nvSpPr>
-            <p:cNvPr id="11" name="TextBox 11"/>
+            <p:cNvPr id="10" name="TextBox 10"/>
             <p:cNvSpPr txBox="1"/>
             <p:nvPr/>
           </p:nvSpPr>
@@ -24361,7 +23953,7 @@
         </p:sp>
         <p:sp>
           <p:nvSpPr>
-            <p:cNvPr id="12" name="TextBox 12"/>
+            <p:cNvPr id="11" name="TextBox 11"/>
             <p:cNvSpPr txBox="1"/>
             <p:nvPr/>
           </p:nvSpPr>
@@ -24401,7 +23993,7 @@
         </p:sp>
         <p:sp>
           <p:nvSpPr>
-            <p:cNvPr id="13" name="TextBox 13"/>
+            <p:cNvPr id="12" name="TextBox 12"/>
             <p:cNvSpPr txBox="1"/>
             <p:nvPr/>
           </p:nvSpPr>
@@ -24441,7 +24033,7 @@
         </p:sp>
         <p:sp>
           <p:nvSpPr>
-            <p:cNvPr id="14" name="TextBox 14"/>
+            <p:cNvPr id="13" name="TextBox 13"/>
             <p:cNvSpPr txBox="1"/>
             <p:nvPr/>
           </p:nvSpPr>
@@ -24482,7 +24074,7 @@
       </p:grpSp>
       <p:grpSp>
         <p:nvGrpSpPr>
-          <p:cNvPr id="22" name="Group 22"/>
+          <p:cNvPr id="21" name="Group 21"/>
           <p:cNvGrpSpPr/>
           <p:nvPr/>
         </p:nvGrpSpPr>
@@ -24496,7 +24088,7 @@
         </p:grpSpPr>
         <p:sp>
           <p:nvSpPr>
-            <p:cNvPr id="16" name="Rectangle 16"/>
+            <p:cNvPr id="15" name="Rectangle 15"/>
             <p:cNvSpPr/>
             <p:nvPr/>
           </p:nvSpPr>
@@ -24522,7 +24114,7 @@
         </p:sp>
         <p:sp>
           <p:nvSpPr>
-            <p:cNvPr id="17" name="Rectangle 17"/>
+            <p:cNvPr id="16" name="Rectangle 16"/>
             <p:cNvSpPr/>
             <p:nvPr/>
           </p:nvSpPr>
@@ -24546,7 +24138,7 @@
         </p:sp>
         <p:sp>
           <p:nvSpPr>
-            <p:cNvPr id="18" name="TextBox 18"/>
+            <p:cNvPr id="17" name="TextBox 17"/>
             <p:cNvSpPr txBox="1"/>
             <p:nvPr/>
           </p:nvSpPr>
@@ -24586,7 +24178,7 @@
         </p:sp>
         <p:sp>
           <p:nvSpPr>
-            <p:cNvPr id="19" name="TextBox 19"/>
+            <p:cNvPr id="18" name="TextBox 18"/>
             <p:cNvSpPr txBox="1"/>
             <p:nvPr/>
           </p:nvSpPr>
@@ -24626,7 +24218,7 @@
         </p:sp>
         <p:sp>
           <p:nvSpPr>
-            <p:cNvPr id="20" name="TextBox 20"/>
+            <p:cNvPr id="19" name="TextBox 19"/>
             <p:cNvSpPr txBox="1"/>
             <p:nvPr/>
           </p:nvSpPr>
@@ -24666,7 +24258,7 @@
         </p:sp>
         <p:sp>
           <p:nvSpPr>
-            <p:cNvPr id="21" name="TextBox 21"/>
+            <p:cNvPr id="20" name="TextBox 20"/>
             <p:cNvSpPr txBox="1"/>
             <p:nvPr/>
           </p:nvSpPr>
@@ -24707,7 +24299,7 @@
       </p:grpSp>
       <p:grpSp>
         <p:nvGrpSpPr>
-          <p:cNvPr id="29" name="Group 29"/>
+          <p:cNvPr id="28" name="Group 28"/>
           <p:cNvGrpSpPr/>
           <p:nvPr/>
         </p:nvGrpSpPr>
@@ -24721,7 +24313,7 @@
         </p:grpSpPr>
         <p:sp>
           <p:nvSpPr>
-            <p:cNvPr id="23" name="Rectangle 23"/>
+            <p:cNvPr id="22" name="Rectangle 22"/>
             <p:cNvSpPr/>
             <p:nvPr/>
           </p:nvSpPr>
@@ -24747,7 +24339,7 @@
         </p:sp>
         <p:sp>
           <p:nvSpPr>
-            <p:cNvPr id="24" name="Rectangle 24"/>
+            <p:cNvPr id="23" name="Rectangle 23"/>
             <p:cNvSpPr/>
             <p:nvPr/>
           </p:nvSpPr>
@@ -24771,7 +24363,7 @@
         </p:sp>
         <p:sp>
           <p:nvSpPr>
-            <p:cNvPr id="25" name="TextBox 25"/>
+            <p:cNvPr id="24" name="TextBox 24"/>
             <p:cNvSpPr txBox="1"/>
             <p:nvPr/>
           </p:nvSpPr>
@@ -24811,7 +24403,7 @@
         </p:sp>
         <p:sp>
           <p:nvSpPr>
-            <p:cNvPr id="26" name="TextBox 26"/>
+            <p:cNvPr id="25" name="TextBox 25"/>
             <p:cNvSpPr txBox="1"/>
             <p:nvPr/>
           </p:nvSpPr>
@@ -24851,7 +24443,7 @@
         </p:sp>
         <p:sp>
           <p:nvSpPr>
-            <p:cNvPr id="27" name="TextBox 27"/>
+            <p:cNvPr id="26" name="TextBox 26"/>
             <p:cNvSpPr txBox="1"/>
             <p:nvPr/>
           </p:nvSpPr>
@@ -24891,7 +24483,7 @@
         </p:sp>
         <p:sp>
           <p:nvSpPr>
-            <p:cNvPr id="28" name="TextBox 28"/>
+            <p:cNvPr id="27" name="TextBox 27"/>
             <p:cNvSpPr txBox="1"/>
             <p:nvPr/>
           </p:nvSpPr>
@@ -24932,7 +24524,7 @@
       </p:grpSp>
       <p:grpSp>
         <p:nvGrpSpPr>
-          <p:cNvPr id="36" name="Group 36"/>
+          <p:cNvPr id="35" name="Group 35"/>
           <p:cNvGrpSpPr/>
           <p:nvPr/>
         </p:nvGrpSpPr>
@@ -24946,7 +24538,7 @@
         </p:grpSpPr>
         <p:sp>
           <p:nvSpPr>
-            <p:cNvPr id="30" name="Rectangle 30"/>
+            <p:cNvPr id="29" name="Rectangle 29"/>
             <p:cNvSpPr/>
             <p:nvPr/>
           </p:nvSpPr>
@@ -24972,7 +24564,7 @@
         </p:sp>
         <p:sp>
           <p:nvSpPr>
-            <p:cNvPr id="31" name="Rectangle 31"/>
+            <p:cNvPr id="30" name="Rectangle 30"/>
             <p:cNvSpPr/>
             <p:nvPr/>
           </p:nvSpPr>
@@ -24996,7 +24588,7 @@
         </p:sp>
         <p:sp>
           <p:nvSpPr>
-            <p:cNvPr id="32" name="TextBox 32"/>
+            <p:cNvPr id="31" name="TextBox 31"/>
             <p:cNvSpPr txBox="1"/>
             <p:nvPr/>
           </p:nvSpPr>
@@ -25036,7 +24628,7 @@
         </p:sp>
         <p:sp>
           <p:nvSpPr>
-            <p:cNvPr id="33" name="TextBox 33"/>
+            <p:cNvPr id="32" name="TextBox 32"/>
             <p:cNvSpPr txBox="1"/>
             <p:nvPr/>
           </p:nvSpPr>
@@ -25076,7 +24668,7 @@
         </p:sp>
         <p:sp>
           <p:nvSpPr>
-            <p:cNvPr id="34" name="TextBox 34"/>
+            <p:cNvPr id="33" name="TextBox 33"/>
             <p:cNvSpPr txBox="1"/>
             <p:nvPr/>
           </p:nvSpPr>
@@ -25116,7 +24708,7 @@
         </p:sp>
         <p:sp>
           <p:nvSpPr>
-            <p:cNvPr id="35" name="TextBox 35"/>
+            <p:cNvPr id="34" name="TextBox 34"/>
             <p:cNvSpPr txBox="1"/>
             <p:nvPr/>
           </p:nvSpPr>
@@ -25157,7 +24749,7 @@
       </p:grpSp>
       <p:grpSp>
         <p:nvGrpSpPr>
-          <p:cNvPr id="39" name="Group 39"/>
+          <p:cNvPr id="38" name="Group 38"/>
           <p:cNvGrpSpPr/>
           <p:nvPr/>
         </p:nvGrpSpPr>
@@ -25171,7 +24763,7 @@
         </p:grpSpPr>
         <p:sp>
           <p:nvSpPr>
-            <p:cNvPr id="37" name="Rectangle 37"/>
+            <p:cNvPr id="36" name="Rectangle 36"/>
             <p:cNvSpPr/>
             <p:nvPr/>
           </p:nvSpPr>
@@ -25195,7 +24787,7 @@
         </p:sp>
         <p:sp>
           <p:nvSpPr>
-            <p:cNvPr id="38" name="TextBox 38"/>
+            <p:cNvPr id="37" name="TextBox 37"/>
             <p:cNvSpPr txBox="1"/>
             <p:nvPr/>
           </p:nvSpPr>
@@ -25236,7 +24828,7 @@
       </p:grpSp>
       <p:grpSp>
         <p:nvGrpSpPr>
-          <p:cNvPr id="42" name="Group 42"/>
+          <p:cNvPr id="41" name="Group 41"/>
           <p:cNvGrpSpPr/>
           <p:nvPr/>
         </p:nvGrpSpPr>
@@ -25250,7 +24842,7 @@
         </p:grpSpPr>
         <p:sp>
           <p:nvSpPr>
-            <p:cNvPr id="40" name="TextBox 40"/>
+            <p:cNvPr id="39" name="TextBox 39"/>
             <p:cNvSpPr txBox="1"/>
             <p:nvPr/>
           </p:nvSpPr>
@@ -25290,7 +24882,7 @@
         </p:sp>
         <p:sp>
           <p:nvSpPr>
-            <p:cNvPr id="41" name="TextBox 41"/>
+            <p:cNvPr id="40" name="TextBox 40"/>
             <p:cNvSpPr txBox="1"/>
             <p:nvPr/>
           </p:nvSpPr>
@@ -25724,7 +25316,7 @@
         </p:nvPicPr>
         <p:blipFill>
           <a:blip r:embed="rId2">
-            <a:alphaModFix amt="5500"/>
+            <a:alphaModFix amt="14000"/>
           </a:blip>
           <a:srcRect l="0" t="27" r="0" b="27"/>
           <a:stretch>
@@ -25741,33 +25333,9 @@
           </a:prstGeom>
         </p:spPr>
       </p:pic>
-      <p:sp>
-        <p:nvSpPr>
-          <p:cNvPr id="3" name="Rectangle 3"/>
-          <p:cNvSpPr/>
-          <p:nvPr/>
-        </p:nvSpPr>
-        <p:spPr>
-          <a:xfrm>
-            <a:off x="0" y="0"/>
-            <a:ext cx="12192000" cy="6858000"/>
-          </a:xfrm>
-          <a:prstGeom prst="rect">
-            <a:avLst/>
-          </a:prstGeom>
-          <a:solidFill>
-            <a:schemeClr val="lt1">
-              <a:alpha val="82000"/>
-            </a:schemeClr>
-          </a:solidFill>
-          <a:ln>
-            <a:noFill/>
-          </a:ln>
-        </p:spPr>
-      </p:sp>
       <p:grpSp>
         <p:nvGrpSpPr>
-          <p:cNvPr id="8" name="Group 8"/>
+          <p:cNvPr id="7" name="Group 7"/>
           <p:cNvGrpSpPr/>
           <p:nvPr/>
         </p:nvGrpSpPr>
@@ -25781,7 +25349,7 @@
         </p:grpSpPr>
         <p:sp>
           <p:nvSpPr>
-            <p:cNvPr id="4" name="TextBox 4"/>
+            <p:cNvPr id="3" name="TextBox 3"/>
             <p:cNvSpPr txBox="1"/>
             <p:nvPr/>
           </p:nvSpPr>
@@ -25821,7 +25389,7 @@
         </p:sp>
         <p:sp>
           <p:nvSpPr>
-            <p:cNvPr id="5" name="TextBox 5"/>
+            <p:cNvPr id="4" name="TextBox 4"/>
             <p:cNvSpPr txBox="1"/>
             <p:nvPr/>
           </p:nvSpPr>
@@ -25861,7 +25429,7 @@
         </p:sp>
         <p:sp>
           <p:nvSpPr>
-            <p:cNvPr id="6" name="TextBox 6"/>
+            <p:cNvPr id="5" name="TextBox 5"/>
             <p:cNvSpPr txBox="1"/>
             <p:nvPr/>
           </p:nvSpPr>
@@ -25901,7 +25469,7 @@
         </p:sp>
         <p:sp>
           <p:nvSpPr>
-            <p:cNvPr id="7" name="Line 7"/>
+            <p:cNvPr id="6" name="Line 6"/>
             <p:cNvSpPr/>
             <p:nvPr/>
           </p:nvSpPr>
@@ -25938,7 +25506,7 @@
       </p:grpSp>
       <p:grpSp>
         <p:nvGrpSpPr>
-          <p:cNvPr id="39" name="Group 39"/>
+          <p:cNvPr id="38" name="Group 38"/>
           <p:cNvGrpSpPr/>
           <p:nvPr/>
         </p:nvGrpSpPr>
@@ -25952,7 +25520,7 @@
         </p:grpSpPr>
         <p:sp>
           <p:nvSpPr>
-            <p:cNvPr id="9" name="Rectangle 9"/>
+            <p:cNvPr id="8" name="Rectangle 8"/>
             <p:cNvSpPr/>
             <p:nvPr/>
           </p:nvSpPr>
@@ -25978,7 +25546,7 @@
         </p:sp>
         <p:sp>
           <p:nvSpPr>
-            <p:cNvPr id="10" name="Rectangle 10"/>
+            <p:cNvPr id="9" name="Rectangle 9"/>
             <p:cNvSpPr/>
             <p:nvPr/>
           </p:nvSpPr>
@@ -26002,7 +25570,7 @@
         </p:sp>
         <p:sp>
           <p:nvSpPr>
-            <p:cNvPr id="11" name="TextBox 11"/>
+            <p:cNvPr id="10" name="TextBox 10"/>
             <p:cNvSpPr txBox="1"/>
             <p:nvPr/>
           </p:nvSpPr>
@@ -26042,7 +25610,7 @@
         </p:sp>
         <p:sp>
           <p:nvSpPr>
-            <p:cNvPr id="12" name="Rectangle 12"/>
+            <p:cNvPr id="11" name="Rectangle 11"/>
             <p:cNvSpPr/>
             <p:nvPr/>
           </p:nvSpPr>
@@ -26068,7 +25636,7 @@
         </p:sp>
         <p:sp>
           <p:nvSpPr>
-            <p:cNvPr id="13" name="TextBox 13"/>
+            <p:cNvPr id="12" name="TextBox 12"/>
             <p:cNvSpPr txBox="1"/>
             <p:nvPr/>
           </p:nvSpPr>
@@ -26108,7 +25676,7 @@
         </p:sp>
         <p:sp>
           <p:nvSpPr>
-            <p:cNvPr id="14" name="Rectangle 14"/>
+            <p:cNvPr id="13" name="Rectangle 13"/>
             <p:cNvSpPr/>
             <p:nvPr/>
           </p:nvSpPr>
@@ -26134,7 +25702,7 @@
         </p:sp>
         <p:sp>
           <p:nvSpPr>
-            <p:cNvPr id="15" name="TextBox 15"/>
+            <p:cNvPr id="14" name="TextBox 14"/>
             <p:cNvSpPr txBox="1"/>
             <p:nvPr/>
           </p:nvSpPr>
@@ -26174,7 +25742,7 @@
         </p:sp>
         <p:sp>
           <p:nvSpPr>
-            <p:cNvPr id="16" name="Rectangle 16"/>
+            <p:cNvPr id="15" name="Rectangle 15"/>
             <p:cNvSpPr/>
             <p:nvPr/>
           </p:nvSpPr>
@@ -26200,7 +25768,7 @@
         </p:sp>
         <p:sp>
           <p:nvSpPr>
-            <p:cNvPr id="17" name="TextBox 17"/>
+            <p:cNvPr id="16" name="TextBox 16"/>
             <p:cNvSpPr txBox="1"/>
             <p:nvPr/>
           </p:nvSpPr>
@@ -26240,7 +25808,7 @@
         </p:sp>
         <p:sp>
           <p:nvSpPr>
-            <p:cNvPr id="18" name="Rectangle 18"/>
+            <p:cNvPr id="17" name="Rectangle 17"/>
             <p:cNvSpPr/>
             <p:nvPr/>
           </p:nvSpPr>
@@ -26266,7 +25834,7 @@
         </p:sp>
         <p:sp>
           <p:nvSpPr>
-            <p:cNvPr id="19" name="TextBox 19"/>
+            <p:cNvPr id="18" name="TextBox 18"/>
             <p:cNvSpPr txBox="1"/>
             <p:nvPr/>
           </p:nvSpPr>
@@ -26306,7 +25874,7 @@
         </p:sp>
         <p:sp>
           <p:nvSpPr>
-            <p:cNvPr id="20" name="Freeform 20"/>
+            <p:cNvPr id="19" name="Freeform 19"/>
             <p:cNvSpPr/>
             <p:nvPr/>
           </p:nvSpPr>
@@ -26344,7 +25912,7 @@
         </p:sp>
         <p:sp>
           <p:nvSpPr>
-            <p:cNvPr id="21" name="Rectangle 21"/>
+            <p:cNvPr id="20" name="Rectangle 20"/>
             <p:cNvSpPr/>
             <p:nvPr/>
           </p:nvSpPr>
@@ -26368,7 +25936,7 @@
         </p:sp>
         <p:sp>
           <p:nvSpPr>
-            <p:cNvPr id="22" name="TextBox 22"/>
+            <p:cNvPr id="21" name="TextBox 21"/>
             <p:cNvSpPr txBox="1"/>
             <p:nvPr/>
           </p:nvSpPr>
@@ -26408,7 +25976,7 @@
         </p:sp>
         <p:sp>
           <p:nvSpPr>
-            <p:cNvPr id="23" name="TextBox 23"/>
+            <p:cNvPr id="22" name="TextBox 22"/>
             <p:cNvSpPr txBox="1"/>
             <p:nvPr/>
           </p:nvSpPr>
@@ -26455,7 +26023,7 @@
         </p:sp>
         <p:sp>
           <p:nvSpPr>
-            <p:cNvPr id="24" name="TextBox 24"/>
+            <p:cNvPr id="23" name="TextBox 23"/>
             <p:cNvSpPr txBox="1"/>
             <p:nvPr/>
           </p:nvSpPr>
@@ -26502,7 +26070,7 @@
         </p:sp>
         <p:sp>
           <p:nvSpPr>
-            <p:cNvPr id="25" name="TextBox 25"/>
+            <p:cNvPr id="24" name="TextBox 24"/>
             <p:cNvSpPr txBox="1"/>
             <p:nvPr/>
           </p:nvSpPr>
@@ -26549,7 +26117,7 @@
         </p:sp>
         <p:sp>
           <p:nvSpPr>
-            <p:cNvPr id="26" name="TextBox 26"/>
+            <p:cNvPr id="25" name="TextBox 25"/>
             <p:cNvSpPr txBox="1"/>
             <p:nvPr/>
           </p:nvSpPr>
@@ -26596,7 +26164,7 @@
         </p:sp>
         <p:sp>
           <p:nvSpPr>
-            <p:cNvPr id="27" name="Freeform 27"/>
+            <p:cNvPr id="26" name="Freeform 26"/>
             <p:cNvSpPr/>
             <p:nvPr/>
           </p:nvSpPr>
@@ -26634,7 +26202,7 @@
         </p:sp>
         <p:sp>
           <p:nvSpPr>
-            <p:cNvPr id="28" name="Rectangle 28"/>
+            <p:cNvPr id="27" name="Rectangle 27"/>
             <p:cNvSpPr/>
             <p:nvPr/>
           </p:nvSpPr>
@@ -26660,7 +26228,7 @@
         </p:sp>
         <p:sp>
           <p:nvSpPr>
-            <p:cNvPr id="29" name="TextBox 29"/>
+            <p:cNvPr id="28" name="TextBox 28"/>
             <p:cNvSpPr txBox="1"/>
             <p:nvPr/>
           </p:nvSpPr>
@@ -26700,7 +26268,7 @@
         </p:sp>
         <p:sp>
           <p:nvSpPr>
-            <p:cNvPr id="30" name="Rectangle 30"/>
+            <p:cNvPr id="29" name="Rectangle 29"/>
             <p:cNvSpPr/>
             <p:nvPr/>
           </p:nvSpPr>
@@ -26726,7 +26294,7 @@
         </p:sp>
         <p:sp>
           <p:nvSpPr>
-            <p:cNvPr id="31" name="TextBox 31"/>
+            <p:cNvPr id="30" name="TextBox 30"/>
             <p:cNvSpPr txBox="1"/>
             <p:nvPr/>
           </p:nvSpPr>
@@ -26766,7 +26334,7 @@
         </p:sp>
         <p:sp>
           <p:nvSpPr>
-            <p:cNvPr id="32" name="TextBox 32"/>
+            <p:cNvPr id="31" name="TextBox 31"/>
             <p:cNvSpPr txBox="1"/>
             <p:nvPr/>
           </p:nvSpPr>
@@ -26806,7 +26374,7 @@
         </p:sp>
         <p:sp>
           <p:nvSpPr>
-            <p:cNvPr id="33" name="Rectangle 33"/>
+            <p:cNvPr id="32" name="Rectangle 32"/>
             <p:cNvSpPr/>
             <p:nvPr/>
           </p:nvSpPr>
@@ -26832,7 +26400,7 @@
         </p:sp>
         <p:sp>
           <p:nvSpPr>
-            <p:cNvPr id="34" name="TextBox 34"/>
+            <p:cNvPr id="33" name="TextBox 33"/>
             <p:cNvSpPr txBox="1"/>
             <p:nvPr/>
           </p:nvSpPr>
@@ -26872,7 +26440,7 @@
         </p:sp>
         <p:sp>
           <p:nvSpPr>
-            <p:cNvPr id="35" name="TextBox 35"/>
+            <p:cNvPr id="34" name="TextBox 34"/>
             <p:cNvSpPr txBox="1"/>
             <p:nvPr/>
           </p:nvSpPr>
@@ -26912,7 +26480,7 @@
         </p:sp>
         <p:sp>
           <p:nvSpPr>
-            <p:cNvPr id="36" name="Rectangle 36"/>
+            <p:cNvPr id="35" name="Rectangle 35"/>
             <p:cNvSpPr/>
             <p:nvPr/>
           </p:nvSpPr>
@@ -26938,7 +26506,7 @@
         </p:sp>
         <p:sp>
           <p:nvSpPr>
-            <p:cNvPr id="37" name="TextBox 37"/>
+            <p:cNvPr id="36" name="TextBox 36"/>
             <p:cNvSpPr txBox="1"/>
             <p:nvPr/>
           </p:nvSpPr>
@@ -26978,7 +26546,7 @@
         </p:sp>
         <p:sp>
           <p:nvSpPr>
-            <p:cNvPr id="38" name="TextBox 38"/>
+            <p:cNvPr id="37" name="TextBox 37"/>
             <p:cNvSpPr txBox="1"/>
             <p:nvPr/>
           </p:nvSpPr>
@@ -27019,7 +26587,7 @@
       </p:grpSp>
       <p:grpSp>
         <p:nvGrpSpPr>
-          <p:cNvPr id="42" name="Group 42"/>
+          <p:cNvPr id="41" name="Group 41"/>
           <p:cNvGrpSpPr/>
           <p:nvPr/>
         </p:nvGrpSpPr>
@@ -27033,7 +26601,7 @@
         </p:grpSpPr>
         <p:sp>
           <p:nvSpPr>
-            <p:cNvPr id="40" name="TextBox 40"/>
+            <p:cNvPr id="39" name="TextBox 39"/>
             <p:cNvSpPr txBox="1"/>
             <p:nvPr/>
           </p:nvSpPr>
@@ -27073,7 +26641,7 @@
         </p:sp>
         <p:sp>
           <p:nvSpPr>
-            <p:cNvPr id="41" name="TextBox 41"/>
+            <p:cNvPr id="40" name="TextBox 40"/>
             <p:cNvSpPr txBox="1"/>
             <p:nvPr/>
           </p:nvSpPr>
@@ -27158,7 +26726,7 @@
         </p:nvPicPr>
         <p:blipFill>
           <a:blip r:embed="rId2">
-            <a:alphaModFix amt="5500"/>
+            <a:alphaModFix amt="14000"/>
           </a:blip>
           <a:srcRect l="0" t="27" r="0" b="27"/>
           <a:stretch>
@@ -27175,33 +26743,9 @@
           </a:prstGeom>
         </p:spPr>
       </p:pic>
-      <p:sp>
-        <p:nvSpPr>
-          <p:cNvPr id="3" name="Rectangle 3"/>
-          <p:cNvSpPr/>
-          <p:nvPr/>
-        </p:nvSpPr>
-        <p:spPr>
-          <a:xfrm>
-            <a:off x="0" y="0"/>
-            <a:ext cx="12192000" cy="6858000"/>
-          </a:xfrm>
-          <a:prstGeom prst="rect">
-            <a:avLst/>
-          </a:prstGeom>
-          <a:solidFill>
-            <a:schemeClr val="lt1">
-              <a:alpha val="82000"/>
-            </a:schemeClr>
-          </a:solidFill>
-          <a:ln>
-            <a:noFill/>
-          </a:ln>
-        </p:spPr>
-      </p:sp>
       <p:grpSp>
         <p:nvGrpSpPr>
-          <p:cNvPr id="8" name="Group 8"/>
+          <p:cNvPr id="7" name="Group 7"/>
           <p:cNvGrpSpPr/>
           <p:nvPr/>
         </p:nvGrpSpPr>
@@ -27215,7 +26759,7 @@
         </p:grpSpPr>
         <p:sp>
           <p:nvSpPr>
-            <p:cNvPr id="4" name="TextBox 4"/>
+            <p:cNvPr id="3" name="TextBox 3"/>
             <p:cNvSpPr txBox="1"/>
             <p:nvPr/>
           </p:nvSpPr>
@@ -27255,7 +26799,7 @@
         </p:sp>
         <p:sp>
           <p:nvSpPr>
-            <p:cNvPr id="5" name="TextBox 5"/>
+            <p:cNvPr id="4" name="TextBox 4"/>
             <p:cNvSpPr txBox="1"/>
             <p:nvPr/>
           </p:nvSpPr>
@@ -27295,7 +26839,7 @@
         </p:sp>
         <p:sp>
           <p:nvSpPr>
-            <p:cNvPr id="6" name="TextBox 6"/>
+            <p:cNvPr id="5" name="TextBox 5"/>
             <p:cNvSpPr txBox="1"/>
             <p:nvPr/>
           </p:nvSpPr>
@@ -27335,7 +26879,7 @@
         </p:sp>
         <p:sp>
           <p:nvSpPr>
-            <p:cNvPr id="7" name="Line 7"/>
+            <p:cNvPr id="6" name="Line 6"/>
             <p:cNvSpPr/>
             <p:nvPr/>
           </p:nvSpPr>
@@ -27372,7 +26916,7 @@
       </p:grpSp>
       <p:grpSp>
         <p:nvGrpSpPr>
-          <p:cNvPr id="11" name="Group 11"/>
+          <p:cNvPr id="10" name="Group 10"/>
           <p:cNvGrpSpPr/>
           <p:nvPr/>
         </p:nvGrpSpPr>
@@ -27386,7 +26930,7 @@
         </p:grpSpPr>
         <p:sp>
           <p:nvSpPr>
-            <p:cNvPr id="9" name="Rectangle 9"/>
+            <p:cNvPr id="8" name="Rectangle 8"/>
             <p:cNvSpPr/>
             <p:nvPr/>
           </p:nvSpPr>
@@ -27412,7 +26956,7 @@
         </p:sp>
         <p:pic>
           <p:nvPicPr>
-            <p:cNvPr id="10" name="Image 10"/>
+            <p:cNvPr id="9" name="Image 9"/>
             <p:cNvPicPr>
               <a:picLocks noChangeAspect="1"/>
             </p:cNvPicPr>
@@ -27437,7 +26981,7 @@
       </p:grpSp>
       <p:grpSp>
         <p:nvGrpSpPr>
-          <p:cNvPr id="27" name="Group 27"/>
+          <p:cNvPr id="26" name="Group 26"/>
           <p:cNvGrpSpPr/>
           <p:nvPr/>
         </p:nvGrpSpPr>
@@ -27451,7 +26995,7 @@
         </p:grpSpPr>
         <p:sp>
           <p:nvSpPr>
-            <p:cNvPr id="12" name="Ellipse 12"/>
+            <p:cNvPr id="11" name="Ellipse 11"/>
             <p:cNvSpPr/>
             <p:nvPr/>
           </p:nvSpPr>
@@ -27473,7 +27017,7 @@
         </p:sp>
         <p:sp>
           <p:nvSpPr>
-            <p:cNvPr id="13" name="TextBox 13"/>
+            <p:cNvPr id="12" name="TextBox 12"/>
             <p:cNvSpPr txBox="1"/>
             <p:nvPr/>
           </p:nvSpPr>
@@ -27513,7 +27057,7 @@
         </p:sp>
         <p:sp>
           <p:nvSpPr>
-            <p:cNvPr id="14" name="Ellipse 14"/>
+            <p:cNvPr id="13" name="Ellipse 13"/>
             <p:cNvSpPr/>
             <p:nvPr/>
           </p:nvSpPr>
@@ -27535,7 +27079,7 @@
         </p:sp>
         <p:sp>
           <p:nvSpPr>
-            <p:cNvPr id="15" name="TextBox 15"/>
+            <p:cNvPr id="14" name="TextBox 14"/>
             <p:cNvSpPr txBox="1"/>
             <p:nvPr/>
           </p:nvSpPr>
@@ -27575,7 +27119,7 @@
         </p:sp>
         <p:sp>
           <p:nvSpPr>
-            <p:cNvPr id="16" name="Ellipse 16"/>
+            <p:cNvPr id="15" name="Ellipse 15"/>
             <p:cNvSpPr/>
             <p:nvPr/>
           </p:nvSpPr>
@@ -27597,7 +27141,7 @@
         </p:sp>
         <p:sp>
           <p:nvSpPr>
-            <p:cNvPr id="17" name="TextBox 17"/>
+            <p:cNvPr id="16" name="TextBox 16"/>
             <p:cNvSpPr txBox="1"/>
             <p:nvPr/>
           </p:nvSpPr>
@@ -27637,7 +27181,7 @@
         </p:sp>
         <p:sp>
           <p:nvSpPr>
-            <p:cNvPr id="18" name="Ellipse 18"/>
+            <p:cNvPr id="17" name="Ellipse 17"/>
             <p:cNvSpPr/>
             <p:nvPr/>
           </p:nvSpPr>
@@ -27659,7 +27203,7 @@
         </p:sp>
         <p:sp>
           <p:nvSpPr>
-            <p:cNvPr id="19" name="TextBox 19"/>
+            <p:cNvPr id="18" name="TextBox 18"/>
             <p:cNvSpPr txBox="1"/>
             <p:nvPr/>
           </p:nvSpPr>
@@ -27699,7 +27243,7 @@
         </p:sp>
         <p:sp>
           <p:nvSpPr>
-            <p:cNvPr id="20" name="Ellipse 20"/>
+            <p:cNvPr id="19" name="Ellipse 19"/>
             <p:cNvSpPr/>
             <p:nvPr/>
           </p:nvSpPr>
@@ -27721,7 +27265,7 @@
         </p:sp>
         <p:sp>
           <p:nvSpPr>
-            <p:cNvPr id="21" name="TextBox 21"/>
+            <p:cNvPr id="20" name="TextBox 20"/>
             <p:cNvSpPr txBox="1"/>
             <p:nvPr/>
           </p:nvSpPr>
@@ -27761,7 +27305,7 @@
         </p:sp>
         <p:sp>
           <p:nvSpPr>
-            <p:cNvPr id="22" name="Ellipse 22"/>
+            <p:cNvPr id="21" name="Ellipse 21"/>
             <p:cNvSpPr/>
             <p:nvPr/>
           </p:nvSpPr>
@@ -27783,7 +27327,7 @@
         </p:sp>
         <p:sp>
           <p:nvSpPr>
-            <p:cNvPr id="23" name="TextBox 23"/>
+            <p:cNvPr id="22" name="TextBox 22"/>
             <p:cNvSpPr txBox="1"/>
             <p:nvPr/>
           </p:nvSpPr>
@@ -27823,7 +27367,7 @@
         </p:sp>
         <p:sp>
           <p:nvSpPr>
-            <p:cNvPr id="24" name="Ellipse 24"/>
+            <p:cNvPr id="23" name="Ellipse 23"/>
             <p:cNvSpPr/>
             <p:nvPr/>
           </p:nvSpPr>
@@ -27845,7 +27389,7 @@
         </p:sp>
         <p:sp>
           <p:nvSpPr>
-            <p:cNvPr id="25" name="TextBox 25"/>
+            <p:cNvPr id="24" name="TextBox 24"/>
             <p:cNvSpPr txBox="1"/>
             <p:nvPr/>
           </p:nvSpPr>
@@ -27885,7 +27429,7 @@
         </p:sp>
         <p:sp>
           <p:nvSpPr>
-            <p:cNvPr id="26" name="TextBox 26"/>
+            <p:cNvPr id="25" name="TextBox 25"/>
             <p:cNvSpPr txBox="1"/>
             <p:nvPr/>
           </p:nvSpPr>
@@ -27926,7 +27470,7 @@
       </p:grpSp>
       <p:grpSp>
         <p:nvGrpSpPr>
-          <p:cNvPr id="30" name="Group 30"/>
+          <p:cNvPr id="29" name="Group 29"/>
           <p:cNvGrpSpPr/>
           <p:nvPr/>
         </p:nvGrpSpPr>
@@ -27940,7 +27484,7 @@
         </p:grpSpPr>
         <p:sp>
           <p:nvSpPr>
-            <p:cNvPr id="28" name="TextBox 28"/>
+            <p:cNvPr id="27" name="TextBox 27"/>
             <p:cNvSpPr txBox="1"/>
             <p:nvPr/>
           </p:nvSpPr>
@@ -27980,7 +27524,7 @@
         </p:sp>
         <p:sp>
           <p:nvSpPr>
-            <p:cNvPr id="29" name="TextBox 29"/>
+            <p:cNvPr id="28" name="TextBox 28"/>
             <p:cNvSpPr txBox="1"/>
             <p:nvPr/>
           </p:nvSpPr>

--- a/deliverables/course/ChainGrade_课程答辩_重制版.pptx
+++ b/deliverables/course/ChainGrade_课程答辩_重制版.pptx
@@ -364,7 +364,7 @@
           <a:p>
             <a:r>
               <a:rPr lang="zh-CN" dirty="0"/>
-              <a:t>今天汇报的是 ChainGrade。我们没有把目标停在“把成绩写到链上”，而是希望一条成绩能够解释它从签发、复核到查询、纠错和验证的全过程。接下来会按问题、设计、证据和边界四部分展开。</a:t>
+              <a:t>今天汇报的是 ChainGrade。团队成员为组长魏子安，学号 3240101782；强璞，学号 3240102045；阳震，学号 3240105586。我们希望一条成绩能够解释它从签发、复核到查询、纠错和验证的全过程。接下来会按问题、设计、证据和边界四部分展开。</a:t>
             </a:r>
           </a:p>
         </p:txBody>
@@ -1249,7 +1249,7 @@
           <a:p>
             <a:r>
               <a:rPr lang="zh-CN" dirty="0"/>
-              <a:t>项目亮点可以概括为三点：完整的可信生命周期、适合低熵成绩数据的隐私承诺模型，以及链上状态和可携带 VC 的联合验证。团队贡献按组长四、两位组员各三分分配，总计十分。</a:t>
+              <a:t>项目亮点包括完整的可信生命周期、适合低熵成绩数据的隐私承诺模型，以及链上状态和可携带 VC 的联合验证。团队贡献按组长魏子安四分、强璞三分、阳震三分分配，总计十分；页面同步标明三人的学号。</a:t>
             </a:r>
           </a:p>
         </p:txBody>
@@ -2643,8 +2643,8 @@
         </p:nvSpPr>
         <p:spPr>
           <a:xfrm>
-            <a:off x="716661" y="5827871"/>
-            <a:ext cx="1792270" cy="278702"/>
+            <a:off x="717804" y="5833110"/>
+            <a:ext cx="2879598" cy="234696"/>
           </a:xfrm>
           <a:prstGeom prst="rect">
             <a:avLst/>
@@ -2662,7 +2662,7 @@
           <a:p>
             <a:pPr algn="l"/>
             <a:r>
-              <a:rPr lang="zh-CN" sz="1420" dirty="0">
+              <a:rPr lang="zh-CN" sz="1200" dirty="0">
                 <a:solidFill>
                   <a:schemeClr val="dk1"/>
                 </a:solidFill>
@@ -2670,7 +2670,47 @@
                 <a:ea typeface="+mn-ea"/>
                 <a:cs typeface="+mn-cs"/>
               </a:rPr>
-              <a:t>魏子安 · 强璞 · 阳震</a:t>
+              <a:t>魏子安 3240101782 · 强璞 3240102045</a:t>
+            </a:r>
+          </a:p>
+        </p:txBody>
+      </p:sp>
+      <p:sp>
+        <p:nvSpPr>
+          <p:cNvPr id="12" name="TextBox 12"/>
+          <p:cNvSpPr txBox="1"/>
+          <p:nvPr/>
+        </p:nvSpPr>
+        <p:spPr>
+          <a:xfrm>
+            <a:off x="717804" y="6090285"/>
+            <a:ext cx="1272235" cy="234696"/>
+          </a:xfrm>
+          <a:prstGeom prst="rect">
+            <a:avLst/>
+          </a:prstGeom>
+          <a:noFill/>
+          <a:ln>
+            <a:noFill/>
+          </a:ln>
+        </p:spPr>
+        <p:txBody>
+          <a:bodyPr wrap="none" lIns="0" tIns="0" rIns="0" bIns="0" anchor="t" anchorCtr="0">
+            <a:spAutoFit/>
+          </a:bodyPr>
+          <a:lstStyle/>
+          <a:p>
+            <a:pPr algn="l"/>
+            <a:r>
+              <a:rPr lang="zh-CN" sz="1200" dirty="0">
+                <a:solidFill>
+                  <a:schemeClr val="dk1"/>
+                </a:solidFill>
+                <a:latin typeface="+mn-lt"/>
+                <a:ea typeface="+mn-ea"/>
+                <a:cs typeface="+mn-cs"/>
+              </a:rPr>
+              <a:t>阳震 3240105586</a:t>
             </a:r>
           </a:p>
         </p:txBody>
@@ -18831,16 +18871,16 @@
       </p:grpSp>
       <p:grpSp>
         <p:nvGrpSpPr>
-          <p:cNvPr id="40" name="Group 40"/>
+          <p:cNvPr id="43" name="Group 43"/>
           <p:cNvGrpSpPr/>
           <p:nvPr/>
         </p:nvGrpSpPr>
         <p:grpSpPr>
           <a:xfrm>
             <a:off x="685800" y="4895850"/>
-            <a:ext cx="10820400" cy="990600"/>
+            <a:ext cx="10820400" cy="1009364"/>
             <a:chOff x="685800" y="4895850"/>
-            <a:chExt cx="10820400" cy="990600"/>
+            <a:chExt cx="10820400" cy="1009364"/>
           </a:xfrm>
         </p:grpSpPr>
         <p:sp>
@@ -18951,7 +18991,47 @@
         </p:sp>
         <p:sp>
           <p:nvSpPr>
-            <p:cNvPr id="32" name="Rectangle 32"/>
+            <p:cNvPr id="32" name="TextBox 32"/>
+            <p:cNvSpPr txBox="1"/>
+            <p:nvPr/>
+          </p:nvSpPr>
+          <p:spPr>
+            <a:xfrm>
+              <a:off x="2719197" y="5304949"/>
+              <a:ext cx="735508" cy="190690"/>
+            </a:xfrm>
+            <a:prstGeom prst="rect">
+              <a:avLst/>
+            </a:prstGeom>
+            <a:noFill/>
+            <a:ln>
+              <a:noFill/>
+            </a:ln>
+          </p:spPr>
+          <p:txBody>
+            <a:bodyPr wrap="none" lIns="0" tIns="0" rIns="0" bIns="0" anchor="t" anchorCtr="0">
+              <a:spAutoFit/>
+            </a:bodyPr>
+            <a:lstStyle/>
+            <a:p>
+              <a:pPr algn="l"/>
+              <a:r>
+                <a:rPr lang="en-US" sz="980" dirty="0">
+                  <a:solidFill>
+                    <a:schemeClr val="accent5"/>
+                  </a:solidFill>
+                  <a:latin typeface="+mn-lt"/>
+                  <a:ea typeface="+mn-ea"/>
+                  <a:cs typeface="+mn-cs"/>
+                </a:rPr>
+                <a:t>3240101782</a:t>
+              </a:r>
+            </a:p>
+          </p:txBody>
+        </p:sp>
+        <p:sp>
+          <p:nvSpPr>
+            <p:cNvPr id="33" name="Rectangle 33"/>
             <p:cNvSpPr/>
             <p:nvPr/>
           </p:nvSpPr>
@@ -18973,7 +19053,7 @@
         </p:sp>
         <p:sp>
           <p:nvSpPr>
-            <p:cNvPr id="33" name="TextBox 33"/>
+            <p:cNvPr id="34" name="TextBox 34"/>
             <p:cNvSpPr txBox="1"/>
             <p:nvPr/>
           </p:nvSpPr>
@@ -19013,7 +19093,7 @@
         </p:sp>
         <p:sp>
           <p:nvSpPr>
-            <p:cNvPr id="34" name="TextBox 34"/>
+            <p:cNvPr id="35" name="TextBox 35"/>
             <p:cNvSpPr txBox="1"/>
             <p:nvPr/>
           </p:nvSpPr>
@@ -19053,7 +19133,47 @@
         </p:sp>
         <p:sp>
           <p:nvSpPr>
-            <p:cNvPr id="35" name="Rectangle 35"/>
+            <p:cNvPr id="36" name="TextBox 36"/>
+            <p:cNvSpPr txBox="1"/>
+            <p:nvPr/>
+          </p:nvSpPr>
+          <p:spPr>
+            <a:xfrm>
+              <a:off x="7234047" y="5304949"/>
+              <a:ext cx="735508" cy="190690"/>
+            </a:xfrm>
+            <a:prstGeom prst="rect">
+              <a:avLst/>
+            </a:prstGeom>
+            <a:noFill/>
+            <a:ln>
+              <a:noFill/>
+            </a:ln>
+          </p:spPr>
+          <p:txBody>
+            <a:bodyPr wrap="none" lIns="0" tIns="0" rIns="0" bIns="0" anchor="t" anchorCtr="0">
+              <a:spAutoFit/>
+            </a:bodyPr>
+            <a:lstStyle/>
+            <a:p>
+              <a:pPr algn="l"/>
+              <a:r>
+                <a:rPr lang="en-US" sz="980" dirty="0">
+                  <a:solidFill>
+                    <a:schemeClr val="accent5"/>
+                  </a:solidFill>
+                  <a:latin typeface="+mn-lt"/>
+                  <a:ea typeface="+mn-ea"/>
+                  <a:cs typeface="+mn-cs"/>
+                </a:rPr>
+                <a:t>3240102045</a:t>
+              </a:r>
+            </a:p>
+          </p:txBody>
+        </p:sp>
+        <p:sp>
+          <p:nvSpPr>
+            <p:cNvPr id="37" name="Rectangle 37"/>
             <p:cNvSpPr/>
             <p:nvPr/>
           </p:nvSpPr>
@@ -19075,7 +19195,7 @@
         </p:sp>
         <p:sp>
           <p:nvSpPr>
-            <p:cNvPr id="36" name="TextBox 36"/>
+            <p:cNvPr id="38" name="TextBox 38"/>
             <p:cNvSpPr txBox="1"/>
             <p:nvPr/>
           </p:nvSpPr>
@@ -19115,7 +19235,7 @@
         </p:sp>
         <p:sp>
           <p:nvSpPr>
-            <p:cNvPr id="37" name="TextBox 37"/>
+            <p:cNvPr id="39" name="TextBox 39"/>
             <p:cNvSpPr txBox="1"/>
             <p:nvPr/>
           </p:nvSpPr>
@@ -19155,7 +19275,47 @@
         </p:sp>
         <p:sp>
           <p:nvSpPr>
-            <p:cNvPr id="38" name="Rectangle 38"/>
+            <p:cNvPr id="40" name="TextBox 40"/>
+            <p:cNvSpPr txBox="1"/>
+            <p:nvPr/>
+          </p:nvSpPr>
+          <p:spPr>
+            <a:xfrm>
+              <a:off x="2719197" y="5714524"/>
+              <a:ext cx="735508" cy="190690"/>
+            </a:xfrm>
+            <a:prstGeom prst="rect">
+              <a:avLst/>
+            </a:prstGeom>
+            <a:noFill/>
+            <a:ln>
+              <a:noFill/>
+            </a:ln>
+          </p:spPr>
+          <p:txBody>
+            <a:bodyPr wrap="none" lIns="0" tIns="0" rIns="0" bIns="0" anchor="t" anchorCtr="0">
+              <a:spAutoFit/>
+            </a:bodyPr>
+            <a:lstStyle/>
+            <a:p>
+              <a:pPr algn="l"/>
+              <a:r>
+                <a:rPr lang="en-US" sz="980" dirty="0">
+                  <a:solidFill>
+                    <a:schemeClr val="accent5"/>
+                  </a:solidFill>
+                  <a:latin typeface="+mn-lt"/>
+                  <a:ea typeface="+mn-ea"/>
+                  <a:cs typeface="+mn-cs"/>
+                </a:rPr>
+                <a:t>3240105586</a:t>
+              </a:r>
+            </a:p>
+          </p:txBody>
+        </p:sp>
+        <p:sp>
+          <p:nvSpPr>
+            <p:cNvPr id="41" name="Rectangle 41"/>
             <p:cNvSpPr/>
             <p:nvPr/>
           </p:nvSpPr>
@@ -19177,7 +19337,7 @@
         </p:sp>
         <p:sp>
           <p:nvSpPr>
-            <p:cNvPr id="39" name="TextBox 39"/>
+            <p:cNvPr id="42" name="TextBox 42"/>
             <p:cNvSpPr txBox="1"/>
             <p:nvPr/>
           </p:nvSpPr>
@@ -19218,7 +19378,7 @@
       </p:grpSp>
       <p:grpSp>
         <p:nvGrpSpPr>
-          <p:cNvPr id="43" name="Group 43"/>
+          <p:cNvPr id="46" name="Group 46"/>
           <p:cNvGrpSpPr/>
           <p:nvPr/>
         </p:nvGrpSpPr>
@@ -19232,7 +19392,7 @@
         </p:grpSpPr>
         <p:sp>
           <p:nvSpPr>
-            <p:cNvPr id="41" name="TextBox 41"/>
+            <p:cNvPr id="44" name="TextBox 44"/>
             <p:cNvSpPr txBox="1"/>
             <p:nvPr/>
           </p:nvSpPr>
@@ -19272,7 +19432,7 @@
         </p:sp>
         <p:sp>
           <p:nvSpPr>
-            <p:cNvPr id="42" name="TextBox 42"/>
+            <p:cNvPr id="45" name="TextBox 45"/>
             <p:cNvSpPr txBox="1"/>
             <p:nvPr/>
           </p:nvSpPr>
